--- a/docs/resumen-ejecutivo/resumen-ejecutivo-pm-method.pptx
+++ b/docs/resumen-ejecutivo/resumen-ejecutivo-pm-method.pptx
@@ -124,14 +124,14 @@
   <p:extLst>
     <p:ext uri="{521415D9-36F7-43E2-AB2F-B90AF26B5E84}">
       <p14:sectionLst xmlns:p14="http://schemas.microsoft.com/office/powerpoint/2010/main">
-        <p14:section name="Propuesta" id="{dfc8cfe3-975b-7d66-a66e-d16027930e8d}">
+        <p14:section name="Propuesta" id="{ab487459-ad57-071d-4017-92c8a8d57cc7}">
           <p14:sldIdLst>
             <p14:sldId id="256"/>
             <p14:sldId id="257"/>
             <p14:sldId id="258"/>
           </p14:sldIdLst>
         </p14:section>
-        <p14:section name="Producto" id="{180a3aed-c3a6-da03-cdd3-3a8f766c78f8}">
+        <p14:section name="Producto" id="{c4de38c1-f90d-112d-9c46-911a8b944633}">
           <p14:sldIdLst>
             <p14:sldId id="259"/>
             <p14:sldId id="260"/>
@@ -141,7 +141,7 @@
             <p14:sldId id="264"/>
           </p14:sldIdLst>
         </p14:section>
-        <p14:section name="Casos E2E" id="{0bb15fcc-3869-5602-9342-c8676ce89ba8}">
+        <p14:section name="Casos E2E" id="{3999a9e4-8904-4c7f-3973-f30a1eb7ce6f}">
           <p14:sldIdLst>
             <p14:sldId id="265"/>
             <p14:sldId id="266"/>
@@ -151,7 +151,7 @@
             <p14:sldId id="270"/>
           </p14:sldIdLst>
         </p14:section>
-        <p14:section name="Confianza y adopción" id="{0f59116f-4bed-2148-0e4c-6cbe74f9cf36}">
+        <p14:section name="Confianza y adopción" id="{c543d76e-abc9-1711-0595-4938d9a7f839}">
           <p14:sldIdLst>
             <p14:sldId id="271"/>
             <p14:sldId id="272"/>
@@ -6853,7 +6853,7 @@
                   <a:srgbClr val="272425"/>
                 </a:solidFill>
               </a:rPr>
-              <a:t>guía paso a paso por prompts, guion del instructor minuto a minuto, ejercicio con solución de referencia y diapositivas PPTX y HTML que regenera un script.</a:t>
+              <a:t>guía paso a paso por prompts, guion del instructor minuto a minuto, ejercicio autocontenido con ejemplo resuelto y diapositivas PPTX y HTML que regenera un script.</a:t>
             </a:r>
             <a:endParaRPr lang="en-US" sz="1200" dirty="0"/>
           </a:p>
@@ -10283,7 +10283,7 @@
                   <a:srgbClr val="FFFFFF"/>
                 </a:solidFill>
               </a:rPr>
-              <a:t>216</a:t>
+              <a:t>223</a:t>
             </a:r>
             <a:endParaRPr lang="en-US" sz="2800" dirty="0"/>
           </a:p>
@@ -10355,7 +10355,7 @@
                   <a:srgbClr val="FFFFFF"/>
                 </a:solidFill>
               </a:rPr>
-              <a:t>0 FALLO · 20 casos</a:t>
+              <a:t>0 FALLO · 21 casos</a:t>
             </a:r>
             <a:endParaRPr lang="en-US" sz="1000" dirty="0"/>
           </a:p>

--- a/docs/resumen-ejecutivo/resumen-ejecutivo-pm-method.pptx
+++ b/docs/resumen-ejecutivo/resumen-ejecutivo-pm-method.pptx
@@ -124,14 +124,14 @@
   <p:extLst>
     <p:ext uri="{521415D9-36F7-43E2-AB2F-B90AF26B5E84}">
       <p14:sectionLst xmlns:p14="http://schemas.microsoft.com/office/powerpoint/2010/main">
-        <p14:section name="Propuesta" id="{ab487459-ad57-071d-4017-92c8a8d57cc7}">
+        <p14:section name="Propuesta" id="{1f16855e-d707-d705-12c4-9864628e5e79}">
           <p14:sldIdLst>
             <p14:sldId id="256"/>
             <p14:sldId id="257"/>
             <p14:sldId id="258"/>
           </p14:sldIdLst>
         </p14:section>
-        <p14:section name="Producto" id="{c4de38c1-f90d-112d-9c46-911a8b944633}">
+        <p14:section name="Producto" id="{f6615d53-8209-4a79-688a-6dabd079187d}">
           <p14:sldIdLst>
             <p14:sldId id="259"/>
             <p14:sldId id="260"/>
@@ -141,7 +141,7 @@
             <p14:sldId id="264"/>
           </p14:sldIdLst>
         </p14:section>
-        <p14:section name="Casos E2E" id="{3999a9e4-8904-4c7f-3973-f30a1eb7ce6f}">
+        <p14:section name="Casos E2E" id="{64b86be7-ae62-12aa-5c74-f69851bd773d}">
           <p14:sldIdLst>
             <p14:sldId id="265"/>
             <p14:sldId id="266"/>
@@ -151,7 +151,7 @@
             <p14:sldId id="270"/>
           </p14:sldIdLst>
         </p14:section>
-        <p14:section name="Confianza y adopción" id="{c543d76e-abc9-1711-0595-4938d9a7f839}">
+        <p14:section name="Confianza y adopción" id="{44a01161-231b-8d98-1bc7-aac47af9050f}">
           <p14:sldIdLst>
             <p14:sldId id="271"/>
             <p14:sldId id="272"/>
@@ -259,13 +259,13 @@
                     <c:v>REG · registros</c:v>
                   </c:pt>
                   <c:pt idx="9">
-                    <c:v>STK · maestro de interesados</c:v>
+                    <c:v>EST · estado, roles y puertas</c:v>
                   </c:pt>
                   <c:pt idx="10">
-                    <c:v>EST · estado, roles y puertas</c:v>
+                    <c:v>ESP · especificación y BMAD</c:v>
                   </c:pt>
                   <c:pt idx="11">
-                    <c:v>ESP · especificación y BMAD</c:v>
+                    <c:v>STK · maestro de interesados</c:v>
                   </c:pt>
                 </c:lvl>
               </c:multiLvlStrCache>
@@ -284,7 +284,7 @@
                   <c:v>3</c:v>
                 </c:pt>
                 <c:pt idx="2">
-                  <c:v>3</c:v>
+                  <c:v>4</c:v>
                 </c:pt>
                 <c:pt idx="3">
                   <c:v>0</c:v>
@@ -397,13 +397,13 @@
                     <c:v>REG · registros</c:v>
                   </c:pt>
                   <c:pt idx="9">
-                    <c:v>STK · maestro de interesados</c:v>
+                    <c:v>EST · estado, roles y puertas</c:v>
                   </c:pt>
                   <c:pt idx="10">
-                    <c:v>EST · estado, roles y puertas</c:v>
+                    <c:v>ESP · especificación y BMAD</c:v>
                   </c:pt>
                   <c:pt idx="11">
-                    <c:v>ESP · especificación y BMAD</c:v>
+                    <c:v>STK · maestro de interesados</c:v>
                   </c:pt>
                 </c:lvl>
               </c:multiLvlStrCache>
@@ -440,16 +440,16 @@
                   <c:v>6</c:v>
                 </c:pt>
                 <c:pt idx="8">
-                  <c:v>9</c:v>
+                  <c:v>12</c:v>
                 </c:pt>
                 <c:pt idx="9">
-                  <c:v>13</c:v>
+                  <c:v>14</c:v>
                 </c:pt>
                 <c:pt idx="10">
-                  <c:v>14</c:v>
+                  <c:v>15</c:v>
                 </c:pt>
                 <c:pt idx="11">
-                  <c:v>15</c:v>
+                  <c:v>17</c:v>
                 </c:pt>
               </c:numCache>
             </c:numRef>
@@ -2824,7 +2824,7 @@
                   <a:srgbClr val="696969"/>
                 </a:solidFill>
               </a:rPr>
-              <a:t>pm-method 2.3.0 · Resumen ejecutivo · 2026-10-20</a:t>
+              <a:t>pm-method 2.4.0 · Resumen ejecutivo · 2026-10-22</a:t>
             </a:r>
             <a:endParaRPr lang="en-US" sz="900" dirty="0"/>
           </a:p>
@@ -3254,7 +3254,7 @@
                   <a:srgbClr val="9FD0F0"/>
                 </a:solidFill>
               </a:rPr>
-              <a:t>Resumen ejecutivo · pm-method 2.3.0</a:t>
+              <a:t>Resumen ejecutivo · pm-method 2.4.0</a:t>
             </a:r>
             <a:endParaRPr lang="en-US" sz="1500" dirty="0"/>
           </a:p>
@@ -3326,7 +3326,7 @@
                   <a:srgbClr val="FFFFFF"/>
                 </a:solidFill>
               </a:rPr>
-              <a:t>Un plugin para Claude Code y Cowork. PRINCE2 7 manda, PMBOK 8 aporta las técnicas y BMAD es la especificación del producto, de solo lectura.</a:t>
+              <a:t>Un plugin para Claude Code y Cowork. PRINCE2 7 manda, PMBOK 8 aporta las técnicas y BMAD es la especificación del producto, de solo lectura. Con la versión 2.4.0: opciones e impacto medidos antes de decidir, un radar de lo que hay que decidir hoy e informes verificados contra el dato.</a:t>
             </a:r>
             <a:endParaRPr lang="en-US" sz="1200" dirty="0"/>
           </a:p>
@@ -3686,7 +3686,7 @@
                   <a:srgbClr val="FFFFFF"/>
                 </a:solidFill>
               </a:rPr>
-              <a:t>97</a:t>
+              <a:t>105</a:t>
             </a:r>
             <a:endParaRPr lang="en-US" sz="3000" dirty="0"/>
           </a:p>
@@ -3857,7 +3857,7 @@
                   <a:srgbClr val="FFFFFF"/>
                 </a:solidFill>
               </a:rPr>
-              <a:t>pm-method 2.3.0 · 20 de octubre de 2026</a:t>
+              <a:t>pm-method 2.4.0 · 22 de octubre de 2026</a:t>
             </a:r>
             <a:endParaRPr lang="en-US" sz="1100" dirty="0"/>
           </a:p>
@@ -4554,7 +4554,7 @@
                           <a:ea typeface="Arial" pitchFamily="34" charset="-122"/>
                           <a:cs typeface="Arial" pitchFamily="34" charset="-120"/>
                         </a:rPr>
-                        <a:t>Riesgos desde cuatro fuentes, respuestas costeadas, reserva vigilada y escalamiento a la junta</a:t>
+                        <a:t>Riesgos desde cuatro fuentes, opciones por valor neto, plan de contingencia y reserva vigilada</a:t>
                       </a:r>
                       <a:endParaRPr lang="en-US" sz="1200" dirty="0">
                         <a:latin typeface="Arial" charset="0"/>
@@ -4814,7 +4814,7 @@
                           <a:ea typeface="Arial" pitchFamily="34" charset="-122"/>
                           <a:cs typeface="Arial" pitchFamily="34" charset="-120"/>
                         </a:rPr>
-                        <a:t>37</a:t>
+                        <a:t>39</a:t>
                       </a:r>
                       <a:endParaRPr lang="en-US" sz="1200" dirty="0">
                         <a:latin typeface="Arial" charset="0"/>
@@ -4879,7 +4879,7 @@
                           <a:ea typeface="Arial" pitchFamily="34" charset="-122"/>
                           <a:cs typeface="Arial" pitchFamily="34" charset="-120"/>
                         </a:rPr>
-                        <a:t>24</a:t>
+                        <a:t>25</a:t>
                       </a:r>
                       <a:endParaRPr lang="en-US" sz="1200" dirty="0">
                         <a:latin typeface="Arial" charset="0"/>
@@ -5011,7 +5011,7 @@
                           <a:ea typeface="Arial" pitchFamily="34" charset="-122"/>
                           <a:cs typeface="Arial" pitchFamily="34" charset="-120"/>
                         </a:rPr>
-                        <a:t>Alcance por productos, estimación, priorización, cambio con presupuesto y excepción</a:t>
+                        <a:t>Alcance, tres valores, capacidad del release, impacto de cada cambio y excepción</a:t>
                       </a:r>
                       <a:endParaRPr lang="en-US" sz="1200" dirty="0">
                         <a:latin typeface="Arial" charset="0"/>
@@ -5271,7 +5271,7 @@
                           <a:ea typeface="Arial" pitchFamily="34" charset="-122"/>
                           <a:cs typeface="Arial" pitchFamily="34" charset="-120"/>
                         </a:rPr>
-                        <a:t>35</a:t>
+                        <a:t>37</a:t>
                       </a:r>
                       <a:endParaRPr lang="en-US" sz="1200" dirty="0">
                         <a:latin typeface="Arial" charset="0"/>
@@ -5468,7 +5468,7 @@
                           <a:ea typeface="Arial" pitchFamily="34" charset="-122"/>
                           <a:cs typeface="Arial" pitchFamily="34" charset="-120"/>
                         </a:rPr>
-                        <a:t>Interesados, preferencias, RACI, OKR, highlight desde el dato y envío por canales</a:t>
+                        <a:t>Interesados, acuerdos de reunión, radar, highlight desde el dato y envío por canales</a:t>
                       </a:r>
                       <a:endParaRPr lang="en-US" sz="1200" dirty="0">
                         <a:latin typeface="Arial" charset="0"/>
@@ -5728,7 +5728,7 @@
                           <a:ea typeface="Arial" pitchFamily="34" charset="-122"/>
                           <a:cs typeface="Arial" pitchFamily="34" charset="-120"/>
                         </a:rPr>
-                        <a:t>38</a:t>
+                        <a:t>39</a:t>
                       </a:r>
                       <a:endParaRPr lang="en-US" sz="1200" dirty="0">
                         <a:latin typeface="Arial" charset="0"/>
@@ -5925,7 +5925,7 @@
                           <a:ea typeface="Arial" pitchFamily="34" charset="-122"/>
                           <a:cs typeface="Arial" pitchFamily="34" charset="-120"/>
                         </a:rPr>
-                        <a:t>Producto con BMAD: condiciones formales, calidad a volumen, cierre y beneficios</a:t>
+                        <a:t>Producto con BMAD: calidad a volumen, ciclo de las lecciones, cierre por id y auditoría</a:t>
                       </a:r>
                       <a:endParaRPr lang="en-US" sz="1200" dirty="0">
                         <a:latin typeface="Arial" charset="0"/>
@@ -5990,7 +5990,7 @@
                           <a:ea typeface="Arial" pitchFamily="34" charset="-122"/>
                           <a:cs typeface="Arial" pitchFamily="34" charset="-120"/>
                         </a:rPr>
-                        <a:t>12</a:t>
+                        <a:t>15</a:t>
                       </a:r>
                       <a:endParaRPr lang="en-US" sz="1200" dirty="0">
                         <a:latin typeface="Arial" charset="0"/>
@@ -6185,7 +6185,7 @@
                           <a:ea typeface="Arial" pitchFamily="34" charset="-122"/>
                           <a:cs typeface="Arial" pitchFamily="34" charset="-120"/>
                         </a:rPr>
-                        <a:t>36</a:t>
+                        <a:t>40</a:t>
                       </a:r>
                       <a:endParaRPr lang="en-US" sz="1200" dirty="0">
                         <a:latin typeface="Arial" charset="0"/>
@@ -6382,7 +6382,7 @@
                           <a:ea typeface="Arial" pitchFamily="34" charset="-122"/>
                           <a:cs typeface="Arial" pitchFamily="34" charset="-120"/>
                         </a:rPr>
-                        <a:t>De la idea al proyecto diseñado: supuestos, opciones con VAN, enfoque y mapas</a:t>
+                        <a:t>De la idea al proyecto: lecciones previas, supuestos, VAN, personas de usuario y mapas</a:t>
                       </a:r>
                       <a:endParaRPr lang="en-US" sz="1200" dirty="0">
                         <a:latin typeface="Arial" charset="0"/>
@@ -6447,7 +6447,7 @@
                           <a:ea typeface="Arial" pitchFamily="34" charset="-122"/>
                           <a:cs typeface="Arial" pitchFamily="34" charset="-120"/>
                         </a:rPr>
-                        <a:t>18</a:t>
+                        <a:t>20</a:t>
                       </a:r>
                       <a:endParaRPr lang="en-US" sz="1200" dirty="0">
                         <a:latin typeface="Arial" charset="0"/>
@@ -7202,7 +7202,7 @@
               <a:buNone/>
             </a:pPr>
             <a:r>
-              <a:rPr lang="en-US" sz="1250" b="1" dirty="0">
+              <a:rPr lang="en-US" sz="1150" b="1" dirty="0">
                 <a:solidFill>
                   <a:srgbClr val="00629B"/>
                 </a:solidFill>
@@ -7216,14 +7216,14 @@
               <a:buNone/>
             </a:pPr>
             <a:r>
-              <a:rPr lang="en-US" sz="1250" dirty="0">
+              <a:rPr lang="en-US" sz="1150" dirty="0">
                 <a:solidFill>
                   <a:srgbClr val="272425"/>
                 </a:solidFill>
               </a:rPr>
               <a:t>Riesgos candidatos desde BMAD, transcripciones, Jira y artefactos, con cita de origen</a:t>
             </a:r>
-            <a:endParaRPr lang="en-US" sz="1250" dirty="0"/>
+            <a:endParaRPr lang="en-US" sz="1150" dirty="0"/>
           </a:p>
           <a:p>
             <a:pPr indent="0" marL="0">
@@ -7233,7 +7233,7 @@
               <a:buNone/>
             </a:pPr>
             <a:r>
-              <a:rPr lang="en-US" sz="1250" b="1" dirty="0">
+              <a:rPr lang="en-US" sz="1150" b="1" dirty="0">
                 <a:solidFill>
                   <a:srgbClr val="00629B"/>
                 </a:solidFill>
@@ -7247,14 +7247,14 @@
               <a:buNone/>
             </a:pPr>
             <a:r>
-              <a:rPr lang="en-US" sz="1250" dirty="0">
+              <a:rPr lang="en-US" sz="1150" dirty="0">
                 <a:solidFill>
                   <a:srgbClr val="272425"/>
                 </a:solidFill>
               </a:rPr>
-              <a:t>Respuestas justificadas por su costo frente a la reducción del valor monetario esperado</a:t>
-            </a:r>
-            <a:endParaRPr lang="en-US" sz="1250" dirty="0"/>
+              <a:t>Opciones de respuesta comparadas por valor neto; decide el propietario y el plan de contingencia queda listo</a:t>
+            </a:r>
+            <a:endParaRPr lang="en-US" sz="1150" dirty="0"/>
           </a:p>
           <a:p>
             <a:pPr indent="0" marL="0">
@@ -7264,7 +7264,7 @@
               <a:buNone/>
             </a:pPr>
             <a:r>
-              <a:rPr lang="en-US" sz="1250" b="1" dirty="0">
+              <a:rPr lang="en-US" sz="1150" b="1" dirty="0">
                 <a:solidFill>
                   <a:srgbClr val="00629B"/>
                 </a:solidFill>
@@ -7278,14 +7278,14 @@
               <a:buNone/>
             </a:pPr>
             <a:r>
-              <a:rPr lang="en-US" sz="1250" dirty="0">
+              <a:rPr lang="en-US" sz="1150" dirty="0">
                 <a:solidFill>
                   <a:srgbClr val="272425"/>
                 </a:solidFill>
               </a:rPr>
-              <a:t>Reserva de riesgo vigilada como presupuesto vivo de la junta</a:t>
-            </a:r>
-            <a:endParaRPr lang="en-US" sz="1250" dirty="0"/>
+              <a:t>Presupuesto de riesgo vigilado y reserva de gestión de la junta para lo no identificado</a:t>
+            </a:r>
+            <a:endParaRPr lang="en-US" sz="1150" dirty="0"/>
           </a:p>
         </p:txBody>
       </p:sp>
@@ -7380,7 +7380,7 @@
               <a:buNone/>
             </a:pPr>
             <a:r>
-              <a:rPr lang="en-US" sz="1150" b="1" dirty="0">
+              <a:rPr lang="en-US" sz="1000" b="1" dirty="0">
                 <a:solidFill>
                   <a:srgbClr val="B5651D"/>
                 </a:solidFill>
@@ -7394,14 +7394,14 @@
               <a:buNone/>
             </a:pPr>
             <a:r>
-              <a:rPr lang="en-US" sz="1150" dirty="0">
+              <a:rPr lang="en-US" sz="1000" dirty="0">
                 <a:solidFill>
                   <a:srgbClr val="272425"/>
                 </a:solidFill>
               </a:rPr>
-              <a:t>Dos amenazas en zona alta al salir del taller; con las respuestas del paso 6, ninguna queda en zona alta.</a:t>
-            </a:r>
-            <a:endParaRPr lang="en-US" sz="1150" dirty="0"/>
+              <a:t>Para R-001 conviene reducir; para R-003, preparar la contingencia. En los dos, evitar deja el residual más bajo pero no el mayor valor neto: cuesta más y crea un riesgo secundario.</a:t>
+            </a:r>
+            <a:endParaRPr lang="en-US" sz="1000" dirty="0"/>
           </a:p>
           <a:p>
             <a:pPr indent="0" marL="0">
@@ -7411,7 +7411,7 @@
               <a:buNone/>
             </a:pPr>
             <a:r>
-              <a:rPr lang="en-US" sz="1150" b="1" dirty="0">
+              <a:rPr lang="en-US" sz="1000" b="1" dirty="0">
                 <a:solidFill>
                   <a:srgbClr val="B5651D"/>
                 </a:solidFill>
@@ -7425,14 +7425,14 @@
               <a:buNone/>
             </a:pPr>
             <a:r>
-              <a:rPr lang="en-US" sz="1150" dirty="0">
+              <a:rPr lang="en-US" sz="1000" dirty="0">
                 <a:solidFill>
                   <a:srgbClr val="272425"/>
                 </a:solidFill>
               </a:rPr>
-              <a:t>La reserva pasa del 21 % al 81 % en cinco corridas de la sanidad; al cruzar el 80 %, CAM-03 deja de ser informativo y avisa.</a:t>
-            </a:r>
-            <a:endParaRPr lang="en-US" sz="1150" dirty="0"/>
+              <a:t>La reserva pasa del 18 % al 94 % en cinco corridas de la sanidad; al activar el plan de contingencia de R-003 cruza el 80 % y CAM-03 deja de ser informativo y avisa. La provisión para lo no identificado no está en esas barras: vive en la reserva de gestión, que solo libera la junta.</a:t>
+            </a:r>
+            <a:endParaRPr lang="en-US" sz="1000" dirty="0"/>
           </a:p>
           <a:p>
             <a:pPr indent="0" marL="0">
@@ -7442,7 +7442,7 @@
               <a:buNone/>
             </a:pPr>
             <a:r>
-              <a:rPr lang="en-US" sz="1150" b="1" dirty="0">
+              <a:rPr lang="en-US" sz="1000" b="1" dirty="0">
                 <a:solidFill>
                   <a:srgbClr val="B5651D"/>
                 </a:solidFill>
@@ -7456,20 +7456,20 @@
               <a:buNone/>
             </a:pPr>
             <a:r>
-              <a:rPr lang="en-US" sz="1150" dirty="0">
+              <a:rPr lang="en-US" sz="1000" dirty="0">
                 <a:solidFill>
                   <a:srgbClr val="272425"/>
                 </a:solidFill>
               </a:rPr>
-              <a:t>El estado de riesgo en una sola vista para la junta del límite de etapa: lo único en atención es la reserva.</a:t>
-            </a:r>
-            <a:endParaRPr lang="en-US" sz="1150" dirty="0"/>
+              <a:t>El estado de riesgo en una sola vista para la junta del límite de etapa: lo único en atención es la reserva de riesgo; la reserva de gestión sigue intacta.</a:t>
+            </a:r>
+            <a:endParaRPr lang="en-US" sz="1000" dirty="0"/>
           </a:p>
         </p:txBody>
       </p:sp>
       <p:pic>
         <p:nvPicPr>
-          <p:cNvPr id="11" name="Image 0" descr="/home/claude/pm-method/docs/guias/img/g1-consumo-reserva.png">    </p:cNvPr>
+          <p:cNvPr id="11" name="Image 0" descr="/home/claude/pm-method/docs/guias/img/g1-opciones-valor-neto.png">    </p:cNvPr>
           <p:cNvPicPr>
             <a:picLocks noChangeAspect="1"/>
           </p:cNvPicPr>
@@ -7521,7 +7521,7 @@
                   <a:srgbClr val="696969"/>
                 </a:solidFill>
               </a:rPr>
-              <a:t>Consumo de la reserva de riesgo</a:t>
+              <a:t>Valor neto de las opciones de respuesta</a:t>
             </a:r>
             <a:endParaRPr lang="en-US" sz="1000" dirty="0"/>
           </a:p>
@@ -7834,7 +7834,7 @@
               <a:buNone/>
             </a:pPr>
             <a:r>
-              <a:rPr lang="en-US" sz="1250" b="1" dirty="0">
+              <a:rPr lang="en-US" sz="1150" b="1" dirty="0">
                 <a:solidFill>
                   <a:srgbClr val="00629B"/>
                 </a:solidFill>
@@ -7848,14 +7848,14 @@
               <a:buNone/>
             </a:pPr>
             <a:r>
-              <a:rPr lang="en-US" sz="1250" dirty="0">
+              <a:rPr lang="en-US" sz="1150" dirty="0">
                 <a:solidFill>
                   <a:srgbClr val="272425"/>
                 </a:solidFill>
               </a:rPr>
-              <a:t>Alcance por productos trazado a requisitos e historias</a:t>
-            </a:r>
-            <a:endParaRPr lang="en-US" sz="1250" dirty="0"/>
+              <a:t>Tres valores, reserva de cronograma y capacidad del release por MoSCoW</a:t>
+            </a:r>
+            <a:endParaRPr lang="en-US" sz="1150" dirty="0"/>
           </a:p>
           <a:p>
             <a:pPr indent="0" marL="0">
@@ -7865,7 +7865,7 @@
               <a:buNone/>
             </a:pPr>
             <a:r>
-              <a:rPr lang="en-US" sz="1250" b="1" dirty="0">
+              <a:rPr lang="en-US" sz="1150" b="1" dirty="0">
                 <a:solidFill>
                   <a:srgbClr val="00629B"/>
                 </a:solidFill>
@@ -7879,14 +7879,14 @@
               <a:buNone/>
             </a:pPr>
             <a:r>
-              <a:rPr lang="en-US" sz="1250" dirty="0">
+              <a:rPr lang="en-US" sz="1150" dirty="0">
                 <a:solidFill>
                   <a:srgbClr val="272425"/>
                 </a:solidFill>
               </a:rPr>
-              <a:t>Presupuesto y límite de la autoridad de cambio registrados por la junta</a:t>
-            </a:r>
-            <a:endParaRPr lang="en-US" sz="1250" dirty="0"/>
+              <a:t>Análisis de impacto antes de decidir: tiempo, capacidad, presupuesto, VAN y quién decide</a:t>
+            </a:r>
+            <a:endParaRPr lang="en-US" sz="1150" dirty="0"/>
           </a:p>
           <a:p>
             <a:pPr indent="0" marL="0">
@@ -7896,7 +7896,7 @@
               <a:buNone/>
             </a:pPr>
             <a:r>
-              <a:rPr lang="en-US" sz="1250" b="1" dirty="0">
+              <a:rPr lang="en-US" sz="1150" b="1" dirty="0">
                 <a:solidFill>
                   <a:srgbClr val="00629B"/>
                 </a:solidFill>
@@ -7910,14 +7910,14 @@
               <a:buNone/>
             </a:pPr>
             <a:r>
-              <a:rPr lang="en-US" sz="1250" dirty="0">
+              <a:rPr lang="en-US" sz="1150" dirty="0">
                 <a:solidFill>
                   <a:srgbClr val="272425"/>
                 </a:solidFill>
               </a:rPr>
               <a:t>Excepción completa: detectada, informada, replanificada y autorizada</a:t>
             </a:r>
-            <a:endParaRPr lang="en-US" sz="1250" dirty="0"/>
+            <a:endParaRPr lang="en-US" sz="1150" dirty="0"/>
           </a:p>
         </p:txBody>
       </p:sp>
@@ -8012,7 +8012,7 @@
               <a:buNone/>
             </a:pPr>
             <a:r>
-              <a:rPr lang="en-US" sz="1100" b="1" dirty="0">
+              <a:rPr lang="en-US" sz="1000" b="1" dirty="0">
                 <a:solidFill>
                   <a:srgbClr val="B5651D"/>
                 </a:solidFill>
@@ -8026,14 +8026,14 @@
               <a:buNone/>
             </a:pPr>
             <a:r>
-              <a:rPr lang="en-US" sz="1100" dirty="0">
+              <a:rPr lang="en-US" sz="1000" dirty="0">
                 <a:solidFill>
                   <a:srgbClr val="272425"/>
                 </a:solidFill>
               </a:rPr>
-              <a:t>El presupuesto de cambio queda en 75 % tras C-001; con C-002 llegaría al 200 %, por eso C-002 espera a la junta, que amplía el presupuesto y lo aprueba: vuelve a 75 % (paso 10).</a:t>
-            </a:r>
-            <a:endParaRPr lang="en-US" sz="1100" dirty="0"/>
+              <a:t>C-002 usaría el 200 % del presupuesto de cambio, el 150 % del límite de quien lo aprobó de palabra y el 143 % de la tolerancia de tiempo de la etapa: no lo puede decidir la autoridad de cambio, lo decide la junta (paso 10).</a:t>
+            </a:r>
+            <a:endParaRPr lang="en-US" sz="1000" dirty="0"/>
           </a:p>
           <a:p>
             <a:pPr indent="0" marL="0">
@@ -8043,7 +8043,7 @@
               <a:buNone/>
             </a:pPr>
             <a:r>
-              <a:rPr lang="en-US" sz="1100" b="1" dirty="0">
+              <a:rPr lang="en-US" sz="1000" b="1" dirty="0">
                 <a:solidFill>
                   <a:srgbClr val="B5651D"/>
                 </a:solidFill>
@@ -8057,14 +8057,14 @@
               <a:buNone/>
             </a:pPr>
             <a:r>
-              <a:rPr lang="en-US" sz="1100" dirty="0">
+              <a:rPr lang="en-US" sz="1000" dirty="0">
                 <a:solidFill>
                   <a:srgbClr val="272425"/>
                 </a:solidFill>
               </a:rPr>
               <a:t>El 29/1 no entra el 10,3 % del alcance (ámbar, lo gestiona el PO); el 19/2 no entra el 22,1 %, más que el 20 % de margen: los Must peligran y hay excepción (pasos 9 y 10).</a:t>
             </a:r>
-            <a:endParaRPr lang="en-US" sz="1100" dirty="0"/>
+            <a:endParaRPr lang="en-US" sz="1000" dirty="0"/>
           </a:p>
           <a:p>
             <a:pPr indent="0" marL="0">
@@ -8074,7 +8074,7 @@
               <a:buNone/>
             </a:pPr>
             <a:r>
-              <a:rPr lang="en-US" sz="1100" b="1" dirty="0">
+              <a:rPr lang="en-US" sz="1000" b="1" dirty="0">
                 <a:solidFill>
                   <a:srgbClr val="B5651D"/>
                 </a:solidFill>
@@ -8088,20 +8088,20 @@
               <a:buNone/>
             </a:pPr>
             <a:r>
-              <a:rPr lang="en-US" sz="1100" dirty="0">
+              <a:rPr lang="en-US" sz="1000" dirty="0">
                 <a:solidFill>
                   <a:srgbClr val="272425"/>
                 </a:solidFill>
               </a:rPr>
-              <a:t>Resumen al 26/2: VAN de 30.939 con los dos cambios, puesta en producción el 18/5, 2 días de reserva, presupuesto de cambio al 75 % tras la ampliación, 22,1 % del alcance en riesgo en el corte del 19/2 y 13 de 13 requisitos trazados.</a:t>
-            </a:r>
-            <a:endParaRPr lang="en-US" sz="1100" dirty="0"/>
+              <a:t>Resumen al 26/2: VAN de 30.939 con los dos cambios, puesta en producción el 20/5, 2 días de reserva, presupuesto de cambio al 75 % tras la ampliación, 22,1 % del alcance en riesgo en el corte del 19/2 y 13 de 13 requisitos trazados.</a:t>
+            </a:r>
+            <a:endParaRPr lang="en-US" sz="1000" dirty="0"/>
           </a:p>
         </p:txBody>
       </p:sp>
       <p:pic>
         <p:nvPicPr>
-          <p:cNvPr id="11" name="Image 0" descr="/home/claude/pm-method/docs/guias/img/g2-consumo-cambio.png">    </p:cNvPr>
+          <p:cNvPr id="11" name="Image 0" descr="/home/claude/pm-method/docs/guias/img/g2-impacto-c002.png">    </p:cNvPr>
           <p:cNvPicPr>
             <a:picLocks noChangeAspect="1"/>
           </p:cNvPicPr>
@@ -8153,7 +8153,7 @@
                   <a:srgbClr val="696969"/>
                 </a:solidFill>
               </a:rPr>
-              <a:t>Consumo del presupuesto de cambio en tres cortes</a:t>
+              <a:t>Límites que usaría C-002, según su análisis de impacto</a:t>
             </a:r>
             <a:endParaRPr lang="en-US" sz="1000" dirty="0"/>
           </a:p>
@@ -8324,7 +8324,7 @@
                   <a:srgbClr val="FFFFFF"/>
                 </a:solidFill>
               </a:rPr>
-              <a:t>E2E-3 · Interesados y OKR: el compromiso se mide en cada período</a:t>
+              <a:t>E2E-3 · Interesados y avance: compromiso y cifras verificados cada período</a:t>
             </a:r>
             <a:endParaRPr lang="en-US" sz="1900" dirty="0"/>
           </a:p>
@@ -8466,7 +8466,7 @@
               <a:buNone/>
             </a:pPr>
             <a:r>
-              <a:rPr lang="en-US" sz="1200" b="1" dirty="0">
+              <a:rPr lang="en-US" sz="1150" b="1" dirty="0">
                 <a:solidFill>
                   <a:srgbClr val="00629B"/>
                 </a:solidFill>
@@ -8480,14 +8480,14 @@
               <a:buNone/>
             </a:pPr>
             <a:r>
-              <a:rPr lang="en-US" sz="1200" dirty="0">
+              <a:rPr lang="en-US" sz="1150" dirty="0">
                 <a:solidFill>
                   <a:srgbClr val="272425"/>
                 </a:solidFill>
               </a:rPr>
-              <a:t>Maestro único de interesados: matriz, preferencias con cita y RACI</a:t>
-            </a:r>
-            <a:endParaRPr lang="en-US" sz="1200" dirty="0"/>
+              <a:t>Acuerdos del taller propuestos con cita y registrados solo al confirmarlos</a:t>
+            </a:r>
+            <a:endParaRPr lang="en-US" sz="1150" dirty="0"/>
           </a:p>
           <a:p>
             <a:pPr indent="0" marL="0">
@@ -8497,7 +8497,7 @@
               <a:buNone/>
             </a:pPr>
             <a:r>
-              <a:rPr lang="en-US" sz="1200" b="1" dirty="0">
+              <a:rPr lang="en-US" sz="1150" b="1" dirty="0">
                 <a:solidFill>
                   <a:srgbClr val="00629B"/>
                 </a:solidFill>
@@ -8511,14 +8511,14 @@
               <a:buNone/>
             </a:pPr>
             <a:r>
-              <a:rPr lang="en-US" sz="1200" dirty="0">
+              <a:rPr lang="en-US" sz="1150" dirty="0">
                 <a:solidFill>
                   <a:srgbClr val="272425"/>
                 </a:solidFill>
               </a:rPr>
-              <a:t>Highlight armado desde el dato y enviado por la capa de canales</a:t>
-            </a:r>
-            <a:endParaRPr lang="en-US" sz="1200" dirty="0"/>
+              <a:t>Radar de lo que hay que decidir hoy y highlight con las cifras verificadas contra el EVM</a:t>
+            </a:r>
+            <a:endParaRPr lang="en-US" sz="1150" dirty="0"/>
           </a:p>
           <a:p>
             <a:pPr indent="0" marL="0">
@@ -8528,7 +8528,7 @@
               <a:buNone/>
             </a:pPr>
             <a:r>
-              <a:rPr lang="en-US" sz="1200" b="1" dirty="0">
+              <a:rPr lang="en-US" sz="1150" b="1" dirty="0">
                 <a:solidFill>
                   <a:srgbClr val="00629B"/>
                 </a:solidFill>
@@ -8542,14 +8542,14 @@
               <a:buNone/>
             </a:pPr>
             <a:r>
-              <a:rPr lang="en-US" sz="1200" dirty="0">
+              <a:rPr lang="en-US" sz="1150" dirty="0">
                 <a:solidFill>
                   <a:srgbClr val="272425"/>
                 </a:solidFill>
               </a:rPr>
               <a:t>Cadencia de contacto y brecha de compromiso como control permanente</a:t>
             </a:r>
-            <a:endParaRPr lang="en-US" sz="1200" dirty="0"/>
+            <a:endParaRPr lang="en-US" sz="1150" dirty="0"/>
           </a:p>
         </p:txBody>
       </p:sp>
@@ -8733,7 +8733,7 @@
       </p:sp>
       <p:pic>
         <p:nvPicPr>
-          <p:cNvPr id="11" name="Image 0" descr="/home/claude/pm-method/docs/guias/img/g3-cadencia-stk12.png">    </p:cNvPr>
+          <p:cNvPr id="11" name="Image 0" descr="/home/claude/pm-method/docs/guias/img/g3-highlight-indicadores.png">    </p:cNvPr>
           <p:cNvPicPr>
             <a:picLocks noChangeAspect="1"/>
           </p:cNvPicPr>
@@ -8785,7 +8785,7 @@
                   <a:srgbClr val="696969"/>
                 </a:solidFill>
               </a:rPr>
-              <a:t>Cadencia de contacto al 5/2</a:t>
+              <a:t>Indicadores del highlight al 8/1</a:t>
             </a:r>
             <a:endParaRPr lang="en-US" sz="1000" dirty="0"/>
           </a:p>
@@ -8956,7 +8956,7 @@
                   <a:srgbClr val="FFFFFF"/>
                 </a:solidFill>
               </a:rPr>
-              <a:t>E2E-4 · Producto con BMAD: calidad a volumen y beneficios medidos después del cierre</a:t>
+              <a:t>E2E-4 · Producto con BMAD: calidad, cierre por id y beneficios medidos</a:t>
             </a:r>
             <a:endParaRPr lang="en-US" sz="1900" dirty="0"/>
           </a:p>
@@ -9148,7 +9148,7 @@
                   <a:srgbClr val="272425"/>
                 </a:solidFill>
               </a:rPr>
-              <a:t>Cada historia terminada con su revisión de calidad, incluido un rechazo</a:t>
+              <a:t>Retrospectiva con cita y ciclo de las lecciones: acción, verificación e índice de la organización</a:t>
             </a:r>
             <a:endParaRPr lang="en-US" sz="1150" dirty="0"/>
           </a:p>
@@ -9179,7 +9179,7 @@
                   <a:srgbClr val="272425"/>
                 </a:solidFill>
               </a:rPr>
-              <a:t>Beneficios medidos después del cierre contra trayectoria y tolerancia</a:t>
+              <a:t>Cierre verificado por id y expediente de auditoría con integridad comprobable</a:t>
             </a:r>
             <a:endParaRPr lang="en-US" sz="1150" dirty="0"/>
           </a:p>
@@ -9276,7 +9276,7 @@
               <a:buNone/>
             </a:pPr>
             <a:r>
-              <a:rPr lang="en-US" sz="1150" b="1" dirty="0">
+              <a:rPr lang="en-US" sz="1000" b="1" dirty="0">
                 <a:solidFill>
                   <a:srgbClr val="B5651D"/>
                 </a:solidFill>
@@ -9290,14 +9290,14 @@
               <a:buNone/>
             </a:pPr>
             <a:r>
-              <a:rPr lang="en-US" sz="1150" dirty="0">
+              <a:rPr lang="en-US" sz="1000" dirty="0">
                 <a:solidFill>
                   <a:srgbClr val="272425"/>
                 </a:solidFill>
               </a:rPr>
-              <a:t>Historias terminadas contra historias con revisión aprobada en cada corte: las brechas del 26/2 y del 7/5 se cerraron antes de la puerta siguiente (paso 8).</a:t>
-            </a:r>
-            <a:endParaRPr lang="en-US" sz="1150" dirty="0"/>
+              <a:t>Historias terminadas contra historias con revisión aprobada en cada corte, según el estado de productos que deriva estado.py productos: las brechas del 26/2 y del 7/5 se cerraron antes de la puerta siguiente (pasos 6 y 8).</a:t>
+            </a:r>
+            <a:endParaRPr lang="en-US" sz="1000" dirty="0"/>
           </a:p>
           <a:p>
             <a:pPr indent="0" marL="0">
@@ -9307,7 +9307,7 @@
               <a:buNone/>
             </a:pPr>
             <a:r>
-              <a:rPr lang="en-US" sz="1150" b="1" dirty="0">
+              <a:rPr lang="en-US" sz="1000" b="1" dirty="0">
                 <a:solidFill>
                   <a:srgbClr val="B5651D"/>
                 </a:solidFill>
@@ -9321,14 +9321,14 @@
               <a:buNone/>
             </a:pPr>
             <a:r>
-              <a:rPr lang="en-US" sz="1150" dirty="0">
+              <a:rPr lang="en-US" sz="1000" dirty="0">
                 <a:solidFill>
                   <a:srgbClr val="272425"/>
                 </a:solidFill>
               </a:rPr>
-              <a:t>La puerta de cierre en una página: 11 de 11 historias con revisión aprobada, CPI 0,977, 40 % del presupuesto de cambio usado y 0 condiciones abiertas (paso 9).</a:t>
-            </a:r>
-            <a:endParaRPr lang="en-US" sz="1150" dirty="0"/>
+              <a:t>De la retrospectiva del sprint 4 al índice de la organización: 3 lecciones con cita (1 de impacto alto), la acción de L-002 verificada en el sprint 5, L-003 cambia el plan de la etapa 3 y se verifica al cerrar el Release 2, y 3 lecciones en el índice (pasos 6c, 7, 8 y 9).</a:t>
+            </a:r>
+            <a:endParaRPr lang="en-US" sz="1000" dirty="0"/>
           </a:p>
           <a:p>
             <a:pPr indent="0" marL="0">
@@ -9338,7 +9338,7 @@
               <a:buNone/>
             </a:pPr>
             <a:r>
-              <a:rPr lang="en-US" sz="1150" b="1" dirty="0">
+              <a:rPr lang="en-US" sz="1000" b="1" dirty="0">
                 <a:solidFill>
                   <a:srgbClr val="B5651D"/>
                 </a:solidFill>
@@ -9352,20 +9352,20 @@
               <a:buNone/>
             </a:pPr>
             <a:r>
-              <a:rPr lang="en-US" sz="1150" dirty="0">
+              <a:rPr lang="en-US" sz="1000" dirty="0">
                 <a:solidFill>
                   <a:srgbClr val="272425"/>
                 </a:solidFill>
               </a:rPr>
-              <a:t>Al 31/12/2027, B-02 adopción llega al 83 % de la meta y queda fuera de la tolerancia de −10 %; B-01 y B-03, dentro (paso 11).</a:t>
-            </a:r>
-            <a:endParaRPr lang="en-US" sz="1150" dirty="0"/>
+              <a:t>El expediente para la auditoría externa: 41 eventos en la cronología y 43 archivos con su huella; una sola palabra cambiada en la copia y la verificación la delata (paso 9b).</a:t>
+            </a:r>
+            <a:endParaRPr lang="en-US" sz="1000" dirty="0"/>
           </a:p>
         </p:txBody>
       </p:sp>
       <p:pic>
         <p:nvPicPr>
-          <p:cNvPr id="11" name="Image 0" descr="/home/claude/pm-method/docs/guias/img/g4-calidad-entregas.png">    </p:cNvPr>
+          <p:cNvPr id="11" name="Image 0" descr="/home/claude/pm-method/docs/guias/img/g4-cierre.png">    </p:cNvPr>
           <p:cNvPicPr>
             <a:picLocks noChangeAspect="1"/>
           </p:cNvPicPr>
@@ -9417,7 +9417,7 @@
                   <a:srgbClr val="696969"/>
                 </a:solidFill>
               </a:rPr>
-              <a:t>Calidad por entrega</a:t>
+              <a:t>Tablero de cierre</a:t>
             </a:r>
             <a:endParaRPr lang="en-US" sz="1000" dirty="0"/>
           </a:p>
@@ -9480,7 +9480,7 @@
                   <a:srgbClr val="002855"/>
                 </a:solidFill>
               </a:rPr>
-              <a:t>12 pasos · 2 clases de webinar · guía docs/guias/E2E-4-producto-bmad.md</a:t>
+              <a:t>15 pasos · 2 clases de webinar · guía docs/guias/E2E-4-producto-bmad.md</a:t>
             </a:r>
             <a:endParaRPr lang="en-US" sz="1050" dirty="0"/>
           </a:p>
@@ -9749,7 +9749,7 @@
                   <a:srgbClr val="272425"/>
                 </a:solidFill>
               </a:rPr>
-              <a:t>Mapa de supuestos y experimentos baratos antes de comprometer dinero</a:t>
+              <a:t>Lecciones de otros proyectos y mapa de supuestos antes de comprometer dinero</a:t>
             </a:r>
             <a:endParaRPr lang="en-US" sz="1150" dirty="0"/>
           </a:p>
@@ -9811,7 +9811,7 @@
                   <a:srgbClr val="272425"/>
                 </a:solidFill>
               </a:rPr>
-              <a:t>Mapa de Wardley y recorrido del paciente para decidir qué construir</a:t>
+              <a:t>Personas de usuario ligadas a cada requisito Must, y mapas para decidir qué construir</a:t>
             </a:r>
             <a:endParaRPr lang="en-US" sz="1150" dirty="0"/>
           </a:p>
@@ -9908,7 +9908,7 @@
               <a:buNone/>
             </a:pPr>
             <a:r>
-              <a:rPr lang="en-US" sz="1150" b="1" dirty="0">
+              <a:rPr lang="en-US" sz="1100" b="1" dirty="0">
                 <a:solidFill>
                   <a:srgbClr val="B5651D"/>
                 </a:solidFill>
@@ -9922,14 +9922,14 @@
               <a:buNone/>
             </a:pPr>
             <a:r>
-              <a:rPr lang="en-US" sz="1150" dirty="0">
+              <a:rPr lang="en-US" sz="1100" dirty="0">
                 <a:solidFill>
                   <a:srgbClr val="272425"/>
                 </a:solidFill>
               </a:rPr>
               <a:t>Tres supuestos críticos sin evidencia (S-001, S-002, S-003) sostienen los dos beneficios y la factibilidad: ahí se invierte primero en aprender (paso 2).</a:t>
             </a:r>
-            <a:endParaRPr lang="en-US" sz="1150" dirty="0"/>
+            <a:endParaRPr lang="en-US" sz="1100" dirty="0"/>
           </a:p>
           <a:p>
             <a:pPr indent="0" marL="0">
@@ -9939,7 +9939,7 @@
               <a:buNone/>
             </a:pPr>
             <a:r>
-              <a:rPr lang="en-US" sz="1150" b="1" dirty="0">
+              <a:rPr lang="en-US" sz="1100" b="1" dirty="0">
                 <a:solidFill>
                   <a:srgbClr val="B5651D"/>
                 </a:solidFill>
@@ -9953,14 +9953,14 @@
               <a:buNone/>
             </a:pPr>
             <a:r>
-              <a:rPr lang="en-US" sz="1150" dirty="0">
+              <a:rPr lang="en-US" sz="1100" dirty="0">
                 <a:solidFill>
                   <a:srgbClr val="272425"/>
                 </a:solidFill>
               </a:rPr>
               <a:t>El piloto bajó el VAN de las dos opciones; la opción 2 sigue siendo la mejor, con una TIR de 54,3 % y un repago de 1,78 años (paso 4).</a:t>
             </a:r>
-            <a:endParaRPr lang="en-US" sz="1150" dirty="0"/>
+            <a:endParaRPr lang="en-US" sz="1100" dirty="0"/>
           </a:p>
           <a:p>
             <a:pPr indent="0" marL="0">
@@ -9970,7 +9970,7 @@
               <a:buNone/>
             </a:pPr>
             <a:r>
-              <a:rPr lang="en-US" sz="1150" b="1" dirty="0">
+              <a:rPr lang="en-US" sz="1100" b="1" dirty="0">
                 <a:solidFill>
                   <a:srgbClr val="B5651D"/>
                 </a:solidFill>
@@ -9984,14 +9984,14 @@
               <a:buNone/>
             </a:pPr>
             <a:r>
-              <a:rPr lang="en-US" sz="1150" dirty="0">
+              <a:rPr lang="en-US" sz="1100" dirty="0">
                 <a:solidFill>
                   <a:srgbClr val="272425"/>
                 </a:solidFill>
               </a:rPr>
-              <a:t>La junta autoriza USD 179.340 (BAC 170.800 + reserva de gestión 8.540) y fija aparte un presupuesto de cambio de 10.000 con tope de 3.000 por cambio (paso 9).</a:t>
-            </a:r>
-            <a:endParaRPr lang="en-US" sz="1150" dirty="0"/>
+              <a:t>Los 4 Must tienen persona y REQ-003 sirve al paciente, a la recepcionista y al paciente mayor de 65; el aviso STK-13 de REQ-006 se resolvió marcando al paciente como beneficiario (paso 10b).</a:t>
+            </a:r>
+            <a:endParaRPr lang="en-US" sz="1100" dirty="0"/>
           </a:p>
         </p:txBody>
       </p:sp>
@@ -10112,7 +10112,7 @@
                   <a:srgbClr val="002855"/>
                 </a:solidFill>
               </a:rPr>
-              <a:t>18 pasos · 2 clases de webinar · guía docs/guias/E2E-5-idea-a-proyecto.md</a:t>
+              <a:t>20 pasos · 2 clases de webinar · guía docs/guias/E2E-5-idea-a-proyecto.md</a:t>
             </a:r>
             <a:endParaRPr lang="en-US" sz="1050" dirty="0"/>
           </a:p>
@@ -10283,7 +10283,7 @@
                   <a:srgbClr val="FFFFFF"/>
                 </a:solidFill>
               </a:rPr>
-              <a:t>223</a:t>
+              <a:t>353</a:t>
             </a:r>
             <a:endParaRPr lang="en-US" sz="2800" dirty="0"/>
           </a:p>
@@ -10355,7 +10355,7 @@
                   <a:srgbClr val="FFFFFF"/>
                 </a:solidFill>
               </a:rPr>
-              <a:t>0 FALLO · 21 casos</a:t>
+              <a:t>0 FALLO · 33 casos</a:t>
             </a:r>
             <a:endParaRPr lang="en-US" sz="1000" dirty="0"/>
           </a:p>
@@ -10553,7 +10553,7 @@
                   <a:srgbClr val="FFFFFF"/>
                 </a:solidFill>
               </a:rPr>
-              <a:t>127</a:t>
+              <a:t>128</a:t>
             </a:r>
             <a:endParaRPr lang="en-US" sz="2800" dirty="0"/>
           </a:p>
@@ -10688,7 +10688,7 @@
                   <a:srgbClr val="FFFFFF"/>
                 </a:solidFill>
               </a:rPr>
-              <a:t>102</a:t>
+              <a:t>130</a:t>
             </a:r>
             <a:endParaRPr lang="en-US" sz="2800" dirty="0"/>
           </a:p>
@@ -10859,7 +10859,7 @@
                   <a:srgbClr val="B5651D"/>
                 </a:solidFill>
               </a:rPr>
-              <a:t>14/14  </a:t>
+              <a:t>2/2  </a:t>
             </a:r>
             <a:pPr indent="0" marL="0">
               <a:buNone/>
@@ -10870,7 +10870,7 @@
                   <a:srgbClr val="272425"/>
                 </a:solidFill>
               </a:rPr>
-              <a:t>enrutamiento  </a:t>
+              <a:t>enrutamiento, ids 103–104  </a:t>
             </a:r>
             <a:pPr indent="0" marL="0">
               <a:spcAft>
@@ -10884,7 +10884,7 @@
                   <a:srgbClr val="696969"/>
                 </a:solidFill>
               </a:rPr>
-              <a:t>20/10</a:t>
+              <a:t>21/10</a:t>
             </a:r>
             <a:endParaRPr lang="en-US" sz="1200" dirty="0"/>
           </a:p>
@@ -10898,7 +10898,7 @@
                   <a:srgbClr val="B5651D"/>
                 </a:solidFill>
               </a:rPr>
-              <a:t>8/8  </a:t>
+              <a:t>3/3  </a:t>
             </a:r>
             <a:pPr indent="0" marL="0">
               <a:buNone/>
@@ -10909,7 +10909,7 @@
                   <a:srgbClr val="272425"/>
                 </a:solidFill>
               </a:rPr>
-              <a:t>enrutamiento, ids 95–102  </a:t>
+              <a:t>enrutamiento, ids 105–107  </a:t>
             </a:r>
             <a:pPr indent="0" marL="0">
               <a:spcAft>
@@ -10923,7 +10923,7 @@
                   <a:srgbClr val="696969"/>
                 </a:solidFill>
               </a:rPr>
-              <a:t>20/10</a:t>
+              <a:t>21/10</a:t>
             </a:r>
             <a:endParaRPr lang="en-US" sz="1200" dirty="0"/>
           </a:p>
@@ -10937,7 +10937,7 @@
                   <a:srgbClr val="B5651D"/>
                 </a:solidFill>
               </a:rPr>
-              <a:t>7/7  </a:t>
+              <a:t>12/12  </a:t>
             </a:r>
             <a:pPr indent="0" marL="0">
               <a:buNone/>
@@ -10948,7 +10948,7 @@
                   <a:srgbClr val="272425"/>
                 </a:solidFill>
               </a:rPr>
-              <a:t>controles, tras el control de autoridad y p…  </a:t>
+              <a:t>enrutamiento, ids 108–114  </a:t>
             </a:r>
             <a:pPr indent="0" marL="0">
               <a:spcAft>
@@ -10962,7 +10962,7 @@
                   <a:srgbClr val="696969"/>
                 </a:solidFill>
               </a:rPr>
-              <a:t>20/10</a:t>
+              <a:t>21/10</a:t>
             </a:r>
             <a:endParaRPr lang="en-US" sz="1200" dirty="0"/>
           </a:p>
@@ -10976,7 +10976,7 @@
                   <a:srgbClr val="B5651D"/>
                 </a:solidFill>
               </a:rPr>
-              <a:t>12/12  </a:t>
+              <a:t>6/6 · 8/8  </a:t>
             </a:r>
             <a:pPr indent="0" marL="0">
               <a:buNone/>
@@ -10987,7 +10987,7 @@
                   <a:srgbClr val="272425"/>
                 </a:solidFill>
               </a:rPr>
-              <a:t>integracion con las 29 skills de BMAD 6.12.…  </a:t>
+              <a:t>enrutamiento, ids 115–120  </a:t>
             </a:r>
             <a:pPr indent="0" marL="0">
               <a:spcAft>
@@ -11001,7 +11001,163 @@
                   <a:srgbClr val="696969"/>
                 </a:solidFill>
               </a:rPr>
-              <a:t>20/10</a:t>
+              <a:t>21/10</a:t>
+            </a:r>
+            <a:endParaRPr lang="en-US" sz="1200" dirty="0"/>
+          </a:p>
+          <a:p>
+            <a:pPr indent="0" marL="0">
+              <a:buNone/>
+            </a:pPr>
+            <a:r>
+              <a:rPr lang="en-US" sz="1100" b="1" dirty="0">
+                <a:solidFill>
+                  <a:srgbClr val="B5651D"/>
+                </a:solidFill>
+              </a:rPr>
+              <a:t>4/4 · 10/10  </a:t>
+            </a:r>
+            <a:pPr indent="0" marL="0">
+              <a:buNone/>
+            </a:pPr>
+            <a:r>
+              <a:rPr lang="en-US" sz="1100" dirty="0">
+                <a:solidFill>
+                  <a:srgbClr val="272425"/>
+                </a:solidFill>
+              </a:rPr>
+              <a:t>enrutamiento, ids 121–124  </a:t>
+            </a:r>
+            <a:pPr indent="0" marL="0">
+              <a:spcAft>
+                <a:spcPts val="400"/>
+              </a:spcAft>
+              <a:buNone/>
+            </a:pPr>
+            <a:r>
+              <a:rPr lang="en-US" sz="1000" dirty="0">
+                <a:solidFill>
+                  <a:srgbClr val="696969"/>
+                </a:solidFill>
+              </a:rPr>
+              <a:t>21/10</a:t>
+            </a:r>
+            <a:endParaRPr lang="en-US" sz="1200" dirty="0"/>
+          </a:p>
+          <a:p>
+            <a:pPr indent="0" marL="0">
+              <a:buNone/>
+            </a:pPr>
+            <a:r>
+              <a:rPr lang="en-US" sz="1100" b="1" dirty="0">
+                <a:solidFill>
+                  <a:srgbClr val="B5651D"/>
+                </a:solidFill>
+              </a:rPr>
+              <a:t>2/2  </a:t>
+            </a:r>
+            <a:pPr indent="0" marL="0">
+              <a:buNone/>
+            </a:pPr>
+            <a:r>
+              <a:rPr lang="en-US" sz="1100" dirty="0">
+                <a:solidFill>
+                  <a:srgbClr val="272425"/>
+                </a:solidFill>
+              </a:rPr>
+              <a:t>enrutamiento, ids 125–126  </a:t>
+            </a:r>
+            <a:pPr indent="0" marL="0">
+              <a:spcAft>
+                <a:spcPts val="400"/>
+              </a:spcAft>
+              <a:buNone/>
+            </a:pPr>
+            <a:r>
+              <a:rPr lang="en-US" sz="1000" dirty="0">
+                <a:solidFill>
+                  <a:srgbClr val="696969"/>
+                </a:solidFill>
+              </a:rPr>
+              <a:t>22/10</a:t>
+            </a:r>
+            <a:endParaRPr lang="en-US" sz="1200" dirty="0"/>
+          </a:p>
+          <a:p>
+            <a:pPr indent="0" marL="0">
+              <a:buNone/>
+            </a:pPr>
+            <a:r>
+              <a:rPr lang="en-US" sz="1100" b="1" dirty="0">
+                <a:solidFill>
+                  <a:srgbClr val="B5651D"/>
+                </a:solidFill>
+              </a:rPr>
+              <a:t>4/4  </a:t>
+            </a:r>
+            <a:pPr indent="0" marL="0">
+              <a:buNone/>
+            </a:pPr>
+            <a:r>
+              <a:rPr lang="en-US" sz="1100" dirty="0">
+                <a:solidFill>
+                  <a:srgbClr val="272425"/>
+                </a:solidFill>
+              </a:rPr>
+              <a:t>enrutamiento, ids 127–128  </a:t>
+            </a:r>
+            <a:pPr indent="0" marL="0">
+              <a:spcAft>
+                <a:spcPts val="400"/>
+              </a:spcAft>
+              <a:buNone/>
+            </a:pPr>
+            <a:r>
+              <a:rPr lang="en-US" sz="1000" dirty="0">
+                <a:solidFill>
+                  <a:srgbClr val="696969"/>
+                </a:solidFill>
+              </a:rPr>
+              <a:t>22/10</a:t>
+            </a:r>
+            <a:endParaRPr lang="en-US" sz="1200" dirty="0"/>
+          </a:p>
+          <a:p>
+            <a:pPr indent="0" marL="0">
+              <a:buNone/>
+            </a:pPr>
+            <a:r>
+              <a:rPr lang="en-US" sz="1100" b="1" dirty="0">
+                <a:solidFill>
+                  <a:srgbClr val="B5651D"/>
+                </a:solidFill>
+              </a:rPr>
+              <a:t>2/2  </a:t>
+            </a:r>
+            <a:pPr indent="0" marL="0">
+              <a:buNone/>
+            </a:pPr>
+            <a:r>
+              <a:rPr lang="en-US" sz="1100" dirty="0">
+                <a:solidFill>
+                  <a:srgbClr val="272425"/>
+                </a:solidFill>
+              </a:rPr>
+              <a:t>enrutamiento, ids 129–130  </a:t>
+            </a:r>
+            <a:pPr indent="0" marL="0">
+              <a:spcAft>
+                <a:spcPts val="400"/>
+              </a:spcAft>
+              <a:buNone/>
+            </a:pPr>
+            <a:r>
+              <a:rPr lang="en-US" sz="1000" dirty="0">
+                <a:solidFill>
+                  <a:srgbClr val="696969"/>
+                </a:solidFill>
+              </a:rPr>
+              <a:t>22/10</a:t>
             </a:r>
             <a:endParaRPr lang="en-US" sz="1200" dirty="0"/>
           </a:p>
@@ -16517,7 +16673,7 @@
                   <a:srgbClr val="272425"/>
                 </a:solidFill>
               </a:rPr>
-              <a:t>Los cambios se aprueban uno a uno y nadie suma lo comprometido</a:t>
+              <a:t>La respuesta a un riesgo se elige por intuición y la contingencia se improvisa</a:t>
             </a:r>
             <a:endParaRPr lang="en-US" sz="1200" dirty="0"/>
           </a:p>
@@ -16616,7 +16772,7 @@
                   <a:srgbClr val="002855"/>
                 </a:solidFill>
               </a:rPr>
-              <a:t>Cada cambio se carga contra el presupuesto de la junta; excedido, bloquea la puerta</a:t>
+              <a:t>Opciones comparadas por valor neto; decide el propietario y el plan de contingencia queda listo</a:t>
             </a:r>
             <a:endParaRPr lang="en-US" sz="1200" dirty="0"/>
           </a:p>
@@ -16682,7 +16838,7 @@
                 <a:ea typeface="Courier New" pitchFamily="34" charset="-122"/>
                 <a:cs typeface="Courier New" pitchFamily="34" charset="-120"/>
               </a:rPr>
-              <a:t>CAM-03 · CAM-04</a:t>
+              <a:t>REG-10</a:t>
             </a:r>
             <a:endParaRPr lang="en-US" sz="1000" dirty="0"/>
           </a:p>
@@ -16745,7 +16901,7 @@
                   <a:srgbClr val="272425"/>
                 </a:solidFill>
               </a:rPr>
-              <a:t>«Aprobado con condiciones» queda en el acta y se olvida</a:t>
+              <a:t>Los cambios se aprueban uno a uno y nadie suma lo comprometido</a:t>
             </a:r>
             <a:endParaRPr lang="en-US" sz="1200" dirty="0"/>
           </a:p>
@@ -16844,7 +17000,7 @@
                   <a:srgbClr val="002855"/>
                 </a:solidFill>
               </a:rPr>
-              <a:t>La condición se sigue hasta que alguien con rol la cierra; abierta, bloquea el cierre</a:t>
+              <a:t>Cada cambio se mide antes de decidirlo y se carga contra el presupuesto de la junta</a:t>
             </a:r>
             <a:endParaRPr lang="en-US" sz="1200" dirty="0"/>
           </a:p>
@@ -16910,7 +17066,7 @@
                 <a:ea typeface="Courier New" pitchFamily="34" charset="-122"/>
                 <a:cs typeface="Courier New" pitchFamily="34" charset="-120"/>
               </a:rPr>
-              <a:t>EST-12 · G-01</a:t>
+              <a:t>CAM-03 · CAM-04</a:t>
             </a:r>
             <a:endParaRPr lang="en-US" sz="1000" dirty="0"/>
           </a:p>
@@ -16973,7 +17129,7 @@
                   <a:srgbClr val="272425"/>
                 </a:solidFill>
               </a:rPr>
-              <a:t>La calidad se revisa al final, si se revisa</a:t>
+              <a:t>«Aprobado con condiciones» queda en el acta y se olvida</a:t>
             </a:r>
             <a:endParaRPr lang="en-US" sz="1200" dirty="0"/>
           </a:p>
@@ -17072,7 +17228,7 @@
                   <a:srgbClr val="002855"/>
                 </a:solidFill>
               </a:rPr>
-              <a:t>Cada historia terminada necesita su revisión aprobada, en cada entrega</a:t>
+              <a:t>La condición se sigue hasta que alguien con rol la cierra; abierta, bloquea el cierre</a:t>
             </a:r>
             <a:endParaRPr lang="en-US" sz="1200" dirty="0"/>
           </a:p>
@@ -17138,7 +17294,7 @@
                 <a:ea typeface="Courier New" pitchFamily="34" charset="-122"/>
                 <a:cs typeface="Courier New" pitchFamily="34" charset="-120"/>
               </a:rPr>
-              <a:t>QUA-01 · QUA-02</a:t>
+              <a:t>EST-12 · G-01</a:t>
             </a:r>
             <a:endParaRPr lang="en-US" sz="1000" dirty="0"/>
           </a:p>
@@ -17201,7 +17357,7 @@
                   <a:srgbClr val="272425"/>
                 </a:solidFill>
               </a:rPr>
-              <a:t>El pronóstico de valor ganado no se vuelve a mirar</a:t>
+              <a:t>La calidad se revisa al final y el cierre se firma de memoria</a:t>
             </a:r>
             <a:endParaRPr lang="en-US" sz="1200" dirty="0"/>
           </a:p>
@@ -17300,7 +17456,7 @@
                   <a:srgbClr val="002855"/>
                 </a:solidFill>
               </a:rPr>
-              <a:t>Un pronóstico fuera de tolerancia sin excepción abierta genera aviso</a:t>
+              <a:t>Cada historia terminada necesita su revisión, y el cierre lista por id lo que falta aceptar</a:t>
             </a:r>
             <a:endParaRPr lang="en-US" sz="1200" dirty="0"/>
           </a:p>
@@ -17366,7 +17522,7 @@
                 <a:ea typeface="Courier New" pitchFamily="34" charset="-122"/>
                 <a:cs typeface="Courier New" pitchFamily="34" charset="-120"/>
               </a:rPr>
-              <a:t>TOL-01</a:t>
+              <a:t>QUA-01 · C-07</a:t>
             </a:r>
             <a:endParaRPr lang="en-US" sz="1000" dirty="0"/>
           </a:p>
@@ -17429,7 +17585,7 @@
                   <a:srgbClr val="272425"/>
                 </a:solidFill>
               </a:rPr>
-              <a:t>El plan de comunicaciones promete una frecuencia que nadie verifica</a:t>
+              <a:t>Las lecciones se archivan en un informe que nadie vuelve a leer</a:t>
             </a:r>
             <a:endParaRPr lang="en-US" sz="1200" dirty="0"/>
           </a:p>
@@ -17528,7 +17684,7 @@
                   <a:srgbClr val="002855"/>
                 </a:solidFill>
               </a:rPr>
-              <a:t>La cadencia de contacto de cada interesado clave queda vigilada</a:t>
+              <a:t>Cada lección de impacto alto se acciona, se verifica que funcionó y alimenta a otros proyectos</a:t>
             </a:r>
             <a:endParaRPr lang="en-US" sz="1200" dirty="0"/>
           </a:p>
@@ -17594,7 +17750,7 @@
                 <a:ea typeface="Courier New" pitchFamily="34" charset="-122"/>
                 <a:cs typeface="Courier New" pitchFamily="34" charset="-120"/>
               </a:rPr>
-              <a:t>STK-12</a:t>
+              <a:t>REG-11 · REG-12</a:t>
             </a:r>
             <a:endParaRPr lang="en-US" sz="1000" dirty="0"/>
           </a:p>
@@ -19670,7 +19826,7 @@
                   <a:srgbClr val="002855"/>
                 </a:solidFill>
               </a:rPr>
-              <a:t>13  </a:t>
+              <a:t>14  </a:t>
             </a:r>
             <a:pPr indent="0" marL="0">
               <a:buNone/>
@@ -19717,7 +19873,7 @@
                   <a:srgbClr val="696969"/>
                 </a:solidFill>
               </a:rPr>
-              <a:t>9 base y 4 que se crean al primer uso</a:t>
+              <a:t>9 base y 5 que se crean al primer uso</a:t>
             </a:r>
             <a:endParaRPr lang="en-US" sz="1200" dirty="0"/>
           </a:p>
@@ -19890,7 +20046,7 @@
                   <a:srgbClr val="002855"/>
                 </a:solidFill>
               </a:rPr>
-              <a:t>97  </a:t>
+              <a:t>105  </a:t>
             </a:r>
             <a:pPr indent="0" marL="0">
               <a:buNone/>
@@ -19937,7 +20093,7 @@
                   <a:srgbClr val="696969"/>
                 </a:solidFill>
               </a:rPr>
-              <a:t>85 de sanidad y 12 de puerta</a:t>
+              <a:t>93 de sanidad y 12 de puerta</a:t>
             </a:r>
             <a:endParaRPr lang="en-US" sz="1200" dirty="0"/>
           </a:p>
@@ -24719,7 +24875,7 @@
                   <a:srgbClr val="FFFFFF"/>
                 </a:solidFill>
               </a:rPr>
-              <a:t>97 controles automáticos vigilan lo que nadie revisa a mano</a:t>
+              <a:t>105 controles automáticos vigilan lo que nadie revisa a mano</a:t>
             </a:r>
             <a:endParaRPr lang="en-US" sz="1900" dirty="0"/>
           </a:p>
@@ -25041,7 +25197,7 @@
                   <a:srgbClr val="B5651D"/>
                 </a:solidFill>
               </a:rPr>
-              <a:t>E2E-2</a:t>
+              <a:t>E2E-1</a:t>
             </a:r>
             <a:endParaRPr lang="en-US" sz="1100" dirty="0"/>
           </a:p>
@@ -25072,12 +25228,12 @@
               <a:buNone/>
             </a:pPr>
             <a:r>
-              <a:rPr lang="en-US" sz="1150" dirty="0">
+              <a:rPr lang="en-US" sz="950" dirty="0">
                 <a:solidFill>
                   <a:srgbClr val="272425"/>
                 </a:solidFill>
               </a:rPr>
-              <a:t>El presupuesto de cambio queda en 75 % tras C-001; con C-002 llegaría al 200 %, por eso C-002 espera a la junta, que amplía el presupuesto y lo aprueba: vuelve a 75 % (paso 10).</a:t>
+              <a:t>La reserva pasa del 18 % al 94 % en cinco corridas de la sanidad; al activar el plan de contingencia de R-003 cruza el 80 % y CAM-03 deja de ser informativo y avisa. La provisión para lo no identificado no está en esas barras: vive en la reserva de gestión, que solo libera la junta.</a:t>
             </a:r>
             <a:endParaRPr lang="en-US" sz="1200" dirty="0"/>
           </a:p>
@@ -25170,7 +25326,7 @@
                 <a:ea typeface="Courier New" pitchFamily="34" charset="-122"/>
                 <a:cs typeface="Courier New" pitchFamily="34" charset="-120"/>
               </a:rPr>
-              <a:t>CAM-03</a:t>
+              <a:t>STK-12</a:t>
             </a:r>
             <a:endParaRPr lang="en-US" sz="1000" dirty="0"/>
           </a:p>
@@ -25206,7 +25362,7 @@
                   <a:srgbClr val="B5651D"/>
                 </a:solidFill>
               </a:rPr>
-              <a:t>E2E-1</a:t>
+              <a:t>E2E-3</a:t>
             </a:r>
             <a:endParaRPr lang="en-US" sz="1100" dirty="0"/>
           </a:p>
@@ -25242,7 +25398,7 @@
                   <a:srgbClr val="272425"/>
                 </a:solidFill>
               </a:rPr>
-              <a:t>La reserva pasa del 21 % al 81 % en cinco corridas de la sanidad; al cruzar el 80 %, CAM-03 deja de ser informativo y avisa.</a:t>
+              <a:t>STK-12 al 5/2: TI, Martín y Lucía superan el máximo de días sin contacto. Laura, Sofía y el sindicato están en el límite.</a:t>
             </a:r>
             <a:endParaRPr lang="en-US" sz="1200" dirty="0"/>
           </a:p>
@@ -25335,7 +25491,7 @@
                 <a:ea typeface="Courier New" pitchFamily="34" charset="-122"/>
                 <a:cs typeface="Courier New" pitchFamily="34" charset="-120"/>
               </a:rPr>
-              <a:t>STK-12</a:t>
+              <a:t>QUA-01</a:t>
             </a:r>
             <a:endParaRPr lang="en-US" sz="1000" dirty="0"/>
           </a:p>
@@ -25371,7 +25527,7 @@
                   <a:srgbClr val="B5651D"/>
                 </a:solidFill>
               </a:rPr>
-              <a:t>E2E-3</a:t>
+              <a:t>E2E-4</a:t>
             </a:r>
             <a:endParaRPr lang="en-US" sz="1100" dirty="0"/>
           </a:p>
@@ -25402,12 +25558,12 @@
               <a:buNone/>
             </a:pPr>
             <a:r>
-              <a:rPr lang="en-US" sz="1150" dirty="0">
+              <a:rPr lang="en-US" sz="950" dirty="0">
                 <a:solidFill>
                   <a:srgbClr val="272425"/>
                 </a:solidFill>
               </a:rPr>
-              <a:t>STK-12 al 5/2: TI, Martín y Lucía superan el máximo de días sin contacto. Laura, Sofía y el sindicato están en el límite.</a:t>
+              <a:t>Historias terminadas contra historias con revisión aprobada en cada corte, según el estado de productos que deriva estado.py productos: las brechas del 26/2 y del 7/5 se cerraron antes de la puerta siguiente (pasos 6 y 8).</a:t>
             </a:r>
             <a:endParaRPr lang="en-US" sz="1200" dirty="0"/>
           </a:p>
@@ -25500,7 +25656,7 @@
                 <a:ea typeface="Courier New" pitchFamily="34" charset="-122"/>
                 <a:cs typeface="Courier New" pitchFamily="34" charset="-120"/>
               </a:rPr>
-              <a:t>QUA-01</a:t>
+              <a:t>REG-11</a:t>
             </a:r>
             <a:endParaRPr lang="en-US" sz="1000" dirty="0"/>
           </a:p>
@@ -25567,12 +25723,12 @@
               <a:buNone/>
             </a:pPr>
             <a:r>
-              <a:rPr lang="en-US" sz="1150" dirty="0">
+              <a:rPr lang="en-US" sz="950" dirty="0">
                 <a:solidFill>
                   <a:srgbClr val="272425"/>
                 </a:solidFill>
               </a:rPr>
-              <a:t>Historias terminadas contra historias con revisión aprobada en cada corte: las brechas del 26/2 y del 7/5 se cerraron antes de la puerta siguiente (paso 8).</a:t>
+              <a:t>De la retrospectiva del sprint 4 al índice de la organización: 3 lecciones con cita (1 de impacto alto), la acción de L-002 verificada en el sprint 5, L-003 cambia el plan de la etapa 3 y se verifica al cerrar el Release 2, y 3 lecciones en el índice (pasos 6c, 7, 8 y 9).</a:t>
             </a:r>
             <a:endParaRPr lang="en-US" sz="1200" dirty="0"/>
           </a:p>
@@ -26149,12 +26305,12 @@
               <a:buNone/>
             </a:pPr>
             <a:r>
-              <a:rPr lang="en-US" sz="1100" dirty="0">
+              <a:rPr lang="en-US" sz="1050" dirty="0">
                 <a:solidFill>
                   <a:srgbClr val="272425"/>
                 </a:solidFill>
               </a:rPr>
-              <a:t>Actas con acciones, riesgos, decisiones y preferencias declaradas, confirmadas por una persona.</a:t>
+              <a:t>Acuerdos con cita: decisiones, compromisos, supuestos, riesgos y lecciones propuestos desde la transcripción y registrados solo si una persona los confirma.</a:t>
             </a:r>
             <a:endParaRPr lang="en-US" sz="1200" dirty="0"/>
           </a:p>

--- a/docs/resumen-ejecutivo/resumen-ejecutivo-pm-method.pptx
+++ b/docs/resumen-ejecutivo/resumen-ejecutivo-pm-method.pptx
@@ -124,14 +124,14 @@
   <p:extLst>
     <p:ext uri="{521415D9-36F7-43E2-AB2F-B90AF26B5E84}">
       <p14:sectionLst xmlns:p14="http://schemas.microsoft.com/office/powerpoint/2010/main">
-        <p14:section name="Propuesta" id="{1f16855e-d707-d705-12c4-9864628e5e79}">
+        <p14:section name="Propuesta" id="{1ea78a40-1a7b-04a4-179a-01f0e580aeb9}">
           <p14:sldIdLst>
             <p14:sldId id="256"/>
             <p14:sldId id="257"/>
             <p14:sldId id="258"/>
           </p14:sldIdLst>
         </p14:section>
-        <p14:section name="Producto" id="{f6615d53-8209-4a79-688a-6dabd079187d}">
+        <p14:section name="Producto" id="{5533237f-77ea-d63d-89df-069711a60e00}">
           <p14:sldIdLst>
             <p14:sldId id="259"/>
             <p14:sldId id="260"/>
@@ -141,7 +141,7 @@
             <p14:sldId id="264"/>
           </p14:sldIdLst>
         </p14:section>
-        <p14:section name="Casos E2E" id="{64b86be7-ae62-12aa-5c74-f69851bd773d}">
+        <p14:section name="Casos E2E" id="{28c19752-b13f-a57b-f2b8-b49cd5e195e0}">
           <p14:sldIdLst>
             <p14:sldId id="265"/>
             <p14:sldId id="266"/>
@@ -151,7 +151,7 @@
             <p14:sldId id="270"/>
           </p14:sldIdLst>
         </p14:section>
-        <p14:section name="Confianza y adopción" id="{44a01161-231b-8d98-1bc7-aac47af9050f}">
+        <p14:section name="Confianza y adopción" id="{47fe54b3-0941-a63f-c0e9-90d7511da62d}">
           <p14:sldIdLst>
             <p14:sldId id="271"/>
             <p14:sldId id="272"/>
@@ -1687,7 +1687,7 @@
           <a:p>
             <a:r>
               <a:rPr lang="en-US" dirty="0"/>
-              <a:t>EN: two ways to start: manual install or an isolated Docker container.</a:t>
+              <a:t>EN: two ways to start: install on WSL2 or Linux, or an isolated Docker container; each has its own step-by-step guide.</a:t>
             </a:r>
             <a:endParaRPr lang="en-US" dirty="0"/>
           </a:p>
@@ -2824,7 +2824,7 @@
                   <a:srgbClr val="696969"/>
                 </a:solidFill>
               </a:rPr>
-              <a:t>pm-method 2.4.0 · Resumen ejecutivo · 2026-10-22</a:t>
+              <a:t>pm-method 2.5.0 · Resumen ejecutivo · 2026-10-27</a:t>
             </a:r>
             <a:endParaRPr lang="en-US" sz="900" dirty="0"/>
           </a:p>
@@ -3254,7 +3254,7 @@
                   <a:srgbClr val="9FD0F0"/>
                 </a:solidFill>
               </a:rPr>
-              <a:t>Resumen ejecutivo · pm-method 2.4.0</a:t>
+              <a:t>Resumen ejecutivo · pm-method 2.5.0</a:t>
             </a:r>
             <a:endParaRPr lang="en-US" sz="1500" dirty="0"/>
           </a:p>
@@ -3326,7 +3326,7 @@
                   <a:srgbClr val="FFFFFF"/>
                 </a:solidFill>
               </a:rPr>
-              <a:t>Un plugin para Claude Code y Cowork. PRINCE2 7 manda, PMBOK 8 aporta las técnicas y BMAD es la especificación del producto, de solo lectura. Con la versión 2.4.0: opciones e impacto medidos antes de decidir, un radar de lo que hay que decidir hoy e informes verificados contra el dato.</a:t>
+              <a:t>Un plugin para Claude Code y Cowork. PRINCE2 7 manda, PMBOK 8 aporta las técnicas y BMAD es la especificación del producto, de solo lectura. Con opciones e impacto medidos antes de decidir, un radar de lo que hay que decidir hoy e informes verificados contra el dato.</a:t>
             </a:r>
             <a:endParaRPr lang="en-US" sz="1200" dirty="0"/>
           </a:p>
@@ -3857,7 +3857,7 @@
                   <a:srgbClr val="FFFFFF"/>
                 </a:solidFill>
               </a:rPr>
-              <a:t>pm-method 2.4.0 · 22 de octubre de 2026</a:t>
+              <a:t>pm-method 2.5.0 · 27 de octubre de 2026</a:t>
             </a:r>
             <a:endParaRPr lang="en-US" sz="1100" dirty="0"/>
           </a:p>
@@ -10283,7 +10283,7 @@
                   <a:srgbClr val="FFFFFF"/>
                 </a:solidFill>
               </a:rPr>
-              <a:t>353</a:t>
+              <a:t>355</a:t>
             </a:r>
             <a:endParaRPr lang="en-US" sz="2800" dirty="0"/>
           </a:p>
@@ -10355,7 +10355,7 @@
                   <a:srgbClr val="FFFFFF"/>
                 </a:solidFill>
               </a:rPr>
-              <a:t>0 FALLO · 33 casos</a:t>
+              <a:t>0 FALLO · 34 casos</a:t>
             </a:r>
             <a:endParaRPr lang="en-US" sz="1000" dirty="0"/>
           </a:p>
@@ -10823,7 +10823,7 @@
                   <a:srgbClr val="002855"/>
                 </a:solidFill>
               </a:rPr>
-              <a:t>PRUEBAS EN VIVO CON CLAUDE CODE REAL</a:t>
+              <a:t>PRUEBAS EN VIVO CON CLAUDE CODE REAL (SERIE 2.4)</a:t>
             </a:r>
             <a:endParaRPr lang="en-US" sz="1000" dirty="0"/>
           </a:p>
@@ -12696,7 +12696,7 @@
                   <a:srgbClr val="FFFFFF"/>
                 </a:solidFill>
               </a:rPr>
-              <a:t>Dos formas de empezar: instalación manual o contenedor Docker aislado</a:t>
+              <a:t>Dos formas de empezar: instalación sobre WSL2 o Linux, o contenedor Docker aislado</a:t>
             </a:r>
             <a:endParaRPr lang="en-US" sz="1900" dirty="0"/>
           </a:p>
@@ -12759,7 +12759,7 @@
                   <a:srgbClr val="002855"/>
                 </a:solidFill>
               </a:rPr>
-              <a:t>INSTALACIÓN MANUAL (CLAUDE CODE Y COWORK)</a:t>
+              <a:t>SOBRE WSL2 O LINUX (GUÍA: DOCS/INSTALACION-WSL2.MD)</a:t>
             </a:r>
             <a:endParaRPr lang="en-US" sz="1000" dirty="0"/>
           </a:p>
@@ -13040,7 +13040,7 @@
                   <a:srgbClr val="002855"/>
                 </a:solidFill>
               </a:rPr>
-              <a:t>DOCKER (PROBAR SIN INSTALAR NADA EN EL EQUIPO)</a:t>
+              <a:t>DOCKER (GUÍA: DOCS/INSTALACION-DOCKER.MD)</a:t>
             </a:r>
             <a:endParaRPr lang="en-US" sz="1000" dirty="0"/>
           </a:p>

--- a/docs/resumen-ejecutivo/resumen-ejecutivo-pm-method.pptx
+++ b/docs/resumen-ejecutivo/resumen-ejecutivo-pm-method.pptx
@@ -23,9 +23,10 @@
     <p:sldId id="271" r:id="rId17"/>
     <p:sldId id="272" r:id="rId18"/>
     <p:sldId id="273" r:id="rId19"/>
+    <p:sldId id="274" r:id="rId20"/>
   </p:sldIdLst>
   <p:notesMasterIdLst>
-    <p:notesMasterId r:id="rId20"/>
+    <p:notesMasterId r:id="rId21"/>
   </p:notesMasterIdLst>
   <p:sldSz cx="12192000" cy="6858000"/>
   <p:notesSz cx="6858000" cy="12192000"/>
@@ -124,14 +125,14 @@
   <p:extLst>
     <p:ext uri="{521415D9-36F7-43E2-AB2F-B90AF26B5E84}">
       <p14:sectionLst xmlns:p14="http://schemas.microsoft.com/office/powerpoint/2010/main">
-        <p14:section name="Propuesta" id="{1ea78a40-1a7b-04a4-179a-01f0e580aeb9}">
+        <p14:section name="Propuesta" id="{489044bb-2e96-5a6b-e93a-9db7bd030622}">
           <p14:sldIdLst>
             <p14:sldId id="256"/>
             <p14:sldId id="257"/>
             <p14:sldId id="258"/>
           </p14:sldIdLst>
         </p14:section>
-        <p14:section name="Producto" id="{5533237f-77ea-d63d-89df-069711a60e00}">
+        <p14:section name="Producto" id="{435ea403-ec88-5a36-cdbb-e10ade8b3c91}">
           <p14:sldIdLst>
             <p14:sldId id="259"/>
             <p14:sldId id="260"/>
@@ -139,23 +140,24 @@
             <p14:sldId id="262"/>
             <p14:sldId id="263"/>
             <p14:sldId id="264"/>
+            <p14:sldId id="265"/>
           </p14:sldIdLst>
         </p14:section>
-        <p14:section name="Casos E2E" id="{28c19752-b13f-a57b-f2b8-b49cd5e195e0}">
+        <p14:section name="Casos E2E" id="{aa5e2806-9a45-4fe7-587e-8eaef6c3095a}">
           <p14:sldIdLst>
-            <p14:sldId id="265"/>
             <p14:sldId id="266"/>
             <p14:sldId id="267"/>
             <p14:sldId id="268"/>
             <p14:sldId id="269"/>
             <p14:sldId id="270"/>
+            <p14:sldId id="271"/>
           </p14:sldIdLst>
         </p14:section>
-        <p14:section name="Confianza y adopción" id="{47fe54b3-0941-a63f-c0e9-90d7511da62d}">
+        <p14:section name="Confianza y adopción" id="{7548cb25-73d5-0d58-23ad-30e8b71f7236}">
           <p14:sldIdLst>
-            <p14:sldId id="271"/>
             <p14:sldId id="272"/>
             <p14:sldId id="273"/>
+            <p14:sldId id="274"/>
           </p14:sldIdLst>
         </p14:section>
       </p14:sectionLst>
@@ -227,44 +229,50 @@
           </c:dLbls>
           <c:cat>
             <c:multiLvlStrRef>
-              <c:f>Sheet1!$A$2:$A$13</c:f>
+              <c:f>Sheet1!$A$2:$A$15</c:f>
               <c:multiLvlStrCache>
-                <c:ptCount val="12"/>
+                <c:ptCount val="14"/>
                 <c:lvl>
                   <c:pt idx="0">
+                    <c:v>BIT · bitácora de escrituras</c:v>
+                  </c:pt>
+                  <c:pt idx="1">
                     <c:v>TOL · pronóstico contra tolerancias</c:v>
                   </c:pt>
-                  <c:pt idx="1">
+                  <c:pt idx="2">
                     <c:v>SUP · supuestos críticos</c:v>
                   </c:pt>
-                  <c:pt idx="2">
+                  <c:pt idx="3">
                     <c:v>QUA · calidad a volumen</c:v>
                   </c:pt>
-                  <c:pt idx="3">
+                  <c:pt idx="4">
                     <c:v>INT · integraciones MCP</c:v>
                   </c:pt>
-                  <c:pt idx="4">
+                  <c:pt idx="5">
                     <c:v>ART · artefactos</c:v>
                   </c:pt>
-                  <c:pt idx="5">
+                  <c:pt idx="6">
                     <c:v>CAM · cambios contra presupuestos</c:v>
                   </c:pt>
-                  <c:pt idx="6">
+                  <c:pt idx="7">
                     <c:v>MAP · mapas de Wardley y de recorrido</c:v>
                   </c:pt>
-                  <c:pt idx="7">
+                  <c:pt idx="8">
                     <c:v>INS · instalación</c:v>
                   </c:pt>
-                  <c:pt idx="8">
+                  <c:pt idx="9">
+                    <c:v>DEC · decisiones con contexto</c:v>
+                  </c:pt>
+                  <c:pt idx="10">
                     <c:v>REG · registros</c:v>
                   </c:pt>
-                  <c:pt idx="9">
+                  <c:pt idx="11">
                     <c:v>EST · estado, roles y puertas</c:v>
                   </c:pt>
-                  <c:pt idx="10">
+                  <c:pt idx="12">
                     <c:v>ESP · especificación y BMAD</c:v>
                   </c:pt>
-                  <c:pt idx="11">
+                  <c:pt idx="13">
                     <c:v>STK · maestro de interesados</c:v>
                   </c:pt>
                 </c:lvl>
@@ -273,30 +281,30 @@
           </c:cat>
           <c:val>
             <c:numRef>
-              <c:f>Sheet1!$B$2:$B$13</c:f>
+              <c:f>Sheet1!$B$2:$B$15</c:f>
               <c:numCache>
                 <c:formatCode>General</c:formatCode>
-                <c:ptCount val="12"/>
+                <c:ptCount val="14"/>
                 <c:pt idx="0">
-                  <c:v>3</c:v>
+                  <c:v>0</c:v>
                 </c:pt>
                 <c:pt idx="1">
                   <c:v>3</c:v>
                 </c:pt>
                 <c:pt idx="2">
-                  <c:v>4</c:v>
+                  <c:v>3</c:v>
                 </c:pt>
                 <c:pt idx="3">
-                  <c:v>0</c:v>
+                  <c:v>4</c:v>
                 </c:pt>
                 <c:pt idx="4">
                   <c:v>0</c:v>
                 </c:pt>
                 <c:pt idx="5">
-                  <c:v>5</c:v>
+                  <c:v>0</c:v>
                 </c:pt>
                 <c:pt idx="6">
-                  <c:v>0</c:v>
+                  <c:v>5</c:v>
                 </c:pt>
                 <c:pt idx="7">
                   <c:v>0</c:v>
@@ -311,6 +319,12 @@
                   <c:v>0</c:v>
                 </c:pt>
                 <c:pt idx="11">
+                  <c:v>0</c:v>
+                </c:pt>
+                <c:pt idx="12">
+                  <c:v>0</c:v>
+                </c:pt>
+                <c:pt idx="13">
                   <c:v>0</c:v>
                 </c:pt>
               </c:numCache>
@@ -365,44 +379,50 @@
           </c:dLbls>
           <c:cat>
             <c:multiLvlStrRef>
-              <c:f>Sheet1!$A$2:$A$13</c:f>
+              <c:f>Sheet1!$A$2:$A$15</c:f>
               <c:multiLvlStrCache>
-                <c:ptCount val="12"/>
+                <c:ptCount val="14"/>
                 <c:lvl>
                   <c:pt idx="0">
+                    <c:v>BIT · bitácora de escrituras</c:v>
+                  </c:pt>
+                  <c:pt idx="1">
                     <c:v>TOL · pronóstico contra tolerancias</c:v>
                   </c:pt>
-                  <c:pt idx="1">
+                  <c:pt idx="2">
                     <c:v>SUP · supuestos críticos</c:v>
                   </c:pt>
-                  <c:pt idx="2">
+                  <c:pt idx="3">
                     <c:v>QUA · calidad a volumen</c:v>
                   </c:pt>
-                  <c:pt idx="3">
+                  <c:pt idx="4">
                     <c:v>INT · integraciones MCP</c:v>
                   </c:pt>
-                  <c:pt idx="4">
+                  <c:pt idx="5">
                     <c:v>ART · artefactos</c:v>
                   </c:pt>
-                  <c:pt idx="5">
+                  <c:pt idx="6">
                     <c:v>CAM · cambios contra presupuestos</c:v>
                   </c:pt>
-                  <c:pt idx="6">
+                  <c:pt idx="7">
                     <c:v>MAP · mapas de Wardley y de recorrido</c:v>
                   </c:pt>
-                  <c:pt idx="7">
+                  <c:pt idx="8">
                     <c:v>INS · instalación</c:v>
                   </c:pt>
-                  <c:pt idx="8">
+                  <c:pt idx="9">
+                    <c:v>DEC · decisiones con contexto</c:v>
+                  </c:pt>
+                  <c:pt idx="10">
                     <c:v>REG · registros</c:v>
                   </c:pt>
-                  <c:pt idx="9">
+                  <c:pt idx="11">
                     <c:v>EST · estado, roles y puertas</c:v>
                   </c:pt>
-                  <c:pt idx="10">
+                  <c:pt idx="12">
                     <c:v>ESP · especificación y BMAD</c:v>
                   </c:pt>
-                  <c:pt idx="11">
+                  <c:pt idx="13">
                     <c:v>STK · maestro de interesados</c:v>
                   </c:pt>
                 </c:lvl>
@@ -411,12 +431,12 @@
           </c:cat>
           <c:val>
             <c:numRef>
-              <c:f>Sheet1!$C$2:$C$13</c:f>
+              <c:f>Sheet1!$C$2:$C$15</c:f>
               <c:numCache>
                 <c:formatCode>General</c:formatCode>
-                <c:ptCount val="12"/>
+                <c:ptCount val="14"/>
                 <c:pt idx="0">
-                  <c:v>0</c:v>
+                  <c:v>2</c:v>
                 </c:pt>
                 <c:pt idx="1">
                   <c:v>0</c:v>
@@ -425,30 +445,36 @@
                   <c:v>0</c:v>
                 </c:pt>
                 <c:pt idx="3">
-                  <c:v>4</c:v>
+                  <c:v>0</c:v>
                 </c:pt>
                 <c:pt idx="4">
                   <c:v>4</c:v>
                 </c:pt>
                 <c:pt idx="5">
-                  <c:v>0</c:v>
+                  <c:v>4</c:v>
                 </c:pt>
                 <c:pt idx="6">
-                  <c:v>6</c:v>
+                  <c:v>0</c:v>
                 </c:pt>
                 <c:pt idx="7">
                   <c:v>6</c:v>
                 </c:pt>
                 <c:pt idx="8">
+                  <c:v>6</c:v>
+                </c:pt>
+                <c:pt idx="9">
+                  <c:v>6</c:v>
+                </c:pt>
+                <c:pt idx="10">
                   <c:v>12</c:v>
                 </c:pt>
-                <c:pt idx="9">
+                <c:pt idx="11">
                   <c:v>14</c:v>
                 </c:pt>
-                <c:pt idx="10">
+                <c:pt idx="12">
                   <c:v>15</c:v>
                 </c:pt>
-                <c:pt idx="11">
+                <c:pt idx="13">
                   <c:v>17</c:v>
                 </c:pt>
               </c:numCache>
@@ -1071,7 +1097,7 @@
           <a:p>
             <a:r>
               <a:rPr lang="en-US" dirty="0"/>
-              <a:t>EN: end-to-end cases, each one also a training module.</a:t>
+              <a:t>EN: open integrations through generic MCP; nothing is hard-wired to a vendor.</a:t>
             </a:r>
             <a:endParaRPr lang="en-US" dirty="0"/>
           </a:p>
@@ -1159,7 +1185,7 @@
           <a:p>
             <a:r>
               <a:rPr lang="en-US" dirty="0"/>
-              <a:t>EN: real figures from the reproducible reference run of each guide. · docs/guias/E2E-1-riesgos.md</a:t>
+              <a:t>EN: end-to-end cases, each one also a training module.</a:t>
             </a:r>
             <a:endParaRPr lang="en-US" dirty="0"/>
           </a:p>
@@ -1247,7 +1273,7 @@
           <a:p>
             <a:r>
               <a:rPr lang="en-US" dirty="0"/>
-              <a:t>EN: real figures from the reproducible reference run of each guide. · docs/guias/E2E-2-alcance-roadmap.md</a:t>
+              <a:t>EN: real figures from the reproducible reference run of each guide. · docs/guias/E2E-1-riesgos.md</a:t>
             </a:r>
             <a:endParaRPr lang="en-US" dirty="0"/>
           </a:p>
@@ -1335,7 +1361,7 @@
           <a:p>
             <a:r>
               <a:rPr lang="en-US" dirty="0"/>
-              <a:t>EN: real figures from the reproducible reference run of each guide. · docs/guias/E2E-3-interesados-okr-avance.md</a:t>
+              <a:t>EN: real figures from the reproducible reference run of each guide. · docs/guias/E2E-2-alcance-roadmap.md</a:t>
             </a:r>
             <a:endParaRPr lang="en-US" dirty="0"/>
           </a:p>
@@ -1423,7 +1449,7 @@
           <a:p>
             <a:r>
               <a:rPr lang="en-US" dirty="0"/>
-              <a:t>EN: real figures from the reproducible reference run of each guide. · docs/guias/E2E-4-producto-bmad.md</a:t>
+              <a:t>EN: real figures from the reproducible reference run of each guide. · docs/guias/E2E-3-interesados-okr-avance.md</a:t>
             </a:r>
             <a:endParaRPr lang="en-US" dirty="0"/>
           </a:p>
@@ -1511,7 +1537,7 @@
           <a:p>
             <a:r>
               <a:rPr lang="en-US" dirty="0"/>
-              <a:t>EN: real figures from the reproducible reference run of each guide. · docs/guias/E2E-5-idea-a-proyecto.md</a:t>
+              <a:t>EN: real figures from the reproducible reference run of each guide. · docs/guias/E2E-4-producto-bmad.md</a:t>
             </a:r>
             <a:endParaRPr lang="en-US" dirty="0"/>
           </a:p>
@@ -1599,7 +1625,7 @@
           <a:p>
             <a:r>
               <a:rPr lang="en-US" dirty="0"/>
-              <a:t>EN: trust is shown, not claimed: reproducible tests, live tests and a security review.</a:t>
+              <a:t>EN: real figures from the reproducible reference run of each guide. · docs/guias/E2E-5-idea-a-proyecto.md</a:t>
             </a:r>
             <a:endParaRPr lang="en-US" dirty="0"/>
           </a:p>
@@ -1687,7 +1713,7 @@
           <a:p>
             <a:r>
               <a:rPr lang="en-US" dirty="0"/>
-              <a:t>EN: two ways to start: install on WSL2 or Linux, or an isolated Docker container; each has its own step-by-step guide.</a:t>
+              <a:t>EN: trust is shown, not claimed: reproducible tests, live tests and a security review.</a:t>
             </a:r>
             <a:endParaRPr lang="en-US" dirty="0"/>
           </a:p>
@@ -1775,7 +1801,7 @@
           <a:p>
             <a:r>
               <a:rPr lang="en-US" dirty="0"/>
-              <a:t>EN: short glossary; full terminology in docs/TERMINOLOGIA.md.</a:t>
+              <a:t>EN: two ways to start: install on WSL2 or Linux, or an isolated Docker container; each has its own step-by-step guide.</a:t>
             </a:r>
             <a:endParaRPr lang="en-US" dirty="0"/>
           </a:p>
@@ -1799,6 +1825,94 @@
             <a:fld id="{F7021451-1387-4CA6-816F-3879F97B5CBC}" type="slidenum">
               <a:rPr lang="en-US"/>
               <a:t>18</a:t>
+            </a:fld>
+            <a:endParaRPr lang="en-US"/>
+          </a:p>
+        </p:txBody>
+      </p:sp>
+    </p:spTree>
+    <p:extLst>
+      <p:ext uri="{BB962C8B-B14F-4D97-AF65-F5344CB8AC3E}">
+        <p14:creationId xmlns:p14="http://schemas.microsoft.com/office/powerpoint/2010/main" val="1024086991"/>
+      </p:ext>
+    </p:extLst>
+  </p:cSld>
+  <p:clrMapOvr>
+    <a:masterClrMapping/>
+  </p:clrMapOvr>
+</p:notes>
+</file>
+
+<file path=ppt/notesSlides/notesSlide19.xml><?xml version="1.0" encoding="utf-8"?>
+<p:notes xmlns:a="http://schemas.openxmlformats.org/drawingml/2006/main" xmlns:r="http://schemas.openxmlformats.org/officeDocument/2006/relationships" xmlns:p="http://schemas.openxmlformats.org/presentationml/2006/main">
+  <p:cSld>
+    <p:spTree>
+      <p:nvGrpSpPr>
+        <p:cNvPr id="1" name=""/>
+        <p:cNvGrpSpPr/>
+        <p:nvPr/>
+      </p:nvGrpSpPr>
+      <p:grpSpPr>
+        <a:xfrm>
+          <a:off x="0" y="0"/>
+          <a:ext cx="0" cy="0"/>
+          <a:chOff x="0" y="0"/>
+          <a:chExt cx="0" cy="0"/>
+        </a:xfrm>
+      </p:grpSpPr>
+      <p:sp>
+        <p:nvSpPr>
+          <p:cNvPr id="2" name="Slide Image Placeholder 1"/>
+          <p:cNvSpPr>
+            <a:spLocks noGrp="1" noRot="1" noChangeAspect="1"/>
+          </p:cNvSpPr>
+          <p:nvPr>
+            <p:ph type="sldImg"/>
+          </p:nvPr>
+        </p:nvSpPr>
+        <p:spPr/>
+      </p:sp>
+      <p:sp>
+        <p:nvSpPr>
+          <p:cNvPr id="3" name="Notes Placeholder 2"/>
+          <p:cNvSpPr>
+            <a:spLocks noGrp="1"/>
+          </p:cNvSpPr>
+          <p:nvPr>
+            <p:ph type="body" idx="1"/>
+          </p:nvPr>
+        </p:nvSpPr>
+        <p:spPr/>
+        <p:txBody>
+          <a:bodyPr/>
+          <a:lstStyle/>
+          <a:p>
+            <a:r>
+              <a:rPr lang="en-US" dirty="0"/>
+              <a:t>EN: short glossary; full terminology in docs/TERMINOLOGIA.md.</a:t>
+            </a:r>
+            <a:endParaRPr lang="en-US" dirty="0"/>
+          </a:p>
+        </p:txBody>
+      </p:sp>
+      <p:sp>
+        <p:nvSpPr>
+          <p:cNvPr id="4" name="Slide Number Placeholder 3"/>
+          <p:cNvSpPr>
+            <a:spLocks noGrp="1"/>
+          </p:cNvSpPr>
+          <p:nvPr>
+            <p:ph type="sldNum" sz="quarter" idx="10"/>
+          </p:nvPr>
+        </p:nvSpPr>
+        <p:spPr/>
+        <p:txBody>
+          <a:bodyPr/>
+          <a:lstStyle/>
+          <a:p>
+            <a:fld id="{F7021451-1387-4CA6-816F-3879F97B5CBC}" type="slidenum">
+              <a:rPr lang="en-US"/>
+              <a:t>19</a:t>
             </a:fld>
             <a:endParaRPr lang="en-US"/>
           </a:p>
@@ -2479,7 +2593,7 @@
           <a:p>
             <a:r>
               <a:rPr lang="en-US" dirty="0"/>
-              <a:t>EN: open integrations through generic MCP; nothing is hard-wired to a vendor.</a:t>
+              <a:t>EN: decide with context and the right authority, track every write, and find the evidence with its citation (optional pm-kb).</a:t>
             </a:r>
             <a:endParaRPr lang="en-US" dirty="0"/>
           </a:p>
@@ -2824,7 +2938,7 @@
                   <a:srgbClr val="696969"/>
                 </a:solidFill>
               </a:rPr>
-              <a:t>pm-method 2.5.0 · Resumen ejecutivo · 2026-10-27</a:t>
+              <a:t>pm-method 2.6.0 · Resumen ejecutivo · 2026-10-29</a:t>
             </a:r>
             <a:endParaRPr lang="en-US" sz="900" dirty="0"/>
           </a:p>
@@ -3254,7 +3368,7 @@
                   <a:srgbClr val="9FD0F0"/>
                 </a:solidFill>
               </a:rPr>
-              <a:t>Resumen ejecutivo · pm-method 2.5.0</a:t>
+              <a:t>Resumen ejecutivo · pm-method 2.6.0</a:t>
             </a:r>
             <a:endParaRPr lang="en-US" sz="1500" dirty="0"/>
           </a:p>
@@ -3321,12 +3435,12 @@
               <a:buNone/>
             </a:pPr>
             <a:r>
-              <a:rPr lang="en-US" sz="1600" dirty="0">
+              <a:rPr lang="en-US" sz="1500" dirty="0">
                 <a:solidFill>
                   <a:srgbClr val="FFFFFF"/>
                 </a:solidFill>
               </a:rPr>
-              <a:t>Un plugin para Claude Code y Cowork. PRINCE2 7 manda, PMBOK 8 aporta las técnicas y BMAD es la especificación del producto, de solo lectura. Con opciones e impacto medidos antes de decidir, un radar de lo que hay que decidir hoy e informes verificados contra el dato.</a:t>
+              <a:t>Un plugin para Claude Code y Cowork. PRINCE2 7 manda, PMBOK 8 aporta las técnicas y BMAD es la especificación del producto, de solo lectura. Decisiones con contexto y con la autoridad que corresponde, un radar de lo que hay que decidir hoy, cada escritura en una bitácora y, opcional, búsqueda citada en los proyectos.</a:t>
             </a:r>
             <a:endParaRPr lang="en-US" sz="1200" dirty="0"/>
           </a:p>
@@ -3686,7 +3800,7 @@
                   <a:srgbClr val="FFFFFF"/>
                 </a:solidFill>
               </a:rPr>
-              <a:t>105</a:t>
+              <a:t>113</a:t>
             </a:r>
             <a:endParaRPr lang="en-US" sz="3000" dirty="0"/>
           </a:p>
@@ -3857,7 +3971,7 @@
                   <a:srgbClr val="FFFFFF"/>
                 </a:solidFill>
               </a:rPr>
-              <a:t>pm-method 2.5.0 · 27 de octubre de 2026</a:t>
+              <a:t>pm-method 2.6.0 · 29 de octubre de 2026</a:t>
             </a:r>
             <a:endParaRPr lang="en-US" sz="1100" dirty="0"/>
           </a:p>
@@ -3956,6 +4070,1195 @@
                   <a:srgbClr val="FFFFFF"/>
                 </a:solidFill>
               </a:rPr>
+              <a:t>Se conecta con las herramientas que ya usa la organización, sin atarse a ninguna</a:t>
+            </a:r>
+            <a:endParaRPr lang="en-US" sz="1900" dirty="0"/>
+          </a:p>
+        </p:txBody>
+      </p:sp>
+      <p:sp>
+        <p:nvSpPr>
+          <p:cNvPr id="4" name="Shape 1"/>
+          <p:cNvSpPr/>
+          <p:nvPr/>
+        </p:nvSpPr>
+        <p:spPr>
+          <a:xfrm>
+            <a:off x="4251960" y="1988820"/>
+            <a:ext cx="1156716" cy="1623060"/>
+          </a:xfrm>
+          <a:prstGeom prst="line">
+            <a:avLst/>
+          </a:prstGeom>
+          <a:noFill/>
+          <a:ln w="15875">
+            <a:solidFill>
+              <a:srgbClr val="AFC0D0"/>
+            </a:solidFill>
+            <a:prstDash val="solid"/>
+          </a:ln>
+        </p:spPr>
+      </p:sp>
+      <p:sp>
+        <p:nvSpPr>
+          <p:cNvPr id="5" name="Shape 2"/>
+          <p:cNvSpPr/>
+          <p:nvPr/>
+        </p:nvSpPr>
+        <p:spPr>
+          <a:xfrm>
+            <a:off x="457200" y="1325880"/>
+            <a:ext cx="3794760" cy="1325880"/>
+          </a:xfrm>
+          <a:prstGeom prst="roundRect">
+            <a:avLst>
+              <a:gd name="adj" fmla="val 5517"/>
+            </a:avLst>
+          </a:prstGeom>
+          <a:solidFill>
+            <a:srgbClr val="FBF1E6"/>
+          </a:solidFill>
+          <a:ln w="9525">
+            <a:solidFill>
+              <a:srgbClr val="FBF1E6"/>
+            </a:solidFill>
+            <a:prstDash val="solid"/>
+          </a:ln>
+        </p:spPr>
+      </p:sp>
+      <p:sp>
+        <p:nvSpPr>
+          <p:cNvPr id="6" name="Text 3"/>
+          <p:cNvSpPr txBox="1"/>
+          <p:nvPr/>
+        </p:nvSpPr>
+        <p:spPr>
+          <a:xfrm>
+            <a:off x="621792" y="1417320"/>
+            <a:ext cx="3465576" cy="274320"/>
+          </a:xfrm>
+          <a:prstGeom prst="rect">
+            <a:avLst/>
+          </a:prstGeom>
+          <a:noFill/>
+          <a:ln/>
+        </p:spPr>
+        <p:txBody>
+          <a:bodyPr wrap="square" lIns="0" tIns="0" rIns="0" bIns="0" rtlCol="0" anchor="t"/>
+          <a:lstStyle/>
+          <a:p>
+            <a:pPr indent="0" marL="0">
+              <a:buNone/>
+            </a:pPr>
+            <a:r>
+              <a:rPr lang="en-US" sz="1350" b="1" dirty="0">
+                <a:solidFill>
+                  <a:srgbClr val="002855"/>
+                </a:solidFill>
+              </a:rPr>
+              <a:t>BMAD</a:t>
+            </a:r>
+            <a:endParaRPr lang="en-US" sz="1350" dirty="0"/>
+          </a:p>
+        </p:txBody>
+      </p:sp>
+      <p:sp>
+        <p:nvSpPr>
+          <p:cNvPr id="7" name="Text 4"/>
+          <p:cNvSpPr txBox="1"/>
+          <p:nvPr/>
+        </p:nvSpPr>
+        <p:spPr>
+          <a:xfrm>
+            <a:off x="621792" y="1691640"/>
+            <a:ext cx="3465576" cy="237744"/>
+          </a:xfrm>
+          <a:prstGeom prst="rect">
+            <a:avLst/>
+          </a:prstGeom>
+          <a:noFill/>
+          <a:ln/>
+        </p:spPr>
+        <p:txBody>
+          <a:bodyPr wrap="square" lIns="0" tIns="0" rIns="0" bIns="0" rtlCol="0" anchor="t"/>
+          <a:lstStyle/>
+          <a:p>
+            <a:pPr indent="0" marL="0">
+              <a:buNone/>
+            </a:pPr>
+            <a:r>
+              <a:rPr lang="en-US" sz="950" b="1" dirty="0">
+                <a:solidFill>
+                  <a:srgbClr val="B5651D"/>
+                </a:solidFill>
+              </a:rPr>
+              <a:t>versiones probadas: 4.x, 6.11, 6.12</a:t>
+            </a:r>
+            <a:endParaRPr lang="en-US" sz="950" dirty="0"/>
+          </a:p>
+        </p:txBody>
+      </p:sp>
+      <p:sp>
+        <p:nvSpPr>
+          <p:cNvPr id="8" name="Text 5"/>
+          <p:cNvSpPr txBox="1"/>
+          <p:nvPr/>
+        </p:nvSpPr>
+        <p:spPr>
+          <a:xfrm>
+            <a:off x="621792" y="1947672"/>
+            <a:ext cx="3465576" cy="649224"/>
+          </a:xfrm>
+          <a:prstGeom prst="rect">
+            <a:avLst/>
+          </a:prstGeom>
+          <a:noFill/>
+          <a:ln/>
+        </p:spPr>
+        <p:txBody>
+          <a:bodyPr wrap="square" lIns="0" tIns="0" rIns="0" bIns="0" rtlCol="0" anchor="t"/>
+          <a:lstStyle/>
+          <a:p>
+            <a:pPr indent="0" marL="0">
+              <a:buNone/>
+            </a:pPr>
+            <a:r>
+              <a:rPr lang="en-US" sz="1100" dirty="0">
+                <a:solidFill>
+                  <a:srgbClr val="272425"/>
+                </a:solidFill>
+              </a:rPr>
+              <a:t>Especificación de solo lectura: PRD, arquitectura, épicas, historias y estado del sprint, sin copias.</a:t>
+            </a:r>
+            <a:endParaRPr lang="en-US" sz="1200" dirty="0"/>
+          </a:p>
+        </p:txBody>
+      </p:sp>
+      <p:sp>
+        <p:nvSpPr>
+          <p:cNvPr id="9" name="Shape 6"/>
+          <p:cNvSpPr/>
+          <p:nvPr/>
+        </p:nvSpPr>
+        <p:spPr>
+          <a:xfrm>
+            <a:off x="4251960" y="3497580"/>
+            <a:ext cx="1156716" cy="114300"/>
+          </a:xfrm>
+          <a:prstGeom prst="line">
+            <a:avLst/>
+          </a:prstGeom>
+          <a:noFill/>
+          <a:ln w="15875">
+            <a:solidFill>
+              <a:srgbClr val="AFC0D0"/>
+            </a:solidFill>
+            <a:prstDash val="solid"/>
+          </a:ln>
+        </p:spPr>
+      </p:sp>
+      <p:sp>
+        <p:nvSpPr>
+          <p:cNvPr id="10" name="Shape 7"/>
+          <p:cNvSpPr/>
+          <p:nvPr/>
+        </p:nvSpPr>
+        <p:spPr>
+          <a:xfrm>
+            <a:off x="457200" y="2834640"/>
+            <a:ext cx="3794760" cy="1325880"/>
+          </a:xfrm>
+          <a:prstGeom prst="roundRect">
+            <a:avLst>
+              <a:gd name="adj" fmla="val 5517"/>
+            </a:avLst>
+          </a:prstGeom>
+          <a:solidFill>
+            <a:srgbClr val="E9F1F8"/>
+          </a:solidFill>
+          <a:ln w="9525">
+            <a:solidFill>
+              <a:srgbClr val="E9F1F8"/>
+            </a:solidFill>
+            <a:prstDash val="solid"/>
+          </a:ln>
+        </p:spPr>
+      </p:sp>
+      <p:sp>
+        <p:nvSpPr>
+          <p:cNvPr id="11" name="Text 8"/>
+          <p:cNvSpPr txBox="1"/>
+          <p:nvPr/>
+        </p:nvSpPr>
+        <p:spPr>
+          <a:xfrm>
+            <a:off x="621792" y="2926080"/>
+            <a:ext cx="3465576" cy="274320"/>
+          </a:xfrm>
+          <a:prstGeom prst="rect">
+            <a:avLst/>
+          </a:prstGeom>
+          <a:noFill/>
+          <a:ln/>
+        </p:spPr>
+        <p:txBody>
+          <a:bodyPr wrap="square" lIns="0" tIns="0" rIns="0" bIns="0" rtlCol="0" anchor="t"/>
+          <a:lstStyle/>
+          <a:p>
+            <a:pPr indent="0" marL="0">
+              <a:buNone/>
+            </a:pPr>
+            <a:r>
+              <a:rPr lang="en-US" sz="1350" b="1" dirty="0">
+                <a:solidFill>
+                  <a:srgbClr val="002855"/>
+                </a:solidFill>
+              </a:rPr>
+              <a:t>Trackers</a:t>
+            </a:r>
+            <a:endParaRPr lang="en-US" sz="1350" dirty="0"/>
+          </a:p>
+        </p:txBody>
+      </p:sp>
+      <p:sp>
+        <p:nvSpPr>
+          <p:cNvPr id="12" name="Text 9"/>
+          <p:cNvSpPr txBox="1"/>
+          <p:nvPr/>
+        </p:nvSpPr>
+        <p:spPr>
+          <a:xfrm>
+            <a:off x="621792" y="3200400"/>
+            <a:ext cx="3465576" cy="237744"/>
+          </a:xfrm>
+          <a:prstGeom prst="rect">
+            <a:avLst/>
+          </a:prstGeom>
+          <a:noFill/>
+          <a:ln/>
+        </p:spPr>
+        <p:txBody>
+          <a:bodyPr wrap="square" lIns="0" tIns="0" rIns="0" bIns="0" rtlCol="0" anchor="t"/>
+          <a:lstStyle/>
+          <a:p>
+            <a:pPr indent="0" marL="0">
+              <a:buNone/>
+            </a:pPr>
+            <a:r>
+              <a:rPr lang="en-US" sz="950" b="1" dirty="0">
+                <a:solidFill>
+                  <a:srgbClr val="00629B"/>
+                </a:solidFill>
+              </a:rPr>
+              <a:t>Azure DevOps · GitHub · Jira · Linear</a:t>
+            </a:r>
+            <a:endParaRPr lang="en-US" sz="950" dirty="0"/>
+          </a:p>
+        </p:txBody>
+      </p:sp>
+      <p:sp>
+        <p:nvSpPr>
+          <p:cNvPr id="13" name="Text 10"/>
+          <p:cNvSpPr txBox="1"/>
+          <p:nvPr/>
+        </p:nvSpPr>
+        <p:spPr>
+          <a:xfrm>
+            <a:off x="621792" y="3456432"/>
+            <a:ext cx="3465576" cy="649224"/>
+          </a:xfrm>
+          <a:prstGeom prst="rect">
+            <a:avLst/>
+          </a:prstGeom>
+          <a:noFill/>
+          <a:ln/>
+        </p:spPr>
+        <p:txBody>
+          <a:bodyPr wrap="square" lIns="0" tIns="0" rIns="0" bIns="0" rtlCol="0" anchor="t"/>
+          <a:lstStyle/>
+          <a:p>
+            <a:pPr indent="0" marL="0">
+              <a:buNone/>
+            </a:pPr>
+            <a:r>
+              <a:rPr lang="en-US" sz="1100" dirty="0">
+                <a:solidFill>
+                  <a:srgbClr val="272425"/>
+                </a:solidFill>
+              </a:rPr>
+              <a:t>Instantáneas fechadas, avance y riesgos candidatos desde los tickets.</a:t>
+            </a:r>
+            <a:endParaRPr lang="en-US" sz="1200" dirty="0"/>
+          </a:p>
+        </p:txBody>
+      </p:sp>
+      <p:sp>
+        <p:nvSpPr>
+          <p:cNvPr id="14" name="Shape 11"/>
+          <p:cNvSpPr/>
+          <p:nvPr/>
+        </p:nvSpPr>
+        <p:spPr>
+          <a:xfrm flipV="1">
+            <a:off x="4251960" y="3611880"/>
+            <a:ext cx="1156716" cy="1394460"/>
+          </a:xfrm>
+          <a:prstGeom prst="line">
+            <a:avLst/>
+          </a:prstGeom>
+          <a:noFill/>
+          <a:ln w="15875">
+            <a:solidFill>
+              <a:srgbClr val="AFC0D0"/>
+            </a:solidFill>
+            <a:prstDash val="solid"/>
+          </a:ln>
+        </p:spPr>
+      </p:sp>
+      <p:sp>
+        <p:nvSpPr>
+          <p:cNvPr id="15" name="Shape 12"/>
+          <p:cNvSpPr/>
+          <p:nvPr/>
+        </p:nvSpPr>
+        <p:spPr>
+          <a:xfrm>
+            <a:off x="457200" y="4343400"/>
+            <a:ext cx="3794760" cy="1325880"/>
+          </a:xfrm>
+          <a:prstGeom prst="roundRect">
+            <a:avLst>
+              <a:gd name="adj" fmla="val 5517"/>
+            </a:avLst>
+          </a:prstGeom>
+          <a:solidFill>
+            <a:srgbClr val="E9F1F8"/>
+          </a:solidFill>
+          <a:ln w="9525">
+            <a:solidFill>
+              <a:srgbClr val="E9F1F8"/>
+            </a:solidFill>
+            <a:prstDash val="solid"/>
+          </a:ln>
+        </p:spPr>
+      </p:sp>
+      <p:sp>
+        <p:nvSpPr>
+          <p:cNvPr id="16" name="Text 13"/>
+          <p:cNvSpPr txBox="1"/>
+          <p:nvPr/>
+        </p:nvSpPr>
+        <p:spPr>
+          <a:xfrm>
+            <a:off x="621792" y="4434840"/>
+            <a:ext cx="3465576" cy="274320"/>
+          </a:xfrm>
+          <a:prstGeom prst="rect">
+            <a:avLst/>
+          </a:prstGeom>
+          <a:noFill/>
+          <a:ln/>
+        </p:spPr>
+        <p:txBody>
+          <a:bodyPr wrap="square" lIns="0" tIns="0" rIns="0" bIns="0" rtlCol="0" anchor="t"/>
+          <a:lstStyle/>
+          <a:p>
+            <a:pPr indent="0" marL="0">
+              <a:buNone/>
+            </a:pPr>
+            <a:r>
+              <a:rPr lang="en-US" sz="1350" b="1" dirty="0">
+                <a:solidFill>
+                  <a:srgbClr val="002855"/>
+                </a:solidFill>
+              </a:rPr>
+              <a:t>Transcripciones</a:t>
+            </a:r>
+            <a:endParaRPr lang="en-US" sz="1350" dirty="0"/>
+          </a:p>
+        </p:txBody>
+      </p:sp>
+      <p:sp>
+        <p:nvSpPr>
+          <p:cNvPr id="17" name="Text 14"/>
+          <p:cNvSpPr txBox="1"/>
+          <p:nvPr/>
+        </p:nvSpPr>
+        <p:spPr>
+          <a:xfrm>
+            <a:off x="621792" y="4709160"/>
+            <a:ext cx="3465576" cy="237744"/>
+          </a:xfrm>
+          <a:prstGeom prst="rect">
+            <a:avLst/>
+          </a:prstGeom>
+          <a:noFill/>
+          <a:ln/>
+        </p:spPr>
+        <p:txBody>
+          <a:bodyPr wrap="square" lIns="0" tIns="0" rIns="0" bIns="0" rtlCol="0" anchor="t"/>
+          <a:lstStyle/>
+          <a:p>
+            <a:pPr indent="0" marL="0">
+              <a:buNone/>
+            </a:pPr>
+            <a:r>
+              <a:rPr lang="en-US" sz="950" b="1" dirty="0">
+                <a:solidFill>
+                  <a:srgbClr val="00629B"/>
+                </a:solidFill>
+              </a:rPr>
+              <a:t>archivo · Fireflies · Granola · minutes · Teams · Zoom</a:t>
+            </a:r>
+            <a:endParaRPr lang="en-US" sz="950" dirty="0"/>
+          </a:p>
+        </p:txBody>
+      </p:sp>
+      <p:sp>
+        <p:nvSpPr>
+          <p:cNvPr id="18" name="Text 15"/>
+          <p:cNvSpPr txBox="1"/>
+          <p:nvPr/>
+        </p:nvSpPr>
+        <p:spPr>
+          <a:xfrm>
+            <a:off x="621792" y="4965192"/>
+            <a:ext cx="3465576" cy="649224"/>
+          </a:xfrm>
+          <a:prstGeom prst="rect">
+            <a:avLst/>
+          </a:prstGeom>
+          <a:noFill/>
+          <a:ln/>
+        </p:spPr>
+        <p:txBody>
+          <a:bodyPr wrap="square" lIns="0" tIns="0" rIns="0" bIns="0" rtlCol="0" anchor="t"/>
+          <a:lstStyle/>
+          <a:p>
+            <a:pPr indent="0" marL="0">
+              <a:buNone/>
+            </a:pPr>
+            <a:r>
+              <a:rPr lang="en-US" sz="1050" dirty="0">
+                <a:solidFill>
+                  <a:srgbClr val="272425"/>
+                </a:solidFill>
+              </a:rPr>
+              <a:t>Acuerdos con cita: decisiones, compromisos, supuestos, riesgos y lecciones propuestos desde la transcripción y registrados solo si una persona los confirma.</a:t>
+            </a:r>
+            <a:endParaRPr lang="en-US" sz="1200" dirty="0"/>
+          </a:p>
+        </p:txBody>
+      </p:sp>
+      <p:sp>
+        <p:nvSpPr>
+          <p:cNvPr id="19" name="Shape 16"/>
+          <p:cNvSpPr/>
+          <p:nvPr/>
+        </p:nvSpPr>
+        <p:spPr>
+          <a:xfrm flipV="1">
+            <a:off x="6780276" y="1988820"/>
+            <a:ext cx="1156716" cy="1623060"/>
+          </a:xfrm>
+          <a:prstGeom prst="line">
+            <a:avLst/>
+          </a:prstGeom>
+          <a:noFill/>
+          <a:ln w="15875">
+            <a:solidFill>
+              <a:srgbClr val="AFC0D0"/>
+            </a:solidFill>
+            <a:prstDash val="solid"/>
+          </a:ln>
+        </p:spPr>
+      </p:sp>
+      <p:sp>
+        <p:nvSpPr>
+          <p:cNvPr id="20" name="Shape 17"/>
+          <p:cNvSpPr/>
+          <p:nvPr/>
+        </p:nvSpPr>
+        <p:spPr>
+          <a:xfrm>
+            <a:off x="7936992" y="1325880"/>
+            <a:ext cx="3794760" cy="1325880"/>
+          </a:xfrm>
+          <a:prstGeom prst="roundRect">
+            <a:avLst>
+              <a:gd name="adj" fmla="val 5517"/>
+            </a:avLst>
+          </a:prstGeom>
+          <a:solidFill>
+            <a:srgbClr val="FBF1E6"/>
+          </a:solidFill>
+          <a:ln w="9525">
+            <a:solidFill>
+              <a:srgbClr val="FBF1E6"/>
+            </a:solidFill>
+            <a:prstDash val="solid"/>
+          </a:ln>
+        </p:spPr>
+      </p:sp>
+      <p:sp>
+        <p:nvSpPr>
+          <p:cNvPr id="21" name="Text 18"/>
+          <p:cNvSpPr txBox="1"/>
+          <p:nvPr/>
+        </p:nvSpPr>
+        <p:spPr>
+          <a:xfrm>
+            <a:off x="8101584" y="1417320"/>
+            <a:ext cx="3465576" cy="274320"/>
+          </a:xfrm>
+          <a:prstGeom prst="rect">
+            <a:avLst/>
+          </a:prstGeom>
+          <a:noFill/>
+          <a:ln/>
+        </p:spPr>
+        <p:txBody>
+          <a:bodyPr wrap="square" lIns="0" tIns="0" rIns="0" bIns="0" rtlCol="0" anchor="t"/>
+          <a:lstStyle/>
+          <a:p>
+            <a:pPr indent="0" marL="0">
+              <a:buNone/>
+            </a:pPr>
+            <a:r>
+              <a:rPr lang="en-US" sz="1350" b="1" dirty="0">
+                <a:solidFill>
+                  <a:srgbClr val="002855"/>
+                </a:solidFill>
+              </a:rPr>
+              <a:t>Correo, Slack y Teams</a:t>
+            </a:r>
+            <a:endParaRPr lang="en-US" sz="1350" dirty="0"/>
+          </a:p>
+        </p:txBody>
+      </p:sp>
+      <p:sp>
+        <p:nvSpPr>
+          <p:cNvPr id="22" name="Text 19"/>
+          <p:cNvSpPr txBox="1"/>
+          <p:nvPr/>
+        </p:nvSpPr>
+        <p:spPr>
+          <a:xfrm>
+            <a:off x="8101584" y="1691640"/>
+            <a:ext cx="3465576" cy="237744"/>
+          </a:xfrm>
+          <a:prstGeom prst="rect">
+            <a:avLst/>
+          </a:prstGeom>
+          <a:noFill/>
+          <a:ln/>
+        </p:spPr>
+        <p:txBody>
+          <a:bodyPr wrap="square" lIns="0" tIns="0" rIns="0" bIns="0" rtlCol="0" anchor="t"/>
+          <a:lstStyle/>
+          <a:p>
+            <a:pPr indent="0" marL="0">
+              <a:buNone/>
+            </a:pPr>
+            <a:r>
+              <a:rPr lang="en-US" sz="950" b="1" dirty="0">
+                <a:solidFill>
+                  <a:srgbClr val="B5651D"/>
+                </a:solidFill>
+              </a:rPr>
+              <a:t>.eml · Gmail · Outlook · SMTP · Slack · Teams</a:t>
+            </a:r>
+            <a:endParaRPr lang="en-US" sz="950" dirty="0"/>
+          </a:p>
+        </p:txBody>
+      </p:sp>
+      <p:sp>
+        <p:nvSpPr>
+          <p:cNvPr id="23" name="Text 20"/>
+          <p:cNvSpPr txBox="1"/>
+          <p:nvPr/>
+        </p:nvSpPr>
+        <p:spPr>
+          <a:xfrm>
+            <a:off x="8101584" y="1947672"/>
+            <a:ext cx="3465576" cy="649224"/>
+          </a:xfrm>
+          <a:prstGeom prst="rect">
+            <a:avLst/>
+          </a:prstGeom>
+          <a:noFill/>
+          <a:ln/>
+        </p:spPr>
+        <p:txBody>
+          <a:bodyPr wrap="square" lIns="0" tIns="0" rIns="0" bIns="0" rtlCol="0" anchor="t"/>
+          <a:lstStyle/>
+          <a:p>
+            <a:pPr indent="0" marL="0">
+              <a:buNone/>
+            </a:pPr>
+            <a:r>
+              <a:rPr lang="en-US" sz="1100" dirty="0">
+                <a:solidFill>
+                  <a:srgbClr val="272425"/>
+                </a:solidFill>
+              </a:rPr>
+              <a:t>Capa de canales: envía solo mensajes aprobados, simula por defecto y registra cada envío.</a:t>
+            </a:r>
+            <a:endParaRPr lang="en-US" sz="1200" dirty="0"/>
+          </a:p>
+        </p:txBody>
+      </p:sp>
+      <p:sp>
+        <p:nvSpPr>
+          <p:cNvPr id="24" name="Shape 21"/>
+          <p:cNvSpPr/>
+          <p:nvPr/>
+        </p:nvSpPr>
+        <p:spPr>
+          <a:xfrm flipV="1">
+            <a:off x="6780276" y="3497580"/>
+            <a:ext cx="1156716" cy="114300"/>
+          </a:xfrm>
+          <a:prstGeom prst="line">
+            <a:avLst/>
+          </a:prstGeom>
+          <a:noFill/>
+          <a:ln w="15875">
+            <a:solidFill>
+              <a:srgbClr val="AFC0D0"/>
+            </a:solidFill>
+            <a:prstDash val="solid"/>
+          </a:ln>
+        </p:spPr>
+      </p:sp>
+      <p:sp>
+        <p:nvSpPr>
+          <p:cNvPr id="25" name="Shape 22"/>
+          <p:cNvSpPr/>
+          <p:nvPr/>
+        </p:nvSpPr>
+        <p:spPr>
+          <a:xfrm>
+            <a:off x="7936992" y="2834640"/>
+            <a:ext cx="3794760" cy="1325880"/>
+          </a:xfrm>
+          <a:prstGeom prst="roundRect">
+            <a:avLst>
+              <a:gd name="adj" fmla="val 5517"/>
+            </a:avLst>
+          </a:prstGeom>
+          <a:solidFill>
+            <a:srgbClr val="E9F1F8"/>
+          </a:solidFill>
+          <a:ln w="9525">
+            <a:solidFill>
+              <a:srgbClr val="E9F1F8"/>
+            </a:solidFill>
+            <a:prstDash val="solid"/>
+          </a:ln>
+        </p:spPr>
+      </p:sp>
+      <p:sp>
+        <p:nvSpPr>
+          <p:cNvPr id="26" name="Text 23"/>
+          <p:cNvSpPr txBox="1"/>
+          <p:nvPr/>
+        </p:nvSpPr>
+        <p:spPr>
+          <a:xfrm>
+            <a:off x="8101584" y="2926080"/>
+            <a:ext cx="3465576" cy="274320"/>
+          </a:xfrm>
+          <a:prstGeom prst="rect">
+            <a:avLst/>
+          </a:prstGeom>
+          <a:noFill/>
+          <a:ln/>
+        </p:spPr>
+        <p:txBody>
+          <a:bodyPr wrap="square" lIns="0" tIns="0" rIns="0" bIns="0" rtlCol="0" anchor="t"/>
+          <a:lstStyle/>
+          <a:p>
+            <a:pPr indent="0" marL="0">
+              <a:buNone/>
+            </a:pPr>
+            <a:r>
+              <a:rPr lang="en-US" sz="1350" b="1" dirty="0">
+                <a:solidFill>
+                  <a:srgbClr val="002855"/>
+                </a:solidFill>
+              </a:rPr>
+              <a:t>OKR</a:t>
+            </a:r>
+            <a:endParaRPr lang="en-US" sz="1350" dirty="0"/>
+          </a:p>
+        </p:txBody>
+      </p:sp>
+      <p:sp>
+        <p:nvSpPr>
+          <p:cNvPr id="27" name="Text 24"/>
+          <p:cNvSpPr txBox="1"/>
+          <p:nvPr/>
+        </p:nvSpPr>
+        <p:spPr>
+          <a:xfrm>
+            <a:off x="8101584" y="3200400"/>
+            <a:ext cx="3465576" cy="237744"/>
+          </a:xfrm>
+          <a:prstGeom prst="rect">
+            <a:avLst/>
+          </a:prstGeom>
+          <a:noFill/>
+          <a:ln/>
+        </p:spPr>
+        <p:txBody>
+          <a:bodyPr wrap="square" lIns="0" tIns="0" rIns="0" bIns="0" rtlCol="0" anchor="t"/>
+          <a:lstStyle/>
+          <a:p>
+            <a:pPr indent="0" marL="0">
+              <a:buNone/>
+            </a:pPr>
+            <a:r>
+              <a:rPr lang="en-US" sz="950" b="1" dirty="0">
+                <a:solidFill>
+                  <a:srgbClr val="00629B"/>
+                </a:solidFill>
+              </a:rPr>
+              <a:t>archivo · Perdoo · Tability</a:t>
+            </a:r>
+            <a:endParaRPr lang="en-US" sz="950" dirty="0"/>
+          </a:p>
+        </p:txBody>
+      </p:sp>
+      <p:sp>
+        <p:nvSpPr>
+          <p:cNvPr id="28" name="Text 25"/>
+          <p:cNvSpPr txBox="1"/>
+          <p:nvPr/>
+        </p:nvSpPr>
+        <p:spPr>
+          <a:xfrm>
+            <a:off x="8101584" y="3456432"/>
+            <a:ext cx="3465576" cy="649224"/>
+          </a:xfrm>
+          <a:prstGeom prst="rect">
+            <a:avLst/>
+          </a:prstGeom>
+          <a:noFill/>
+          <a:ln/>
+        </p:spPr>
+        <p:txBody>
+          <a:bodyPr wrap="square" lIns="0" tIns="0" rIns="0" bIns="0" rtlCol="0" anchor="t"/>
+          <a:lstStyle/>
+          <a:p>
+            <a:pPr indent="0" marL="0">
+              <a:buNone/>
+            </a:pPr>
+            <a:r>
+              <a:rPr lang="en-US" sz="1100" dirty="0">
+                <a:solidFill>
+                  <a:srgbClr val="272425"/>
+                </a:solidFill>
+              </a:rPr>
+              <a:t>Resultados clave ligados a los beneficios del business case, con check-ins y salud.</a:t>
+            </a:r>
+            <a:endParaRPr lang="en-US" sz="1200" dirty="0"/>
+          </a:p>
+        </p:txBody>
+      </p:sp>
+      <p:sp>
+        <p:nvSpPr>
+          <p:cNvPr id="29" name="Shape 26"/>
+          <p:cNvSpPr/>
+          <p:nvPr/>
+        </p:nvSpPr>
+        <p:spPr>
+          <a:xfrm>
+            <a:off x="6780276" y="3611880"/>
+            <a:ext cx="1156716" cy="1394460"/>
+          </a:xfrm>
+          <a:prstGeom prst="line">
+            <a:avLst/>
+          </a:prstGeom>
+          <a:noFill/>
+          <a:ln w="15875">
+            <a:solidFill>
+              <a:srgbClr val="AFC0D0"/>
+            </a:solidFill>
+            <a:prstDash val="solid"/>
+          </a:ln>
+        </p:spPr>
+      </p:sp>
+      <p:sp>
+        <p:nvSpPr>
+          <p:cNvPr id="30" name="Shape 27"/>
+          <p:cNvSpPr/>
+          <p:nvPr/>
+        </p:nvSpPr>
+        <p:spPr>
+          <a:xfrm>
+            <a:off x="7936992" y="4343400"/>
+            <a:ext cx="3794760" cy="1325880"/>
+          </a:xfrm>
+          <a:prstGeom prst="roundRect">
+            <a:avLst>
+              <a:gd name="adj" fmla="val 5517"/>
+            </a:avLst>
+          </a:prstGeom>
+          <a:solidFill>
+            <a:srgbClr val="E9F1F8"/>
+          </a:solidFill>
+          <a:ln w="9525">
+            <a:solidFill>
+              <a:srgbClr val="E9F1F8"/>
+            </a:solidFill>
+            <a:prstDash val="solid"/>
+          </a:ln>
+        </p:spPr>
+      </p:sp>
+      <p:sp>
+        <p:nvSpPr>
+          <p:cNvPr id="31" name="Text 28"/>
+          <p:cNvSpPr txBox="1"/>
+          <p:nvPr/>
+        </p:nvSpPr>
+        <p:spPr>
+          <a:xfrm>
+            <a:off x="8101584" y="4434840"/>
+            <a:ext cx="3465576" cy="274320"/>
+          </a:xfrm>
+          <a:prstGeom prst="rect">
+            <a:avLst/>
+          </a:prstGeom>
+          <a:noFill/>
+          <a:ln/>
+        </p:spPr>
+        <p:txBody>
+          <a:bodyPr wrap="square" lIns="0" tIns="0" rIns="0" bIns="0" rtlCol="0" anchor="t"/>
+          <a:lstStyle/>
+          <a:p>
+            <a:pPr indent="0" marL="0">
+              <a:buNone/>
+            </a:pPr>
+            <a:r>
+              <a:rPr lang="en-US" sz="1350" b="1" dirty="0">
+                <a:solidFill>
+                  <a:srgbClr val="002855"/>
+                </a:solidFill>
+              </a:rPr>
+              <a:t>Mapas de Wardley y recorrido</a:t>
+            </a:r>
+            <a:endParaRPr lang="en-US" sz="1350" dirty="0"/>
+          </a:p>
+        </p:txBody>
+      </p:sp>
+      <p:sp>
+        <p:nvSpPr>
+          <p:cNvPr id="32" name="Text 29"/>
+          <p:cNvSpPr txBox="1"/>
+          <p:nvPr/>
+        </p:nvSpPr>
+        <p:spPr>
+          <a:xfrm>
+            <a:off x="8101584" y="4709160"/>
+            <a:ext cx="3465576" cy="237744"/>
+          </a:xfrm>
+          <a:prstGeom prst="rect">
+            <a:avLst/>
+          </a:prstGeom>
+          <a:noFill/>
+          <a:ln/>
+        </p:spPr>
+        <p:txBody>
+          <a:bodyPr wrap="square" lIns="0" tIns="0" rIns="0" bIns="0" rtlCol="0" anchor="t"/>
+          <a:lstStyle/>
+          <a:p>
+            <a:pPr indent="0" marL="0">
+              <a:buNone/>
+            </a:pPr>
+            <a:r>
+              <a:rPr lang="en-US" sz="950" b="1" dirty="0">
+                <a:solidFill>
+                  <a:srgbClr val="00629B"/>
+                </a:solidFill>
+              </a:rPr>
+              <a:t>Mermaid wardley-beta y journey · OWM · HTML</a:t>
+            </a:r>
+            <a:endParaRPr lang="en-US" sz="950" dirty="0"/>
+          </a:p>
+        </p:txBody>
+      </p:sp>
+      <p:sp>
+        <p:nvSpPr>
+          <p:cNvPr id="33" name="Text 30"/>
+          <p:cNvSpPr txBox="1"/>
+          <p:nvPr/>
+        </p:nvSpPr>
+        <p:spPr>
+          <a:xfrm>
+            <a:off x="8101584" y="4965192"/>
+            <a:ext cx="3465576" cy="649224"/>
+          </a:xfrm>
+          <a:prstGeom prst="rect">
+            <a:avLst/>
+          </a:prstGeom>
+          <a:noFill/>
+          <a:ln/>
+        </p:spPr>
+        <p:txBody>
+          <a:bodyPr wrap="square" lIns="0" tIns="0" rIns="0" bIns="0" rtlCol="0" anchor="t"/>
+          <a:lstStyle/>
+          <a:p>
+            <a:pPr indent="0" marL="0">
+              <a:buNone/>
+            </a:pPr>
+            <a:r>
+              <a:rPr lang="en-US" sz="1100" dirty="0">
+                <a:solidFill>
+                  <a:srgbClr val="272425"/>
+                </a:solidFill>
+              </a:rPr>
+              <a:t>Qué construir, comprar o tercerizar y la experiencia del usuario paso a paso, con controles.</a:t>
+            </a:r>
+            <a:endParaRPr lang="en-US" sz="1200" dirty="0"/>
+          </a:p>
+        </p:txBody>
+      </p:sp>
+      <p:sp>
+        <p:nvSpPr>
+          <p:cNvPr id="34" name="Shape 31"/>
+          <p:cNvSpPr/>
+          <p:nvPr/>
+        </p:nvSpPr>
+        <p:spPr>
+          <a:xfrm>
+            <a:off x="5180076" y="2697480"/>
+            <a:ext cx="1828800" cy="1828800"/>
+          </a:xfrm>
+          <a:prstGeom prst="ellipse">
+            <a:avLst/>
+          </a:prstGeom>
+          <a:solidFill>
+            <a:srgbClr val="002855"/>
+          </a:solidFill>
+          <a:ln w="12700">
+            <a:solidFill>
+              <a:srgbClr val="FFFFFF"/>
+            </a:solidFill>
+            <a:prstDash val="solid"/>
+          </a:ln>
+        </p:spPr>
+      </p:sp>
+      <p:sp>
+        <p:nvSpPr>
+          <p:cNvPr id="35" name="Text 32"/>
+          <p:cNvSpPr txBox="1"/>
+          <p:nvPr/>
+        </p:nvSpPr>
+        <p:spPr>
+          <a:xfrm>
+            <a:off x="5271516" y="3227832"/>
+            <a:ext cx="1645920" cy="365760"/>
+          </a:xfrm>
+          <a:prstGeom prst="rect">
+            <a:avLst/>
+          </a:prstGeom>
+          <a:noFill/>
+          <a:ln/>
+        </p:spPr>
+        <p:txBody>
+          <a:bodyPr wrap="square" lIns="0" tIns="0" rIns="0" bIns="0" rtlCol="0" anchor="b"/>
+          <a:lstStyle/>
+          <a:p>
+            <a:pPr algn="ctr" indent="0" marL="0">
+              <a:buNone/>
+            </a:pPr>
+            <a:r>
+              <a:rPr lang="en-US" sz="1800" b="1" dirty="0">
+                <a:solidFill>
+                  <a:srgbClr val="FFFFFF"/>
+                </a:solidFill>
+              </a:rPr>
+              <a:t>pm-method</a:t>
+            </a:r>
+            <a:endParaRPr lang="en-US" sz="1800" dirty="0"/>
+          </a:p>
+        </p:txBody>
+      </p:sp>
+      <p:sp>
+        <p:nvSpPr>
+          <p:cNvPr id="36" name="Text 33"/>
+          <p:cNvSpPr txBox="1"/>
+          <p:nvPr/>
+        </p:nvSpPr>
+        <p:spPr>
+          <a:xfrm>
+            <a:off x="5408676" y="3630168"/>
+            <a:ext cx="1371600" cy="457200"/>
+          </a:xfrm>
+          <a:prstGeom prst="rect">
+            <a:avLst/>
+          </a:prstGeom>
+          <a:noFill/>
+          <a:ln/>
+        </p:spPr>
+        <p:txBody>
+          <a:bodyPr wrap="square" lIns="0" tIns="0" rIns="0" bIns="0" rtlCol="0" anchor="t"/>
+          <a:lstStyle/>
+          <a:p>
+            <a:pPr algn="ctr" indent="0" marL="0">
+              <a:buNone/>
+            </a:pPr>
+            <a:r>
+              <a:rPr lang="en-US" sz="1000" dirty="0">
+                <a:solidFill>
+                  <a:srgbClr val="9FD0F0"/>
+                </a:solidFill>
+              </a:rPr>
+              <a:t>gobierno sobre la carpeta del proyecto</a:t>
+            </a:r>
+            <a:endParaRPr lang="en-US" sz="1000" dirty="0"/>
+          </a:p>
+        </p:txBody>
+      </p:sp>
+      <p:sp>
+        <p:nvSpPr>
+          <p:cNvPr id="37" name="Text 34"/>
+          <p:cNvSpPr txBox="1"/>
+          <p:nvPr/>
+        </p:nvSpPr>
+        <p:spPr>
+          <a:xfrm>
+            <a:off x="457200" y="5870448"/>
+            <a:ext cx="11274552" cy="384048"/>
+          </a:xfrm>
+          <a:prstGeom prst="rect">
+            <a:avLst/>
+          </a:prstGeom>
+          <a:noFill/>
+          <a:ln/>
+        </p:spPr>
+        <p:txBody>
+          <a:bodyPr wrap="square" lIns="0" tIns="0" rIns="0" bIns="0" rtlCol="0" anchor="t"/>
+          <a:lstStyle/>
+          <a:p>
+            <a:pPr indent="0" marL="0">
+              <a:buNone/>
+            </a:pPr>
+            <a:r>
+              <a:rPr lang="en-US" sz="1100" dirty="0">
+                <a:solidFill>
+                  <a:srgbClr val="696969"/>
+                </a:solidFill>
+              </a:rPr>
+              <a:t>Conexión por MCP genérico: nada viene predefinido. Sin MCP, pm-method trabaja con archivos; sin BMAD, con su propia especificación.</a:t>
+            </a:r>
+            <a:endParaRPr lang="en-US" sz="1200" dirty="0"/>
+          </a:p>
+        </p:txBody>
+      </p:sp>
+      <p:sp>
+        <p:nvSpPr>
+          <p:cNvPr id="25" name="Slide Number Placeholder 0"/>
+          <p:cNvSpPr>
+            <a:spLocks noGrp="1"/>
+          </p:cNvSpPr>
+          <p:nvPr>
+            <p:ph type="sldNum" sz="quarter" idx="4294967295"/>
+          </p:nvPr>
+        </p:nvSpPr>
+        <p:spPr>
+          <a:xfrm>
+            <a:off x="11091672" y="6419088"/>
+            <a:ext cx="640080" cy="274320"/>
+          </a:xfrm>
+          <a:prstGeom prst="rect">
+            <a:avLst/>
+          </a:prstGeom>
+          <a:extLst>
+            <a:ext uri="{C572A759-6A51-4108-AA02-DFA0A04FC94B}">
+              <ma14:wrappingTextBoxFlag xmlns:ma14="http://schemas.microsoft.com/office/mac/drawingml/2011/main" val="0"/>
+            </a:ext>
+          </a:extLst>
+        </p:spPr>
+        <p:txBody>
+          <a:bodyPr/>
+          <a:lstStyle>
+            <a:lvl1pPr>
+              <a:defRPr sz="900">
+                <a:solidFill>
+                  <a:srgbClr val="696969"/>
+                </a:solidFill>
+              </a:defRPr>
+            </a:lvl1pPr>
+          </a:lstStyle>
+          <a:p>
+            <a:pPr algn="r"/>
+            <a:fld id="{F7021451-1387-4CA6-816F-3879F97B5CBC}" type="slidenum">
+              <a:rPr b="0" lang="en-US"/>
+              <a:t>10</a:t>
+            </a:fld>
+            <a:endParaRPr lang="en-US"/>
+          </a:p>
+        </p:txBody>
+      </p:sp>
+    </p:spTree>
+  </p:cSld>
+  <p:clrMapOvr>
+    <a:masterClrMapping/>
+  </p:clrMapOvr>
+</p:sld>
+</file>
+
+<file path=ppt/slides/slide11.xml><?xml version="1.0" encoding="utf-8"?>
+<p:sld xmlns:a="http://schemas.openxmlformats.org/drawingml/2006/main" xmlns:r="http://schemas.openxmlformats.org/officeDocument/2006/relationships" xmlns:p="http://schemas.openxmlformats.org/presentationml/2006/main">
+  <p:cSld name="Slide 11">
+    <p:spTree>
+      <p:nvGrpSpPr>
+        <p:cNvPr id="1" name=""/>
+        <p:cNvGrpSpPr/>
+        <p:nvPr/>
+      </p:nvGrpSpPr>
+      <p:grpSpPr>
+        <a:xfrm>
+          <a:off x="0" y="0"/>
+          <a:ext cx="0" cy="0"/>
+          <a:chOff x="0" y="0"/>
+          <a:chExt cx="0" cy="0"/>
+        </a:xfrm>
+      </p:grpSpPr>
+      <p:sp>
+        <p:nvSpPr>
+          <p:cNvPr id="2" name="Text 3"/>
+          <p:cNvSpPr/>
+          <p:nvPr>
+            <p:ph idx="103" type="title" hasCustomPrompt="1"/>
+          </p:nvPr>
+        </p:nvSpPr>
+        <p:spPr>
+          <a:xfrm>
+            <a:off x="640080" y="365760"/>
+            <a:ext cx="9235440" cy="713232"/>
+          </a:xfrm>
+          <a:prstGeom prst="rect">
+            <a:avLst/>
+          </a:prstGeom>
+          <a:noFill/>
+          <a:ln/>
+        </p:spPr>
+        <p:txBody>
+          <a:bodyPr wrap="square" lIns="0" tIns="0" rIns="0" bIns="0" rtlCol="0" anchor="ctr"/>
+          <a:lstStyle/>
+          <a:p>
+            <a:pPr algn="l" indent="0" marL="0">
+              <a:buNone/>
+            </a:pPr>
+            <a:r>
+              <a:rPr lang="en-US" sz="1900" b="1" dirty="0">
+                <a:solidFill>
+                  <a:srgbClr val="FFFFFF"/>
+                </a:solidFill>
+              </a:rPr>
               <a:t>5 casos de punta a punta, cada uno con su módulo de capacitación</a:t>
             </a:r>
             <a:endParaRPr lang="en-US" sz="1900" dirty="0"/>
@@ -3964,7 +5267,7 @@
       </p:sp>
       <p:graphicFrame>
         <p:nvGraphicFramePr>
-          <p:cNvPr id="11" name="Table 0"/>
+          <p:cNvPr id="12" name="Table 0"/>
           <p:cNvGraphicFramePr>
             <a:graphicFrameLocks noGrp="1"/>
           </p:cNvGraphicFramePr>
@@ -4554,7 +5857,7 @@
                           <a:ea typeface="Arial" pitchFamily="34" charset="-122"/>
                           <a:cs typeface="Arial" pitchFamily="34" charset="-120"/>
                         </a:rPr>
-                        <a:t>Riesgos desde cuatro fuentes, opciones por valor neto, plan de contingencia y reserva vigilada</a:t>
+                        <a:t>Riesgos desde cuatro fuentes, opciones por valor neto, matriz de la decisión, contingencia y la pregunta de la junta con pm-kb</a:t>
                       </a:r>
                       <a:endParaRPr lang="en-US" sz="1200" dirty="0">
                         <a:latin typeface="Arial" charset="0"/>
@@ -4619,7 +5922,7 @@
                           <a:ea typeface="Arial" pitchFamily="34" charset="-122"/>
                           <a:cs typeface="Arial" pitchFamily="34" charset="-120"/>
                         </a:rPr>
-                        <a:t>15</a:t>
+                        <a:t>16</a:t>
                       </a:r>
                       <a:endParaRPr lang="en-US" sz="1200" dirty="0">
                         <a:latin typeface="Arial" charset="0"/>
@@ -4814,7 +6117,7 @@
                           <a:ea typeface="Arial" pitchFamily="34" charset="-122"/>
                           <a:cs typeface="Arial" pitchFamily="34" charset="-120"/>
                         </a:rPr>
-                        <a:t>39</a:t>
+                        <a:t>40</a:t>
                       </a:r>
                       <a:endParaRPr lang="en-US" sz="1200" dirty="0">
                         <a:latin typeface="Arial" charset="0"/>
@@ -5011,7 +6314,7 @@
                           <a:ea typeface="Arial" pitchFamily="34" charset="-122"/>
                           <a:cs typeface="Arial" pitchFamily="34" charset="-120"/>
                         </a:rPr>
-                        <a:t>Alcance, tres valores, capacidad del release, impacto de cada cambio y excepción</a:t>
+                        <a:t>Alcance, tres valores, capacidad del release, impacto de cada cambio, pregunta tipada y excepción</a:t>
                       </a:r>
                       <a:endParaRPr lang="en-US" sz="1200" dirty="0">
                         <a:latin typeface="Arial" charset="0"/>
@@ -5271,7 +6574,7 @@
                           <a:ea typeface="Arial" pitchFamily="34" charset="-122"/>
                           <a:cs typeface="Arial" pitchFamily="34" charset="-120"/>
                         </a:rPr>
-                        <a:t>37</a:t>
+                        <a:t>39</a:t>
                       </a:r>
                       <a:endParaRPr lang="en-US" sz="1200" dirty="0">
                         <a:latin typeface="Arial" charset="0"/>
@@ -5468,7 +6771,7 @@
                           <a:ea typeface="Arial" pitchFamily="34" charset="-122"/>
                           <a:cs typeface="Arial" pitchFamily="34" charset="-120"/>
                         </a:rPr>
-                        <a:t>Interesados, acuerdos de reunión, radar, highlight desde el dato y envío por canales</a:t>
+                        <a:t>Interesados, decisión de la A de la RACI, acuerdos de reunión, radar, highlight desde el dato y envío por canales</a:t>
                       </a:r>
                       <a:endParaRPr lang="en-US" sz="1200" dirty="0">
                         <a:latin typeface="Arial" charset="0"/>
@@ -5728,7 +7031,7 @@
                           <a:ea typeface="Arial" pitchFamily="34" charset="-122"/>
                           <a:cs typeface="Arial" pitchFamily="34" charset="-120"/>
                         </a:rPr>
-                        <a:t>39</a:t>
+                        <a:t>40</a:t>
                       </a:r>
                       <a:endParaRPr lang="en-US" sz="1200" dirty="0">
                         <a:latin typeface="Arial" charset="0"/>
@@ -5925,7 +7228,7 @@
                           <a:ea typeface="Arial" pitchFamily="34" charset="-122"/>
                           <a:cs typeface="Arial" pitchFamily="34" charset="-120"/>
                         </a:rPr>
-                        <a:t>Producto con BMAD: calidad a volumen, ciclo de las lecciones, cierre por id y auditoría</a:t>
+                        <a:t>Producto con BMAD: calidad a volumen, ciclo de las lecciones, cierre por id, auditoría con bitácora y versiones con pm-kb</a:t>
                       </a:r>
                       <a:endParaRPr lang="en-US" sz="1200" dirty="0">
                         <a:latin typeface="Arial" charset="0"/>
@@ -5990,7 +7293,7 @@
                           <a:ea typeface="Arial" pitchFamily="34" charset="-122"/>
                           <a:cs typeface="Arial" pitchFamily="34" charset="-120"/>
                         </a:rPr>
-                        <a:t>15</a:t>
+                        <a:t>16</a:t>
                       </a:r>
                       <a:endParaRPr lang="en-US" sz="1200" dirty="0">
                         <a:latin typeface="Arial" charset="0"/>
@@ -6382,7 +7685,7 @@
                           <a:ea typeface="Arial" pitchFamily="34" charset="-122"/>
                           <a:cs typeface="Arial" pitchFamily="34" charset="-120"/>
                         </a:rPr>
-                        <a:t>De la idea al proyecto: lecciones previas, supuestos, VAN, personas de usuario y mapas</a:t>
+                        <a:t>De la idea al proyecto: lecciones previas, supuestos, VAN con matriz, hacer o comprar, personas de usuario y mapas</a:t>
                       </a:r>
                       <a:endParaRPr lang="en-US" sz="1200" dirty="0">
                         <a:latin typeface="Arial" charset="0"/>
@@ -6997,638 +8300,6 @@
             <a:pPr algn="r"/>
             <a:fld id="{F7021451-1387-4CA6-816F-3879F97B5CBC}" type="slidenum">
               <a:rPr b="0" lang="en-US"/>
-              <a:t>10</a:t>
-            </a:fld>
-            <a:endParaRPr lang="en-US"/>
-          </a:p>
-        </p:txBody>
-      </p:sp>
-    </p:spTree>
-  </p:cSld>
-  <p:clrMapOvr>
-    <a:masterClrMapping/>
-  </p:clrMapOvr>
-</p:sld>
-</file>
-
-<file path=ppt/slides/slide11.xml><?xml version="1.0" encoding="utf-8"?>
-<p:sld xmlns:a="http://schemas.openxmlformats.org/drawingml/2006/main" xmlns:r="http://schemas.openxmlformats.org/officeDocument/2006/relationships" xmlns:p="http://schemas.openxmlformats.org/presentationml/2006/main">
-  <p:cSld name="Slide 11">
-    <p:spTree>
-      <p:nvGrpSpPr>
-        <p:cNvPr id="1" name=""/>
-        <p:cNvGrpSpPr/>
-        <p:nvPr/>
-      </p:nvGrpSpPr>
-      <p:grpSpPr>
-        <a:xfrm>
-          <a:off x="0" y="0"/>
-          <a:ext cx="0" cy="0"/>
-          <a:chOff x="0" y="0"/>
-          <a:chExt cx="0" cy="0"/>
-        </a:xfrm>
-      </p:grpSpPr>
-      <p:sp>
-        <p:nvSpPr>
-          <p:cNvPr id="2" name="Text 3"/>
-          <p:cNvSpPr/>
-          <p:nvPr>
-            <p:ph idx="103" type="title" hasCustomPrompt="1"/>
-          </p:nvPr>
-        </p:nvSpPr>
-        <p:spPr>
-          <a:xfrm>
-            <a:off x="640080" y="365760"/>
-            <a:ext cx="9235440" cy="713232"/>
-          </a:xfrm>
-          <a:prstGeom prst="rect">
-            <a:avLst/>
-          </a:prstGeom>
-          <a:noFill/>
-          <a:ln/>
-        </p:spPr>
-        <p:txBody>
-          <a:bodyPr wrap="square" lIns="0" tIns="0" rIns="0" bIns="0" rtlCol="0" anchor="ctr"/>
-          <a:lstStyle/>
-          <a:p>
-            <a:pPr algn="l" indent="0" marL="0">
-              <a:buNone/>
-            </a:pPr>
-            <a:r>
-              <a:rPr lang="en-US" sz="1900" b="1" dirty="0">
-                <a:solidFill>
-                  <a:srgbClr val="FFFFFF"/>
-                </a:solidFill>
-              </a:rPr>
-              <a:t>E2E-1 · Riesgos: el registro trabaja solo entre revisiones</a:t>
-            </a:r>
-            <a:endParaRPr lang="en-US" sz="1900" dirty="0"/>
-          </a:p>
-        </p:txBody>
-      </p:sp>
-      <p:sp>
-        <p:nvSpPr>
-          <p:cNvPr id="4" name="Text 1"/>
-          <p:cNvSpPr txBox="1"/>
-          <p:nvPr/>
-        </p:nvSpPr>
-        <p:spPr>
-          <a:xfrm>
-            <a:off x="457200" y="1298448"/>
-            <a:ext cx="5120640" cy="237744"/>
-          </a:xfrm>
-          <a:prstGeom prst="rect">
-            <a:avLst/>
-          </a:prstGeom>
-          <a:noFill/>
-          <a:ln/>
-        </p:spPr>
-        <p:txBody>
-          <a:bodyPr wrap="square" lIns="0" tIns="0" rIns="0" bIns="0" rtlCol="0" anchor="t"/>
-          <a:lstStyle/>
-          <a:p>
-            <a:pPr indent="0" marL="0">
-              <a:buNone/>
-            </a:pPr>
-            <a:r>
-              <a:rPr lang="en-US" sz="1000" b="1" spc="100" kern="0" dirty="0">
-                <a:solidFill>
-                  <a:srgbClr val="B5651D"/>
-                </a:solidFill>
-              </a:rPr>
-              <a:t>EL PROBLEMA</a:t>
-            </a:r>
-            <a:endParaRPr lang="en-US" sz="1000" dirty="0"/>
-          </a:p>
-        </p:txBody>
-      </p:sp>
-      <p:sp>
-        <p:nvSpPr>
-          <p:cNvPr id="5" name="Text 2"/>
-          <p:cNvSpPr txBox="1"/>
-          <p:nvPr/>
-        </p:nvSpPr>
-        <p:spPr>
-          <a:xfrm>
-            <a:off x="457200" y="1554480"/>
-            <a:ext cx="5120640" cy="749808"/>
-          </a:xfrm>
-          <a:prstGeom prst="rect">
-            <a:avLst/>
-          </a:prstGeom>
-          <a:noFill/>
-          <a:ln/>
-        </p:spPr>
-        <p:txBody>
-          <a:bodyPr wrap="square" lIns="0" tIns="0" rIns="0" bIns="0" rtlCol="0" anchor="t"/>
-          <a:lstStyle/>
-          <a:p>
-            <a:pPr indent="0" marL="0">
-              <a:buNone/>
-            </a:pPr>
-            <a:r>
-              <a:rPr lang="en-US" sz="1350" dirty="0">
-                <a:solidFill>
-                  <a:srgbClr val="272425"/>
-                </a:solidFill>
-              </a:rPr>
-              <a:t>El registro de riesgos nace en un taller y se congela. Las respuestas no se costean y la reserva se usa como bolsa general.</a:t>
-            </a:r>
-            <a:endParaRPr lang="en-US" sz="1200" dirty="0"/>
-          </a:p>
-        </p:txBody>
-      </p:sp>
-      <p:sp>
-        <p:nvSpPr>
-          <p:cNvPr id="6" name="Text 3"/>
-          <p:cNvSpPr txBox="1"/>
-          <p:nvPr/>
-        </p:nvSpPr>
-        <p:spPr>
-          <a:xfrm>
-            <a:off x="457200" y="2359152"/>
-            <a:ext cx="5120640" cy="237744"/>
-          </a:xfrm>
-          <a:prstGeom prst="rect">
-            <a:avLst/>
-          </a:prstGeom>
-          <a:noFill/>
-          <a:ln/>
-        </p:spPr>
-        <p:txBody>
-          <a:bodyPr wrap="square" lIns="0" tIns="0" rIns="0" bIns="0" rtlCol="0" anchor="t"/>
-          <a:lstStyle/>
-          <a:p>
-            <a:pPr indent="0" marL="0">
-              <a:buNone/>
-            </a:pPr>
-            <a:r>
-              <a:rPr lang="en-US" sz="1000" b="1" spc="100" kern="0" dirty="0">
-                <a:solidFill>
-                  <a:srgbClr val="00629B"/>
-                </a:solidFill>
-              </a:rPr>
-              <a:t>QUÉ MUESTRA</a:t>
-            </a:r>
-            <a:endParaRPr lang="en-US" sz="1000" dirty="0"/>
-          </a:p>
-        </p:txBody>
-      </p:sp>
-      <p:sp>
-        <p:nvSpPr>
-          <p:cNvPr id="7" name="Text 4"/>
-          <p:cNvSpPr txBox="1"/>
-          <p:nvPr/>
-        </p:nvSpPr>
-        <p:spPr>
-          <a:xfrm>
-            <a:off x="457200" y="2615184"/>
-            <a:ext cx="5120640" cy="1298448"/>
-          </a:xfrm>
-          <a:prstGeom prst="rect">
-            <a:avLst/>
-          </a:prstGeom>
-          <a:noFill/>
-          <a:ln/>
-        </p:spPr>
-        <p:txBody>
-          <a:bodyPr wrap="square" lIns="0" tIns="0" rIns="0" bIns="0" rtlCol="0" anchor="t"/>
-          <a:lstStyle/>
-          <a:p>
-            <a:pPr indent="0" marL="0">
-              <a:spcAft>
-                <a:spcPts val="600"/>
-              </a:spcAft>
-              <a:buNone/>
-            </a:pPr>
-            <a:r>
-              <a:rPr lang="en-US" sz="1150" b="1" dirty="0">
-                <a:solidFill>
-                  <a:srgbClr val="00629B"/>
-                </a:solidFill>
-              </a:rPr>
-              <a:t>▪  </a:t>
-            </a:r>
-            <a:pPr indent="0" marL="0">
-              <a:spcAft>
-                <a:spcPts val="600"/>
-              </a:spcAft>
-              <a:buNone/>
-            </a:pPr>
-            <a:r>
-              <a:rPr lang="en-US" sz="1150" dirty="0">
-                <a:solidFill>
-                  <a:srgbClr val="272425"/>
-                </a:solidFill>
-              </a:rPr>
-              <a:t>Riesgos candidatos desde BMAD, transcripciones, Jira y artefactos, con cita de origen</a:t>
-            </a:r>
-            <a:endParaRPr lang="en-US" sz="1150" dirty="0"/>
-          </a:p>
-          <a:p>
-            <a:pPr indent="0" marL="0">
-              <a:spcAft>
-                <a:spcPts val="600"/>
-              </a:spcAft>
-              <a:buNone/>
-            </a:pPr>
-            <a:r>
-              <a:rPr lang="en-US" sz="1150" b="1" dirty="0">
-                <a:solidFill>
-                  <a:srgbClr val="00629B"/>
-                </a:solidFill>
-              </a:rPr>
-              <a:t>▪  </a:t>
-            </a:r>
-            <a:pPr indent="0" marL="0">
-              <a:spcAft>
-                <a:spcPts val="600"/>
-              </a:spcAft>
-              <a:buNone/>
-            </a:pPr>
-            <a:r>
-              <a:rPr lang="en-US" sz="1150" dirty="0">
-                <a:solidFill>
-                  <a:srgbClr val="272425"/>
-                </a:solidFill>
-              </a:rPr>
-              <a:t>Opciones de respuesta comparadas por valor neto; decide el propietario y el plan de contingencia queda listo</a:t>
-            </a:r>
-            <a:endParaRPr lang="en-US" sz="1150" dirty="0"/>
-          </a:p>
-          <a:p>
-            <a:pPr indent="0" marL="0">
-              <a:spcAft>
-                <a:spcPts val="600"/>
-              </a:spcAft>
-              <a:buNone/>
-            </a:pPr>
-            <a:r>
-              <a:rPr lang="en-US" sz="1150" b="1" dirty="0">
-                <a:solidFill>
-                  <a:srgbClr val="00629B"/>
-                </a:solidFill>
-              </a:rPr>
-              <a:t>▪  </a:t>
-            </a:r>
-            <a:pPr indent="0" marL="0">
-              <a:spcAft>
-                <a:spcPts val="600"/>
-              </a:spcAft>
-              <a:buNone/>
-            </a:pPr>
-            <a:r>
-              <a:rPr lang="en-US" sz="1150" dirty="0">
-                <a:solidFill>
-                  <a:srgbClr val="272425"/>
-                </a:solidFill>
-              </a:rPr>
-              <a:t>Presupuesto de riesgo vigilado y reserva de gestión de la junta para lo no identificado</a:t>
-            </a:r>
-            <a:endParaRPr lang="en-US" sz="1150" dirty="0"/>
-          </a:p>
-        </p:txBody>
-      </p:sp>
-      <p:sp>
-        <p:nvSpPr>
-          <p:cNvPr id="8" name="Text 5"/>
-          <p:cNvSpPr txBox="1"/>
-          <p:nvPr/>
-        </p:nvSpPr>
-        <p:spPr>
-          <a:xfrm>
-            <a:off x="457200" y="3950208"/>
-            <a:ext cx="5120640" cy="237744"/>
-          </a:xfrm>
-          <a:prstGeom prst="rect">
-            <a:avLst/>
-          </a:prstGeom>
-          <a:noFill/>
-          <a:ln/>
-        </p:spPr>
-        <p:txBody>
-          <a:bodyPr wrap="square" lIns="0" tIns="0" rIns="0" bIns="0" rtlCol="0" anchor="t"/>
-          <a:lstStyle/>
-          <a:p>
-            <a:pPr indent="0" marL="0">
-              <a:buNone/>
-            </a:pPr>
-            <a:r>
-              <a:rPr lang="en-US" sz="1000" b="1" spc="100" kern="0" dirty="0">
-                <a:solidFill>
-                  <a:srgbClr val="002855"/>
-                </a:solidFill>
-              </a:rPr>
-              <a:t>INDICADORES DE LA CORRIDA DE REFERENCIA</a:t>
-            </a:r>
-            <a:endParaRPr lang="en-US" sz="1000" dirty="0"/>
-          </a:p>
-        </p:txBody>
-      </p:sp>
-      <p:sp>
-        <p:nvSpPr>
-          <p:cNvPr id="9" name="Shape 6"/>
-          <p:cNvSpPr/>
-          <p:nvPr/>
-        </p:nvSpPr>
-        <p:spPr>
-          <a:xfrm>
-            <a:off x="457200" y="4206240"/>
-            <a:ext cx="5120640" cy="2029968"/>
-          </a:xfrm>
-          <a:prstGeom prst="roundRect">
-            <a:avLst>
-              <a:gd name="adj" fmla="val 3604"/>
-            </a:avLst>
-          </a:prstGeom>
-          <a:solidFill>
-            <a:srgbClr val="F4F6F8"/>
-          </a:solidFill>
-          <a:ln w="9525">
-            <a:solidFill>
-              <a:srgbClr val="F4F6F8"/>
-            </a:solidFill>
-            <a:prstDash val="solid"/>
-          </a:ln>
-        </p:spPr>
-      </p:sp>
-      <p:sp>
-        <p:nvSpPr>
-          <p:cNvPr id="10" name="Text 7"/>
-          <p:cNvSpPr txBox="1"/>
-          <p:nvPr/>
-        </p:nvSpPr>
-        <p:spPr>
-          <a:xfrm>
-            <a:off x="594360" y="4297680"/>
-            <a:ext cx="4846320" cy="1874520"/>
-          </a:xfrm>
-          <a:prstGeom prst="rect">
-            <a:avLst/>
-          </a:prstGeom>
-          <a:noFill/>
-          <a:ln/>
-        </p:spPr>
-        <p:txBody>
-          <a:bodyPr wrap="square" lIns="0" tIns="0" rIns="0" bIns="0" rtlCol="0" anchor="t"/>
-          <a:lstStyle/>
-          <a:p>
-            <a:pPr indent="0" marL="0">
-              <a:spcAft>
-                <a:spcPts val="500"/>
-              </a:spcAft>
-              <a:buNone/>
-            </a:pPr>
-            <a:r>
-              <a:rPr lang="en-US" sz="1000" b="1" dirty="0">
-                <a:solidFill>
-                  <a:srgbClr val="B5651D"/>
-                </a:solidFill>
-              </a:rPr>
-              <a:t>●  </a:t>
-            </a:r>
-            <a:pPr indent="0" marL="0">
-              <a:spcAft>
-                <a:spcPts val="500"/>
-              </a:spcAft>
-              <a:buNone/>
-            </a:pPr>
-            <a:r>
-              <a:rPr lang="en-US" sz="1000" dirty="0">
-                <a:solidFill>
-                  <a:srgbClr val="272425"/>
-                </a:solidFill>
-              </a:rPr>
-              <a:t>Para R-001 conviene reducir; para R-003, preparar la contingencia. En los dos, evitar deja el residual más bajo pero no el mayor valor neto: cuesta más y crea un riesgo secundario.</a:t>
-            </a:r>
-            <a:endParaRPr lang="en-US" sz="1000" dirty="0"/>
-          </a:p>
-          <a:p>
-            <a:pPr indent="0" marL="0">
-              <a:spcAft>
-                <a:spcPts val="500"/>
-              </a:spcAft>
-              <a:buNone/>
-            </a:pPr>
-            <a:r>
-              <a:rPr lang="en-US" sz="1000" b="1" dirty="0">
-                <a:solidFill>
-                  <a:srgbClr val="B5651D"/>
-                </a:solidFill>
-              </a:rPr>
-              <a:t>●  </a:t>
-            </a:r>
-            <a:pPr indent="0" marL="0">
-              <a:spcAft>
-                <a:spcPts val="500"/>
-              </a:spcAft>
-              <a:buNone/>
-            </a:pPr>
-            <a:r>
-              <a:rPr lang="en-US" sz="1000" dirty="0">
-                <a:solidFill>
-                  <a:srgbClr val="272425"/>
-                </a:solidFill>
-              </a:rPr>
-              <a:t>La reserva pasa del 18 % al 94 % en cinco corridas de la sanidad; al activar el plan de contingencia de R-003 cruza el 80 % y CAM-03 deja de ser informativo y avisa. La provisión para lo no identificado no está en esas barras: vive en la reserva de gestión, que solo libera la junta.</a:t>
-            </a:r>
-            <a:endParaRPr lang="en-US" sz="1000" dirty="0"/>
-          </a:p>
-          <a:p>
-            <a:pPr indent="0" marL="0">
-              <a:spcAft>
-                <a:spcPts val="500"/>
-              </a:spcAft>
-              <a:buNone/>
-            </a:pPr>
-            <a:r>
-              <a:rPr lang="en-US" sz="1000" b="1" dirty="0">
-                <a:solidFill>
-                  <a:srgbClr val="B5651D"/>
-                </a:solidFill>
-              </a:rPr>
-              <a:t>●  </a:t>
-            </a:r>
-            <a:pPr indent="0" marL="0">
-              <a:spcAft>
-                <a:spcPts val="500"/>
-              </a:spcAft>
-              <a:buNone/>
-            </a:pPr>
-            <a:r>
-              <a:rPr lang="en-US" sz="1000" dirty="0">
-                <a:solidFill>
-                  <a:srgbClr val="272425"/>
-                </a:solidFill>
-              </a:rPr>
-              <a:t>El estado de riesgo en una sola vista para la junta del límite de etapa: lo único en atención es la reserva de riesgo; la reserva de gestión sigue intacta.</a:t>
-            </a:r>
-            <a:endParaRPr lang="en-US" sz="1000" dirty="0"/>
-          </a:p>
-        </p:txBody>
-      </p:sp>
-      <p:pic>
-        <p:nvPicPr>
-          <p:cNvPr id="11" name="Image 0" descr="/home/claude/pm-method/docs/guias/img/g1-opciones-valor-neto.png">    </p:cNvPr>
-          <p:cNvPicPr>
-            <a:picLocks noChangeAspect="1"/>
-          </p:cNvPicPr>
-          <p:nvPr/>
-        </p:nvPicPr>
-        <p:blipFill>
-          <a:blip r:embed="rId1"/>
-          <a:stretch>
-            <a:fillRect/>
-          </a:stretch>
-        </p:blipFill>
-        <p:spPr>
-          <a:xfrm>
-            <a:off x="5806440" y="1298448"/>
-            <a:ext cx="5925312" cy="3332988"/>
-          </a:xfrm>
-          <a:prstGeom prst="rect">
-            <a:avLst/>
-          </a:prstGeom>
-        </p:spPr>
-      </p:pic>
-      <p:sp>
-        <p:nvSpPr>
-          <p:cNvPr id="12" name="Text 8"/>
-          <p:cNvSpPr txBox="1"/>
-          <p:nvPr/>
-        </p:nvSpPr>
-        <p:spPr>
-          <a:xfrm>
-            <a:off x="5806440" y="4686300"/>
-            <a:ext cx="5925312" cy="256032"/>
-          </a:xfrm>
-          <a:prstGeom prst="rect">
-            <a:avLst/>
-          </a:prstGeom>
-          <a:noFill/>
-          <a:ln/>
-        </p:spPr>
-        <p:txBody>
-          <a:bodyPr wrap="square" lIns="0" tIns="0" rIns="0" bIns="0" rtlCol="0" anchor="t"/>
-          <a:lstStyle/>
-          <a:p>
-            <a:pPr algn="ctr" indent="0" marL="0">
-              <a:buNone/>
-            </a:pPr>
-            <a:r>
-              <a:rPr lang="en-US" sz="1000" i="1" dirty="0">
-                <a:solidFill>
-                  <a:srgbClr val="696969"/>
-                </a:solidFill>
-              </a:rPr>
-              <a:t>Valor neto de las opciones de respuesta</a:t>
-            </a:r>
-            <a:endParaRPr lang="en-US" sz="1000" dirty="0"/>
-          </a:p>
-        </p:txBody>
-      </p:sp>
-      <p:sp>
-        <p:nvSpPr>
-          <p:cNvPr id="13" name="Shape 9"/>
-          <p:cNvSpPr/>
-          <p:nvPr/>
-        </p:nvSpPr>
-        <p:spPr>
-          <a:xfrm>
-            <a:off x="5806440" y="5897880"/>
-            <a:ext cx="5925312" cy="338328"/>
-          </a:xfrm>
-          <a:prstGeom prst="roundRect">
-            <a:avLst>
-              <a:gd name="adj" fmla="val 21622"/>
-            </a:avLst>
-          </a:prstGeom>
-          <a:solidFill>
-            <a:srgbClr val="E9F1F8"/>
-          </a:solidFill>
-          <a:ln w="9525">
-            <a:solidFill>
-              <a:srgbClr val="E9F1F8"/>
-            </a:solidFill>
-            <a:prstDash val="solid"/>
-          </a:ln>
-        </p:spPr>
-      </p:sp>
-      <p:sp>
-        <p:nvSpPr>
-          <p:cNvPr id="14" name="Text 10"/>
-          <p:cNvSpPr txBox="1"/>
-          <p:nvPr/>
-        </p:nvSpPr>
-        <p:spPr>
-          <a:xfrm>
-            <a:off x="5943600" y="5897880"/>
-            <a:ext cx="5669280" cy="338328"/>
-          </a:xfrm>
-          <a:prstGeom prst="rect">
-            <a:avLst/>
-          </a:prstGeom>
-          <a:noFill/>
-          <a:ln/>
-        </p:spPr>
-        <p:txBody>
-          <a:bodyPr wrap="square" lIns="0" tIns="0" rIns="0" bIns="0" rtlCol="0" anchor="ctr"/>
-          <a:lstStyle/>
-          <a:p>
-            <a:pPr indent="0" marL="0">
-              <a:buNone/>
-            </a:pPr>
-            <a:r>
-              <a:rPr lang="en-US" sz="1050" b="1" dirty="0">
-                <a:solidFill>
-                  <a:srgbClr val="002855"/>
-                </a:solidFill>
-              </a:rPr>
-              <a:t>15 pasos · 2 clases de webinar · guía docs/guias/E2E-1-riesgos.md</a:t>
-            </a:r>
-            <a:endParaRPr lang="en-US" sz="1050" dirty="0"/>
-          </a:p>
-        </p:txBody>
-      </p:sp>
-      <p:sp>
-        <p:nvSpPr>
-          <p:cNvPr id="25" name="Slide Number Placeholder 0"/>
-          <p:cNvSpPr>
-            <a:spLocks noGrp="1"/>
-          </p:cNvSpPr>
-          <p:nvPr>
-            <p:ph type="sldNum" sz="quarter" idx="4294967295"/>
-          </p:nvPr>
-        </p:nvSpPr>
-        <p:spPr>
-          <a:xfrm>
-            <a:off x="11091672" y="6419088"/>
-            <a:ext cx="640080" cy="274320"/>
-          </a:xfrm>
-          <a:prstGeom prst="rect">
-            <a:avLst/>
-          </a:prstGeom>
-          <a:extLst>
-            <a:ext uri="{C572A759-6A51-4108-AA02-DFA0A04FC94B}">
-              <ma14:wrappingTextBoxFlag xmlns:ma14="http://schemas.microsoft.com/office/mac/drawingml/2011/main" val="0"/>
-            </a:ext>
-          </a:extLst>
-        </p:spPr>
-        <p:txBody>
-          <a:bodyPr/>
-          <a:lstStyle>
-            <a:lvl1pPr>
-              <a:defRPr sz="900">
-                <a:solidFill>
-                  <a:srgbClr val="696969"/>
-                </a:solidFill>
-              </a:defRPr>
-            </a:lvl1pPr>
-          </a:lstStyle>
-          <a:p>
-            <a:pPr algn="r"/>
-            <a:fld id="{F7021451-1387-4CA6-816F-3879F97B5CBC}" type="slidenum">
-              <a:rPr b="0" lang="en-US"/>
               <a:t>11</a:t>
             </a:fld>
             <a:endParaRPr lang="en-US"/>
@@ -7692,7 +8363,7 @@
                   <a:srgbClr val="FFFFFF"/>
                 </a:solidFill>
               </a:rPr>
-              <a:t>E2E-2 · Alcance y cambio: el desvío se ve el mismo día, no al cerrar la etapa</a:t>
+              <a:t>E2E-1 · Riesgos: el registro trabaja solo entre revisiones</a:t>
             </a:r>
             <a:endParaRPr lang="en-US" sz="1900" dirty="0"/>
           </a:p>
@@ -7764,7 +8435,7 @@
                   <a:srgbClr val="272425"/>
                 </a:solidFill>
               </a:rPr>
-              <a:t>El alcance se define bien una vez y se controla mal después. Los cambios se aprueban «porque son razonables» y nadie suma lo comprometido.</a:t>
+              <a:t>El registro de riesgos nace en un taller y se congela. Las respuestas no se costean y la reserva se usa como bolsa general.</a:t>
             </a:r>
             <a:endParaRPr lang="en-US" sz="1200" dirty="0"/>
           </a:p>
@@ -7853,7 +8524,7 @@
                   <a:srgbClr val="272425"/>
                 </a:solidFill>
               </a:rPr>
-              <a:t>Tres valores, reserva de cronograma y capacidad del release por MoSCoW</a:t>
+              <a:t>Riesgos candidatos desde BMAD, transcripciones, Jira y artefactos, con cita de origen</a:t>
             </a:r>
             <a:endParaRPr lang="en-US" sz="1150" dirty="0"/>
           </a:p>
@@ -7884,7 +8555,7 @@
                   <a:srgbClr val="272425"/>
                 </a:solidFill>
               </a:rPr>
-              <a:t>Análisis de impacto antes de decidir: tiempo, capacidad, presupuesto, VAN y quién decide</a:t>
+              <a:t>Opciones por valor neto y, para R-003, expediente y matriz con su sensibilidad; decide el propietario, contrastado con la RACI</a:t>
             </a:r>
             <a:endParaRPr lang="en-US" sz="1150" dirty="0"/>
           </a:p>
@@ -7915,7 +8586,7 @@
                   <a:srgbClr val="272425"/>
                 </a:solidFill>
               </a:rPr>
-              <a:t>Excepción completa: detectada, informada, replanificada y autorizada</a:t>
+              <a:t>Presupuesto de riesgo vigilado y reserva de gestión de la junta para lo no identificado</a:t>
             </a:r>
             <a:endParaRPr lang="en-US" sz="1150" dirty="0"/>
           </a:p>
@@ -8031,7 +8702,7 @@
                   <a:srgbClr val="272425"/>
                 </a:solidFill>
               </a:rPr>
-              <a:t>C-002 usaría el 200 % del presupuesto de cambio, el 150 % del límite de quien lo aprobó de palabra y el 143 % de la tolerancia de tiempo de la etapa: no lo puede decidir la autoridad de cambio, lo decide la junta (paso 10).</a:t>
+              <a:t>Para R-001 conviene reducir; para R-003, preparar la contingencia. En los dos, evitar deja el residual más bajo pero no el mayor valor neto: cuesta más y crea un riesgo secundario.</a:t>
             </a:r>
             <a:endParaRPr lang="en-US" sz="1000" dirty="0"/>
           </a:p>
@@ -8062,7 +8733,7 @@
                   <a:srgbClr val="272425"/>
                 </a:solidFill>
               </a:rPr>
-              <a:t>El 29/1 no entra el 10,3 % del alcance (ámbar, lo gestiona el PO); el 19/2 no entra el 22,1 %, más que el 20 % de margen: los Must peligran y hay excepción (pasos 9 y 10).</a:t>
+              <a:t>La reserva pasa del 18 % al 94 % en cinco corridas de la sanidad; al activar el plan de contingencia de R-003 cruza el 80 % y CAM-03 deja de ser informativo y avisa. La provisión para lo no identificado no está en esas barras: vive en la reserva de gestión, que solo libera la junta.</a:t>
             </a:r>
             <a:endParaRPr lang="en-US" sz="1000" dirty="0"/>
           </a:p>
@@ -8093,7 +8764,7 @@
                   <a:srgbClr val="272425"/>
                 </a:solidFill>
               </a:rPr>
-              <a:t>Resumen al 26/2: VAN de 30.939 con los dos cambios, puesta en producción el 20/5, 2 días de reserva, presupuesto de cambio al 75 % tras la ampliación, 22,1 % del alcance en riesgo en el corte del 19/2 y 13 de 13 requisitos trazados.</a:t>
+              <a:t>El estado de riesgo en una sola vista para la junta del límite de etapa: lo único en atención es la reserva de riesgo; la reserva de gestión sigue intacta.</a:t>
             </a:r>
             <a:endParaRPr lang="en-US" sz="1000" dirty="0"/>
           </a:p>
@@ -8101,7 +8772,7 @@
       </p:sp>
       <p:pic>
         <p:nvPicPr>
-          <p:cNvPr id="11" name="Image 0" descr="/home/claude/pm-method/docs/guias/img/g2-impacto-c002.png">    </p:cNvPr>
+          <p:cNvPr id="11" name="Image 0" descr="/home/claude/pm-method/docs/guias/img/g1-opciones-valor-neto.png">    </p:cNvPr>
           <p:cNvPicPr>
             <a:picLocks noChangeAspect="1"/>
           </p:cNvPicPr>
@@ -8153,7 +8824,7 @@
                   <a:srgbClr val="696969"/>
                 </a:solidFill>
               </a:rPr>
-              <a:t>Límites que usaría C-002, según su análisis de impacto</a:t>
+              <a:t>Valor neto de las opciones de respuesta</a:t>
             </a:r>
             <a:endParaRPr lang="en-US" sz="1000" dirty="0"/>
           </a:p>
@@ -8216,7 +8887,7 @@
                   <a:srgbClr val="002855"/>
                 </a:solidFill>
               </a:rPr>
-              <a:t>10 pasos · 2 clases de webinar · guía docs/guias/E2E-2-alcance-roadmap.md</a:t>
+              <a:t>16 pasos · 2 clases de webinar · guía docs/guias/E2E-1-riesgos.md</a:t>
             </a:r>
             <a:endParaRPr lang="en-US" sz="1050" dirty="0"/>
           </a:p>
@@ -8324,7 +8995,7 @@
                   <a:srgbClr val="FFFFFF"/>
                 </a:solidFill>
               </a:rPr>
-              <a:t>E2E-3 · Interesados y avance: compromiso y cifras verificados cada período</a:t>
+              <a:t>E2E-2 · Alcance y cambio: el desvío se ve el mismo día, no al cerrar la etapa</a:t>
             </a:r>
             <a:endParaRPr lang="en-US" sz="1900" dirty="0"/>
           </a:p>
@@ -8396,7 +9067,7 @@
                   <a:srgbClr val="272425"/>
                 </a:solidFill>
               </a:rPr>
-              <a:t>El mapa de interesados se arma una vez, el highlight se copia a mano y los OKR se miran al final.</a:t>
+              <a:t>El alcance se define bien una vez y se controla mal después. Los cambios se aprueban «porque son razonables» y nadie suma lo comprometido.</a:t>
             </a:r>
             <a:endParaRPr lang="en-US" sz="1200" dirty="0"/>
           </a:p>
@@ -8485,7 +9156,7 @@
                   <a:srgbClr val="272425"/>
                 </a:solidFill>
               </a:rPr>
-              <a:t>Acuerdos del taller propuestos con cita y registrados solo al confirmarlos</a:t>
+              <a:t>Tres valores, reserva de cronograma y capacidad del release por MoSCoW</a:t>
             </a:r>
             <a:endParaRPr lang="en-US" sz="1150" dirty="0"/>
           </a:p>
@@ -8516,7 +9187,7 @@
                   <a:srgbClr val="272425"/>
                 </a:solidFill>
               </a:rPr>
-              <a:t>Radar de lo que hay que decidir hoy y highlight con las cifras verificadas contra el EVM</a:t>
+              <a:t>Análisis de impacto antes de decidir: tiempo, capacidad, presupuesto, VAN y quién decide</a:t>
             </a:r>
             <a:endParaRPr lang="en-US" sz="1150" dirty="0"/>
           </a:p>
@@ -8547,7 +9218,7 @@
                   <a:srgbClr val="272425"/>
                 </a:solidFill>
               </a:rPr>
-              <a:t>Cadencia de contacto y brecha de compromiso como control permanente</a:t>
+              <a:t>Excepción completa: detectada, informada, replanificada y autorizada</a:t>
             </a:r>
             <a:endParaRPr lang="en-US" sz="1150" dirty="0"/>
           </a:p>
@@ -8644,7 +9315,7 @@
               <a:buNone/>
             </a:pPr>
             <a:r>
-              <a:rPr lang="en-US" sz="1150" b="1" dirty="0">
+              <a:rPr lang="en-US" sz="1000" b="1" dirty="0">
                 <a:solidFill>
                   <a:srgbClr val="B5651D"/>
                 </a:solidFill>
@@ -8658,14 +9329,14 @@
               <a:buNone/>
             </a:pPr>
             <a:r>
-              <a:rPr lang="en-US" sz="1150" dirty="0">
+              <a:rPr lang="en-US" sz="1000" dirty="0">
                 <a:solidFill>
                   <a:srgbClr val="272425"/>
                 </a:solidFill>
               </a:rPr>
-              <a:t>Highlight al 8/1: plazo y costo en ámbar dentro de la tolerancia (SPI 0,933, CPI 0,942) y un compromiso vencido (A-004).</a:t>
-            </a:r>
-            <a:endParaRPr lang="en-US" sz="1150" dirty="0"/>
+              <a:t>C-002 usaría el 200 % del presupuesto de cambio, el 150 % del límite de quien lo aprobó de palabra y el 143 % de la tolerancia de tiempo de la etapa: no lo puede decidir la autoridad de cambio, lo decide la junta (paso 10).</a:t>
+            </a:r>
+            <a:endParaRPr lang="en-US" sz="1000" dirty="0"/>
           </a:p>
           <a:p>
             <a:pPr indent="0" marL="0">
@@ -8675,7 +9346,7 @@
               <a:buNone/>
             </a:pPr>
             <a:r>
-              <a:rPr lang="en-US" sz="1150" b="1" dirty="0">
+              <a:rPr lang="en-US" sz="1000" b="1" dirty="0">
                 <a:solidFill>
                   <a:srgbClr val="B5651D"/>
                 </a:solidFill>
@@ -8689,14 +9360,14 @@
               <a:buNone/>
             </a:pPr>
             <a:r>
-              <a:rPr lang="en-US" sz="1150" dirty="0">
+              <a:rPr lang="en-US" sz="1000" dirty="0">
                 <a:solidFill>
                   <a:srgbClr val="272425"/>
                 </a:solidFill>
               </a:rPr>
-              <a:t>STK-12 al 5/2: TI, Martín y Lucía superan el máximo de días sin contacto. Laura, Sofía y el sindicato están en el límite.</a:t>
-            </a:r>
-            <a:endParaRPr lang="en-US" sz="1150" dirty="0"/>
+              <a:t>El 29/1 no entra el 10,3 % del alcance (ámbar, lo gestiona el PO); el 19/2 no entra el 22,1 %, más que el 20 % de margen: los Must peligran y hay excepción (pasos 9 y 10).</a:t>
+            </a:r>
+            <a:endParaRPr lang="en-US" sz="1000" dirty="0"/>
           </a:p>
           <a:p>
             <a:pPr indent="0" marL="0">
@@ -8706,7 +9377,7 @@
               <a:buNone/>
             </a:pPr>
             <a:r>
-              <a:rPr lang="en-US" sz="1150" b="1" dirty="0">
+              <a:rPr lang="en-US" sz="1000" b="1" dirty="0">
                 <a:solidFill>
                   <a:srgbClr val="B5651D"/>
                 </a:solidFill>
@@ -8720,20 +9391,20 @@
               <a:buNone/>
             </a:pPr>
             <a:r>
-              <a:rPr lang="en-US" sz="1150" dirty="0">
+              <a:rPr lang="en-US" sz="1000" dirty="0">
                 <a:solidFill>
                   <a:srgbClr val="272425"/>
                 </a:solidFill>
               </a:rPr>
-              <a:t>La brecha total baja de 7 a 3 niveles. TI empeora cuando se corta su reunión semanal y repunta al retomarla.</a:t>
-            </a:r>
-            <a:endParaRPr lang="en-US" sz="1150" dirty="0"/>
+              <a:t>Resumen al 26/2: VAN de 30.939 con los dos cambios, puesta en producción el 20/5, 2 días de reserva, presupuesto de cambio al 75 % tras la ampliación, 22,1 % del alcance en riesgo en el corte del 19/2 y 13 de 13 requisitos trazados.</a:t>
+            </a:r>
+            <a:endParaRPr lang="en-US" sz="1000" dirty="0"/>
           </a:p>
         </p:txBody>
       </p:sp>
       <p:pic>
         <p:nvPicPr>
-          <p:cNvPr id="11" name="Image 0" descr="/home/claude/pm-method/docs/guias/img/g3-highlight-indicadores.png">    </p:cNvPr>
+          <p:cNvPr id="11" name="Image 0" descr="/home/claude/pm-method/docs/guias/img/g2-impacto-c002.png">    </p:cNvPr>
           <p:cNvPicPr>
             <a:picLocks noChangeAspect="1"/>
           </p:cNvPicPr>
@@ -8785,7 +9456,7 @@
                   <a:srgbClr val="696969"/>
                 </a:solidFill>
               </a:rPr>
-              <a:t>Indicadores del highlight al 8/1</a:t>
+              <a:t>Límites que usaría C-002, según su análisis de impacto</a:t>
             </a:r>
             <a:endParaRPr lang="en-US" sz="1000" dirty="0"/>
           </a:p>
@@ -8848,7 +9519,7 @@
                   <a:srgbClr val="002855"/>
                 </a:solidFill>
               </a:rPr>
-              <a:t>14 pasos · 2 clases de webinar · guía docs/guias/E2E-3-interesados-okr-avance.md</a:t>
+              <a:t>10 pasos · 2 clases de webinar · guía docs/guias/E2E-2-alcance-roadmap.md</a:t>
             </a:r>
             <a:endParaRPr lang="en-US" sz="1050" dirty="0"/>
           </a:p>
@@ -8956,7 +9627,7 @@
                   <a:srgbClr val="FFFFFF"/>
                 </a:solidFill>
               </a:rPr>
-              <a:t>E2E-4 · Producto con BMAD: calidad, cierre por id y beneficios medidos</a:t>
+              <a:t>E2E-3 · Interesados y avance: compromiso y cifras verificados cada período</a:t>
             </a:r>
             <a:endParaRPr lang="en-US" sz="1900" dirty="0"/>
           </a:p>
@@ -9028,7 +9699,7 @@
                   <a:srgbClr val="272425"/>
                 </a:solidFill>
               </a:rPr>
-              <a:t>Con decenas de historias terminadas nadie verifica cada revisión, las condiciones de la junta se olvidan y los beneficios no se miden.</a:t>
+              <a:t>El mapa de interesados se arma una vez, el highlight se copia a mano y los OKR se miran al final.</a:t>
             </a:r>
             <a:endParaRPr lang="en-US" sz="1200" dirty="0"/>
           </a:p>
@@ -9117,7 +9788,7 @@
                   <a:srgbClr val="272425"/>
                 </a:solidFill>
               </a:rPr>
-              <a:t>El CONCERNS del gate de BMAD se vuelve una condición formal que bloquea el cierre</a:t>
+              <a:t>Acuerdos del taller propuestos con cita y registrados solo al confirmarlos</a:t>
             </a:r>
             <a:endParaRPr lang="en-US" sz="1150" dirty="0"/>
           </a:p>
@@ -9148,7 +9819,7 @@
                   <a:srgbClr val="272425"/>
                 </a:solidFill>
               </a:rPr>
-              <a:t>Retrospectiva con cita y ciclo de las lecciones: acción, verificación e índice de la organización</a:t>
+              <a:t>Radar de lo que hay que decidir hoy y highlight con las cifras verificadas contra el EVM</a:t>
             </a:r>
             <a:endParaRPr lang="en-US" sz="1150" dirty="0"/>
           </a:p>
@@ -9179,7 +9850,7 @@
                   <a:srgbClr val="272425"/>
                 </a:solidFill>
               </a:rPr>
-              <a:t>Cierre verificado por id y expediente de auditoría con integridad comprobable</a:t>
+              <a:t>Cadencia de contacto y brecha de compromiso como control permanente</a:t>
             </a:r>
             <a:endParaRPr lang="en-US" sz="1150" dirty="0"/>
           </a:p>
@@ -9276,7 +9947,7 @@
               <a:buNone/>
             </a:pPr>
             <a:r>
-              <a:rPr lang="en-US" sz="1000" b="1" dirty="0">
+              <a:rPr lang="en-US" sz="1150" b="1" dirty="0">
                 <a:solidFill>
                   <a:srgbClr val="B5651D"/>
                 </a:solidFill>
@@ -9290,14 +9961,14 @@
               <a:buNone/>
             </a:pPr>
             <a:r>
-              <a:rPr lang="en-US" sz="1000" dirty="0">
+              <a:rPr lang="en-US" sz="1150" dirty="0">
                 <a:solidFill>
                   <a:srgbClr val="272425"/>
                 </a:solidFill>
               </a:rPr>
-              <a:t>Historias terminadas contra historias con revisión aprobada en cada corte, según el estado de productos que deriva estado.py productos: las brechas del 26/2 y del 7/5 se cerraron antes de la puerta siguiente (pasos 6 y 8).</a:t>
-            </a:r>
-            <a:endParaRPr lang="en-US" sz="1000" dirty="0"/>
+              <a:t>Highlight al 8/1: plazo y costo en ámbar dentro de la tolerancia (SPI 0,933, CPI 0,942) y un compromiso vencido (A-004).</a:t>
+            </a:r>
+            <a:endParaRPr lang="en-US" sz="1150" dirty="0"/>
           </a:p>
           <a:p>
             <a:pPr indent="0" marL="0">
@@ -9307,7 +9978,7 @@
               <a:buNone/>
             </a:pPr>
             <a:r>
-              <a:rPr lang="en-US" sz="1000" b="1" dirty="0">
+              <a:rPr lang="en-US" sz="1150" b="1" dirty="0">
                 <a:solidFill>
                   <a:srgbClr val="B5651D"/>
                 </a:solidFill>
@@ -9321,14 +9992,14 @@
               <a:buNone/>
             </a:pPr>
             <a:r>
-              <a:rPr lang="en-US" sz="1000" dirty="0">
+              <a:rPr lang="en-US" sz="1150" dirty="0">
                 <a:solidFill>
                   <a:srgbClr val="272425"/>
                 </a:solidFill>
               </a:rPr>
-              <a:t>De la retrospectiva del sprint 4 al índice de la organización: 3 lecciones con cita (1 de impacto alto), la acción de L-002 verificada en el sprint 5, L-003 cambia el plan de la etapa 3 y se verifica al cerrar el Release 2, y 3 lecciones en el índice (pasos 6c, 7, 8 y 9).</a:t>
-            </a:r>
-            <a:endParaRPr lang="en-US" sz="1000" dirty="0"/>
+              <a:t>STK-12 al 5/2: TI, Martín y Lucía superan el máximo de días sin contacto. Laura, Sofía y el sindicato están en el límite.</a:t>
+            </a:r>
+            <a:endParaRPr lang="en-US" sz="1150" dirty="0"/>
           </a:p>
           <a:p>
             <a:pPr indent="0" marL="0">
@@ -9338,7 +10009,7 @@
               <a:buNone/>
             </a:pPr>
             <a:r>
-              <a:rPr lang="en-US" sz="1000" b="1" dirty="0">
+              <a:rPr lang="en-US" sz="1150" b="1" dirty="0">
                 <a:solidFill>
                   <a:srgbClr val="B5651D"/>
                 </a:solidFill>
@@ -9352,20 +10023,20 @@
               <a:buNone/>
             </a:pPr>
             <a:r>
-              <a:rPr lang="en-US" sz="1000" dirty="0">
+              <a:rPr lang="en-US" sz="1150" dirty="0">
                 <a:solidFill>
                   <a:srgbClr val="272425"/>
                 </a:solidFill>
               </a:rPr>
-              <a:t>El expediente para la auditoría externa: 41 eventos en la cronología y 43 archivos con su huella; una sola palabra cambiada en la copia y la verificación la delata (paso 9b).</a:t>
-            </a:r>
-            <a:endParaRPr lang="en-US" sz="1000" dirty="0"/>
+              <a:t>La brecha total baja de 7 a 3 niveles. TI empeora cuando se corta su reunión semanal y repunta al retomarla.</a:t>
+            </a:r>
+            <a:endParaRPr lang="en-US" sz="1150" dirty="0"/>
           </a:p>
         </p:txBody>
       </p:sp>
       <p:pic>
         <p:nvPicPr>
-          <p:cNvPr id="11" name="Image 0" descr="/home/claude/pm-method/docs/guias/img/g4-cierre.png">    </p:cNvPr>
+          <p:cNvPr id="11" name="Image 0" descr="/home/claude/pm-method/docs/guias/img/g3-highlight-indicadores.png">    </p:cNvPr>
           <p:cNvPicPr>
             <a:picLocks noChangeAspect="1"/>
           </p:cNvPicPr>
@@ -9417,7 +10088,7 @@
                   <a:srgbClr val="696969"/>
                 </a:solidFill>
               </a:rPr>
-              <a:t>Tablero de cierre</a:t>
+              <a:t>Indicadores del highlight al 8/1</a:t>
             </a:r>
             <a:endParaRPr lang="en-US" sz="1000" dirty="0"/>
           </a:p>
@@ -9480,7 +10151,7 @@
                   <a:srgbClr val="002855"/>
                 </a:solidFill>
               </a:rPr>
-              <a:t>15 pasos · 2 clases de webinar · guía docs/guias/E2E-4-producto-bmad.md</a:t>
+              <a:t>14 pasos · 2 clases de webinar · guía docs/guias/E2E-3-interesados-okr-avance.md</a:t>
             </a:r>
             <a:endParaRPr lang="en-US" sz="1050" dirty="0"/>
           </a:p>
@@ -9588,7 +10259,7 @@
                   <a:srgbClr val="FFFFFF"/>
                 </a:solidFill>
               </a:rPr>
-              <a:t>E2E-5 · De la idea al proyecto: los supuestos se validan antes de invertir</a:t>
+              <a:t>E2E-4 · Producto con BMAD: calidad, cierre por id y beneficios medidos</a:t>
             </a:r>
             <a:endParaRPr lang="en-US" sz="1900" dirty="0"/>
           </a:p>
@@ -9660,7 +10331,7 @@
                   <a:srgbClr val="272425"/>
                 </a:solidFill>
               </a:rPr>
-              <a:t>El caso de negocio se escribe una vez, con el supuesto más optimista, y el enfoque de entrega se elige por costumbre.</a:t>
+              <a:t>Con decenas de historias terminadas nadie verifica cada revisión, las condiciones de la junta se olvidan y los beneficios no se miden.</a:t>
             </a:r>
             <a:endParaRPr lang="en-US" sz="1200" dirty="0"/>
           </a:p>
@@ -9749,7 +10420,7 @@
                   <a:srgbClr val="272425"/>
                 </a:solidFill>
               </a:rPr>
-              <a:t>Lecciones de otros proyectos y mapa de supuestos antes de comprometer dinero</a:t>
+              <a:t>El CONCERNS del gate de BMAD se vuelve una condición formal que bloquea el cierre</a:t>
             </a:r>
             <a:endParaRPr lang="en-US" sz="1150" dirty="0"/>
           </a:p>
@@ -9780,7 +10451,7 @@
                   <a:srgbClr val="272425"/>
                 </a:solidFill>
               </a:rPr>
-              <a:t>Opciones comparadas con VAN y enfoque de entrega elegido con criterios</a:t>
+              <a:t>Retrospectiva con cita y ciclo de las lecciones: acción, verificación e índice de la organización</a:t>
             </a:r>
             <a:endParaRPr lang="en-US" sz="1150" dirty="0"/>
           </a:p>
@@ -9811,7 +10482,7 @@
                   <a:srgbClr val="272425"/>
                 </a:solidFill>
               </a:rPr>
-              <a:t>Personas de usuario ligadas a cada requisito Must, y mapas para decidir qué construir</a:t>
+              <a:t>Cierre verificado por id y expediente de auditoría con la bitácora de escrituras</a:t>
             </a:r>
             <a:endParaRPr lang="en-US" sz="1150" dirty="0"/>
           </a:p>
@@ -9908,7 +10579,7 @@
               <a:buNone/>
             </a:pPr>
             <a:r>
-              <a:rPr lang="en-US" sz="1100" b="1" dirty="0">
+              <a:rPr lang="en-US" sz="950" b="1" dirty="0">
                 <a:solidFill>
                   <a:srgbClr val="B5651D"/>
                 </a:solidFill>
@@ -9922,14 +10593,14 @@
               <a:buNone/>
             </a:pPr>
             <a:r>
-              <a:rPr lang="en-US" sz="1100" dirty="0">
+              <a:rPr lang="en-US" sz="950" dirty="0">
                 <a:solidFill>
                   <a:srgbClr val="272425"/>
                 </a:solidFill>
               </a:rPr>
-              <a:t>Tres supuestos críticos sin evidencia (S-001, S-002, S-003) sostienen los dos beneficios y la factibilidad: ahí se invierte primero en aprender (paso 2).</a:t>
-            </a:r>
-            <a:endParaRPr lang="en-US" sz="1100" dirty="0"/>
+              <a:t>Historias terminadas contra historias con revisión aprobada en cada corte, según el estado de productos que deriva estado.py productos: las brechas del 26/2 y del 7/5 se cerraron antes de la puerta siguiente (pasos 6 y 8).</a:t>
+            </a:r>
+            <a:endParaRPr lang="en-US" sz="950" dirty="0"/>
           </a:p>
           <a:p>
             <a:pPr indent="0" marL="0">
@@ -9939,7 +10610,7 @@
               <a:buNone/>
             </a:pPr>
             <a:r>
-              <a:rPr lang="en-US" sz="1100" b="1" dirty="0">
+              <a:rPr lang="en-US" sz="950" b="1" dirty="0">
                 <a:solidFill>
                   <a:srgbClr val="B5651D"/>
                 </a:solidFill>
@@ -9953,14 +10624,14 @@
               <a:buNone/>
             </a:pPr>
             <a:r>
-              <a:rPr lang="en-US" sz="1100" dirty="0">
+              <a:rPr lang="en-US" sz="950" dirty="0">
                 <a:solidFill>
                   <a:srgbClr val="272425"/>
                 </a:solidFill>
               </a:rPr>
-              <a:t>El piloto bajó el VAN de las dos opciones; la opción 2 sigue siendo la mejor, con una TIR de 54,3 % y un repago de 1,78 años (paso 4).</a:t>
-            </a:r>
-            <a:endParaRPr lang="en-US" sz="1100" dirty="0"/>
+              <a:t>De la retrospectiva del sprint 4 al índice de la organización: 3 lecciones con cita (1 de impacto alto), la acción de L-002 verificada en el sprint 5, L-003 cambia el plan de la etapa 3 y se verifica al cerrar el Release 2, y 3 lecciones en el índice (pasos 6c, 7, 8 y 9).</a:t>
+            </a:r>
+            <a:endParaRPr lang="en-US" sz="950" dirty="0"/>
           </a:p>
           <a:p>
             <a:pPr indent="0" marL="0">
@@ -9970,7 +10641,7 @@
               <a:buNone/>
             </a:pPr>
             <a:r>
-              <a:rPr lang="en-US" sz="1100" b="1" dirty="0">
+              <a:rPr lang="en-US" sz="950" b="1" dirty="0">
                 <a:solidFill>
                   <a:srgbClr val="B5651D"/>
                 </a:solidFill>
@@ -9984,20 +10655,20 @@
               <a:buNone/>
             </a:pPr>
             <a:r>
-              <a:rPr lang="en-US" sz="1100" dirty="0">
+              <a:rPr lang="en-US" sz="950" dirty="0">
                 <a:solidFill>
                   <a:srgbClr val="272425"/>
                 </a:solidFill>
               </a:rPr>
-              <a:t>Los 4 Must tienen persona y REQ-003 sirve al paciente, a la recepcionista y al paciente mayor de 65; el aviso STK-13 de REQ-006 se resolvió marcando al paciente como beneficiario (paso 10b).</a:t>
-            </a:r>
-            <a:endParaRPr lang="en-US" sz="1100" dirty="0"/>
+              <a:t>El expediente para la auditoría externa: 42 eventos en la cronología, 44 archivos con su huella y 132 escrituras en la bitácora; una sola palabra cambiada en la copia, la verificación la delata y la bitácora muestra que no salió de los scripts (paso 9b).</a:t>
+            </a:r>
+            <a:endParaRPr lang="en-US" sz="950" dirty="0"/>
           </a:p>
         </p:txBody>
       </p:sp>
       <p:pic>
         <p:nvPicPr>
-          <p:cNvPr id="11" name="Image 0" descr="/home/claude/pm-method/docs/guias/img/g5-van-opciones.png">    </p:cNvPr>
+          <p:cNvPr id="11" name="Image 0" descr="/home/claude/pm-method/docs/guias/img/g4-cierre.png">    </p:cNvPr>
           <p:cNvPicPr>
             <a:picLocks noChangeAspect="1"/>
           </p:cNvPicPr>
@@ -10049,7 +10720,7 @@
                   <a:srgbClr val="696969"/>
                 </a:solidFill>
               </a:rPr>
-              <a:t>VAN antes y después de los experimentos</a:t>
+              <a:t>Tablero de cierre</a:t>
             </a:r>
             <a:endParaRPr lang="en-US" sz="1000" dirty="0"/>
           </a:p>
@@ -10112,7 +10783,7 @@
                   <a:srgbClr val="002855"/>
                 </a:solidFill>
               </a:rPr>
-              <a:t>20 pasos · 2 clases de webinar · guía docs/guias/E2E-5-idea-a-proyecto.md</a:t>
+              <a:t>16 pasos · 2 clases de webinar · guía docs/guias/E2E-4-producto-bmad.md</a:t>
             </a:r>
             <a:endParaRPr lang="en-US" sz="1050" dirty="0"/>
           </a:p>
@@ -10220,6 +10891,638 @@
                   <a:srgbClr val="FFFFFF"/>
                 </a:solidFill>
               </a:rPr>
+              <a:t>E2E-5 · De la idea al proyecto: los supuestos se validan antes de invertir</a:t>
+            </a:r>
+            <a:endParaRPr lang="en-US" sz="1900" dirty="0"/>
+          </a:p>
+        </p:txBody>
+      </p:sp>
+      <p:sp>
+        <p:nvSpPr>
+          <p:cNvPr id="4" name="Text 1"/>
+          <p:cNvSpPr txBox="1"/>
+          <p:nvPr/>
+        </p:nvSpPr>
+        <p:spPr>
+          <a:xfrm>
+            <a:off x="457200" y="1298448"/>
+            <a:ext cx="5120640" cy="237744"/>
+          </a:xfrm>
+          <a:prstGeom prst="rect">
+            <a:avLst/>
+          </a:prstGeom>
+          <a:noFill/>
+          <a:ln/>
+        </p:spPr>
+        <p:txBody>
+          <a:bodyPr wrap="square" lIns="0" tIns="0" rIns="0" bIns="0" rtlCol="0" anchor="t"/>
+          <a:lstStyle/>
+          <a:p>
+            <a:pPr indent="0" marL="0">
+              <a:buNone/>
+            </a:pPr>
+            <a:r>
+              <a:rPr lang="en-US" sz="1000" b="1" spc="100" kern="0" dirty="0">
+                <a:solidFill>
+                  <a:srgbClr val="B5651D"/>
+                </a:solidFill>
+              </a:rPr>
+              <a:t>EL PROBLEMA</a:t>
+            </a:r>
+            <a:endParaRPr lang="en-US" sz="1000" dirty="0"/>
+          </a:p>
+        </p:txBody>
+      </p:sp>
+      <p:sp>
+        <p:nvSpPr>
+          <p:cNvPr id="5" name="Text 2"/>
+          <p:cNvSpPr txBox="1"/>
+          <p:nvPr/>
+        </p:nvSpPr>
+        <p:spPr>
+          <a:xfrm>
+            <a:off x="457200" y="1554480"/>
+            <a:ext cx="5120640" cy="749808"/>
+          </a:xfrm>
+          <a:prstGeom prst="rect">
+            <a:avLst/>
+          </a:prstGeom>
+          <a:noFill/>
+          <a:ln/>
+        </p:spPr>
+        <p:txBody>
+          <a:bodyPr wrap="square" lIns="0" tIns="0" rIns="0" bIns="0" rtlCol="0" anchor="t"/>
+          <a:lstStyle/>
+          <a:p>
+            <a:pPr indent="0" marL="0">
+              <a:buNone/>
+            </a:pPr>
+            <a:r>
+              <a:rPr lang="en-US" sz="1350" dirty="0">
+                <a:solidFill>
+                  <a:srgbClr val="272425"/>
+                </a:solidFill>
+              </a:rPr>
+              <a:t>El caso de negocio se escribe una vez, con el supuesto más optimista, y el enfoque de entrega se elige por costumbre.</a:t>
+            </a:r>
+            <a:endParaRPr lang="en-US" sz="1200" dirty="0"/>
+          </a:p>
+        </p:txBody>
+      </p:sp>
+      <p:sp>
+        <p:nvSpPr>
+          <p:cNvPr id="6" name="Text 3"/>
+          <p:cNvSpPr txBox="1"/>
+          <p:nvPr/>
+        </p:nvSpPr>
+        <p:spPr>
+          <a:xfrm>
+            <a:off x="457200" y="2359152"/>
+            <a:ext cx="5120640" cy="237744"/>
+          </a:xfrm>
+          <a:prstGeom prst="rect">
+            <a:avLst/>
+          </a:prstGeom>
+          <a:noFill/>
+          <a:ln/>
+        </p:spPr>
+        <p:txBody>
+          <a:bodyPr wrap="square" lIns="0" tIns="0" rIns="0" bIns="0" rtlCol="0" anchor="t"/>
+          <a:lstStyle/>
+          <a:p>
+            <a:pPr indent="0" marL="0">
+              <a:buNone/>
+            </a:pPr>
+            <a:r>
+              <a:rPr lang="en-US" sz="1000" b="1" spc="100" kern="0" dirty="0">
+                <a:solidFill>
+                  <a:srgbClr val="00629B"/>
+                </a:solidFill>
+              </a:rPr>
+              <a:t>QUÉ MUESTRA</a:t>
+            </a:r>
+            <a:endParaRPr lang="en-US" sz="1000" dirty="0"/>
+          </a:p>
+        </p:txBody>
+      </p:sp>
+      <p:sp>
+        <p:nvSpPr>
+          <p:cNvPr id="7" name="Text 4"/>
+          <p:cNvSpPr txBox="1"/>
+          <p:nvPr/>
+        </p:nvSpPr>
+        <p:spPr>
+          <a:xfrm>
+            <a:off x="457200" y="2615184"/>
+            <a:ext cx="5120640" cy="1298448"/>
+          </a:xfrm>
+          <a:prstGeom prst="rect">
+            <a:avLst/>
+          </a:prstGeom>
+          <a:noFill/>
+          <a:ln/>
+        </p:spPr>
+        <p:txBody>
+          <a:bodyPr wrap="square" lIns="0" tIns="0" rIns="0" bIns="0" rtlCol="0" anchor="t"/>
+          <a:lstStyle/>
+          <a:p>
+            <a:pPr indent="0" marL="0">
+              <a:spcAft>
+                <a:spcPts val="600"/>
+              </a:spcAft>
+              <a:buNone/>
+            </a:pPr>
+            <a:r>
+              <a:rPr lang="en-US" sz="1150" b="1" dirty="0">
+                <a:solidFill>
+                  <a:srgbClr val="00629B"/>
+                </a:solidFill>
+              </a:rPr>
+              <a:t>▪  </a:t>
+            </a:r>
+            <a:pPr indent="0" marL="0">
+              <a:spcAft>
+                <a:spcPts val="600"/>
+              </a:spcAft>
+              <a:buNone/>
+            </a:pPr>
+            <a:r>
+              <a:rPr lang="en-US" sz="1150" dirty="0">
+                <a:solidFill>
+                  <a:srgbClr val="272425"/>
+                </a:solidFill>
+              </a:rPr>
+              <a:t>Lecciones de otros proyectos y mapa de supuestos antes de comprometer dinero</a:t>
+            </a:r>
+            <a:endParaRPr lang="en-US" sz="1150" dirty="0"/>
+          </a:p>
+          <a:p>
+            <a:pPr indent="0" marL="0">
+              <a:spcAft>
+                <a:spcPts val="600"/>
+              </a:spcAft>
+              <a:buNone/>
+            </a:pPr>
+            <a:r>
+              <a:rPr lang="en-US" sz="1150" b="1" dirty="0">
+                <a:solidFill>
+                  <a:srgbClr val="00629B"/>
+                </a:solidFill>
+              </a:rPr>
+              <a:t>▪  </a:t>
+            </a:r>
+            <a:pPr indent="0" marL="0">
+              <a:spcAft>
+                <a:spcPts val="600"/>
+              </a:spcAft>
+              <a:buNone/>
+            </a:pPr>
+            <a:r>
+              <a:rPr lang="en-US" sz="1150" dirty="0">
+                <a:solidFill>
+                  <a:srgbClr val="272425"/>
+                </a:solidFill>
+              </a:rPr>
+              <a:t>Opciones comparadas con VAN y enfoque de entrega elegido con criterios</a:t>
+            </a:r>
+            <a:endParaRPr lang="en-US" sz="1150" dirty="0"/>
+          </a:p>
+          <a:p>
+            <a:pPr indent="0" marL="0">
+              <a:spcAft>
+                <a:spcPts val="600"/>
+              </a:spcAft>
+              <a:buNone/>
+            </a:pPr>
+            <a:r>
+              <a:rPr lang="en-US" sz="1150" b="1" dirty="0">
+                <a:solidFill>
+                  <a:srgbClr val="00629B"/>
+                </a:solidFill>
+              </a:rPr>
+              <a:t>▪  </a:t>
+            </a:r>
+            <a:pPr indent="0" marL="0">
+              <a:spcAft>
+                <a:spcPts val="600"/>
+              </a:spcAft>
+              <a:buNone/>
+            </a:pPr>
+            <a:r>
+              <a:rPr lang="en-US" sz="1150" dirty="0">
+                <a:solidFill>
+                  <a:srgbClr val="272425"/>
+                </a:solidFill>
+              </a:rPr>
+              <a:t>Personas de usuario por requisito Must, y hacer o comprar con el contexto de los mapas</a:t>
+            </a:r>
+            <a:endParaRPr lang="en-US" sz="1150" dirty="0"/>
+          </a:p>
+        </p:txBody>
+      </p:sp>
+      <p:sp>
+        <p:nvSpPr>
+          <p:cNvPr id="8" name="Text 5"/>
+          <p:cNvSpPr txBox="1"/>
+          <p:nvPr/>
+        </p:nvSpPr>
+        <p:spPr>
+          <a:xfrm>
+            <a:off x="457200" y="3950208"/>
+            <a:ext cx="5120640" cy="237744"/>
+          </a:xfrm>
+          <a:prstGeom prst="rect">
+            <a:avLst/>
+          </a:prstGeom>
+          <a:noFill/>
+          <a:ln/>
+        </p:spPr>
+        <p:txBody>
+          <a:bodyPr wrap="square" lIns="0" tIns="0" rIns="0" bIns="0" rtlCol="0" anchor="t"/>
+          <a:lstStyle/>
+          <a:p>
+            <a:pPr indent="0" marL="0">
+              <a:buNone/>
+            </a:pPr>
+            <a:r>
+              <a:rPr lang="en-US" sz="1000" b="1" spc="100" kern="0" dirty="0">
+                <a:solidFill>
+                  <a:srgbClr val="002855"/>
+                </a:solidFill>
+              </a:rPr>
+              <a:t>INDICADORES DE LA CORRIDA DE REFERENCIA</a:t>
+            </a:r>
+            <a:endParaRPr lang="en-US" sz="1000" dirty="0"/>
+          </a:p>
+        </p:txBody>
+      </p:sp>
+      <p:sp>
+        <p:nvSpPr>
+          <p:cNvPr id="9" name="Shape 6"/>
+          <p:cNvSpPr/>
+          <p:nvPr/>
+        </p:nvSpPr>
+        <p:spPr>
+          <a:xfrm>
+            <a:off x="457200" y="4206240"/>
+            <a:ext cx="5120640" cy="2029968"/>
+          </a:xfrm>
+          <a:prstGeom prst="roundRect">
+            <a:avLst>
+              <a:gd name="adj" fmla="val 3604"/>
+            </a:avLst>
+          </a:prstGeom>
+          <a:solidFill>
+            <a:srgbClr val="F4F6F8"/>
+          </a:solidFill>
+          <a:ln w="9525">
+            <a:solidFill>
+              <a:srgbClr val="F4F6F8"/>
+            </a:solidFill>
+            <a:prstDash val="solid"/>
+          </a:ln>
+        </p:spPr>
+      </p:sp>
+      <p:sp>
+        <p:nvSpPr>
+          <p:cNvPr id="10" name="Text 7"/>
+          <p:cNvSpPr txBox="1"/>
+          <p:nvPr/>
+        </p:nvSpPr>
+        <p:spPr>
+          <a:xfrm>
+            <a:off x="594360" y="4297680"/>
+            <a:ext cx="4846320" cy="1874520"/>
+          </a:xfrm>
+          <a:prstGeom prst="rect">
+            <a:avLst/>
+          </a:prstGeom>
+          <a:noFill/>
+          <a:ln/>
+        </p:spPr>
+        <p:txBody>
+          <a:bodyPr wrap="square" lIns="0" tIns="0" rIns="0" bIns="0" rtlCol="0" anchor="t"/>
+          <a:lstStyle/>
+          <a:p>
+            <a:pPr indent="0" marL="0">
+              <a:spcAft>
+                <a:spcPts val="500"/>
+              </a:spcAft>
+              <a:buNone/>
+            </a:pPr>
+            <a:r>
+              <a:rPr lang="en-US" sz="1100" b="1" dirty="0">
+                <a:solidFill>
+                  <a:srgbClr val="B5651D"/>
+                </a:solidFill>
+              </a:rPr>
+              <a:t>●  </a:t>
+            </a:r>
+            <a:pPr indent="0" marL="0">
+              <a:spcAft>
+                <a:spcPts val="500"/>
+              </a:spcAft>
+              <a:buNone/>
+            </a:pPr>
+            <a:r>
+              <a:rPr lang="en-US" sz="1100" dirty="0">
+                <a:solidFill>
+                  <a:srgbClr val="272425"/>
+                </a:solidFill>
+              </a:rPr>
+              <a:t>Tres supuestos críticos sin evidencia (S-001, S-002, S-003) sostienen los dos beneficios y la factibilidad: ahí se invierte primero en aprender (paso 2).</a:t>
+            </a:r>
+            <a:endParaRPr lang="en-US" sz="1100" dirty="0"/>
+          </a:p>
+          <a:p>
+            <a:pPr indent="0" marL="0">
+              <a:spcAft>
+                <a:spcPts val="500"/>
+              </a:spcAft>
+              <a:buNone/>
+            </a:pPr>
+            <a:r>
+              <a:rPr lang="en-US" sz="1100" b="1" dirty="0">
+                <a:solidFill>
+                  <a:srgbClr val="B5651D"/>
+                </a:solidFill>
+              </a:rPr>
+              <a:t>●  </a:t>
+            </a:r>
+            <a:pPr indent="0" marL="0">
+              <a:spcAft>
+                <a:spcPts val="500"/>
+              </a:spcAft>
+              <a:buNone/>
+            </a:pPr>
+            <a:r>
+              <a:rPr lang="en-US" sz="1100" dirty="0">
+                <a:solidFill>
+                  <a:srgbClr val="272425"/>
+                </a:solidFill>
+              </a:rPr>
+              <a:t>El piloto bajó el VAN de las dos opciones; la opción 2 sigue siendo la mejor, con una TIR de 54,3 % y un repago de 1,78 años (paso 4).</a:t>
+            </a:r>
+            <a:endParaRPr lang="en-US" sz="1100" dirty="0"/>
+          </a:p>
+          <a:p>
+            <a:pPr indent="0" marL="0">
+              <a:spcAft>
+                <a:spcPts val="500"/>
+              </a:spcAft>
+              <a:buNone/>
+            </a:pPr>
+            <a:r>
+              <a:rPr lang="en-US" sz="1100" b="1" dirty="0">
+                <a:solidFill>
+                  <a:srgbClr val="B5651D"/>
+                </a:solidFill>
+              </a:rPr>
+              <a:t>●  </a:t>
+            </a:r>
+            <a:pPr indent="0" marL="0">
+              <a:spcAft>
+                <a:spcPts val="500"/>
+              </a:spcAft>
+              <a:buNone/>
+            </a:pPr>
+            <a:r>
+              <a:rPr lang="en-US" sz="1100" dirty="0">
+                <a:solidFill>
+                  <a:srgbClr val="272425"/>
+                </a:solidFill>
+              </a:rPr>
+              <a:t>Los 4 Must tienen persona y REQ-003 sirve al paciente, a la recepcionista y al paciente mayor de 65; el aviso STK-13 de REQ-006 se resolvió marcando al paciente como beneficiario (paso 10b).</a:t>
+            </a:r>
+            <a:endParaRPr lang="en-US" sz="1100" dirty="0"/>
+          </a:p>
+        </p:txBody>
+      </p:sp>
+      <p:pic>
+        <p:nvPicPr>
+          <p:cNvPr id="11" name="Image 0" descr="/home/claude/pm-method/docs/guias/img/g5-van-opciones.png">    </p:cNvPr>
+          <p:cNvPicPr>
+            <a:picLocks noChangeAspect="1"/>
+          </p:cNvPicPr>
+          <p:nvPr/>
+        </p:nvPicPr>
+        <p:blipFill>
+          <a:blip r:embed="rId1"/>
+          <a:stretch>
+            <a:fillRect/>
+          </a:stretch>
+        </p:blipFill>
+        <p:spPr>
+          <a:xfrm>
+            <a:off x="5806440" y="1298448"/>
+            <a:ext cx="5925312" cy="3332988"/>
+          </a:xfrm>
+          <a:prstGeom prst="rect">
+            <a:avLst/>
+          </a:prstGeom>
+        </p:spPr>
+      </p:pic>
+      <p:sp>
+        <p:nvSpPr>
+          <p:cNvPr id="12" name="Text 8"/>
+          <p:cNvSpPr txBox="1"/>
+          <p:nvPr/>
+        </p:nvSpPr>
+        <p:spPr>
+          <a:xfrm>
+            <a:off x="5806440" y="4686300"/>
+            <a:ext cx="5925312" cy="256032"/>
+          </a:xfrm>
+          <a:prstGeom prst="rect">
+            <a:avLst/>
+          </a:prstGeom>
+          <a:noFill/>
+          <a:ln/>
+        </p:spPr>
+        <p:txBody>
+          <a:bodyPr wrap="square" lIns="0" tIns="0" rIns="0" bIns="0" rtlCol="0" anchor="t"/>
+          <a:lstStyle/>
+          <a:p>
+            <a:pPr algn="ctr" indent="0" marL="0">
+              <a:buNone/>
+            </a:pPr>
+            <a:r>
+              <a:rPr lang="en-US" sz="1000" i="1" dirty="0">
+                <a:solidFill>
+                  <a:srgbClr val="696969"/>
+                </a:solidFill>
+              </a:rPr>
+              <a:t>VAN antes y después de los experimentos</a:t>
+            </a:r>
+            <a:endParaRPr lang="en-US" sz="1000" dirty="0"/>
+          </a:p>
+        </p:txBody>
+      </p:sp>
+      <p:sp>
+        <p:nvSpPr>
+          <p:cNvPr id="13" name="Shape 9"/>
+          <p:cNvSpPr/>
+          <p:nvPr/>
+        </p:nvSpPr>
+        <p:spPr>
+          <a:xfrm>
+            <a:off x="5806440" y="5897880"/>
+            <a:ext cx="5925312" cy="338328"/>
+          </a:xfrm>
+          <a:prstGeom prst="roundRect">
+            <a:avLst>
+              <a:gd name="adj" fmla="val 21622"/>
+            </a:avLst>
+          </a:prstGeom>
+          <a:solidFill>
+            <a:srgbClr val="E9F1F8"/>
+          </a:solidFill>
+          <a:ln w="9525">
+            <a:solidFill>
+              <a:srgbClr val="E9F1F8"/>
+            </a:solidFill>
+            <a:prstDash val="solid"/>
+          </a:ln>
+        </p:spPr>
+      </p:sp>
+      <p:sp>
+        <p:nvSpPr>
+          <p:cNvPr id="14" name="Text 10"/>
+          <p:cNvSpPr txBox="1"/>
+          <p:nvPr/>
+        </p:nvSpPr>
+        <p:spPr>
+          <a:xfrm>
+            <a:off x="5943600" y="5897880"/>
+            <a:ext cx="5669280" cy="338328"/>
+          </a:xfrm>
+          <a:prstGeom prst="rect">
+            <a:avLst/>
+          </a:prstGeom>
+          <a:noFill/>
+          <a:ln/>
+        </p:spPr>
+        <p:txBody>
+          <a:bodyPr wrap="square" lIns="0" tIns="0" rIns="0" bIns="0" rtlCol="0" anchor="ctr"/>
+          <a:lstStyle/>
+          <a:p>
+            <a:pPr indent="0" marL="0">
+              <a:buNone/>
+            </a:pPr>
+            <a:r>
+              <a:rPr lang="en-US" sz="1050" b="1" dirty="0">
+                <a:solidFill>
+                  <a:srgbClr val="002855"/>
+                </a:solidFill>
+              </a:rPr>
+              <a:t>20 pasos · 2 clases de webinar · guía docs/guias/E2E-5-idea-a-proyecto.md</a:t>
+            </a:r>
+            <a:endParaRPr lang="en-US" sz="1050" dirty="0"/>
+          </a:p>
+        </p:txBody>
+      </p:sp>
+      <p:sp>
+        <p:nvSpPr>
+          <p:cNvPr id="25" name="Slide Number Placeholder 0"/>
+          <p:cNvSpPr>
+            <a:spLocks noGrp="1"/>
+          </p:cNvSpPr>
+          <p:nvPr>
+            <p:ph type="sldNum" sz="quarter" idx="4294967295"/>
+          </p:nvPr>
+        </p:nvSpPr>
+        <p:spPr>
+          <a:xfrm>
+            <a:off x="11091672" y="6419088"/>
+            <a:ext cx="640080" cy="274320"/>
+          </a:xfrm>
+          <a:prstGeom prst="rect">
+            <a:avLst/>
+          </a:prstGeom>
+          <a:extLst>
+            <a:ext uri="{C572A759-6A51-4108-AA02-DFA0A04FC94B}">
+              <ma14:wrappingTextBoxFlag xmlns:ma14="http://schemas.microsoft.com/office/mac/drawingml/2011/main" val="0"/>
+            </a:ext>
+          </a:extLst>
+        </p:spPr>
+        <p:txBody>
+          <a:bodyPr/>
+          <a:lstStyle>
+            <a:lvl1pPr>
+              <a:defRPr sz="900">
+                <a:solidFill>
+                  <a:srgbClr val="696969"/>
+                </a:solidFill>
+              </a:defRPr>
+            </a:lvl1pPr>
+          </a:lstStyle>
+          <a:p>
+            <a:pPr algn="r"/>
+            <a:fld id="{F7021451-1387-4CA6-816F-3879F97B5CBC}" type="slidenum">
+              <a:rPr b="0" lang="en-US"/>
+              <a:t>16</a:t>
+            </a:fld>
+            <a:endParaRPr lang="en-US"/>
+          </a:p>
+        </p:txBody>
+      </p:sp>
+    </p:spTree>
+  </p:cSld>
+  <p:clrMapOvr>
+    <a:masterClrMapping/>
+  </p:clrMapOvr>
+</p:sld>
+</file>
+
+<file path=ppt/slides/slide17.xml><?xml version="1.0" encoding="utf-8"?>
+<p:sld xmlns:a="http://schemas.openxmlformats.org/drawingml/2006/main" xmlns:r="http://schemas.openxmlformats.org/officeDocument/2006/relationships" xmlns:p="http://schemas.openxmlformats.org/presentationml/2006/main">
+  <p:cSld name="Slide 17">
+    <p:spTree>
+      <p:nvGrpSpPr>
+        <p:cNvPr id="1" name=""/>
+        <p:cNvGrpSpPr/>
+        <p:nvPr/>
+      </p:nvGrpSpPr>
+      <p:grpSpPr>
+        <a:xfrm>
+          <a:off x="0" y="0"/>
+          <a:ext cx="0" cy="0"/>
+          <a:chOff x="0" y="0"/>
+          <a:chExt cx="0" cy="0"/>
+        </a:xfrm>
+      </p:grpSpPr>
+      <p:sp>
+        <p:nvSpPr>
+          <p:cNvPr id="2" name="Text 3"/>
+          <p:cNvSpPr/>
+          <p:nvPr>
+            <p:ph idx="103" type="title" hasCustomPrompt="1"/>
+          </p:nvPr>
+        </p:nvSpPr>
+        <p:spPr>
+          <a:xfrm>
+            <a:off x="640080" y="365760"/>
+            <a:ext cx="9235440" cy="713232"/>
+          </a:xfrm>
+          <a:prstGeom prst="rect">
+            <a:avLst/>
+          </a:prstGeom>
+          <a:noFill/>
+          <a:ln/>
+        </p:spPr>
+        <p:txBody>
+          <a:bodyPr wrap="square" lIns="0" tIns="0" rIns="0" bIns="0" rtlCol="0" anchor="ctr"/>
+          <a:lstStyle/>
+          <a:p>
+            <a:pPr algn="l" indent="0" marL="0">
+              <a:buNone/>
+            </a:pPr>
+            <a:r>
+              <a:rPr lang="en-US" sz="1900" b="1" dirty="0">
+                <a:solidFill>
+                  <a:srgbClr val="FFFFFF"/>
+                </a:solidFill>
+              </a:rPr>
               <a:t>La confianza se demuestra: pruebas reproducibles, pruebas en vivo y revisión de seguridad</a:t>
             </a:r>
             <a:endParaRPr lang="en-US" sz="1900" dirty="0"/>
@@ -10283,7 +11586,7 @@
                   <a:srgbClr val="FFFFFF"/>
                 </a:solidFill>
               </a:rPr>
-              <a:t>355</a:t>
+              <a:t>463</a:t>
             </a:r>
             <a:endParaRPr lang="en-US" sz="2800" dirty="0"/>
           </a:p>
@@ -10355,7 +11658,7 @@
                   <a:srgbClr val="FFFFFF"/>
                 </a:solidFill>
               </a:rPr>
-              <a:t>0 FALLO · 34 casos</a:t>
+              <a:t>0 FALLO · 43 casos</a:t>
             </a:r>
             <a:endParaRPr lang="en-US" sz="1000" dirty="0"/>
           </a:p>
@@ -10553,7 +11856,7 @@
                   <a:srgbClr val="FFFFFF"/>
                 </a:solidFill>
               </a:rPr>
-              <a:t>128</a:t>
+              <a:t>131</a:t>
             </a:r>
             <a:endParaRPr lang="en-US" sz="2800" dirty="0"/>
           </a:p>
@@ -10688,7 +11991,7 @@
                   <a:srgbClr val="FFFFFF"/>
                 </a:solidFill>
               </a:rPr>
-              <a:t>130</a:t>
+              <a:t>134</a:t>
             </a:r>
             <a:endParaRPr lang="en-US" sz="2800" dirty="0"/>
           </a:p>
@@ -10823,7 +12126,7 @@
                   <a:srgbClr val="002855"/>
                 </a:solidFill>
               </a:rPr>
-              <a:t>PRUEBAS EN VIVO CON CLAUDE CODE REAL (SERIE 2.4)</a:t>
+              <a:t>PRUEBAS EN VIVO CON CLAUDE CODE REAL (LAS MÁS RECIENTES)</a:t>
             </a:r>
             <a:endParaRPr lang="en-US" sz="1000" dirty="0"/>
           </a:p>
@@ -10859,7 +12162,7 @@
                   <a:srgbClr val="B5651D"/>
                 </a:solidFill>
               </a:rPr>
-              <a:t>2/2  </a:t>
+              <a:t>3/3  </a:t>
             </a:r>
             <a:pPr indent="0" marL="0">
               <a:buNone/>
@@ -10870,7 +12173,7 @@
                   <a:srgbClr val="272425"/>
                 </a:solidFill>
               </a:rPr>
-              <a:t>enrutamiento, ids 103–104  </a:t>
+              <a:t>enrutamiento, ids 105–107  </a:t>
             </a:r>
             <a:pPr indent="0" marL="0">
               <a:spcAft>
@@ -10898,7 +12201,7 @@
                   <a:srgbClr val="B5651D"/>
                 </a:solidFill>
               </a:rPr>
-              <a:t>3/3  </a:t>
+              <a:t>12/12  </a:t>
             </a:r>
             <a:pPr indent="0" marL="0">
               <a:buNone/>
@@ -10909,7 +12212,7 @@
                   <a:srgbClr val="272425"/>
                 </a:solidFill>
               </a:rPr>
-              <a:t>enrutamiento, ids 105–107  </a:t>
+              <a:t>enrutamiento, ids 108–114  </a:t>
             </a:r>
             <a:pPr indent="0" marL="0">
               <a:spcAft>
@@ -10937,7 +12240,7 @@
                   <a:srgbClr val="B5651D"/>
                 </a:solidFill>
               </a:rPr>
-              <a:t>12/12  </a:t>
+              <a:t>6/6 · 8/8  </a:t>
             </a:r>
             <a:pPr indent="0" marL="0">
               <a:buNone/>
@@ -10948,7 +12251,7 @@
                   <a:srgbClr val="272425"/>
                 </a:solidFill>
               </a:rPr>
-              <a:t>enrutamiento, ids 108–114  </a:t>
+              <a:t>enrutamiento, ids 115–120  </a:t>
             </a:r>
             <a:pPr indent="0" marL="0">
               <a:spcAft>
@@ -10976,7 +12279,7 @@
                   <a:srgbClr val="B5651D"/>
                 </a:solidFill>
               </a:rPr>
-              <a:t>6/6 · 8/8  </a:t>
+              <a:t>4/4 · 10/10  </a:t>
             </a:r>
             <a:pPr indent="0" marL="0">
               <a:buNone/>
@@ -10987,7 +12290,7 @@
                   <a:srgbClr val="272425"/>
                 </a:solidFill>
               </a:rPr>
-              <a:t>enrutamiento, ids 115–120  </a:t>
+              <a:t>enrutamiento, ids 121–124  </a:t>
             </a:r>
             <a:pPr indent="0" marL="0">
               <a:spcAft>
@@ -11015,7 +12318,7 @@
                   <a:srgbClr val="B5651D"/>
                 </a:solidFill>
               </a:rPr>
-              <a:t>4/4 · 10/10  </a:t>
+              <a:t>2/2  </a:t>
             </a:r>
             <a:pPr indent="0" marL="0">
               <a:buNone/>
@@ -11026,7 +12329,7 @@
                   <a:srgbClr val="272425"/>
                 </a:solidFill>
               </a:rPr>
-              <a:t>enrutamiento, ids 121–124  </a:t>
+              <a:t>enrutamiento, ids 125–126  </a:t>
             </a:r>
             <a:pPr indent="0" marL="0">
               <a:spcAft>
@@ -11040,7 +12343,7 @@
                   <a:srgbClr val="696969"/>
                 </a:solidFill>
               </a:rPr>
-              <a:t>21/10</a:t>
+              <a:t>22/10</a:t>
             </a:r>
             <a:endParaRPr lang="en-US" sz="1200" dirty="0"/>
           </a:p>
@@ -11054,7 +12357,7 @@
                   <a:srgbClr val="B5651D"/>
                 </a:solidFill>
               </a:rPr>
-              <a:t>2/2  </a:t>
+              <a:t>4/4  </a:t>
             </a:r>
             <a:pPr indent="0" marL="0">
               <a:buNone/>
@@ -11065,7 +12368,7 @@
                   <a:srgbClr val="272425"/>
                 </a:solidFill>
               </a:rPr>
-              <a:t>enrutamiento, ids 125–126  </a:t>
+              <a:t>enrutamiento, ids 127–128  </a:t>
             </a:r>
             <a:pPr indent="0" marL="0">
               <a:spcAft>
@@ -11093,7 +12396,7 @@
                   <a:srgbClr val="B5651D"/>
                 </a:solidFill>
               </a:rPr>
-              <a:t>4/4  </a:t>
+              <a:t>2/2  </a:t>
             </a:r>
             <a:pPr indent="0" marL="0">
               <a:buNone/>
@@ -11104,7 +12407,7 @@
                   <a:srgbClr val="272425"/>
                 </a:solidFill>
               </a:rPr>
-              <a:t>enrutamiento, ids 127–128  </a:t>
+              <a:t>enrutamiento, ids 129–130  </a:t>
             </a:r>
             <a:pPr indent="0" marL="0">
               <a:spcAft>
@@ -11132,7 +12435,7 @@
                   <a:srgbClr val="B5651D"/>
                 </a:solidFill>
               </a:rPr>
-              <a:t>2/2  </a:t>
+              <a:t>11/11  </a:t>
             </a:r>
             <a:pPr indent="0" marL="0">
               <a:buNone/>
@@ -11143,7 +12446,7 @@
                   <a:srgbClr val="272425"/>
                 </a:solidFill>
               </a:rPr>
-              <a:t>enrutamiento, ids 129–130  </a:t>
+              <a:t>enrutamiento, ids 131–134  </a:t>
             </a:r>
             <a:pPr indent="0" marL="0">
               <a:spcAft>
@@ -11157,7 +12460,7 @@
                   <a:srgbClr val="696969"/>
                 </a:solidFill>
               </a:rPr>
-              <a:t>22/10</a:t>
+              <a:t>28/10</a:t>
             </a:r>
             <a:endParaRPr lang="en-US" sz="1200" dirty="0"/>
           </a:p>
@@ -11228,7 +12531,7 @@
       </p:sp>
       <p:graphicFrame>
         <p:nvGraphicFramePr>
-          <p:cNvPr id="17" name="Table 0"/>
+          <p:cNvPr id="18" name="Table 0"/>
           <p:cNvGraphicFramePr>
             <a:graphicFrameLocks noGrp="1"/>
           </p:cNvGraphicFramePr>
@@ -12133,7 +13436,7 @@
                           <a:ea typeface="Arial" pitchFamily="34" charset="-122"/>
                           <a:cs typeface="Arial" pitchFamily="34" charset="-120"/>
                         </a:rPr>
-                        <a:t>2</a:t>
+                        <a:t>4</a:t>
                       </a:r>
                       <a:endParaRPr lang="en-US" sz="1000" dirty="0">
                         <a:latin typeface="Arial" charset="0"/>
@@ -12633,764 +13936,6 @@
             <a:pPr algn="r"/>
             <a:fld id="{F7021451-1387-4CA6-816F-3879F97B5CBC}" type="slidenum">
               <a:rPr b="0" lang="en-US"/>
-              <a:t>16</a:t>
-            </a:fld>
-            <a:endParaRPr lang="en-US"/>
-          </a:p>
-        </p:txBody>
-      </p:sp>
-    </p:spTree>
-  </p:cSld>
-  <p:clrMapOvr>
-    <a:masterClrMapping/>
-  </p:clrMapOvr>
-</p:sld>
-</file>
-
-<file path=ppt/slides/slide17.xml><?xml version="1.0" encoding="utf-8"?>
-<p:sld xmlns:a="http://schemas.openxmlformats.org/drawingml/2006/main" xmlns:r="http://schemas.openxmlformats.org/officeDocument/2006/relationships" xmlns:p="http://schemas.openxmlformats.org/presentationml/2006/main">
-  <p:cSld name="Slide 17">
-    <p:spTree>
-      <p:nvGrpSpPr>
-        <p:cNvPr id="1" name=""/>
-        <p:cNvGrpSpPr/>
-        <p:nvPr/>
-      </p:nvGrpSpPr>
-      <p:grpSpPr>
-        <a:xfrm>
-          <a:off x="0" y="0"/>
-          <a:ext cx="0" cy="0"/>
-          <a:chOff x="0" y="0"/>
-          <a:chExt cx="0" cy="0"/>
-        </a:xfrm>
-      </p:grpSpPr>
-      <p:sp>
-        <p:nvSpPr>
-          <p:cNvPr id="2" name="Text 3"/>
-          <p:cNvSpPr/>
-          <p:nvPr>
-            <p:ph idx="103" type="title" hasCustomPrompt="1"/>
-          </p:nvPr>
-        </p:nvSpPr>
-        <p:spPr>
-          <a:xfrm>
-            <a:off x="640080" y="365760"/>
-            <a:ext cx="9235440" cy="713232"/>
-          </a:xfrm>
-          <a:prstGeom prst="rect">
-            <a:avLst/>
-          </a:prstGeom>
-          <a:noFill/>
-          <a:ln/>
-        </p:spPr>
-        <p:txBody>
-          <a:bodyPr wrap="square" lIns="0" tIns="0" rIns="0" bIns="0" rtlCol="0" anchor="ctr"/>
-          <a:lstStyle/>
-          <a:p>
-            <a:pPr algn="l" indent="0" marL="0">
-              <a:buNone/>
-            </a:pPr>
-            <a:r>
-              <a:rPr lang="en-US" sz="1900" b="1" dirty="0">
-                <a:solidFill>
-                  <a:srgbClr val="FFFFFF"/>
-                </a:solidFill>
-              </a:rPr>
-              <a:t>Dos formas de empezar: instalación sobre WSL2 o Linux, o contenedor Docker aislado</a:t>
-            </a:r>
-            <a:endParaRPr lang="en-US" sz="1900" dirty="0"/>
-          </a:p>
-        </p:txBody>
-      </p:sp>
-      <p:sp>
-        <p:nvSpPr>
-          <p:cNvPr id="4" name="Shape 1"/>
-          <p:cNvSpPr/>
-          <p:nvPr/>
-        </p:nvSpPr>
-        <p:spPr>
-          <a:xfrm>
-            <a:off x="457200" y="1298448"/>
-            <a:ext cx="5541264" cy="4937760"/>
-          </a:xfrm>
-          <a:prstGeom prst="roundRect">
-            <a:avLst>
-              <a:gd name="adj" fmla="val 1481"/>
-            </a:avLst>
-          </a:prstGeom>
-          <a:solidFill>
-            <a:srgbClr val="E9F1F8"/>
-          </a:solidFill>
-          <a:ln w="9525">
-            <a:solidFill>
-              <a:srgbClr val="E9F1F8"/>
-            </a:solidFill>
-            <a:prstDash val="solid"/>
-          </a:ln>
-        </p:spPr>
-      </p:sp>
-      <p:sp>
-        <p:nvSpPr>
-          <p:cNvPr id="5" name="Text 2"/>
-          <p:cNvSpPr txBox="1"/>
-          <p:nvPr/>
-        </p:nvSpPr>
-        <p:spPr>
-          <a:xfrm>
-            <a:off x="640080" y="1444752"/>
-            <a:ext cx="5120640" cy="237744"/>
-          </a:xfrm>
-          <a:prstGeom prst="rect">
-            <a:avLst/>
-          </a:prstGeom>
-          <a:noFill/>
-          <a:ln/>
-        </p:spPr>
-        <p:txBody>
-          <a:bodyPr wrap="square" lIns="0" tIns="0" rIns="0" bIns="0" rtlCol="0" anchor="t"/>
-          <a:lstStyle/>
-          <a:p>
-            <a:pPr indent="0" marL="0">
-              <a:buNone/>
-            </a:pPr>
-            <a:r>
-              <a:rPr lang="en-US" sz="1000" b="1" spc="100" kern="0" dirty="0">
-                <a:solidFill>
-                  <a:srgbClr val="002855"/>
-                </a:solidFill>
-              </a:rPr>
-              <a:t>SOBRE WSL2 O LINUX (GUÍA: DOCS/INSTALACION-WSL2.MD)</a:t>
-            </a:r>
-            <a:endParaRPr lang="en-US" sz="1000" dirty="0"/>
-          </a:p>
-        </p:txBody>
-      </p:sp>
-      <p:sp>
-        <p:nvSpPr>
-          <p:cNvPr id="6" name="Shape 3"/>
-          <p:cNvSpPr/>
-          <p:nvPr/>
-        </p:nvSpPr>
-        <p:spPr>
-          <a:xfrm>
-            <a:off x="640080" y="1783080"/>
-            <a:ext cx="5175504" cy="749808"/>
-          </a:xfrm>
-          <a:prstGeom prst="roundRect">
-            <a:avLst>
-              <a:gd name="adj" fmla="val 9756"/>
-            </a:avLst>
-          </a:prstGeom>
-          <a:solidFill>
-            <a:srgbClr val="0F2238"/>
-          </a:solidFill>
-          <a:ln w="9525">
-            <a:solidFill>
-              <a:srgbClr val="0F2238"/>
-            </a:solidFill>
-            <a:prstDash val="solid"/>
-          </a:ln>
-        </p:spPr>
-      </p:sp>
-      <p:sp>
-        <p:nvSpPr>
-          <p:cNvPr id="7" name="Text 4"/>
-          <p:cNvSpPr txBox="1"/>
-          <p:nvPr/>
-        </p:nvSpPr>
-        <p:spPr>
-          <a:xfrm>
-            <a:off x="777240" y="1865376"/>
-            <a:ext cx="4901184" cy="585216"/>
-          </a:xfrm>
-          <a:prstGeom prst="rect">
-            <a:avLst/>
-          </a:prstGeom>
-          <a:noFill/>
-          <a:ln/>
-        </p:spPr>
-        <p:txBody>
-          <a:bodyPr wrap="square" lIns="0" tIns="0" rIns="0" bIns="0" rtlCol="0" anchor="t"/>
-          <a:lstStyle/>
-          <a:p>
-            <a:pPr indent="0" marL="0">
-              <a:buNone/>
-            </a:pPr>
-            <a:r>
-              <a:rPr lang="en-US" sz="1100" dirty="0">
-                <a:solidFill>
-                  <a:srgbClr val="E8EEF5"/>
-                </a:solidFill>
-                <a:latin typeface="Courier New" pitchFamily="34" charset="0"/>
-                <a:ea typeface="Courier New" pitchFamily="34" charset="-122"/>
-                <a:cs typeface="Courier New" pitchFamily="34" charset="-120"/>
-              </a:rPr>
-              <a:t>claude plugin marketplace add Arturo-Penas-Rial/pm-method</a:t>
-            </a:r>
-            <a:endParaRPr lang="en-US" sz="1100" dirty="0"/>
-          </a:p>
-          <a:p>
-            <a:pPr indent="0" marL="0">
-              <a:buNone/>
-            </a:pPr>
-            <a:r>
-              <a:rPr lang="en-US" sz="1100" dirty="0">
-                <a:solidFill>
-                  <a:srgbClr val="E8EEF5"/>
-                </a:solidFill>
-                <a:latin typeface="Courier New" pitchFamily="34" charset="0"/>
-                <a:ea typeface="Courier New" pitchFamily="34" charset="-122"/>
-                <a:cs typeface="Courier New" pitchFamily="34" charset="-120"/>
-              </a:rPr>
-              <a:t>claude plugin install pm-method@pm-method</a:t>
-            </a:r>
-            <a:endParaRPr lang="en-US" sz="1100" dirty="0"/>
-          </a:p>
-        </p:txBody>
-      </p:sp>
-      <p:sp>
-        <p:nvSpPr>
-          <p:cNvPr id="8" name="Text 5"/>
-          <p:cNvSpPr txBox="1"/>
-          <p:nvPr/>
-        </p:nvSpPr>
-        <p:spPr>
-          <a:xfrm>
-            <a:off x="640080" y="2724912"/>
-            <a:ext cx="5120640" cy="237744"/>
-          </a:xfrm>
-          <a:prstGeom prst="rect">
-            <a:avLst/>
-          </a:prstGeom>
-          <a:noFill/>
-          <a:ln/>
-        </p:spPr>
-        <p:txBody>
-          <a:bodyPr wrap="square" lIns="0" tIns="0" rIns="0" bIns="0" rtlCol="0" anchor="t"/>
-          <a:lstStyle/>
-          <a:p>
-            <a:pPr indent="0" marL="0">
-              <a:buNone/>
-            </a:pPr>
-            <a:r>
-              <a:rPr lang="en-US" sz="1000" b="1" spc="100" kern="0" dirty="0">
-                <a:solidFill>
-                  <a:srgbClr val="00629B"/>
-                </a:solidFill>
-              </a:rPr>
-              <a:t>LUEGO, EN UNA SESIÓN</a:t>
-            </a:r>
-            <a:endParaRPr lang="en-US" sz="1000" dirty="0"/>
-          </a:p>
-        </p:txBody>
-      </p:sp>
-      <p:sp>
-        <p:nvSpPr>
-          <p:cNvPr id="9" name="Text 6"/>
-          <p:cNvSpPr txBox="1"/>
-          <p:nvPr/>
-        </p:nvSpPr>
-        <p:spPr>
-          <a:xfrm>
-            <a:off x="640080" y="2999232"/>
-            <a:ext cx="5175504" cy="685800"/>
-          </a:xfrm>
-          <a:prstGeom prst="rect">
-            <a:avLst/>
-          </a:prstGeom>
-          <a:noFill/>
-          <a:ln/>
-        </p:spPr>
-        <p:txBody>
-          <a:bodyPr wrap="square" lIns="0" tIns="0" rIns="0" bIns="0" rtlCol="0" anchor="t"/>
-          <a:lstStyle/>
-          <a:p>
-            <a:pPr indent="0" marL="0">
-              <a:buNone/>
-            </a:pPr>
-            <a:r>
-              <a:rPr lang="en-US" sz="1500" b="1" dirty="0">
-                <a:solidFill>
-                  <a:srgbClr val="002855"/>
-                </a:solidFill>
-              </a:rPr>
-              <a:t>/pm-method:pm-nuevo "Mi proyecto" y "¿qué sigue?"</a:t>
-            </a:r>
-            <a:endParaRPr lang="en-US" sz="1200" dirty="0"/>
-          </a:p>
-        </p:txBody>
-      </p:sp>
-      <p:sp>
-        <p:nvSpPr>
-          <p:cNvPr id="10" name="Shape 7"/>
-          <p:cNvSpPr/>
-          <p:nvPr/>
-        </p:nvSpPr>
-        <p:spPr>
-          <a:xfrm>
-            <a:off x="640080" y="3840480"/>
-            <a:ext cx="5175504" cy="2212848"/>
-          </a:xfrm>
-          <a:prstGeom prst="roundRect">
-            <a:avLst>
-              <a:gd name="adj" fmla="val 3306"/>
-            </a:avLst>
-          </a:prstGeom>
-          <a:solidFill>
-            <a:srgbClr val="FBF1E6"/>
-          </a:solidFill>
-          <a:ln w="9525">
-            <a:solidFill>
-              <a:srgbClr val="FBF1E6"/>
-            </a:solidFill>
-            <a:prstDash val="solid"/>
-          </a:ln>
-        </p:spPr>
-      </p:sp>
-      <p:sp>
-        <p:nvSpPr>
-          <p:cNvPr id="11" name="Text 8"/>
-          <p:cNvSpPr txBox="1"/>
-          <p:nvPr/>
-        </p:nvSpPr>
-        <p:spPr>
-          <a:xfrm>
-            <a:off x="822960" y="3968496"/>
-            <a:ext cx="4809744" cy="1956816"/>
-          </a:xfrm>
-          <a:prstGeom prst="rect">
-            <a:avLst/>
-          </a:prstGeom>
-          <a:noFill/>
-          <a:ln/>
-        </p:spPr>
-        <p:txBody>
-          <a:bodyPr wrap="square" lIns="0" tIns="0" rIns="0" bIns="0" rtlCol="0" anchor="t"/>
-          <a:lstStyle/>
-          <a:p>
-            <a:pPr indent="0" marL="0">
-              <a:buNone/>
-            </a:pPr>
-            <a:r>
-              <a:rPr lang="en-US" sz="1500" b="1" dirty="0">
-                <a:solidFill>
-                  <a:srgbClr val="B5651D"/>
-                </a:solidFill>
-              </a:rPr>
-              <a:t>Siguiente paso: recorrer una guía E2E sobre la copia del proyecto de prueba (docs/guias/README.md) y planificar un piloto en paralelo (docs/PILOTO.md).</a:t>
-            </a:r>
-            <a:endParaRPr lang="en-US" sz="1200" dirty="0"/>
-          </a:p>
-        </p:txBody>
-      </p:sp>
-      <p:sp>
-        <p:nvSpPr>
-          <p:cNvPr id="12" name="Shape 9"/>
-          <p:cNvSpPr/>
-          <p:nvPr/>
-        </p:nvSpPr>
-        <p:spPr>
-          <a:xfrm>
-            <a:off x="6190488" y="1298448"/>
-            <a:ext cx="5541264" cy="4937760"/>
-          </a:xfrm>
-          <a:prstGeom prst="roundRect">
-            <a:avLst>
-              <a:gd name="adj" fmla="val 1481"/>
-            </a:avLst>
-          </a:prstGeom>
-          <a:solidFill>
-            <a:srgbClr val="F4F6F8"/>
-          </a:solidFill>
-          <a:ln w="9525">
-            <a:solidFill>
-              <a:srgbClr val="F4F6F8"/>
-            </a:solidFill>
-            <a:prstDash val="solid"/>
-          </a:ln>
-        </p:spPr>
-      </p:sp>
-      <p:sp>
-        <p:nvSpPr>
-          <p:cNvPr id="13" name="Text 10"/>
-          <p:cNvSpPr txBox="1"/>
-          <p:nvPr/>
-        </p:nvSpPr>
-        <p:spPr>
-          <a:xfrm>
-            <a:off x="6373368" y="1444752"/>
-            <a:ext cx="5120640" cy="237744"/>
-          </a:xfrm>
-          <a:prstGeom prst="rect">
-            <a:avLst/>
-          </a:prstGeom>
-          <a:noFill/>
-          <a:ln/>
-        </p:spPr>
-        <p:txBody>
-          <a:bodyPr wrap="square" lIns="0" tIns="0" rIns="0" bIns="0" rtlCol="0" anchor="t"/>
-          <a:lstStyle/>
-          <a:p>
-            <a:pPr indent="0" marL="0">
-              <a:buNone/>
-            </a:pPr>
-            <a:r>
-              <a:rPr lang="en-US" sz="1000" b="1" spc="100" kern="0" dirty="0">
-                <a:solidFill>
-                  <a:srgbClr val="002855"/>
-                </a:solidFill>
-              </a:rPr>
-              <a:t>DOCKER (GUÍA: DOCS/INSTALACION-DOCKER.MD)</a:t>
-            </a:r>
-            <a:endParaRPr lang="en-US" sz="1000" dirty="0"/>
-          </a:p>
-        </p:txBody>
-      </p:sp>
-      <p:sp>
-        <p:nvSpPr>
-          <p:cNvPr id="14" name="Text 11"/>
-          <p:cNvSpPr txBox="1"/>
-          <p:nvPr/>
-        </p:nvSpPr>
-        <p:spPr>
-          <a:xfrm>
-            <a:off x="6373368" y="1828800"/>
-            <a:ext cx="5120640" cy="292608"/>
-          </a:xfrm>
-          <a:prstGeom prst="rect">
-            <a:avLst/>
-          </a:prstGeom>
-          <a:noFill/>
-          <a:ln/>
-        </p:spPr>
-        <p:txBody>
-          <a:bodyPr wrap="square" lIns="0" tIns="0" rIns="0" bIns="0" rtlCol="0" anchor="t"/>
-          <a:lstStyle/>
-          <a:p>
-            <a:pPr indent="0" marL="0">
-              <a:buNone/>
-            </a:pPr>
-            <a:r>
-              <a:rPr lang="en-US" sz="1300" b="1" dirty="0">
-                <a:solidFill>
-                  <a:srgbClr val="00629B"/>
-                </a:solidFill>
-              </a:rPr>
-              <a:t>1 · Construir la imagen</a:t>
-            </a:r>
-            <a:endParaRPr lang="en-US" sz="1300" dirty="0"/>
-          </a:p>
-        </p:txBody>
-      </p:sp>
-      <p:sp>
-        <p:nvSpPr>
-          <p:cNvPr id="15" name="Shape 12"/>
-          <p:cNvSpPr/>
-          <p:nvPr/>
-        </p:nvSpPr>
-        <p:spPr>
-          <a:xfrm>
-            <a:off x="6373368" y="2176272"/>
-            <a:ext cx="5175504" cy="457200"/>
-          </a:xfrm>
-          <a:prstGeom prst="roundRect">
-            <a:avLst>
-              <a:gd name="adj" fmla="val 16000"/>
-            </a:avLst>
-          </a:prstGeom>
-          <a:solidFill>
-            <a:srgbClr val="0F2238"/>
-          </a:solidFill>
-          <a:ln w="9525">
-            <a:solidFill>
-              <a:srgbClr val="0F2238"/>
-            </a:solidFill>
-            <a:prstDash val="solid"/>
-          </a:ln>
-        </p:spPr>
-      </p:sp>
-      <p:sp>
-        <p:nvSpPr>
-          <p:cNvPr id="16" name="Text 13"/>
-          <p:cNvSpPr txBox="1"/>
-          <p:nvPr/>
-        </p:nvSpPr>
-        <p:spPr>
-          <a:xfrm>
-            <a:off x="6510528" y="2258568"/>
-            <a:ext cx="4901184" cy="292608"/>
-          </a:xfrm>
-          <a:prstGeom prst="rect">
-            <a:avLst/>
-          </a:prstGeom>
-          <a:noFill/>
-          <a:ln/>
-        </p:spPr>
-        <p:txBody>
-          <a:bodyPr wrap="square" lIns="0" tIns="0" rIns="0" bIns="0" rtlCol="0" anchor="t"/>
-          <a:lstStyle/>
-          <a:p>
-            <a:pPr indent="0" marL="0">
-              <a:buNone/>
-            </a:pPr>
-            <a:r>
-              <a:rPr lang="en-US" sz="1100" dirty="0">
-                <a:solidFill>
-                  <a:srgbClr val="E8EEF5"/>
-                </a:solidFill>
-                <a:latin typeface="Courier New" pitchFamily="34" charset="0"/>
-                <a:ea typeface="Courier New" pitchFamily="34" charset="-122"/>
-                <a:cs typeface="Courier New" pitchFamily="34" charset="-120"/>
-              </a:rPr>
-              <a:t>docker compose -f docker/compose.yaml build pm</a:t>
-            </a:r>
-            <a:endParaRPr lang="en-US" sz="1100" dirty="0"/>
-          </a:p>
-        </p:txBody>
-      </p:sp>
-      <p:sp>
-        <p:nvSpPr>
-          <p:cNvPr id="17" name="Text 14"/>
-          <p:cNvSpPr txBox="1"/>
-          <p:nvPr/>
-        </p:nvSpPr>
-        <p:spPr>
-          <a:xfrm>
-            <a:off x="6373368" y="3154680"/>
-            <a:ext cx="5120640" cy="292608"/>
-          </a:xfrm>
-          <a:prstGeom prst="rect">
-            <a:avLst/>
-          </a:prstGeom>
-          <a:noFill/>
-          <a:ln/>
-        </p:spPr>
-        <p:txBody>
-          <a:bodyPr wrap="square" lIns="0" tIns="0" rIns="0" bIns="0" rtlCol="0" anchor="t"/>
-          <a:lstStyle/>
-          <a:p>
-            <a:pPr indent="0" marL="0">
-              <a:buNone/>
-            </a:pPr>
-            <a:r>
-              <a:rPr lang="en-US" sz="1300" b="1" dirty="0">
-                <a:solidFill>
-                  <a:srgbClr val="00629B"/>
-                </a:solidFill>
-              </a:rPr>
-              <a:t>2 · Trabajar sobre un proyecto montado</a:t>
-            </a:r>
-            <a:endParaRPr lang="en-US" sz="1300" dirty="0"/>
-          </a:p>
-        </p:txBody>
-      </p:sp>
-      <p:sp>
-        <p:nvSpPr>
-          <p:cNvPr id="18" name="Shape 15"/>
-          <p:cNvSpPr/>
-          <p:nvPr/>
-        </p:nvSpPr>
-        <p:spPr>
-          <a:xfrm>
-            <a:off x="6373368" y="3502152"/>
-            <a:ext cx="5175504" cy="658368"/>
-          </a:xfrm>
-          <a:prstGeom prst="roundRect">
-            <a:avLst>
-              <a:gd name="adj" fmla="val 11111"/>
-            </a:avLst>
-          </a:prstGeom>
-          <a:solidFill>
-            <a:srgbClr val="0F2238"/>
-          </a:solidFill>
-          <a:ln w="9525">
-            <a:solidFill>
-              <a:srgbClr val="0F2238"/>
-            </a:solidFill>
-            <a:prstDash val="solid"/>
-          </a:ln>
-        </p:spPr>
-      </p:sp>
-      <p:sp>
-        <p:nvSpPr>
-          <p:cNvPr id="19" name="Text 16"/>
-          <p:cNvSpPr txBox="1"/>
-          <p:nvPr/>
-        </p:nvSpPr>
-        <p:spPr>
-          <a:xfrm>
-            <a:off x="6510528" y="3584448"/>
-            <a:ext cx="4901184" cy="493776"/>
-          </a:xfrm>
-          <a:prstGeom prst="rect">
-            <a:avLst/>
-          </a:prstGeom>
-          <a:noFill/>
-          <a:ln/>
-        </p:spPr>
-        <p:txBody>
-          <a:bodyPr wrap="square" lIns="0" tIns="0" rIns="0" bIns="0" rtlCol="0" anchor="t"/>
-          <a:lstStyle/>
-          <a:p>
-            <a:pPr indent="0" marL="0">
-              <a:buNone/>
-            </a:pPr>
-            <a:r>
-              <a:rPr lang="en-US" sz="900" dirty="0">
-                <a:solidFill>
-                  <a:srgbClr val="E8EEF5"/>
-                </a:solidFill>
-                <a:latin typeface="Courier New" pitchFamily="34" charset="0"/>
-                <a:ea typeface="Courier New" pitchFamily="34" charset="-122"/>
-                <a:cs typeface="Courier New" pitchFamily="34" charset="-120"/>
-              </a:rPr>
-              <a:t>PROYECTO=/ruta/al/proyecto docker compose -f /ruta/a/pm-method/docker/compose.yaml run --rm pm</a:t>
-            </a:r>
-            <a:endParaRPr lang="en-US" sz="900" dirty="0"/>
-          </a:p>
-        </p:txBody>
-      </p:sp>
-      <p:sp>
-        <p:nvSpPr>
-          <p:cNvPr id="20" name="Text 17"/>
-          <p:cNvSpPr txBox="1"/>
-          <p:nvPr/>
-        </p:nvSpPr>
-        <p:spPr>
-          <a:xfrm>
-            <a:off x="6373368" y="4480560"/>
-            <a:ext cx="5120640" cy="292608"/>
-          </a:xfrm>
-          <a:prstGeom prst="rect">
-            <a:avLst/>
-          </a:prstGeom>
-          <a:noFill/>
-          <a:ln/>
-        </p:spPr>
-        <p:txBody>
-          <a:bodyPr wrap="square" lIns="0" tIns="0" rIns="0" bIns="0" rtlCol="0" anchor="t"/>
-          <a:lstStyle/>
-          <a:p>
-            <a:pPr indent="0" marL="0">
-              <a:buNone/>
-            </a:pPr>
-            <a:r>
-              <a:rPr lang="en-US" sz="1300" b="1" dirty="0">
-                <a:solidFill>
-                  <a:srgbClr val="00629B"/>
-                </a:solidFill>
-              </a:rPr>
-              <a:t>3 · Correr todas las pruebas sin red</a:t>
-            </a:r>
-            <a:endParaRPr lang="en-US" sz="1300" dirty="0"/>
-          </a:p>
-        </p:txBody>
-      </p:sp>
-      <p:sp>
-        <p:nvSpPr>
-          <p:cNvPr id="21" name="Shape 18"/>
-          <p:cNvSpPr/>
-          <p:nvPr/>
-        </p:nvSpPr>
-        <p:spPr>
-          <a:xfrm>
-            <a:off x="6373368" y="4828032"/>
-            <a:ext cx="5175504" cy="457200"/>
-          </a:xfrm>
-          <a:prstGeom prst="roundRect">
-            <a:avLst>
-              <a:gd name="adj" fmla="val 16000"/>
-            </a:avLst>
-          </a:prstGeom>
-          <a:solidFill>
-            <a:srgbClr val="0F2238"/>
-          </a:solidFill>
-          <a:ln w="9525">
-            <a:solidFill>
-              <a:srgbClr val="0F2238"/>
-            </a:solidFill>
-            <a:prstDash val="solid"/>
-          </a:ln>
-        </p:spPr>
-      </p:sp>
-      <p:sp>
-        <p:nvSpPr>
-          <p:cNvPr id="22" name="Text 19"/>
-          <p:cNvSpPr txBox="1"/>
-          <p:nvPr/>
-        </p:nvSpPr>
-        <p:spPr>
-          <a:xfrm>
-            <a:off x="6510528" y="4910328"/>
-            <a:ext cx="4901184" cy="292608"/>
-          </a:xfrm>
-          <a:prstGeom prst="rect">
-            <a:avLst/>
-          </a:prstGeom>
-          <a:noFill/>
-          <a:ln/>
-        </p:spPr>
-        <p:txBody>
-          <a:bodyPr wrap="square" lIns="0" tIns="0" rIns="0" bIns="0" rtlCol="0" anchor="t"/>
-          <a:lstStyle/>
-          <a:p>
-            <a:pPr indent="0" marL="0">
-              <a:buNone/>
-            </a:pPr>
-            <a:r>
-              <a:rPr lang="en-US" sz="1100" dirty="0">
-                <a:solidFill>
-                  <a:srgbClr val="E8EEF5"/>
-                </a:solidFill>
-                <a:latin typeface="Courier New" pitchFamily="34" charset="0"/>
-                <a:ea typeface="Courier New" pitchFamily="34" charset="-122"/>
-                <a:cs typeface="Courier New" pitchFamily="34" charset="-120"/>
-              </a:rPr>
-              <a:t>docker compose -f docker/compose.yaml run --rm pruebas</a:t>
-            </a:r>
-            <a:endParaRPr lang="en-US" sz="1100" dirty="0"/>
-          </a:p>
-        </p:txBody>
-      </p:sp>
-      <p:sp>
-        <p:nvSpPr>
-          <p:cNvPr id="25" name="Slide Number Placeholder 0"/>
-          <p:cNvSpPr>
-            <a:spLocks noGrp="1"/>
-          </p:cNvSpPr>
-          <p:nvPr>
-            <p:ph type="sldNum" sz="quarter" idx="4294967295"/>
-          </p:nvPr>
-        </p:nvSpPr>
-        <p:spPr>
-          <a:xfrm>
-            <a:off x="11091672" y="6419088"/>
-            <a:ext cx="640080" cy="274320"/>
-          </a:xfrm>
-          <a:prstGeom prst="rect">
-            <a:avLst/>
-          </a:prstGeom>
-          <a:extLst>
-            <a:ext uri="{C572A759-6A51-4108-AA02-DFA0A04FC94B}">
-              <ma14:wrappingTextBoxFlag xmlns:ma14="http://schemas.microsoft.com/office/mac/drawingml/2011/main" val="0"/>
-            </a:ext>
-          </a:extLst>
-        </p:spPr>
-        <p:txBody>
-          <a:bodyPr/>
-          <a:lstStyle>
-            <a:lvl1pPr>
-              <a:defRPr sz="900">
-                <a:solidFill>
-                  <a:srgbClr val="696969"/>
-                </a:solidFill>
-              </a:defRPr>
-            </a:lvl1pPr>
-          </a:lstStyle>
-          <a:p>
-            <a:pPr algn="r"/>
-            <a:fld id="{F7021451-1387-4CA6-816F-3879F97B5CBC}" type="slidenum">
-              <a:rPr b="0" lang="en-US"/>
               <a:t>17</a:t>
             </a:fld>
             <a:endParaRPr lang="en-US"/>
@@ -13454,6 +13999,764 @@
                   <a:srgbClr val="FFFFFF"/>
                 </a:solidFill>
               </a:rPr>
+              <a:t>Dos formas de empezar: instalación sobre WSL2 o Linux, o contenedor Docker aislado</a:t>
+            </a:r>
+            <a:endParaRPr lang="en-US" sz="1900" dirty="0"/>
+          </a:p>
+        </p:txBody>
+      </p:sp>
+      <p:sp>
+        <p:nvSpPr>
+          <p:cNvPr id="4" name="Shape 1"/>
+          <p:cNvSpPr/>
+          <p:nvPr/>
+        </p:nvSpPr>
+        <p:spPr>
+          <a:xfrm>
+            <a:off x="457200" y="1298448"/>
+            <a:ext cx="5541264" cy="4937760"/>
+          </a:xfrm>
+          <a:prstGeom prst="roundRect">
+            <a:avLst>
+              <a:gd name="adj" fmla="val 1481"/>
+            </a:avLst>
+          </a:prstGeom>
+          <a:solidFill>
+            <a:srgbClr val="E9F1F8"/>
+          </a:solidFill>
+          <a:ln w="9525">
+            <a:solidFill>
+              <a:srgbClr val="E9F1F8"/>
+            </a:solidFill>
+            <a:prstDash val="solid"/>
+          </a:ln>
+        </p:spPr>
+      </p:sp>
+      <p:sp>
+        <p:nvSpPr>
+          <p:cNvPr id="5" name="Text 2"/>
+          <p:cNvSpPr txBox="1"/>
+          <p:nvPr/>
+        </p:nvSpPr>
+        <p:spPr>
+          <a:xfrm>
+            <a:off x="640080" y="1444752"/>
+            <a:ext cx="5120640" cy="237744"/>
+          </a:xfrm>
+          <a:prstGeom prst="rect">
+            <a:avLst/>
+          </a:prstGeom>
+          <a:noFill/>
+          <a:ln/>
+        </p:spPr>
+        <p:txBody>
+          <a:bodyPr wrap="square" lIns="0" tIns="0" rIns="0" bIns="0" rtlCol="0" anchor="t"/>
+          <a:lstStyle/>
+          <a:p>
+            <a:pPr indent="0" marL="0">
+              <a:buNone/>
+            </a:pPr>
+            <a:r>
+              <a:rPr lang="en-US" sz="1000" b="1" spc="100" kern="0" dirty="0">
+                <a:solidFill>
+                  <a:srgbClr val="002855"/>
+                </a:solidFill>
+              </a:rPr>
+              <a:t>SOBRE WSL2 O LINUX (GUÍA: DOCS/INSTALACION-WSL2.MD)</a:t>
+            </a:r>
+            <a:endParaRPr lang="en-US" sz="1000" dirty="0"/>
+          </a:p>
+        </p:txBody>
+      </p:sp>
+      <p:sp>
+        <p:nvSpPr>
+          <p:cNvPr id="6" name="Shape 3"/>
+          <p:cNvSpPr/>
+          <p:nvPr/>
+        </p:nvSpPr>
+        <p:spPr>
+          <a:xfrm>
+            <a:off x="640080" y="1783080"/>
+            <a:ext cx="5175504" cy="749808"/>
+          </a:xfrm>
+          <a:prstGeom prst="roundRect">
+            <a:avLst>
+              <a:gd name="adj" fmla="val 9756"/>
+            </a:avLst>
+          </a:prstGeom>
+          <a:solidFill>
+            <a:srgbClr val="0F2238"/>
+          </a:solidFill>
+          <a:ln w="9525">
+            <a:solidFill>
+              <a:srgbClr val="0F2238"/>
+            </a:solidFill>
+            <a:prstDash val="solid"/>
+          </a:ln>
+        </p:spPr>
+      </p:sp>
+      <p:sp>
+        <p:nvSpPr>
+          <p:cNvPr id="7" name="Text 4"/>
+          <p:cNvSpPr txBox="1"/>
+          <p:nvPr/>
+        </p:nvSpPr>
+        <p:spPr>
+          <a:xfrm>
+            <a:off x="777240" y="1865376"/>
+            <a:ext cx="4901184" cy="585216"/>
+          </a:xfrm>
+          <a:prstGeom prst="rect">
+            <a:avLst/>
+          </a:prstGeom>
+          <a:noFill/>
+          <a:ln/>
+        </p:spPr>
+        <p:txBody>
+          <a:bodyPr wrap="square" lIns="0" tIns="0" rIns="0" bIns="0" rtlCol="0" anchor="t"/>
+          <a:lstStyle/>
+          <a:p>
+            <a:pPr indent="0" marL="0">
+              <a:buNone/>
+            </a:pPr>
+            <a:r>
+              <a:rPr lang="en-US" sz="1100" dirty="0">
+                <a:solidFill>
+                  <a:srgbClr val="E8EEF5"/>
+                </a:solidFill>
+                <a:latin typeface="Courier New" pitchFamily="34" charset="0"/>
+                <a:ea typeface="Courier New" pitchFamily="34" charset="-122"/>
+                <a:cs typeface="Courier New" pitchFamily="34" charset="-120"/>
+              </a:rPr>
+              <a:t>claude plugin marketplace add Arturo-Penas-Rial/pm-method</a:t>
+            </a:r>
+            <a:endParaRPr lang="en-US" sz="1100" dirty="0"/>
+          </a:p>
+          <a:p>
+            <a:pPr indent="0" marL="0">
+              <a:buNone/>
+            </a:pPr>
+            <a:r>
+              <a:rPr lang="en-US" sz="1100" dirty="0">
+                <a:solidFill>
+                  <a:srgbClr val="E8EEF5"/>
+                </a:solidFill>
+                <a:latin typeface="Courier New" pitchFamily="34" charset="0"/>
+                <a:ea typeface="Courier New" pitchFamily="34" charset="-122"/>
+                <a:cs typeface="Courier New" pitchFamily="34" charset="-120"/>
+              </a:rPr>
+              <a:t>claude plugin install pm-method@pm-method</a:t>
+            </a:r>
+            <a:endParaRPr lang="en-US" sz="1100" dirty="0"/>
+          </a:p>
+        </p:txBody>
+      </p:sp>
+      <p:sp>
+        <p:nvSpPr>
+          <p:cNvPr id="8" name="Text 5"/>
+          <p:cNvSpPr txBox="1"/>
+          <p:nvPr/>
+        </p:nvSpPr>
+        <p:spPr>
+          <a:xfrm>
+            <a:off x="640080" y="2724912"/>
+            <a:ext cx="5120640" cy="237744"/>
+          </a:xfrm>
+          <a:prstGeom prst="rect">
+            <a:avLst/>
+          </a:prstGeom>
+          <a:noFill/>
+          <a:ln/>
+        </p:spPr>
+        <p:txBody>
+          <a:bodyPr wrap="square" lIns="0" tIns="0" rIns="0" bIns="0" rtlCol="0" anchor="t"/>
+          <a:lstStyle/>
+          <a:p>
+            <a:pPr indent="0" marL="0">
+              <a:buNone/>
+            </a:pPr>
+            <a:r>
+              <a:rPr lang="en-US" sz="1000" b="1" spc="100" kern="0" dirty="0">
+                <a:solidFill>
+                  <a:srgbClr val="00629B"/>
+                </a:solidFill>
+              </a:rPr>
+              <a:t>LUEGO, EN UNA SESIÓN</a:t>
+            </a:r>
+            <a:endParaRPr lang="en-US" sz="1000" dirty="0"/>
+          </a:p>
+        </p:txBody>
+      </p:sp>
+      <p:sp>
+        <p:nvSpPr>
+          <p:cNvPr id="9" name="Text 6"/>
+          <p:cNvSpPr txBox="1"/>
+          <p:nvPr/>
+        </p:nvSpPr>
+        <p:spPr>
+          <a:xfrm>
+            <a:off x="640080" y="2999232"/>
+            <a:ext cx="5175504" cy="685800"/>
+          </a:xfrm>
+          <a:prstGeom prst="rect">
+            <a:avLst/>
+          </a:prstGeom>
+          <a:noFill/>
+          <a:ln/>
+        </p:spPr>
+        <p:txBody>
+          <a:bodyPr wrap="square" lIns="0" tIns="0" rIns="0" bIns="0" rtlCol="0" anchor="t"/>
+          <a:lstStyle/>
+          <a:p>
+            <a:pPr indent="0" marL="0">
+              <a:buNone/>
+            </a:pPr>
+            <a:r>
+              <a:rPr lang="en-US" sz="1500" b="1" dirty="0">
+                <a:solidFill>
+                  <a:srgbClr val="002855"/>
+                </a:solidFill>
+              </a:rPr>
+              <a:t>/pm-method:pm-nuevo "Mi proyecto" y "¿qué sigue?"</a:t>
+            </a:r>
+            <a:endParaRPr lang="en-US" sz="1200" dirty="0"/>
+          </a:p>
+        </p:txBody>
+      </p:sp>
+      <p:sp>
+        <p:nvSpPr>
+          <p:cNvPr id="10" name="Shape 7"/>
+          <p:cNvSpPr/>
+          <p:nvPr/>
+        </p:nvSpPr>
+        <p:spPr>
+          <a:xfrm>
+            <a:off x="640080" y="3840480"/>
+            <a:ext cx="5175504" cy="2212848"/>
+          </a:xfrm>
+          <a:prstGeom prst="roundRect">
+            <a:avLst>
+              <a:gd name="adj" fmla="val 3306"/>
+            </a:avLst>
+          </a:prstGeom>
+          <a:solidFill>
+            <a:srgbClr val="FBF1E6"/>
+          </a:solidFill>
+          <a:ln w="9525">
+            <a:solidFill>
+              <a:srgbClr val="FBF1E6"/>
+            </a:solidFill>
+            <a:prstDash val="solid"/>
+          </a:ln>
+        </p:spPr>
+      </p:sp>
+      <p:sp>
+        <p:nvSpPr>
+          <p:cNvPr id="11" name="Text 8"/>
+          <p:cNvSpPr txBox="1"/>
+          <p:nvPr/>
+        </p:nvSpPr>
+        <p:spPr>
+          <a:xfrm>
+            <a:off x="822960" y="3968496"/>
+            <a:ext cx="4809744" cy="1956816"/>
+          </a:xfrm>
+          <a:prstGeom prst="rect">
+            <a:avLst/>
+          </a:prstGeom>
+          <a:noFill/>
+          <a:ln/>
+        </p:spPr>
+        <p:txBody>
+          <a:bodyPr wrap="square" lIns="0" tIns="0" rIns="0" bIns="0" rtlCol="0" anchor="t"/>
+          <a:lstStyle/>
+          <a:p>
+            <a:pPr indent="0" marL="0">
+              <a:buNone/>
+            </a:pPr>
+            <a:r>
+              <a:rPr lang="en-US" sz="1500" b="1" dirty="0">
+                <a:solidFill>
+                  <a:srgbClr val="B5651D"/>
+                </a:solidFill>
+              </a:rPr>
+              <a:t>Siguiente paso: recorrer una guía E2E sobre la copia del proyecto de prueba (docs/guias/README.md) y planificar un piloto en paralelo (docs/PILOTO.md). Opcional, en cualquiera de los dos caminos: pm-kb para buscar en los proyectos con evidencia citada (docs/PM-KB.md).</a:t>
+            </a:r>
+            <a:endParaRPr lang="en-US" sz="1200" dirty="0"/>
+          </a:p>
+        </p:txBody>
+      </p:sp>
+      <p:sp>
+        <p:nvSpPr>
+          <p:cNvPr id="12" name="Shape 9"/>
+          <p:cNvSpPr/>
+          <p:nvPr/>
+        </p:nvSpPr>
+        <p:spPr>
+          <a:xfrm>
+            <a:off x="6190488" y="1298448"/>
+            <a:ext cx="5541264" cy="4937760"/>
+          </a:xfrm>
+          <a:prstGeom prst="roundRect">
+            <a:avLst>
+              <a:gd name="adj" fmla="val 1481"/>
+            </a:avLst>
+          </a:prstGeom>
+          <a:solidFill>
+            <a:srgbClr val="F4F6F8"/>
+          </a:solidFill>
+          <a:ln w="9525">
+            <a:solidFill>
+              <a:srgbClr val="F4F6F8"/>
+            </a:solidFill>
+            <a:prstDash val="solid"/>
+          </a:ln>
+        </p:spPr>
+      </p:sp>
+      <p:sp>
+        <p:nvSpPr>
+          <p:cNvPr id="13" name="Text 10"/>
+          <p:cNvSpPr txBox="1"/>
+          <p:nvPr/>
+        </p:nvSpPr>
+        <p:spPr>
+          <a:xfrm>
+            <a:off x="6373368" y="1444752"/>
+            <a:ext cx="5120640" cy="237744"/>
+          </a:xfrm>
+          <a:prstGeom prst="rect">
+            <a:avLst/>
+          </a:prstGeom>
+          <a:noFill/>
+          <a:ln/>
+        </p:spPr>
+        <p:txBody>
+          <a:bodyPr wrap="square" lIns="0" tIns="0" rIns="0" bIns="0" rtlCol="0" anchor="t"/>
+          <a:lstStyle/>
+          <a:p>
+            <a:pPr indent="0" marL="0">
+              <a:buNone/>
+            </a:pPr>
+            <a:r>
+              <a:rPr lang="en-US" sz="1000" b="1" spc="100" kern="0" dirty="0">
+                <a:solidFill>
+                  <a:srgbClr val="002855"/>
+                </a:solidFill>
+              </a:rPr>
+              <a:t>DOCKER (GUÍA: DOCS/INSTALACION-DOCKER.MD)</a:t>
+            </a:r>
+            <a:endParaRPr lang="en-US" sz="1000" dirty="0"/>
+          </a:p>
+        </p:txBody>
+      </p:sp>
+      <p:sp>
+        <p:nvSpPr>
+          <p:cNvPr id="14" name="Text 11"/>
+          <p:cNvSpPr txBox="1"/>
+          <p:nvPr/>
+        </p:nvSpPr>
+        <p:spPr>
+          <a:xfrm>
+            <a:off x="6373368" y="1828800"/>
+            <a:ext cx="5120640" cy="292608"/>
+          </a:xfrm>
+          <a:prstGeom prst="rect">
+            <a:avLst/>
+          </a:prstGeom>
+          <a:noFill/>
+          <a:ln/>
+        </p:spPr>
+        <p:txBody>
+          <a:bodyPr wrap="square" lIns="0" tIns="0" rIns="0" bIns="0" rtlCol="0" anchor="t"/>
+          <a:lstStyle/>
+          <a:p>
+            <a:pPr indent="0" marL="0">
+              <a:buNone/>
+            </a:pPr>
+            <a:r>
+              <a:rPr lang="en-US" sz="1300" b="1" dirty="0">
+                <a:solidFill>
+                  <a:srgbClr val="00629B"/>
+                </a:solidFill>
+              </a:rPr>
+              <a:t>1 · Construir la imagen</a:t>
+            </a:r>
+            <a:endParaRPr lang="en-US" sz="1300" dirty="0"/>
+          </a:p>
+        </p:txBody>
+      </p:sp>
+      <p:sp>
+        <p:nvSpPr>
+          <p:cNvPr id="15" name="Shape 12"/>
+          <p:cNvSpPr/>
+          <p:nvPr/>
+        </p:nvSpPr>
+        <p:spPr>
+          <a:xfrm>
+            <a:off x="6373368" y="2176272"/>
+            <a:ext cx="5175504" cy="457200"/>
+          </a:xfrm>
+          <a:prstGeom prst="roundRect">
+            <a:avLst>
+              <a:gd name="adj" fmla="val 16000"/>
+            </a:avLst>
+          </a:prstGeom>
+          <a:solidFill>
+            <a:srgbClr val="0F2238"/>
+          </a:solidFill>
+          <a:ln w="9525">
+            <a:solidFill>
+              <a:srgbClr val="0F2238"/>
+            </a:solidFill>
+            <a:prstDash val="solid"/>
+          </a:ln>
+        </p:spPr>
+      </p:sp>
+      <p:sp>
+        <p:nvSpPr>
+          <p:cNvPr id="16" name="Text 13"/>
+          <p:cNvSpPr txBox="1"/>
+          <p:nvPr/>
+        </p:nvSpPr>
+        <p:spPr>
+          <a:xfrm>
+            <a:off x="6510528" y="2258568"/>
+            <a:ext cx="4901184" cy="292608"/>
+          </a:xfrm>
+          <a:prstGeom prst="rect">
+            <a:avLst/>
+          </a:prstGeom>
+          <a:noFill/>
+          <a:ln/>
+        </p:spPr>
+        <p:txBody>
+          <a:bodyPr wrap="square" lIns="0" tIns="0" rIns="0" bIns="0" rtlCol="0" anchor="t"/>
+          <a:lstStyle/>
+          <a:p>
+            <a:pPr indent="0" marL="0">
+              <a:buNone/>
+            </a:pPr>
+            <a:r>
+              <a:rPr lang="en-US" sz="1100" dirty="0">
+                <a:solidFill>
+                  <a:srgbClr val="E8EEF5"/>
+                </a:solidFill>
+                <a:latin typeface="Courier New" pitchFamily="34" charset="0"/>
+                <a:ea typeface="Courier New" pitchFamily="34" charset="-122"/>
+                <a:cs typeface="Courier New" pitchFamily="34" charset="-120"/>
+              </a:rPr>
+              <a:t>docker compose -f docker/compose.yaml build pm</a:t>
+            </a:r>
+            <a:endParaRPr lang="en-US" sz="1100" dirty="0"/>
+          </a:p>
+        </p:txBody>
+      </p:sp>
+      <p:sp>
+        <p:nvSpPr>
+          <p:cNvPr id="17" name="Text 14"/>
+          <p:cNvSpPr txBox="1"/>
+          <p:nvPr/>
+        </p:nvSpPr>
+        <p:spPr>
+          <a:xfrm>
+            <a:off x="6373368" y="3154680"/>
+            <a:ext cx="5120640" cy="292608"/>
+          </a:xfrm>
+          <a:prstGeom prst="rect">
+            <a:avLst/>
+          </a:prstGeom>
+          <a:noFill/>
+          <a:ln/>
+        </p:spPr>
+        <p:txBody>
+          <a:bodyPr wrap="square" lIns="0" tIns="0" rIns="0" bIns="0" rtlCol="0" anchor="t"/>
+          <a:lstStyle/>
+          <a:p>
+            <a:pPr indent="0" marL="0">
+              <a:buNone/>
+            </a:pPr>
+            <a:r>
+              <a:rPr lang="en-US" sz="1300" b="1" dirty="0">
+                <a:solidFill>
+                  <a:srgbClr val="00629B"/>
+                </a:solidFill>
+              </a:rPr>
+              <a:t>2 · Trabajar sobre un proyecto montado</a:t>
+            </a:r>
+            <a:endParaRPr lang="en-US" sz="1300" dirty="0"/>
+          </a:p>
+        </p:txBody>
+      </p:sp>
+      <p:sp>
+        <p:nvSpPr>
+          <p:cNvPr id="18" name="Shape 15"/>
+          <p:cNvSpPr/>
+          <p:nvPr/>
+        </p:nvSpPr>
+        <p:spPr>
+          <a:xfrm>
+            <a:off x="6373368" y="3502152"/>
+            <a:ext cx="5175504" cy="658368"/>
+          </a:xfrm>
+          <a:prstGeom prst="roundRect">
+            <a:avLst>
+              <a:gd name="adj" fmla="val 11111"/>
+            </a:avLst>
+          </a:prstGeom>
+          <a:solidFill>
+            <a:srgbClr val="0F2238"/>
+          </a:solidFill>
+          <a:ln w="9525">
+            <a:solidFill>
+              <a:srgbClr val="0F2238"/>
+            </a:solidFill>
+            <a:prstDash val="solid"/>
+          </a:ln>
+        </p:spPr>
+      </p:sp>
+      <p:sp>
+        <p:nvSpPr>
+          <p:cNvPr id="19" name="Text 16"/>
+          <p:cNvSpPr txBox="1"/>
+          <p:nvPr/>
+        </p:nvSpPr>
+        <p:spPr>
+          <a:xfrm>
+            <a:off x="6510528" y="3584448"/>
+            <a:ext cx="4901184" cy="493776"/>
+          </a:xfrm>
+          <a:prstGeom prst="rect">
+            <a:avLst/>
+          </a:prstGeom>
+          <a:noFill/>
+          <a:ln/>
+        </p:spPr>
+        <p:txBody>
+          <a:bodyPr wrap="square" lIns="0" tIns="0" rIns="0" bIns="0" rtlCol="0" anchor="t"/>
+          <a:lstStyle/>
+          <a:p>
+            <a:pPr indent="0" marL="0">
+              <a:buNone/>
+            </a:pPr>
+            <a:r>
+              <a:rPr lang="en-US" sz="900" dirty="0">
+                <a:solidFill>
+                  <a:srgbClr val="E8EEF5"/>
+                </a:solidFill>
+                <a:latin typeface="Courier New" pitchFamily="34" charset="0"/>
+                <a:ea typeface="Courier New" pitchFamily="34" charset="-122"/>
+                <a:cs typeface="Courier New" pitchFamily="34" charset="-120"/>
+              </a:rPr>
+              <a:t>PROYECTO=/ruta/al/proyecto docker compose -f /ruta/a/pm-method/docker/compose.yaml run --rm pm</a:t>
+            </a:r>
+            <a:endParaRPr lang="en-US" sz="900" dirty="0"/>
+          </a:p>
+        </p:txBody>
+      </p:sp>
+      <p:sp>
+        <p:nvSpPr>
+          <p:cNvPr id="20" name="Text 17"/>
+          <p:cNvSpPr txBox="1"/>
+          <p:nvPr/>
+        </p:nvSpPr>
+        <p:spPr>
+          <a:xfrm>
+            <a:off x="6373368" y="4480560"/>
+            <a:ext cx="5120640" cy="292608"/>
+          </a:xfrm>
+          <a:prstGeom prst="rect">
+            <a:avLst/>
+          </a:prstGeom>
+          <a:noFill/>
+          <a:ln/>
+        </p:spPr>
+        <p:txBody>
+          <a:bodyPr wrap="square" lIns="0" tIns="0" rIns="0" bIns="0" rtlCol="0" anchor="t"/>
+          <a:lstStyle/>
+          <a:p>
+            <a:pPr indent="0" marL="0">
+              <a:buNone/>
+            </a:pPr>
+            <a:r>
+              <a:rPr lang="en-US" sz="1300" b="1" dirty="0">
+                <a:solidFill>
+                  <a:srgbClr val="00629B"/>
+                </a:solidFill>
+              </a:rPr>
+              <a:t>3 · Correr todas las pruebas sin red</a:t>
+            </a:r>
+            <a:endParaRPr lang="en-US" sz="1300" dirty="0"/>
+          </a:p>
+        </p:txBody>
+      </p:sp>
+      <p:sp>
+        <p:nvSpPr>
+          <p:cNvPr id="21" name="Shape 18"/>
+          <p:cNvSpPr/>
+          <p:nvPr/>
+        </p:nvSpPr>
+        <p:spPr>
+          <a:xfrm>
+            <a:off x="6373368" y="4828032"/>
+            <a:ext cx="5175504" cy="457200"/>
+          </a:xfrm>
+          <a:prstGeom prst="roundRect">
+            <a:avLst>
+              <a:gd name="adj" fmla="val 16000"/>
+            </a:avLst>
+          </a:prstGeom>
+          <a:solidFill>
+            <a:srgbClr val="0F2238"/>
+          </a:solidFill>
+          <a:ln w="9525">
+            <a:solidFill>
+              <a:srgbClr val="0F2238"/>
+            </a:solidFill>
+            <a:prstDash val="solid"/>
+          </a:ln>
+        </p:spPr>
+      </p:sp>
+      <p:sp>
+        <p:nvSpPr>
+          <p:cNvPr id="22" name="Text 19"/>
+          <p:cNvSpPr txBox="1"/>
+          <p:nvPr/>
+        </p:nvSpPr>
+        <p:spPr>
+          <a:xfrm>
+            <a:off x="6510528" y="4910328"/>
+            <a:ext cx="4901184" cy="292608"/>
+          </a:xfrm>
+          <a:prstGeom prst="rect">
+            <a:avLst/>
+          </a:prstGeom>
+          <a:noFill/>
+          <a:ln/>
+        </p:spPr>
+        <p:txBody>
+          <a:bodyPr wrap="square" lIns="0" tIns="0" rIns="0" bIns="0" rtlCol="0" anchor="t"/>
+          <a:lstStyle/>
+          <a:p>
+            <a:pPr indent="0" marL="0">
+              <a:buNone/>
+            </a:pPr>
+            <a:r>
+              <a:rPr lang="en-US" sz="1100" dirty="0">
+                <a:solidFill>
+                  <a:srgbClr val="E8EEF5"/>
+                </a:solidFill>
+                <a:latin typeface="Courier New" pitchFamily="34" charset="0"/>
+                <a:ea typeface="Courier New" pitchFamily="34" charset="-122"/>
+                <a:cs typeface="Courier New" pitchFamily="34" charset="-120"/>
+              </a:rPr>
+              <a:t>docker compose -f docker/compose.yaml run --rm pruebas</a:t>
+            </a:r>
+            <a:endParaRPr lang="en-US" sz="1100" dirty="0"/>
+          </a:p>
+        </p:txBody>
+      </p:sp>
+      <p:sp>
+        <p:nvSpPr>
+          <p:cNvPr id="25" name="Slide Number Placeholder 0"/>
+          <p:cNvSpPr>
+            <a:spLocks noGrp="1"/>
+          </p:cNvSpPr>
+          <p:nvPr>
+            <p:ph type="sldNum" sz="quarter" idx="4294967295"/>
+          </p:nvPr>
+        </p:nvSpPr>
+        <p:spPr>
+          <a:xfrm>
+            <a:off x="11091672" y="6419088"/>
+            <a:ext cx="640080" cy="274320"/>
+          </a:xfrm>
+          <a:prstGeom prst="rect">
+            <a:avLst/>
+          </a:prstGeom>
+          <a:extLst>
+            <a:ext uri="{C572A759-6A51-4108-AA02-DFA0A04FC94B}">
+              <ma14:wrappingTextBoxFlag xmlns:ma14="http://schemas.microsoft.com/office/mac/drawingml/2011/main" val="0"/>
+            </a:ext>
+          </a:extLst>
+        </p:spPr>
+        <p:txBody>
+          <a:bodyPr/>
+          <a:lstStyle>
+            <a:lvl1pPr>
+              <a:defRPr sz="900">
+                <a:solidFill>
+                  <a:srgbClr val="696969"/>
+                </a:solidFill>
+              </a:defRPr>
+            </a:lvl1pPr>
+          </a:lstStyle>
+          <a:p>
+            <a:pPr algn="r"/>
+            <a:fld id="{F7021451-1387-4CA6-816F-3879F97B5CBC}" type="slidenum">
+              <a:rPr b="0" lang="en-US"/>
+              <a:t>18</a:t>
+            </a:fld>
+            <a:endParaRPr lang="en-US"/>
+          </a:p>
+        </p:txBody>
+      </p:sp>
+    </p:spTree>
+  </p:cSld>
+  <p:clrMapOvr>
+    <a:masterClrMapping/>
+  </p:clrMapOvr>
+</p:sld>
+</file>
+
+<file path=ppt/slides/slide19.xml><?xml version="1.0" encoding="utf-8"?>
+<p:sld xmlns:a="http://schemas.openxmlformats.org/drawingml/2006/main" xmlns:r="http://schemas.openxmlformats.org/officeDocument/2006/relationships" xmlns:p="http://schemas.openxmlformats.org/presentationml/2006/main">
+  <p:cSld name="Slide 19">
+    <p:spTree>
+      <p:nvGrpSpPr>
+        <p:cNvPr id="1" name=""/>
+        <p:cNvGrpSpPr/>
+        <p:nvPr/>
+      </p:nvGrpSpPr>
+      <p:grpSpPr>
+        <a:xfrm>
+          <a:off x="0" y="0"/>
+          <a:ext cx="0" cy="0"/>
+          <a:chOff x="0" y="0"/>
+          <a:chExt cx="0" cy="0"/>
+        </a:xfrm>
+      </p:grpSpPr>
+      <p:sp>
+        <p:nvSpPr>
+          <p:cNvPr id="2" name="Text 3"/>
+          <p:cNvSpPr/>
+          <p:nvPr>
+            <p:ph idx="103" type="title" hasCustomPrompt="1"/>
+          </p:nvPr>
+        </p:nvSpPr>
+        <p:spPr>
+          <a:xfrm>
+            <a:off x="640080" y="365760"/>
+            <a:ext cx="9235440" cy="713232"/>
+          </a:xfrm>
+          <a:prstGeom prst="rect">
+            <a:avLst/>
+          </a:prstGeom>
+          <a:noFill/>
+          <a:ln/>
+        </p:spPr>
+        <p:txBody>
+          <a:bodyPr wrap="square" lIns="0" tIns="0" rIns="0" bIns="0" rtlCol="0" anchor="ctr"/>
+          <a:lstStyle/>
+          <a:p>
+            <a:pPr algn="l" indent="0" marL="0">
+              <a:buNone/>
+            </a:pPr>
+            <a:r>
+              <a:rPr lang="en-US" sz="1900" b="1" dirty="0">
+                <a:solidFill>
+                  <a:srgbClr val="FFFFFF"/>
+                </a:solidFill>
+              </a:rPr>
               <a:t>Glosario breve</a:t>
             </a:r>
             <a:endParaRPr lang="en-US" sz="1900" dirty="0"/>
@@ -13462,7 +14765,7 @@
       </p:sp>
       <p:graphicFrame>
         <p:nvGraphicFramePr>
-          <p:cNvPr id="19" name="Table 0"/>
+          <p:cNvPr id="20" name="Table 0"/>
           <p:cNvGraphicFramePr>
             <a:graphicFrameLocks noGrp="1"/>
           </p:cNvGraphicFramePr>
@@ -13634,7 +14937,7 @@
                         <a:buNone/>
                       </a:pPr>
                       <a:r>
-                        <a:rPr lang="en-US" sz="1050" b="1" dirty="0">
+                        <a:rPr lang="en-US" sz="950" b="1" dirty="0">
                           <a:solidFill>
                             <a:srgbClr val="002855"/>
                           </a:solidFill>
@@ -13644,7 +14947,7 @@
                         </a:rPr>
                         <a:t>Agente y subagente</a:t>
                       </a:r>
-                      <a:endParaRPr lang="en-US" sz="1050" dirty="0">
+                      <a:endParaRPr lang="en-US" sz="950" dirty="0">
                         <a:latin typeface="Arial" charset="0"/>
                         <a:ea typeface="Arial" charset="0"/>
                         <a:cs typeface="Arial" charset="0"/>
@@ -13699,7 +15002,7 @@
                         <a:buNone/>
                       </a:pPr>
                       <a:r>
-                        <a:rPr lang="en-US" sz="1050" dirty="0">
+                        <a:rPr lang="en-US" sz="950" dirty="0">
                           <a:solidFill>
                             <a:srgbClr val="272425"/>
                           </a:solidFill>
@@ -13709,7 +15012,7 @@
                         </a:rPr>
                         <a:t>Instancia del modelo con un rol. El orquestador conversa con la persona y delega en subagentes de fase, que trabajan con contexto aislado y no deciden.</a:t>
                       </a:r>
-                      <a:endParaRPr lang="en-US" sz="1050" dirty="0">
+                      <a:endParaRPr lang="en-US" sz="950" dirty="0">
                         <a:latin typeface="Arial" charset="0"/>
                         <a:ea typeface="Arial" charset="0"/>
                         <a:cs typeface="Arial" charset="0"/>
@@ -13766,7 +15069,7 @@
                         <a:buNone/>
                       </a:pPr>
                       <a:r>
-                        <a:rPr lang="en-US" sz="1050" b="1" dirty="0">
+                        <a:rPr lang="en-US" sz="950" b="1" dirty="0">
                           <a:solidFill>
                             <a:srgbClr val="002855"/>
                           </a:solidFill>
@@ -13776,7 +15079,7 @@
                         </a:rPr>
                         <a:t>BMAD</a:t>
                       </a:r>
-                      <a:endParaRPr lang="en-US" sz="1050" dirty="0">
+                      <a:endParaRPr lang="en-US" sz="950" dirty="0">
                         <a:latin typeface="Arial" charset="0"/>
                         <a:ea typeface="Arial" charset="0"/>
                         <a:cs typeface="Arial" charset="0"/>
@@ -13831,7 +15134,7 @@
                         <a:buNone/>
                       </a:pPr>
                       <a:r>
-                        <a:rPr lang="en-US" sz="1050" dirty="0">
+                        <a:rPr lang="en-US" sz="950" dirty="0">
                           <a:solidFill>
                             <a:srgbClr val="272425"/>
                           </a:solidFill>
@@ -13841,7 +15144,7 @@
                         </a:rPr>
                         <a:t>Método de especificación y construcción con agentes; en pm-method es la fuente única de la especificación, de solo lectura.</a:t>
                       </a:r>
-                      <a:endParaRPr lang="en-US" sz="1050" dirty="0">
+                      <a:endParaRPr lang="en-US" sz="950" dirty="0">
                         <a:latin typeface="Arial" charset="0"/>
                         <a:ea typeface="Arial" charset="0"/>
                         <a:cs typeface="Arial" charset="0"/>
@@ -13898,7 +15201,7 @@
                         <a:buNone/>
                       </a:pPr>
                       <a:r>
-                        <a:rPr lang="en-US" sz="1050" b="1" dirty="0">
+                        <a:rPr lang="en-US" sz="950" b="1" dirty="0">
                           <a:solidFill>
                             <a:srgbClr val="002855"/>
                           </a:solidFill>
@@ -13908,7 +15211,7 @@
                         </a:rPr>
                         <a:t>Condición formal</a:t>
                       </a:r>
-                      <a:endParaRPr lang="en-US" sz="1050" dirty="0">
+                      <a:endParaRPr lang="en-US" sz="950" dirty="0">
                         <a:latin typeface="Arial" charset="0"/>
                         <a:ea typeface="Arial" charset="0"/>
                         <a:cs typeface="Arial" charset="0"/>
@@ -13963,7 +15266,7 @@
                         <a:buNone/>
                       </a:pPr>
                       <a:r>
-                        <a:rPr lang="en-US" sz="1050" dirty="0">
+                        <a:rPr lang="en-US" sz="950" dirty="0">
                           <a:solidFill>
                             <a:srgbClr val="272425"/>
                           </a:solidFill>
@@ -13973,7 +15276,7 @@
                         </a:rPr>
                         <a:t>Requisito que la junta impone al autorizar una puerta; se sigue con EST-12 y G-01 hasta cumplir-condiciones.</a:t>
                       </a:r>
-                      <a:endParaRPr lang="en-US" sz="1050" dirty="0">
+                      <a:endParaRPr lang="en-US" sz="950" dirty="0">
                         <a:latin typeface="Arial" charset="0"/>
                         <a:ea typeface="Arial" charset="0"/>
                         <a:cs typeface="Arial" charset="0"/>
@@ -14030,7 +15333,7 @@
                         <a:buNone/>
                       </a:pPr>
                       <a:r>
-                        <a:rPr lang="en-US" sz="1050" b="1" dirty="0">
+                        <a:rPr lang="en-US" sz="950" b="1" dirty="0">
                           <a:solidFill>
                             <a:srgbClr val="002855"/>
                           </a:solidFill>
@@ -14040,7 +15343,7 @@
                         </a:rPr>
                         <a:t>Fachada de especificación</a:t>
                       </a:r>
-                      <a:endParaRPr lang="en-US" sz="1050" dirty="0">
+                      <a:endParaRPr lang="en-US" sz="950" dirty="0">
                         <a:latin typeface="Arial" charset="0"/>
                         <a:ea typeface="Arial" charset="0"/>
                         <a:cs typeface="Arial" charset="0"/>
@@ -14095,7 +15398,7 @@
                         <a:buNone/>
                       </a:pPr>
                       <a:r>
-                        <a:rPr lang="en-US" sz="1050" dirty="0">
+                        <a:rPr lang="en-US" sz="950" dirty="0">
                           <a:solidFill>
                             <a:srgbClr val="272425"/>
                           </a:solidFill>
@@ -14105,7 +15408,7 @@
                         </a:rPr>
                         <a:t>Lectura de BMAD que hace pm-method (bmad.py, especificacion.py) sin copiar ni modificar los artefactos.</a:t>
                       </a:r>
-                      <a:endParaRPr lang="en-US" sz="1050" dirty="0">
+                      <a:endParaRPr lang="en-US" sz="950" dirty="0">
                         <a:latin typeface="Arial" charset="0"/>
                         <a:ea typeface="Arial" charset="0"/>
                         <a:cs typeface="Arial" charset="0"/>
@@ -14162,7 +15465,7 @@
                         <a:buNone/>
                       </a:pPr>
                       <a:r>
-                        <a:rPr lang="en-US" sz="1050" b="1" dirty="0">
+                        <a:rPr lang="en-US" sz="950" b="1" dirty="0">
                           <a:solidFill>
                             <a:srgbClr val="002855"/>
                           </a:solidFill>
@@ -14172,7 +15475,7 @@
                         </a:rPr>
                         <a:t>Gestión por excepción</a:t>
                       </a:r>
-                      <a:endParaRPr lang="en-US" sz="1050" dirty="0">
+                      <a:endParaRPr lang="en-US" sz="950" dirty="0">
                         <a:latin typeface="Arial" charset="0"/>
                         <a:ea typeface="Arial" charset="0"/>
                         <a:cs typeface="Arial" charset="0"/>
@@ -14227,7 +15530,7 @@
                         <a:buNone/>
                       </a:pPr>
                       <a:r>
-                        <a:rPr lang="en-US" sz="1050" dirty="0">
+                        <a:rPr lang="en-US" sz="950" dirty="0">
                           <a:solidFill>
                             <a:srgbClr val="272425"/>
                           </a:solidFill>
@@ -14235,9 +15538,9 @@
                           <a:ea typeface="Arial" pitchFamily="34" charset="-122"/>
                           <a:cs typeface="Arial" pitchFamily="34" charset="-120"/>
                         </a:rPr>
-                        <a:t>Cada nivel decide dentro de su tolerancia y escala solo cuando un pronóstico la supera (management by exception).</a:t>
+                        <a:t>Cada nivel decide dentro de su tolerancia y escala solo cuando un pronóstico la supera (management by exception): el informe de excepción avisa a la junta con opciones y recomendación y, si la junta lo pide, el plan de excepción reemplaza al vigente y se aprueba en una puerta.</a:t>
                       </a:r>
-                      <a:endParaRPr lang="en-US" sz="1050" dirty="0">
+                      <a:endParaRPr lang="en-US" sz="950" dirty="0">
                         <a:latin typeface="Arial" charset="0"/>
                         <a:ea typeface="Arial" charset="0"/>
                         <a:cs typeface="Arial" charset="0"/>
@@ -14294,7 +15597,7 @@
                         <a:buNone/>
                       </a:pPr>
                       <a:r>
-                        <a:rPr lang="en-US" sz="1050" b="1" dirty="0">
+                        <a:rPr lang="en-US" sz="950" b="1" dirty="0">
                           <a:solidFill>
                             <a:srgbClr val="002855"/>
                           </a:solidFill>
@@ -14304,7 +15607,7 @@
                         </a:rPr>
                         <a:t>Hook</a:t>
                       </a:r>
-                      <a:endParaRPr lang="en-US" sz="1050" dirty="0">
+                      <a:endParaRPr lang="en-US" sz="950" dirty="0">
                         <a:latin typeface="Arial" charset="0"/>
                         <a:ea typeface="Arial" charset="0"/>
                         <a:cs typeface="Arial" charset="0"/>
@@ -14359,7 +15662,7 @@
                         <a:buNone/>
                       </a:pPr>
                       <a:r>
-                        <a:rPr lang="en-US" sz="1050" dirty="0">
+                        <a:rPr lang="en-US" sz="950" dirty="0">
                           <a:solidFill>
                             <a:srgbClr val="272425"/>
                           </a:solidFill>
@@ -14369,7 +15672,7 @@
                         </a:rPr>
                         <a:t>Script que Claude Code ejecuta ante un evento (inicio de sesión, pedido, uso de una herramienta). En pm-method protege los datos de gobierno y agrega contexto.</a:t>
                       </a:r>
-                      <a:endParaRPr lang="en-US" sz="1050" dirty="0">
+                      <a:endParaRPr lang="en-US" sz="950" dirty="0">
                         <a:latin typeface="Arial" charset="0"/>
                         <a:ea typeface="Arial" charset="0"/>
                         <a:cs typeface="Arial" charset="0"/>
@@ -14426,7 +15729,7 @@
                         <a:buNone/>
                       </a:pPr>
                       <a:r>
-                        <a:rPr lang="en-US" sz="1050" b="1" dirty="0">
+                        <a:rPr lang="en-US" sz="950" b="1" dirty="0">
                           <a:solidFill>
                             <a:srgbClr val="002855"/>
                           </a:solidFill>
@@ -14436,7 +15739,7 @@
                         </a:rPr>
                         <a:t>Junta del proyecto (project board)</a:t>
                       </a:r>
-                      <a:endParaRPr lang="en-US" sz="1050" dirty="0">
+                      <a:endParaRPr lang="en-US" sz="950" dirty="0">
                         <a:latin typeface="Arial" charset="0"/>
                         <a:ea typeface="Arial" charset="0"/>
                         <a:cs typeface="Arial" charset="0"/>
@@ -14491,7 +15794,7 @@
                         <a:buNone/>
                       </a:pPr>
                       <a:r>
-                        <a:rPr lang="en-US" sz="1050" dirty="0">
+                        <a:rPr lang="en-US" sz="950" dirty="0">
                           <a:solidFill>
                             <a:srgbClr val="272425"/>
                           </a:solidFill>
@@ -14501,7 +15804,7 @@
                         </a:rPr>
                         <a:t>Ejecutiva, usuaria sénior y proveedor sénior; decide tolerancias, presupuestos y excepciones.</a:t>
                       </a:r>
-                      <a:endParaRPr lang="en-US" sz="1050" dirty="0">
+                      <a:endParaRPr lang="en-US" sz="950" dirty="0">
                         <a:latin typeface="Arial" charset="0"/>
                         <a:ea typeface="Arial" charset="0"/>
                         <a:cs typeface="Arial" charset="0"/>
@@ -14558,7 +15861,7 @@
                         <a:buNone/>
                       </a:pPr>
                       <a:r>
-                        <a:rPr lang="en-US" sz="1050" b="1" dirty="0">
+                        <a:rPr lang="en-US" sz="950" b="1" dirty="0">
                           <a:solidFill>
                             <a:srgbClr val="002855"/>
                           </a:solidFill>
@@ -14568,7 +15871,7 @@
                         </a:rPr>
                         <a:t>Matriz RACI</a:t>
                       </a:r>
-                      <a:endParaRPr lang="en-US" sz="1050" dirty="0">
+                      <a:endParaRPr lang="en-US" sz="950" dirty="0">
                         <a:latin typeface="Arial" charset="0"/>
                         <a:ea typeface="Arial" charset="0"/>
                         <a:cs typeface="Arial" charset="0"/>
@@ -14623,7 +15926,7 @@
                         <a:buNone/>
                       </a:pPr>
                       <a:r>
-                        <a:rPr lang="en-US" sz="1050" dirty="0">
+                        <a:rPr lang="en-US" sz="950" dirty="0">
                           <a:solidFill>
                             <a:srgbClr val="272425"/>
                           </a:solidFill>
@@ -14631,9 +15934,9 @@
                           <a:ea typeface="Arial" pitchFamily="34" charset="-122"/>
                           <a:cs typeface="Arial" pitchFamily="34" charset="-120"/>
                         </a:rPr>
-                        <a:t>Quién es responsable (R), aprobador (A), consultado (C) e informado (I) en cada elemento; un solo A.</a:t>
+                        <a:t>Por elemento (paquete, requisito, decisión): un solo A que rinde cuentas, quién lo hace (R), a quién se consulta antes (C) y a quién se informa después (I). Refleja la autoridad de PRINCE2; no la reemplaza.</a:t>
                       </a:r>
-                      <a:endParaRPr lang="en-US" sz="1050" dirty="0">
+                      <a:endParaRPr lang="en-US" sz="950" dirty="0">
                         <a:latin typeface="Arial" charset="0"/>
                         <a:ea typeface="Arial" charset="0"/>
                         <a:cs typeface="Arial" charset="0"/>
@@ -14690,7 +15993,7 @@
                         <a:buNone/>
                       </a:pPr>
                       <a:r>
-                        <a:rPr lang="en-US" sz="1050" b="1" dirty="0">
+                        <a:rPr lang="en-US" sz="950" b="1" dirty="0">
                           <a:solidFill>
                             <a:srgbClr val="002855"/>
                           </a:solidFill>
@@ -14700,7 +16003,7 @@
                         </a:rPr>
                         <a:t>MCP</a:t>
                       </a:r>
-                      <a:endParaRPr lang="en-US" sz="1050" dirty="0">
+                      <a:endParaRPr lang="en-US" sz="950" dirty="0">
                         <a:latin typeface="Arial" charset="0"/>
                         <a:ea typeface="Arial" charset="0"/>
                         <a:cs typeface="Arial" charset="0"/>
@@ -14755,7 +16058,7 @@
                         <a:buNone/>
                       </a:pPr>
                       <a:r>
-                        <a:rPr lang="en-US" sz="1050" dirty="0">
+                        <a:rPr lang="en-US" sz="950" dirty="0">
                           <a:solidFill>
                             <a:srgbClr val="272425"/>
                           </a:solidFill>
@@ -14765,7 +16068,7 @@
                         </a:rPr>
                         <a:t>Model Context Protocol: estándar para conectar el modelo con herramientas externas como trackers, chat, correo, transcripciones u OKR.</a:t>
                       </a:r>
-                      <a:endParaRPr lang="en-US" sz="1050" dirty="0">
+                      <a:endParaRPr lang="en-US" sz="950" dirty="0">
                         <a:latin typeface="Arial" charset="0"/>
                         <a:ea typeface="Arial" charset="0"/>
                         <a:cs typeface="Arial" charset="0"/>
@@ -14818,7 +16121,7 @@
       </p:graphicFrame>
       <p:graphicFrame>
         <p:nvGraphicFramePr>
-          <p:cNvPr id="37" name="Table 1"/>
+          <p:cNvPr id="39" name="Table 1"/>
           <p:cNvGraphicFramePr>
             <a:graphicFrameLocks noGrp="1"/>
           </p:cNvGraphicFramePr>
@@ -14990,7 +16293,7 @@
                         <a:buNone/>
                       </a:pPr>
                       <a:r>
-                        <a:rPr lang="en-US" sz="1050" b="1" dirty="0">
+                        <a:rPr lang="en-US" sz="950" b="1" dirty="0">
                           <a:solidFill>
                             <a:srgbClr val="002855"/>
                           </a:solidFill>
@@ -15000,7 +16303,7 @@
                         </a:rPr>
                         <a:t>OKR</a:t>
                       </a:r>
-                      <a:endParaRPr lang="en-US" sz="1050" dirty="0">
+                      <a:endParaRPr lang="en-US" sz="950" dirty="0">
                         <a:latin typeface="Arial" charset="0"/>
                         <a:ea typeface="Arial" charset="0"/>
                         <a:cs typeface="Arial" charset="0"/>
@@ -15055,7 +16358,7 @@
                         <a:buNone/>
                       </a:pPr>
                       <a:r>
-                        <a:rPr lang="en-US" sz="1050" dirty="0">
+                        <a:rPr lang="en-US" sz="950" dirty="0">
                           <a:solidFill>
                             <a:srgbClr val="272425"/>
                           </a:solidFill>
@@ -15065,7 +16368,7 @@
                         </a:rPr>
                         <a:t>Objetivos y resultados clave: metas de ciclo que complementan los beneficios y se siguen con check-ins (mediciones fechadas con su confianza).</a:t>
                       </a:r>
-                      <a:endParaRPr lang="en-US" sz="1050" dirty="0">
+                      <a:endParaRPr lang="en-US" sz="950" dirty="0">
                         <a:latin typeface="Arial" charset="0"/>
                         <a:ea typeface="Arial" charset="0"/>
                         <a:cs typeface="Arial" charset="0"/>
@@ -15122,7 +16425,7 @@
                         <a:buNone/>
                       </a:pPr>
                       <a:r>
-                        <a:rPr lang="en-US" sz="1050" b="1" dirty="0">
+                        <a:rPr lang="en-US" sz="950" b="1" dirty="0">
                           <a:solidFill>
                             <a:srgbClr val="002855"/>
                           </a:solidFill>
@@ -15132,7 +16435,7 @@
                         </a:rPr>
                         <a:t>PMBOK 8</a:t>
                       </a:r>
-                      <a:endParaRPr lang="en-US" sz="1050" dirty="0">
+                      <a:endParaRPr lang="en-US" sz="950" dirty="0">
                         <a:latin typeface="Arial" charset="0"/>
                         <a:ea typeface="Arial" charset="0"/>
                         <a:cs typeface="Arial" charset="0"/>
@@ -15187,7 +16490,7 @@
                         <a:buNone/>
                       </a:pPr>
                       <a:r>
-                        <a:rPr lang="en-US" sz="1050" dirty="0">
+                        <a:rPr lang="en-US" sz="950" dirty="0">
                           <a:solidFill>
                             <a:srgbClr val="272425"/>
                           </a:solidFill>
@@ -15197,7 +16500,7 @@
                         </a:rPr>
                         <a:t>Guía de fundamentos de la dirección de proyectos. En pm-method aporta solo técnicas (valor ganado, camino crítico, PERT, P×I) dentro de PRINCE2.</a:t>
                       </a:r>
-                      <a:endParaRPr lang="en-US" sz="1050" dirty="0">
+                      <a:endParaRPr lang="en-US" sz="950" dirty="0">
                         <a:latin typeface="Arial" charset="0"/>
                         <a:ea typeface="Arial" charset="0"/>
                         <a:cs typeface="Arial" charset="0"/>
@@ -15254,7 +16557,7 @@
                         <a:buNone/>
                       </a:pPr>
                       <a:r>
-                        <a:rPr lang="en-US" sz="1050" b="1" dirty="0">
+                        <a:rPr lang="en-US" sz="950" b="1" dirty="0">
                           <a:solidFill>
                             <a:srgbClr val="002855"/>
                           </a:solidFill>
@@ -15264,7 +16567,7 @@
                         </a:rPr>
                         <a:t>Presupuesto de cambio</a:t>
                       </a:r>
-                      <a:endParaRPr lang="en-US" sz="1050" dirty="0">
+                      <a:endParaRPr lang="en-US" sz="950" dirty="0">
                         <a:latin typeface="Arial" charset="0"/>
                         <a:ea typeface="Arial" charset="0"/>
                         <a:cs typeface="Arial" charset="0"/>
@@ -15319,7 +16622,7 @@
                         <a:buNone/>
                       </a:pPr>
                       <a:r>
-                        <a:rPr lang="en-US" sz="1050" dirty="0">
+                        <a:rPr lang="en-US" sz="950" dirty="0">
                           <a:solidFill>
                             <a:srgbClr val="272425"/>
                           </a:solidFill>
@@ -15329,7 +16632,7 @@
                         </a:rPr>
                         <a:t>Monto que la junta reserva para pagar cambios aprobados, separado de la reserva de riesgo (change budget).</a:t>
                       </a:r>
-                      <a:endParaRPr lang="en-US" sz="1050" dirty="0">
+                      <a:endParaRPr lang="en-US" sz="950" dirty="0">
                         <a:latin typeface="Arial" charset="0"/>
                         <a:ea typeface="Arial" charset="0"/>
                         <a:cs typeface="Arial" charset="0"/>
@@ -15386,7 +16689,7 @@
                         <a:buNone/>
                       </a:pPr>
                       <a:r>
-                        <a:rPr lang="en-US" sz="1050" b="1" dirty="0">
+                        <a:rPr lang="en-US" sz="950" b="1" dirty="0">
                           <a:solidFill>
                             <a:srgbClr val="002855"/>
                           </a:solidFill>
@@ -15396,7 +16699,7 @@
                         </a:rPr>
                         <a:t>PRINCE2 7</a:t>
                       </a:r>
-                      <a:endParaRPr lang="en-US" sz="1050" dirty="0">
+                      <a:endParaRPr lang="en-US" sz="950" dirty="0">
                         <a:latin typeface="Arial" charset="0"/>
                         <a:ea typeface="Arial" charset="0"/>
                         <a:cs typeface="Arial" charset="0"/>
@@ -15451,7 +16754,7 @@
                         <a:buNone/>
                       </a:pPr>
                       <a:r>
-                        <a:rPr lang="en-US" sz="1050" dirty="0">
+                        <a:rPr lang="en-US" sz="950" dirty="0">
                           <a:solidFill>
                             <a:srgbClr val="272425"/>
                           </a:solidFill>
@@ -15461,7 +16764,7 @@
                         </a:rPr>
                         <a:t>Método de gestión de proyectos por etapas. En pm-method define el ciclo de vida, los roles, las tolerancias y las puertas, y siempre manda.</a:t>
                       </a:r>
-                      <a:endParaRPr lang="en-US" sz="1050" dirty="0">
+                      <a:endParaRPr lang="en-US" sz="950" dirty="0">
                         <a:latin typeface="Arial" charset="0"/>
                         <a:ea typeface="Arial" charset="0"/>
                         <a:cs typeface="Arial" charset="0"/>
@@ -15518,7 +16821,7 @@
                         <a:buNone/>
                       </a:pPr>
                       <a:r>
-                        <a:rPr lang="en-US" sz="1050" b="1" dirty="0">
+                        <a:rPr lang="en-US" sz="950" b="1" dirty="0">
                           <a:solidFill>
                             <a:srgbClr val="002855"/>
                           </a:solidFill>
@@ -15528,7 +16831,7 @@
                         </a:rPr>
                         <a:t>Puerta</a:t>
                       </a:r>
-                      <a:endParaRPr lang="en-US" sz="1050" dirty="0">
+                      <a:endParaRPr lang="en-US" sz="950" dirty="0">
                         <a:latin typeface="Arial" charset="0"/>
                         <a:ea typeface="Arial" charset="0"/>
                         <a:cs typeface="Arial" charset="0"/>
@@ -15583,7 +16886,7 @@
                         <a:buNone/>
                       </a:pPr>
                       <a:r>
-                        <a:rPr lang="en-US" sz="1050" dirty="0">
+                        <a:rPr lang="en-US" sz="950" dirty="0">
                           <a:solidFill>
                             <a:srgbClr val="272425"/>
                           </a:solidFill>
@@ -15593,7 +16896,7 @@
                         </a:rPr>
                         <a:t>Decisión formal de la junta; pm-method la verifica y la bloquea si sanidad tiene un ERROR.</a:t>
                       </a:r>
-                      <a:endParaRPr lang="en-US" sz="1050" dirty="0">
+                      <a:endParaRPr lang="en-US" sz="950" dirty="0">
                         <a:latin typeface="Arial" charset="0"/>
                         <a:ea typeface="Arial" charset="0"/>
                         <a:cs typeface="Arial" charset="0"/>
@@ -15650,7 +16953,7 @@
                         <a:buNone/>
                       </a:pPr>
                       <a:r>
-                        <a:rPr lang="en-US" sz="1050" b="1" dirty="0">
+                        <a:rPr lang="en-US" sz="950" b="1" dirty="0">
                           <a:solidFill>
                             <a:srgbClr val="002855"/>
                           </a:solidFill>
@@ -15660,7 +16963,7 @@
                         </a:rPr>
                         <a:t>Sanidad</a:t>
                       </a:r>
-                      <a:endParaRPr lang="en-US" sz="1050" dirty="0">
+                      <a:endParaRPr lang="en-US" sz="950" dirty="0">
                         <a:latin typeface="Arial" charset="0"/>
                         <a:ea typeface="Arial" charset="0"/>
                         <a:cs typeface="Arial" charset="0"/>
@@ -15715,7 +17018,7 @@
                         <a:buNone/>
                       </a:pPr>
                       <a:r>
-                        <a:rPr lang="en-US" sz="1050" dirty="0">
+                        <a:rPr lang="en-US" sz="950" dirty="0">
                           <a:solidFill>
                             <a:srgbClr val="272425"/>
                           </a:solidFill>
@@ -15725,7 +17028,7 @@
                         </a:rPr>
                         <a:t>Control automático de pm-method que, en cada corrida, informa hallazgos ERROR, AVISO o INFO con su código.</a:t>
                       </a:r>
-                      <a:endParaRPr lang="en-US" sz="1050" dirty="0">
+                      <a:endParaRPr lang="en-US" sz="950" dirty="0">
                         <a:latin typeface="Arial" charset="0"/>
                         <a:ea typeface="Arial" charset="0"/>
                         <a:cs typeface="Arial" charset="0"/>
@@ -15782,7 +17085,7 @@
                         <a:buNone/>
                       </a:pPr>
                       <a:r>
-                        <a:rPr lang="en-US" sz="1050" b="1" dirty="0">
+                        <a:rPr lang="en-US" sz="950" b="1" dirty="0">
                           <a:solidFill>
                             <a:srgbClr val="002855"/>
                           </a:solidFill>
@@ -15792,7 +17095,7 @@
                         </a:rPr>
                         <a:t>Skill</a:t>
                       </a:r>
-                      <a:endParaRPr lang="en-US" sz="1050" dirty="0">
+                      <a:endParaRPr lang="en-US" sz="950" dirty="0">
                         <a:latin typeface="Arial" charset="0"/>
                         <a:ea typeface="Arial" charset="0"/>
                         <a:cs typeface="Arial" charset="0"/>
@@ -15847,7 +17150,7 @@
                         <a:buNone/>
                       </a:pPr>
                       <a:r>
-                        <a:rPr lang="en-US" sz="1050" dirty="0">
+                        <a:rPr lang="en-US" sz="950" dirty="0">
                           <a:solidFill>
                             <a:srgbClr val="272425"/>
                           </a:solidFill>
@@ -15857,7 +17160,7 @@
                         </a:rPr>
                         <a:t>Paquete de instrucciones, plantillas y scripts que Claude Code activa por su descripción o que la persona invoca como comando.</a:t>
                       </a:r>
-                      <a:endParaRPr lang="en-US" sz="1050" dirty="0">
+                      <a:endParaRPr lang="en-US" sz="950" dirty="0">
                         <a:latin typeface="Arial" charset="0"/>
                         <a:ea typeface="Arial" charset="0"/>
                         <a:cs typeface="Arial" charset="0"/>
@@ -15914,7 +17217,7 @@
                         <a:buNone/>
                       </a:pPr>
                       <a:r>
-                        <a:rPr lang="en-US" sz="1050" b="1" dirty="0">
+                        <a:rPr lang="en-US" sz="950" b="1" dirty="0">
                           <a:solidFill>
                             <a:srgbClr val="002855"/>
                           </a:solidFill>
@@ -15924,7 +17227,7 @@
                         </a:rPr>
                         <a:t>Tolerancia</a:t>
                       </a:r>
-                      <a:endParaRPr lang="en-US" sz="1050" dirty="0">
+                      <a:endParaRPr lang="en-US" sz="950" dirty="0">
                         <a:latin typeface="Arial" charset="0"/>
                         <a:ea typeface="Arial" charset="0"/>
                         <a:cs typeface="Arial" charset="0"/>
@@ -15979,7 +17282,7 @@
                         <a:buNone/>
                       </a:pPr>
                       <a:r>
-                        <a:rPr lang="en-US" sz="1050" dirty="0">
+                        <a:rPr lang="en-US" sz="950" dirty="0">
                           <a:solidFill>
                             <a:srgbClr val="272425"/>
                           </a:solidFill>
@@ -15987,9 +17290,9 @@
                           <a:ea typeface="Arial" pitchFamily="34" charset="-122"/>
                           <a:cs typeface="Arial" pitchFamily="34" charset="-120"/>
                         </a:rPr>
-                        <a:t>Margen fijado por la junta; superarlo es una excepción que decide un nivel superior.</a:t>
+                        <a:t>Desvío que un nivel de gestión puede absorber sin escalar al nivel de arriba (tolerance).</a:t>
                       </a:r>
-                      <a:endParaRPr lang="en-US" sz="1050" dirty="0">
+                      <a:endParaRPr lang="en-US" sz="950" dirty="0">
                         <a:latin typeface="Arial" charset="0"/>
                         <a:ea typeface="Arial" charset="0"/>
                         <a:cs typeface="Arial" charset="0"/>
@@ -16046,7 +17349,7 @@
                         <a:buNone/>
                       </a:pPr>
                       <a:r>
-                        <a:rPr lang="en-US" sz="1050" b="1" dirty="0">
+                        <a:rPr lang="en-US" sz="950" b="1" dirty="0">
                           <a:solidFill>
                             <a:srgbClr val="002855"/>
                           </a:solidFill>
@@ -16056,7 +17359,7 @@
                         </a:rPr>
                         <a:t>Valor ganado (EVM)</a:t>
                       </a:r>
-                      <a:endParaRPr lang="en-US" sz="1050" dirty="0">
+                      <a:endParaRPr lang="en-US" sz="950" dirty="0">
                         <a:latin typeface="Arial" charset="0"/>
                         <a:ea typeface="Arial" charset="0"/>
                         <a:cs typeface="Arial" charset="0"/>
@@ -16111,7 +17414,7 @@
                         <a:buNone/>
                       </a:pPr>
                       <a:r>
-                        <a:rPr lang="en-US" sz="1050" dirty="0">
+                        <a:rPr lang="en-US" sz="950" dirty="0">
                           <a:solidFill>
                             <a:srgbClr val="272425"/>
                           </a:solidFill>
@@ -16121,7 +17424,7 @@
                         </a:rPr>
                         <a:t>Técnica que compara lo planificado (PV), lo ganado (EV) y lo gastado (AC) para pronosticar.</a:t>
                       </a:r>
-                      <a:endParaRPr lang="en-US" sz="1050" dirty="0">
+                      <a:endParaRPr lang="en-US" sz="950" dirty="0">
                         <a:latin typeface="Arial" charset="0"/>
                         <a:ea typeface="Arial" charset="0"/>
                         <a:cs typeface="Arial" charset="0"/>
@@ -16211,7 +17514,7 @@
             <a:pPr algn="r"/>
             <a:fld id="{F7021451-1387-4CA6-816F-3879F97B5CBC}" type="slidenum">
               <a:rPr b="0" lang="en-US"/>
-              <a:t>18</a:t>
+              <a:t>19</a:t>
             </a:fld>
             <a:endParaRPr lang="en-US"/>
           </a:p>
@@ -16397,11 +17700,11 @@
         <p:spPr>
           <a:xfrm>
             <a:off x="457200" y="1600200"/>
-            <a:ext cx="4663440" cy="566928"/>
+            <a:ext cx="4663440" cy="502920"/>
           </a:xfrm>
           <a:prstGeom prst="roundRect">
             <a:avLst>
-              <a:gd name="adj" fmla="val 12903"/>
+              <a:gd name="adj" fmla="val 14545"/>
             </a:avLst>
           </a:prstGeom>
           <a:solidFill>
@@ -16424,7 +17727,7 @@
         <p:spPr>
           <a:xfrm>
             <a:off x="603504" y="1655064"/>
-            <a:ext cx="4389120" cy="457200"/>
+            <a:ext cx="4389120" cy="393192"/>
           </a:xfrm>
           <a:prstGeom prst="rect">
             <a:avLst/>
@@ -16440,7 +17743,7 @@
               <a:buNone/>
             </a:pPr>
             <a:r>
-              <a:rPr lang="en-US" sz="1300" dirty="0">
+              <a:rPr lang="en-US" sz="1250" dirty="0">
                 <a:solidFill>
                   <a:srgbClr val="272425"/>
                 </a:solidFill>
@@ -16460,7 +17763,7 @@
         <p:spPr>
           <a:xfrm>
             <a:off x="5138928" y="1600200"/>
-            <a:ext cx="365760" cy="566928"/>
+            <a:ext cx="365760" cy="502920"/>
           </a:xfrm>
           <a:prstGeom prst="rect">
             <a:avLst/>
@@ -16496,11 +17799,11 @@
         <p:spPr>
           <a:xfrm>
             <a:off x="5532120" y="1600200"/>
-            <a:ext cx="4663440" cy="566928"/>
+            <a:ext cx="4663440" cy="502920"/>
           </a:xfrm>
           <a:prstGeom prst="roundRect">
             <a:avLst>
-              <a:gd name="adj" fmla="val 12903"/>
+              <a:gd name="adj" fmla="val 14545"/>
             </a:avLst>
           </a:prstGeom>
           <a:solidFill>
@@ -16523,7 +17826,7 @@
         <p:spPr>
           <a:xfrm>
             <a:off x="5669280" y="1655064"/>
-            <a:ext cx="4389120" cy="457200"/>
+            <a:ext cx="4389120" cy="393192"/>
           </a:xfrm>
           <a:prstGeom prst="rect">
             <a:avLst/>
@@ -16539,7 +17842,7 @@
               <a:buNone/>
             </a:pPr>
             <a:r>
-              <a:rPr lang="en-US" sz="1300" dirty="0">
+              <a:rPr lang="en-US" sz="1250" dirty="0">
                 <a:solidFill>
                   <a:srgbClr val="002855"/>
                 </a:solidFill>
@@ -16559,11 +17862,11 @@
         <p:spPr>
           <a:xfrm>
             <a:off x="10332720" y="1691640"/>
-            <a:ext cx="1399032" cy="384048"/>
+            <a:ext cx="1399032" cy="320040"/>
           </a:xfrm>
           <a:prstGeom prst="roundRect">
             <a:avLst>
-              <a:gd name="adj" fmla="val 19048"/>
+              <a:gd name="adj" fmla="val 22857"/>
             </a:avLst>
           </a:prstGeom>
           <a:solidFill>
@@ -16586,7 +17889,7 @@
         <p:spPr>
           <a:xfrm>
             <a:off x="10332720" y="1691640"/>
-            <a:ext cx="1399032" cy="384048"/>
+            <a:ext cx="1399032" cy="320040"/>
           </a:xfrm>
           <a:prstGeom prst="rect">
             <a:avLst/>
@@ -16624,12 +17927,12 @@
         </p:nvSpPr>
         <p:spPr>
           <a:xfrm>
-            <a:off x="457200" y="2258568"/>
-            <a:ext cx="4663440" cy="566928"/>
+            <a:off x="457200" y="2194560"/>
+            <a:ext cx="4663440" cy="502920"/>
           </a:xfrm>
           <a:prstGeom prst="roundRect">
             <a:avLst>
-              <a:gd name="adj" fmla="val 12903"/>
+              <a:gd name="adj" fmla="val 14545"/>
             </a:avLst>
           </a:prstGeom>
           <a:solidFill>
@@ -16651,8 +17954,8 @@
         </p:nvSpPr>
         <p:spPr>
           <a:xfrm>
-            <a:off x="603504" y="2313432"/>
-            <a:ext cx="4389120" cy="457200"/>
+            <a:off x="603504" y="2249424"/>
+            <a:ext cx="4389120" cy="393192"/>
           </a:xfrm>
           <a:prstGeom prst="rect">
             <a:avLst/>
@@ -16668,7 +17971,7 @@
               <a:buNone/>
             </a:pPr>
             <a:r>
-              <a:rPr lang="en-US" sz="1300" dirty="0">
+              <a:rPr lang="en-US" sz="1250" dirty="0">
                 <a:solidFill>
                   <a:srgbClr val="272425"/>
                 </a:solidFill>
@@ -16687,8 +17990,8 @@
         </p:nvSpPr>
         <p:spPr>
           <a:xfrm>
-            <a:off x="5138928" y="2258568"/>
-            <a:ext cx="365760" cy="566928"/>
+            <a:off x="5138928" y="2194560"/>
+            <a:ext cx="365760" cy="502920"/>
           </a:xfrm>
           <a:prstGeom prst="rect">
             <a:avLst/>
@@ -16723,12 +18026,12 @@
         </p:nvSpPr>
         <p:spPr>
           <a:xfrm>
-            <a:off x="5532120" y="2258568"/>
-            <a:ext cx="4663440" cy="566928"/>
+            <a:off x="5532120" y="2194560"/>
+            <a:ext cx="4663440" cy="502920"/>
           </a:xfrm>
           <a:prstGeom prst="roundRect">
             <a:avLst>
-              <a:gd name="adj" fmla="val 12903"/>
+              <a:gd name="adj" fmla="val 14545"/>
             </a:avLst>
           </a:prstGeom>
           <a:solidFill>
@@ -16750,8 +18053,8 @@
         </p:nvSpPr>
         <p:spPr>
           <a:xfrm>
-            <a:off x="5669280" y="2313432"/>
-            <a:ext cx="4389120" cy="457200"/>
+            <a:off x="5669280" y="2249424"/>
+            <a:ext cx="4389120" cy="393192"/>
           </a:xfrm>
           <a:prstGeom prst="rect">
             <a:avLst/>
@@ -16767,7 +18070,7 @@
               <a:buNone/>
             </a:pPr>
             <a:r>
-              <a:rPr lang="en-US" sz="1300" dirty="0">
+              <a:rPr lang="en-US" sz="1250" dirty="0">
                 <a:solidFill>
                   <a:srgbClr val="002855"/>
                 </a:solidFill>
@@ -16786,12 +18089,12 @@
         </p:nvSpPr>
         <p:spPr>
           <a:xfrm>
-            <a:off x="10332720" y="2350008"/>
-            <a:ext cx="1399032" cy="384048"/>
+            <a:off x="10332720" y="2286000"/>
+            <a:ext cx="1399032" cy="320040"/>
           </a:xfrm>
           <a:prstGeom prst="roundRect">
             <a:avLst>
-              <a:gd name="adj" fmla="val 19048"/>
+              <a:gd name="adj" fmla="val 22857"/>
             </a:avLst>
           </a:prstGeom>
           <a:solidFill>
@@ -16813,8 +18116,8 @@
         </p:nvSpPr>
         <p:spPr>
           <a:xfrm>
-            <a:off x="10332720" y="2350008"/>
-            <a:ext cx="1399032" cy="384048"/>
+            <a:off x="10332720" y="2286000"/>
+            <a:ext cx="1399032" cy="320040"/>
           </a:xfrm>
           <a:prstGeom prst="rect">
             <a:avLst/>
@@ -16852,12 +18155,12 @@
         </p:nvSpPr>
         <p:spPr>
           <a:xfrm>
-            <a:off x="457200" y="2916936"/>
-            <a:ext cx="4663440" cy="566928"/>
+            <a:off x="457200" y="2788920"/>
+            <a:ext cx="4663440" cy="502920"/>
           </a:xfrm>
           <a:prstGeom prst="roundRect">
             <a:avLst>
-              <a:gd name="adj" fmla="val 12903"/>
+              <a:gd name="adj" fmla="val 14545"/>
             </a:avLst>
           </a:prstGeom>
           <a:solidFill>
@@ -16879,8 +18182,8 @@
         </p:nvSpPr>
         <p:spPr>
           <a:xfrm>
-            <a:off x="603504" y="2971800"/>
-            <a:ext cx="4389120" cy="457200"/>
+            <a:off x="603504" y="2843784"/>
+            <a:ext cx="4389120" cy="393192"/>
           </a:xfrm>
           <a:prstGeom prst="rect">
             <a:avLst/>
@@ -16896,12 +18199,12 @@
               <a:buNone/>
             </a:pPr>
             <a:r>
-              <a:rPr lang="en-US" sz="1300" dirty="0">
+              <a:rPr lang="en-US" sz="1250" dirty="0">
                 <a:solidFill>
                   <a:srgbClr val="272425"/>
                 </a:solidFill>
               </a:rPr>
-              <a:t>Los cambios se aprueban uno a uno y nadie suma lo comprometido</a:t>
+              <a:t>Se elige entre alternativas sin evidencia ni pesos, y después nadie sabe qué decisión sigue vigente</a:t>
             </a:r>
             <a:endParaRPr lang="en-US" sz="1200" dirty="0"/>
           </a:p>
@@ -16915,8 +18218,8 @@
         </p:nvSpPr>
         <p:spPr>
           <a:xfrm>
-            <a:off x="5138928" y="2916936"/>
-            <a:ext cx="365760" cy="566928"/>
+            <a:off x="5138928" y="2788920"/>
+            <a:ext cx="365760" cy="502920"/>
           </a:xfrm>
           <a:prstGeom prst="rect">
             <a:avLst/>
@@ -16951,12 +18254,12 @@
         </p:nvSpPr>
         <p:spPr>
           <a:xfrm>
-            <a:off x="5532120" y="2916936"/>
-            <a:ext cx="4663440" cy="566928"/>
+            <a:off x="5532120" y="2788920"/>
+            <a:ext cx="4663440" cy="502920"/>
           </a:xfrm>
           <a:prstGeom prst="roundRect">
             <a:avLst>
-              <a:gd name="adj" fmla="val 12903"/>
+              <a:gd name="adj" fmla="val 14545"/>
             </a:avLst>
           </a:prstGeom>
           <a:solidFill>
@@ -16978,8 +18281,8 @@
         </p:nvSpPr>
         <p:spPr>
           <a:xfrm>
-            <a:off x="5669280" y="2971800"/>
-            <a:ext cx="4389120" cy="457200"/>
+            <a:off x="5669280" y="2843784"/>
+            <a:ext cx="4389120" cy="393192"/>
           </a:xfrm>
           <a:prstGeom prst="rect">
             <a:avLst/>
@@ -16995,12 +18298,12 @@
               <a:buNone/>
             </a:pPr>
             <a:r>
-              <a:rPr lang="en-US" sz="1300" dirty="0">
+              <a:rPr lang="en-US" sz="1200" dirty="0">
                 <a:solidFill>
                   <a:srgbClr val="002855"/>
                 </a:solidFill>
               </a:rPr>
-              <a:t>Cada cambio se mide antes de decidirlo y se carga contra el presupuesto de la junta</a:t>
+              <a:t>Expediente con fuente, matriz con sensibilidad y elección de quien tiene la autoridad; la vigente, con su cadena</a:t>
             </a:r>
             <a:endParaRPr lang="en-US" sz="1200" dirty="0"/>
           </a:p>
@@ -17014,12 +18317,12 @@
         </p:nvSpPr>
         <p:spPr>
           <a:xfrm>
-            <a:off x="10332720" y="3008376"/>
-            <a:ext cx="1399032" cy="384048"/>
+            <a:off x="10332720" y="2880360"/>
+            <a:ext cx="1399032" cy="320040"/>
           </a:xfrm>
           <a:prstGeom prst="roundRect">
             <a:avLst>
-              <a:gd name="adj" fmla="val 19048"/>
+              <a:gd name="adj" fmla="val 22857"/>
             </a:avLst>
           </a:prstGeom>
           <a:solidFill>
@@ -17041,8 +18344,8 @@
         </p:nvSpPr>
         <p:spPr>
           <a:xfrm>
-            <a:off x="10332720" y="3008376"/>
-            <a:ext cx="1399032" cy="384048"/>
+            <a:off x="10332720" y="2880360"/>
+            <a:ext cx="1399032" cy="320040"/>
           </a:xfrm>
           <a:prstGeom prst="rect">
             <a:avLst/>
@@ -17066,7 +18369,7 @@
                 <a:ea typeface="Courier New" pitchFamily="34" charset="-122"/>
                 <a:cs typeface="Courier New" pitchFamily="34" charset="-120"/>
               </a:rPr>
-              <a:t>CAM-03 · CAM-04</a:t>
+              <a:t>DEC-01 · DEC-05</a:t>
             </a:r>
             <a:endParaRPr lang="en-US" sz="1000" dirty="0"/>
           </a:p>
@@ -17080,12 +18383,12 @@
         </p:nvSpPr>
         <p:spPr>
           <a:xfrm>
-            <a:off x="457200" y="3575304"/>
-            <a:ext cx="4663440" cy="566928"/>
+            <a:off x="457200" y="3383280"/>
+            <a:ext cx="4663440" cy="502920"/>
           </a:xfrm>
           <a:prstGeom prst="roundRect">
             <a:avLst>
-              <a:gd name="adj" fmla="val 12903"/>
+              <a:gd name="adj" fmla="val 14545"/>
             </a:avLst>
           </a:prstGeom>
           <a:solidFill>
@@ -17107,8 +18410,8 @@
         </p:nvSpPr>
         <p:spPr>
           <a:xfrm>
-            <a:off x="603504" y="3630168"/>
-            <a:ext cx="4389120" cy="457200"/>
+            <a:off x="603504" y="3438144"/>
+            <a:ext cx="4389120" cy="393192"/>
           </a:xfrm>
           <a:prstGeom prst="rect">
             <a:avLst/>
@@ -17124,12 +18427,12 @@
               <a:buNone/>
             </a:pPr>
             <a:r>
-              <a:rPr lang="en-US" sz="1300" dirty="0">
+              <a:rPr lang="en-US" sz="1250" dirty="0">
                 <a:solidFill>
                   <a:srgbClr val="272425"/>
                 </a:solidFill>
               </a:rPr>
-              <a:t>«Aprobado con condiciones» queda en el acta y se olvida</a:t>
+              <a:t>Los cambios se aprueban uno a uno y nadie suma lo comprometido</a:t>
             </a:r>
             <a:endParaRPr lang="en-US" sz="1200" dirty="0"/>
           </a:p>
@@ -17143,8 +18446,8 @@
         </p:nvSpPr>
         <p:spPr>
           <a:xfrm>
-            <a:off x="5138928" y="3575304"/>
-            <a:ext cx="365760" cy="566928"/>
+            <a:off x="5138928" y="3383280"/>
+            <a:ext cx="365760" cy="502920"/>
           </a:xfrm>
           <a:prstGeom prst="rect">
             <a:avLst/>
@@ -17179,12 +18482,12 @@
         </p:nvSpPr>
         <p:spPr>
           <a:xfrm>
-            <a:off x="5532120" y="3575304"/>
-            <a:ext cx="4663440" cy="566928"/>
+            <a:off x="5532120" y="3383280"/>
+            <a:ext cx="4663440" cy="502920"/>
           </a:xfrm>
           <a:prstGeom prst="roundRect">
             <a:avLst>
-              <a:gd name="adj" fmla="val 12903"/>
+              <a:gd name="adj" fmla="val 14545"/>
             </a:avLst>
           </a:prstGeom>
           <a:solidFill>
@@ -17206,8 +18509,8 @@
         </p:nvSpPr>
         <p:spPr>
           <a:xfrm>
-            <a:off x="5669280" y="3630168"/>
-            <a:ext cx="4389120" cy="457200"/>
+            <a:off x="5669280" y="3438144"/>
+            <a:ext cx="4389120" cy="393192"/>
           </a:xfrm>
           <a:prstGeom prst="rect">
             <a:avLst/>
@@ -17223,12 +18526,12 @@
               <a:buNone/>
             </a:pPr>
             <a:r>
-              <a:rPr lang="en-US" sz="1300" dirty="0">
+              <a:rPr lang="en-US" sz="1250" dirty="0">
                 <a:solidFill>
                   <a:srgbClr val="002855"/>
                 </a:solidFill>
               </a:rPr>
-              <a:t>La condición se sigue hasta que alguien con rol la cierra; abierta, bloquea el cierre</a:t>
+              <a:t>Cada cambio se mide antes de decidirlo y se carga contra el presupuesto de la junta</a:t>
             </a:r>
             <a:endParaRPr lang="en-US" sz="1200" dirty="0"/>
           </a:p>
@@ -17242,12 +18545,12 @@
         </p:nvSpPr>
         <p:spPr>
           <a:xfrm>
-            <a:off x="10332720" y="3666744"/>
-            <a:ext cx="1399032" cy="384048"/>
+            <a:off x="10332720" y="3474720"/>
+            <a:ext cx="1399032" cy="320040"/>
           </a:xfrm>
           <a:prstGeom prst="roundRect">
             <a:avLst>
-              <a:gd name="adj" fmla="val 19048"/>
+              <a:gd name="adj" fmla="val 22857"/>
             </a:avLst>
           </a:prstGeom>
           <a:solidFill>
@@ -17269,8 +18572,8 @@
         </p:nvSpPr>
         <p:spPr>
           <a:xfrm>
-            <a:off x="10332720" y="3666744"/>
-            <a:ext cx="1399032" cy="384048"/>
+            <a:off x="10332720" y="3474720"/>
+            <a:ext cx="1399032" cy="320040"/>
           </a:xfrm>
           <a:prstGeom prst="rect">
             <a:avLst/>
@@ -17294,7 +18597,7 @@
                 <a:ea typeface="Courier New" pitchFamily="34" charset="-122"/>
                 <a:cs typeface="Courier New" pitchFamily="34" charset="-120"/>
               </a:rPr>
-              <a:t>EST-12 · G-01</a:t>
+              <a:t>CAM-03 · CAM-04</a:t>
             </a:r>
             <a:endParaRPr lang="en-US" sz="1000" dirty="0"/>
           </a:p>
@@ -17308,12 +18611,12 @@
         </p:nvSpPr>
         <p:spPr>
           <a:xfrm>
-            <a:off x="457200" y="4233672"/>
-            <a:ext cx="4663440" cy="566928"/>
+            <a:off x="457200" y="3977640"/>
+            <a:ext cx="4663440" cy="502920"/>
           </a:xfrm>
           <a:prstGeom prst="roundRect">
             <a:avLst>
-              <a:gd name="adj" fmla="val 12903"/>
+              <a:gd name="adj" fmla="val 14545"/>
             </a:avLst>
           </a:prstGeom>
           <a:solidFill>
@@ -17335,8 +18638,8 @@
         </p:nvSpPr>
         <p:spPr>
           <a:xfrm>
-            <a:off x="603504" y="4288536"/>
-            <a:ext cx="4389120" cy="457200"/>
+            <a:off x="603504" y="4032504"/>
+            <a:ext cx="4389120" cy="393192"/>
           </a:xfrm>
           <a:prstGeom prst="rect">
             <a:avLst/>
@@ -17352,12 +18655,12 @@
               <a:buNone/>
             </a:pPr>
             <a:r>
-              <a:rPr lang="en-US" sz="1300" dirty="0">
+              <a:rPr lang="en-US" sz="1250" dirty="0">
                 <a:solidFill>
                   <a:srgbClr val="272425"/>
                 </a:solidFill>
               </a:rPr>
-              <a:t>La calidad se revisa al final y el cierre se firma de memoria</a:t>
+              <a:t>«Aprobado con condiciones» queda en el acta y se olvida</a:t>
             </a:r>
             <a:endParaRPr lang="en-US" sz="1200" dirty="0"/>
           </a:p>
@@ -17371,8 +18674,8 @@
         </p:nvSpPr>
         <p:spPr>
           <a:xfrm>
-            <a:off x="5138928" y="4233672"/>
-            <a:ext cx="365760" cy="566928"/>
+            <a:off x="5138928" y="3977640"/>
+            <a:ext cx="365760" cy="502920"/>
           </a:xfrm>
           <a:prstGeom prst="rect">
             <a:avLst/>
@@ -17407,12 +18710,12 @@
         </p:nvSpPr>
         <p:spPr>
           <a:xfrm>
-            <a:off x="5532120" y="4233672"/>
-            <a:ext cx="4663440" cy="566928"/>
+            <a:off x="5532120" y="3977640"/>
+            <a:ext cx="4663440" cy="502920"/>
           </a:xfrm>
           <a:prstGeom prst="roundRect">
             <a:avLst>
-              <a:gd name="adj" fmla="val 12903"/>
+              <a:gd name="adj" fmla="val 14545"/>
             </a:avLst>
           </a:prstGeom>
           <a:solidFill>
@@ -17434,8 +18737,8 @@
         </p:nvSpPr>
         <p:spPr>
           <a:xfrm>
-            <a:off x="5669280" y="4288536"/>
-            <a:ext cx="4389120" cy="457200"/>
+            <a:off x="5669280" y="4032504"/>
+            <a:ext cx="4389120" cy="393192"/>
           </a:xfrm>
           <a:prstGeom prst="rect">
             <a:avLst/>
@@ -17451,12 +18754,12 @@
               <a:buNone/>
             </a:pPr>
             <a:r>
-              <a:rPr lang="en-US" sz="1300" dirty="0">
+              <a:rPr lang="en-US" sz="1250" dirty="0">
                 <a:solidFill>
                   <a:srgbClr val="002855"/>
                 </a:solidFill>
               </a:rPr>
-              <a:t>Cada historia terminada necesita su revisión, y el cierre lista por id lo que falta aceptar</a:t>
+              <a:t>La condición se sigue hasta que alguien con rol la cierra; abierta, bloquea el cierre</a:t>
             </a:r>
             <a:endParaRPr lang="en-US" sz="1200" dirty="0"/>
           </a:p>
@@ -17470,12 +18773,12 @@
         </p:nvSpPr>
         <p:spPr>
           <a:xfrm>
-            <a:off x="10332720" y="4325112"/>
-            <a:ext cx="1399032" cy="384048"/>
+            <a:off x="10332720" y="4069080"/>
+            <a:ext cx="1399032" cy="320040"/>
           </a:xfrm>
           <a:prstGeom prst="roundRect">
             <a:avLst>
-              <a:gd name="adj" fmla="val 19048"/>
+              <a:gd name="adj" fmla="val 22857"/>
             </a:avLst>
           </a:prstGeom>
           <a:solidFill>
@@ -17497,8 +18800,8 @@
         </p:nvSpPr>
         <p:spPr>
           <a:xfrm>
-            <a:off x="10332720" y="4325112"/>
-            <a:ext cx="1399032" cy="384048"/>
+            <a:off x="10332720" y="4069080"/>
+            <a:ext cx="1399032" cy="320040"/>
           </a:xfrm>
           <a:prstGeom prst="rect">
             <a:avLst/>
@@ -17522,7 +18825,7 @@
                 <a:ea typeface="Courier New" pitchFamily="34" charset="-122"/>
                 <a:cs typeface="Courier New" pitchFamily="34" charset="-120"/>
               </a:rPr>
-              <a:t>QUA-01 · C-07</a:t>
+              <a:t>EST-12 · G-01</a:t>
             </a:r>
             <a:endParaRPr lang="en-US" sz="1000" dirty="0"/>
           </a:p>
@@ -17536,12 +18839,12 @@
         </p:nvSpPr>
         <p:spPr>
           <a:xfrm>
-            <a:off x="457200" y="4892040"/>
-            <a:ext cx="4663440" cy="566928"/>
+            <a:off x="457200" y="4572000"/>
+            <a:ext cx="4663440" cy="502920"/>
           </a:xfrm>
           <a:prstGeom prst="roundRect">
             <a:avLst>
-              <a:gd name="adj" fmla="val 12903"/>
+              <a:gd name="adj" fmla="val 14545"/>
             </a:avLst>
           </a:prstGeom>
           <a:solidFill>
@@ -17563,8 +18866,8 @@
         </p:nvSpPr>
         <p:spPr>
           <a:xfrm>
-            <a:off x="603504" y="4946904"/>
-            <a:ext cx="4389120" cy="457200"/>
+            <a:off x="603504" y="4626864"/>
+            <a:ext cx="4389120" cy="393192"/>
           </a:xfrm>
           <a:prstGeom prst="rect">
             <a:avLst/>
@@ -17580,12 +18883,12 @@
               <a:buNone/>
             </a:pPr>
             <a:r>
-              <a:rPr lang="en-US" sz="1300" dirty="0">
+              <a:rPr lang="en-US" sz="1250" dirty="0">
                 <a:solidFill>
                   <a:srgbClr val="272425"/>
                 </a:solidFill>
               </a:rPr>
-              <a:t>Las lecciones se archivan en un informe que nadie vuelve a leer</a:t>
+              <a:t>La calidad se revisa al final y el cierre se firma de memoria</a:t>
             </a:r>
             <a:endParaRPr lang="en-US" sz="1200" dirty="0"/>
           </a:p>
@@ -17599,8 +18902,8 @@
         </p:nvSpPr>
         <p:spPr>
           <a:xfrm>
-            <a:off x="5138928" y="4892040"/>
-            <a:ext cx="365760" cy="566928"/>
+            <a:off x="5138928" y="4572000"/>
+            <a:ext cx="365760" cy="502920"/>
           </a:xfrm>
           <a:prstGeom prst="rect">
             <a:avLst/>
@@ -17635,12 +18938,12 @@
         </p:nvSpPr>
         <p:spPr>
           <a:xfrm>
-            <a:off x="5532120" y="4892040"/>
-            <a:ext cx="4663440" cy="566928"/>
+            <a:off x="5532120" y="4572000"/>
+            <a:ext cx="4663440" cy="502920"/>
           </a:xfrm>
           <a:prstGeom prst="roundRect">
             <a:avLst>
-              <a:gd name="adj" fmla="val 12903"/>
+              <a:gd name="adj" fmla="val 14545"/>
             </a:avLst>
           </a:prstGeom>
           <a:solidFill>
@@ -17662,8 +18965,8 @@
         </p:nvSpPr>
         <p:spPr>
           <a:xfrm>
-            <a:off x="5669280" y="4946904"/>
-            <a:ext cx="4389120" cy="457200"/>
+            <a:off x="5669280" y="4626864"/>
+            <a:ext cx="4389120" cy="393192"/>
           </a:xfrm>
           <a:prstGeom prst="rect">
             <a:avLst/>
@@ -17679,12 +18982,12 @@
               <a:buNone/>
             </a:pPr>
             <a:r>
-              <a:rPr lang="en-US" sz="1300" dirty="0">
+              <a:rPr lang="en-US" sz="1250" dirty="0">
                 <a:solidFill>
                   <a:srgbClr val="002855"/>
                 </a:solidFill>
               </a:rPr>
-              <a:t>Cada lección de impacto alto se acciona, se verifica que funcionó y alimenta a otros proyectos</a:t>
+              <a:t>Cada historia terminada necesita su revisión, y el cierre lista por id lo que falta aceptar</a:t>
             </a:r>
             <a:endParaRPr lang="en-US" sz="1200" dirty="0"/>
           </a:p>
@@ -17698,12 +19001,12 @@
         </p:nvSpPr>
         <p:spPr>
           <a:xfrm>
-            <a:off x="10332720" y="4983480"/>
-            <a:ext cx="1399032" cy="384048"/>
+            <a:off x="10332720" y="4663440"/>
+            <a:ext cx="1399032" cy="320040"/>
           </a:xfrm>
           <a:prstGeom prst="roundRect">
             <a:avLst>
-              <a:gd name="adj" fmla="val 19048"/>
+              <a:gd name="adj" fmla="val 22857"/>
             </a:avLst>
           </a:prstGeom>
           <a:solidFill>
@@ -17725,8 +19028,8 @@
         </p:nvSpPr>
         <p:spPr>
           <a:xfrm>
-            <a:off x="10332720" y="4983480"/>
-            <a:ext cx="1399032" cy="384048"/>
+            <a:off x="10332720" y="4663440"/>
+            <a:ext cx="1399032" cy="320040"/>
           </a:xfrm>
           <a:prstGeom prst="rect">
             <a:avLst/>
@@ -17750,7 +19053,7 @@
                 <a:ea typeface="Courier New" pitchFamily="34" charset="-122"/>
                 <a:cs typeface="Courier New" pitchFamily="34" charset="-120"/>
               </a:rPr>
-              <a:t>REG-11 · REG-12</a:t>
+              <a:t>QUA-01 · C-07</a:t>
             </a:r>
             <a:endParaRPr lang="en-US" sz="1000" dirty="0"/>
           </a:p>
@@ -17764,7 +19067,235 @@
         </p:nvSpPr>
         <p:spPr>
           <a:xfrm>
-            <a:off x="457200" y="5596128"/>
+            <a:off x="457200" y="5166360"/>
+            <a:ext cx="4663440" cy="502920"/>
+          </a:xfrm>
+          <a:prstGeom prst="roundRect">
+            <a:avLst>
+              <a:gd name="adj" fmla="val 14545"/>
+            </a:avLst>
+          </a:prstGeom>
+          <a:solidFill>
+            <a:srgbClr val="F4F6F8"/>
+          </a:solidFill>
+          <a:ln w="9525">
+            <a:solidFill>
+              <a:srgbClr val="F4F6F8"/>
+            </a:solidFill>
+            <a:prstDash val="solid"/>
+          </a:ln>
+        </p:spPr>
+      </p:sp>
+      <p:sp>
+        <p:nvSpPr>
+          <p:cNvPr id="50" name="Text 47"/>
+          <p:cNvSpPr txBox="1"/>
+          <p:nvPr/>
+        </p:nvSpPr>
+        <p:spPr>
+          <a:xfrm>
+            <a:off x="603504" y="5221224"/>
+            <a:ext cx="4389120" cy="393192"/>
+          </a:xfrm>
+          <a:prstGeom prst="rect">
+            <a:avLst/>
+          </a:prstGeom>
+          <a:noFill/>
+          <a:ln/>
+        </p:spPr>
+        <p:txBody>
+          <a:bodyPr wrap="square" lIns="0" tIns="0" rIns="0" bIns="0" rtlCol="0" anchor="ctr"/>
+          <a:lstStyle/>
+          <a:p>
+            <a:pPr indent="0" marL="0">
+              <a:buNone/>
+            </a:pPr>
+            <a:r>
+              <a:rPr lang="en-US" sz="1250" dirty="0">
+                <a:solidFill>
+                  <a:srgbClr val="272425"/>
+                </a:solidFill>
+              </a:rPr>
+              <a:t>Las lecciones se archivan en un informe que nadie vuelve a leer</a:t>
+            </a:r>
+            <a:endParaRPr lang="en-US" sz="1200" dirty="0"/>
+          </a:p>
+        </p:txBody>
+      </p:sp>
+      <p:sp>
+        <p:nvSpPr>
+          <p:cNvPr id="51" name="Text 48"/>
+          <p:cNvSpPr txBox="1"/>
+          <p:nvPr/>
+        </p:nvSpPr>
+        <p:spPr>
+          <a:xfrm>
+            <a:off x="5138928" y="5166360"/>
+            <a:ext cx="365760" cy="502920"/>
+          </a:xfrm>
+          <a:prstGeom prst="rect">
+            <a:avLst/>
+          </a:prstGeom>
+          <a:noFill/>
+          <a:ln/>
+        </p:spPr>
+        <p:txBody>
+          <a:bodyPr wrap="square" lIns="0" tIns="0" rIns="0" bIns="0" rtlCol="0" anchor="ctr"/>
+          <a:lstStyle/>
+          <a:p>
+            <a:pPr algn="ctr" indent="0" marL="0">
+              <a:buNone/>
+            </a:pPr>
+            <a:r>
+              <a:rPr lang="en-US" sz="1800" b="1" dirty="0">
+                <a:solidFill>
+                  <a:srgbClr val="B5651D"/>
+                </a:solidFill>
+              </a:rPr>
+              <a:t>→</a:t>
+            </a:r>
+            <a:endParaRPr lang="en-US" sz="1800" dirty="0"/>
+          </a:p>
+        </p:txBody>
+      </p:sp>
+      <p:sp>
+        <p:nvSpPr>
+          <p:cNvPr id="52" name="Shape 49"/>
+          <p:cNvSpPr/>
+          <p:nvPr/>
+        </p:nvSpPr>
+        <p:spPr>
+          <a:xfrm>
+            <a:off x="5532120" y="5166360"/>
+            <a:ext cx="4663440" cy="502920"/>
+          </a:xfrm>
+          <a:prstGeom prst="roundRect">
+            <a:avLst>
+              <a:gd name="adj" fmla="val 14545"/>
+            </a:avLst>
+          </a:prstGeom>
+          <a:solidFill>
+            <a:srgbClr val="E9F1F8"/>
+          </a:solidFill>
+          <a:ln w="9525">
+            <a:solidFill>
+              <a:srgbClr val="E9F1F8"/>
+            </a:solidFill>
+            <a:prstDash val="solid"/>
+          </a:ln>
+        </p:spPr>
+      </p:sp>
+      <p:sp>
+        <p:nvSpPr>
+          <p:cNvPr id="53" name="Text 50"/>
+          <p:cNvSpPr txBox="1"/>
+          <p:nvPr/>
+        </p:nvSpPr>
+        <p:spPr>
+          <a:xfrm>
+            <a:off x="5669280" y="5221224"/>
+            <a:ext cx="4389120" cy="393192"/>
+          </a:xfrm>
+          <a:prstGeom prst="rect">
+            <a:avLst/>
+          </a:prstGeom>
+          <a:noFill/>
+          <a:ln/>
+        </p:spPr>
+        <p:txBody>
+          <a:bodyPr wrap="square" lIns="0" tIns="0" rIns="0" bIns="0" rtlCol="0" anchor="ctr"/>
+          <a:lstStyle/>
+          <a:p>
+            <a:pPr indent="0" marL="0">
+              <a:buNone/>
+            </a:pPr>
+            <a:r>
+              <a:rPr lang="en-US" sz="1250" dirty="0">
+                <a:solidFill>
+                  <a:srgbClr val="002855"/>
+                </a:solidFill>
+              </a:rPr>
+              <a:t>Cada lección de impacto alto se acciona, se verifica que funcionó y alimenta a otros proyectos</a:t>
+            </a:r>
+            <a:endParaRPr lang="en-US" sz="1200" dirty="0"/>
+          </a:p>
+        </p:txBody>
+      </p:sp>
+      <p:sp>
+        <p:nvSpPr>
+          <p:cNvPr id="54" name="Shape 51"/>
+          <p:cNvSpPr/>
+          <p:nvPr/>
+        </p:nvSpPr>
+        <p:spPr>
+          <a:xfrm>
+            <a:off x="10332720" y="5257800"/>
+            <a:ext cx="1399032" cy="320040"/>
+          </a:xfrm>
+          <a:prstGeom prst="roundRect">
+            <a:avLst>
+              <a:gd name="adj" fmla="val 22857"/>
+            </a:avLst>
+          </a:prstGeom>
+          <a:solidFill>
+            <a:srgbClr val="002855"/>
+          </a:solidFill>
+          <a:ln w="9525">
+            <a:solidFill>
+              <a:srgbClr val="002855"/>
+            </a:solidFill>
+            <a:prstDash val="solid"/>
+          </a:ln>
+        </p:spPr>
+      </p:sp>
+      <p:sp>
+        <p:nvSpPr>
+          <p:cNvPr id="55" name="Text 52"/>
+          <p:cNvSpPr txBox="1"/>
+          <p:nvPr/>
+        </p:nvSpPr>
+        <p:spPr>
+          <a:xfrm>
+            <a:off x="10332720" y="5257800"/>
+            <a:ext cx="1399032" cy="320040"/>
+          </a:xfrm>
+          <a:prstGeom prst="rect">
+            <a:avLst/>
+          </a:prstGeom>
+          <a:noFill/>
+          <a:ln/>
+        </p:spPr>
+        <p:txBody>
+          <a:bodyPr wrap="square" lIns="0" tIns="0" rIns="0" bIns="0" rtlCol="0" anchor="ctr"/>
+          <a:lstStyle/>
+          <a:p>
+            <a:pPr algn="ctr" indent="0" marL="0">
+              <a:buNone/>
+            </a:pPr>
+            <a:r>
+              <a:rPr lang="en-US" sz="1000" b="1" dirty="0">
+                <a:solidFill>
+                  <a:srgbClr val="FFFFFF"/>
+                </a:solidFill>
+                <a:latin typeface="Courier New" pitchFamily="34" charset="0"/>
+                <a:ea typeface="Courier New" pitchFamily="34" charset="-122"/>
+                <a:cs typeface="Courier New" pitchFamily="34" charset="-120"/>
+              </a:rPr>
+              <a:t>REG-11 · REG-12</a:t>
+            </a:r>
+            <a:endParaRPr lang="en-US" sz="1000" dirty="0"/>
+          </a:p>
+        </p:txBody>
+      </p:sp>
+      <p:sp>
+        <p:nvSpPr>
+          <p:cNvPr id="56" name="Shape 53"/>
+          <p:cNvSpPr/>
+          <p:nvPr/>
+        </p:nvSpPr>
+        <p:spPr>
+          <a:xfrm>
+            <a:off x="457200" y="5806440"/>
             <a:ext cx="11274552" cy="457200"/>
           </a:xfrm>
           <a:prstGeom prst="roundRect">
@@ -17785,13 +19316,13 @@
       </p:sp>
       <p:sp>
         <p:nvSpPr>
-          <p:cNvPr id="50" name="Text 47"/>
+          <p:cNvPr id="57" name="Text 54"/>
           <p:cNvSpPr txBox="1"/>
           <p:nvPr/>
         </p:nvSpPr>
         <p:spPr>
           <a:xfrm>
-            <a:off x="640080" y="5596128"/>
+            <a:off x="640080" y="5806440"/>
             <a:ext cx="10972800" cy="457200"/>
           </a:xfrm>
           <a:prstGeom prst="rect">
@@ -20046,7 +21577,7 @@
                   <a:srgbClr val="002855"/>
                 </a:solidFill>
               </a:rPr>
-              <a:t>105  </a:t>
+              <a:t>113  </a:t>
             </a:r>
             <a:pPr indent="0" marL="0">
               <a:buNone/>
@@ -20093,7 +21624,7 @@
                   <a:srgbClr val="696969"/>
                 </a:solidFill>
               </a:rPr>
-              <a:t>93 de sanidad y 12 de puerta</a:t>
+              <a:t>101 de sanidad y 12 de puerta</a:t>
             </a:r>
             <a:endParaRPr lang="en-US" sz="1200" dirty="0"/>
           </a:p>
@@ -20259,8 +21790,8 @@
         </p:blipFill>
         <p:spPr>
           <a:xfrm>
-            <a:off x="489451" y="1298448"/>
-            <a:ext cx="11210050" cy="3703320"/>
+            <a:off x="1586086" y="1298448"/>
+            <a:ext cx="9016779" cy="3703320"/>
           </a:xfrm>
           <a:prstGeom prst="rect">
             <a:avLst/>
@@ -24875,7 +26406,7 @@
                   <a:srgbClr val="FFFFFF"/>
                 </a:solidFill>
               </a:rPr>
-              <a:t>105 controles automáticos vigilan lo que nadie revisa a mano</a:t>
+              <a:t>113 controles automáticos vigilan lo que nadie revisa a mano</a:t>
             </a:r>
             <a:endParaRPr lang="en-US" sz="1900" dirty="0"/>
           </a:p>
@@ -25836,7 +27367,7 @@
                   <a:srgbClr val="FFFFFF"/>
                 </a:solidFill>
               </a:rPr>
-              <a:t>Se conecta con las herramientas que ya usa la organización, sin atarse a ninguna</a:t>
+              <a:t>Decidir con contexto, controlar cada escritura y encontrar la evidencia con su cita</a:t>
             </a:r>
             <a:endParaRPr lang="en-US" sz="1900" dirty="0"/>
           </a:p>
@@ -25850,16 +27381,20 @@
         </p:nvSpPr>
         <p:spPr>
           <a:xfrm>
-            <a:off x="4251960" y="1988820"/>
-            <a:ext cx="1156716" cy="1623060"/>
-          </a:xfrm>
-          <a:prstGeom prst="line">
-            <a:avLst/>
-          </a:prstGeom>
-          <a:noFill/>
-          <a:ln w="15875">
+            <a:off x="457200" y="1261872"/>
+            <a:ext cx="5541264" cy="4572000"/>
+          </a:xfrm>
+          <a:prstGeom prst="roundRect">
+            <a:avLst>
+              <a:gd name="adj" fmla="val 1600"/>
+            </a:avLst>
+          </a:prstGeom>
+          <a:solidFill>
+            <a:srgbClr val="F4F6F8"/>
+          </a:solidFill>
+          <a:ln w="9525">
             <a:solidFill>
-              <a:srgbClr val="AFC0D0"/>
+              <a:srgbClr val="F4F6F8"/>
             </a:solidFill>
             <a:prstDash val="solid"/>
           </a:ln>
@@ -25867,176 +27402,291 @@
       </p:sp>
       <p:sp>
         <p:nvSpPr>
-          <p:cNvPr id="5" name="Shape 2"/>
+          <p:cNvPr id="5" name="Text 2"/>
+          <p:cNvSpPr txBox="1"/>
+          <p:nvPr/>
+        </p:nvSpPr>
+        <p:spPr>
+          <a:xfrm>
+            <a:off x="640080" y="1371600"/>
+            <a:ext cx="5175504" cy="237744"/>
+          </a:xfrm>
+          <a:prstGeom prst="rect">
+            <a:avLst/>
+          </a:prstGeom>
+          <a:noFill/>
+          <a:ln/>
+        </p:spPr>
+        <p:txBody>
+          <a:bodyPr wrap="square" lIns="0" tIns="0" rIns="0" bIns="0" rtlCol="0" anchor="t"/>
+          <a:lstStyle/>
+          <a:p>
+            <a:pPr indent="0" marL="0">
+              <a:buNone/>
+            </a:pPr>
+            <a:r>
+              <a:rPr lang="en-US" sz="1000" b="1" spc="100" kern="0" dirty="0">
+                <a:solidFill>
+                  <a:srgbClr val="002855"/>
+                </a:solidFill>
+              </a:rPr>
+              <a:t>DECIDIR CON CONTEXTO</a:t>
+            </a:r>
+            <a:endParaRPr lang="en-US" sz="1000" dirty="0"/>
+          </a:p>
+        </p:txBody>
+      </p:sp>
+      <p:sp>
+        <p:nvSpPr>
+          <p:cNvPr id="6" name="Text 3"/>
+          <p:cNvSpPr txBox="1"/>
+          <p:nvPr/>
+        </p:nvSpPr>
+        <p:spPr>
+          <a:xfrm>
+            <a:off x="640080" y="1682496"/>
+            <a:ext cx="5175504" cy="1783080"/>
+          </a:xfrm>
+          <a:prstGeom prst="rect">
+            <a:avLst/>
+          </a:prstGeom>
+          <a:noFill/>
+          <a:ln/>
+        </p:spPr>
+        <p:txBody>
+          <a:bodyPr wrap="square" lIns="0" tIns="0" rIns="0" bIns="0" rtlCol="0" anchor="t"/>
+          <a:lstStyle/>
+          <a:p>
+            <a:pPr indent="0" marL="0">
+              <a:spcAft>
+                <a:spcPts val="400"/>
+              </a:spcAft>
+              <a:buNone/>
+            </a:pPr>
+            <a:r>
+              <a:rPr lang="en-US" sz="1050" b="1" dirty="0">
+                <a:solidFill>
+                  <a:srgbClr val="00629B"/>
+                </a:solidFill>
+              </a:rPr>
+              <a:t>▪  </a:t>
+            </a:r>
+            <a:pPr indent="0" marL="0">
+              <a:spcAft>
+                <a:spcPts val="400"/>
+              </a:spcAft>
+              <a:buNone/>
+            </a:pPr>
+            <a:r>
+              <a:rPr lang="en-US" sz="1050" dirty="0">
+                <a:solidFill>
+                  <a:srgbClr val="272425"/>
+                </a:solidFill>
+              </a:rPr>
+              <a:t>Expediente: la evidencia que aplica a la decisión, cada dato con su fuente y sin datos confidenciales</a:t>
+            </a:r>
+            <a:endParaRPr lang="en-US" sz="1050" dirty="0"/>
+          </a:p>
+          <a:p>
+            <a:pPr indent="0" marL="0">
+              <a:spcAft>
+                <a:spcPts val="400"/>
+              </a:spcAft>
+              <a:buNone/>
+            </a:pPr>
+            <a:r>
+              <a:rPr lang="en-US" sz="1050" b="1" dirty="0">
+                <a:solidFill>
+                  <a:srgbClr val="00629B"/>
+                </a:solidFill>
+              </a:rPr>
+              <a:t>▪  </a:t>
+            </a:r>
+            <a:pPr indent="0" marL="0">
+              <a:spcAft>
+                <a:spcPts val="400"/>
+              </a:spcAft>
+              <a:buNone/>
+            </a:pPr>
+            <a:r>
+              <a:rPr lang="en-US" sz="1050" dirty="0">
+                <a:solidFill>
+                  <a:srgbClr val="272425"/>
+                </a:solidFill>
+              </a:rPr>
+              <a:t>Matriz con pesos explícitos, eliminatorios y sensibilidad: qué peso cambiaría la elección</a:t>
+            </a:r>
+            <a:endParaRPr lang="en-US" sz="1050" dirty="0"/>
+          </a:p>
+          <a:p>
+            <a:pPr indent="0" marL="0">
+              <a:spcAft>
+                <a:spcPts val="400"/>
+              </a:spcAft>
+              <a:buNone/>
+            </a:pPr>
+            <a:r>
+              <a:rPr lang="en-US" sz="1050" b="1" dirty="0">
+                <a:solidFill>
+                  <a:srgbClr val="00629B"/>
+                </a:solidFill>
+              </a:rPr>
+              <a:t>▪  </a:t>
+            </a:r>
+            <a:pPr indent="0" marL="0">
+              <a:spcAft>
+                <a:spcPts val="400"/>
+              </a:spcAft>
+              <a:buNone/>
+            </a:pPr>
+            <a:r>
+              <a:rPr lang="en-US" sz="1050" dirty="0">
+                <a:solidFill>
+                  <a:srgbClr val="272425"/>
+                </a:solidFill>
+              </a:rPr>
+              <a:t>Elige la persona con la autoridad que fija PRINCE2 y refleja la RACI; si no es el A, explica por qué</a:t>
+            </a:r>
+            <a:endParaRPr lang="en-US" sz="1050" dirty="0"/>
+          </a:p>
+          <a:p>
+            <a:pPr indent="0" marL="0">
+              <a:spcAft>
+                <a:spcPts val="400"/>
+              </a:spcAft>
+              <a:buNone/>
+            </a:pPr>
+            <a:r>
+              <a:rPr lang="en-US" sz="1050" b="1" dirty="0">
+                <a:solidFill>
+                  <a:srgbClr val="00629B"/>
+                </a:solidFill>
+              </a:rPr>
+              <a:t>▪  </a:t>
+            </a:r>
+            <a:pPr indent="0" marL="0">
+              <a:spcAft>
+                <a:spcPts val="400"/>
+              </a:spcAft>
+              <a:buNone/>
+            </a:pPr>
+            <a:r>
+              <a:rPr lang="en-US" sz="1050" dirty="0">
+                <a:solidFill>
+                  <a:srgbClr val="272425"/>
+                </a:solidFill>
+              </a:rPr>
+              <a:t>Vigencia: qué decisión reemplaza a cuál, con aviso de contradicciones y revisiones vencidas</a:t>
+            </a:r>
+            <a:endParaRPr lang="en-US" sz="1050" dirty="0"/>
+          </a:p>
+          <a:p>
+            <a:pPr indent="0" marL="0">
+              <a:spcAft>
+                <a:spcPts val="400"/>
+              </a:spcAft>
+              <a:buNone/>
+            </a:pPr>
+            <a:r>
+              <a:rPr lang="en-US" sz="1050" b="1" dirty="0">
+                <a:solidFill>
+                  <a:srgbClr val="00629B"/>
+                </a:solidFill>
+              </a:rPr>
+              <a:t>▪  </a:t>
+            </a:r>
+            <a:pPr indent="0" marL="0">
+              <a:spcAft>
+                <a:spcPts val="400"/>
+              </a:spcAft>
+              <a:buNone/>
+            </a:pPr>
+            <a:r>
+              <a:rPr lang="en-US" sz="1050" dirty="0">
+                <a:solidFill>
+                  <a:srgbClr val="272425"/>
+                </a:solidFill>
+              </a:rPr>
+              <a:t>Bitácora encadenada de cada escritura y propuestas de los agentes que aprueba una persona</a:t>
+            </a:r>
+            <a:endParaRPr lang="en-US" sz="1050" dirty="0"/>
+          </a:p>
+        </p:txBody>
+      </p:sp>
+      <p:pic>
+        <p:nvPicPr>
+          <p:cNvPr id="7" name="Image 0" descr="/home/claude/pm-method/docs/guias/img/g1-sensibilidad-r003.png">    </p:cNvPr>
+          <p:cNvPicPr>
+            <a:picLocks noChangeAspect="1"/>
+          </p:cNvPicPr>
+          <p:nvPr/>
+        </p:nvPicPr>
+        <p:blipFill>
+          <a:blip r:embed="rId1"/>
+          <a:stretch>
+            <a:fillRect/>
+          </a:stretch>
+        </p:blipFill>
+        <p:spPr>
+          <a:xfrm>
+            <a:off x="1480312" y="3529584"/>
+            <a:ext cx="3495040" cy="1965960"/>
+          </a:xfrm>
+          <a:prstGeom prst="rect">
+            <a:avLst/>
+          </a:prstGeom>
+        </p:spPr>
+      </p:pic>
+      <p:sp>
+        <p:nvSpPr>
+          <p:cNvPr id="8" name="Text 4"/>
+          <p:cNvSpPr txBox="1"/>
+          <p:nvPr/>
+        </p:nvSpPr>
+        <p:spPr>
+          <a:xfrm>
+            <a:off x="640080" y="5532120"/>
+            <a:ext cx="5175504" cy="237744"/>
+          </a:xfrm>
+          <a:prstGeom prst="rect">
+            <a:avLst/>
+          </a:prstGeom>
+          <a:noFill/>
+          <a:ln/>
+        </p:spPr>
+        <p:txBody>
+          <a:bodyPr wrap="square" lIns="0" tIns="0" rIns="0" bIns="0" rtlCol="0" anchor="t"/>
+          <a:lstStyle/>
+          <a:p>
+            <a:pPr algn="ctr" indent="0" marL="0">
+              <a:buNone/>
+            </a:pPr>
+            <a:r>
+              <a:rPr lang="en-US" sz="950" i="1" dirty="0">
+                <a:solidFill>
+                  <a:srgbClr val="696969"/>
+                </a:solidFill>
+              </a:rPr>
+              <a:t>Sensibilidad de la decisión de R-003</a:t>
+            </a:r>
+            <a:endParaRPr lang="en-US" sz="950" dirty="0"/>
+          </a:p>
+        </p:txBody>
+      </p:sp>
+      <p:sp>
+        <p:nvSpPr>
+          <p:cNvPr id="9" name="Shape 5"/>
           <p:cNvSpPr/>
           <p:nvPr/>
         </p:nvSpPr>
         <p:spPr>
           <a:xfrm>
-            <a:off x="457200" y="1325880"/>
-            <a:ext cx="3794760" cy="1325880"/>
+            <a:off x="6190488" y="1261872"/>
+            <a:ext cx="5541264" cy="4572000"/>
           </a:xfrm>
           <a:prstGeom prst="roundRect">
             <a:avLst>
-              <a:gd name="adj" fmla="val 5517"/>
-            </a:avLst>
-          </a:prstGeom>
-          <a:solidFill>
-            <a:srgbClr val="FBF1E6"/>
-          </a:solidFill>
-          <a:ln w="9525">
-            <a:solidFill>
-              <a:srgbClr val="FBF1E6"/>
-            </a:solidFill>
-            <a:prstDash val="solid"/>
-          </a:ln>
-        </p:spPr>
-      </p:sp>
-      <p:sp>
-        <p:nvSpPr>
-          <p:cNvPr id="6" name="Text 3"/>
-          <p:cNvSpPr txBox="1"/>
-          <p:nvPr/>
-        </p:nvSpPr>
-        <p:spPr>
-          <a:xfrm>
-            <a:off x="621792" y="1417320"/>
-            <a:ext cx="3465576" cy="274320"/>
-          </a:xfrm>
-          <a:prstGeom prst="rect">
-            <a:avLst/>
-          </a:prstGeom>
-          <a:noFill/>
-          <a:ln/>
-        </p:spPr>
-        <p:txBody>
-          <a:bodyPr wrap="square" lIns="0" tIns="0" rIns="0" bIns="0" rtlCol="0" anchor="t"/>
-          <a:lstStyle/>
-          <a:p>
-            <a:pPr indent="0" marL="0">
-              <a:buNone/>
-            </a:pPr>
-            <a:r>
-              <a:rPr lang="en-US" sz="1350" b="1" dirty="0">
-                <a:solidFill>
-                  <a:srgbClr val="002855"/>
-                </a:solidFill>
-              </a:rPr>
-              <a:t>BMAD</a:t>
-            </a:r>
-            <a:endParaRPr lang="en-US" sz="1350" dirty="0"/>
-          </a:p>
-        </p:txBody>
-      </p:sp>
-      <p:sp>
-        <p:nvSpPr>
-          <p:cNvPr id="7" name="Text 4"/>
-          <p:cNvSpPr txBox="1"/>
-          <p:nvPr/>
-        </p:nvSpPr>
-        <p:spPr>
-          <a:xfrm>
-            <a:off x="621792" y="1691640"/>
-            <a:ext cx="3465576" cy="237744"/>
-          </a:xfrm>
-          <a:prstGeom prst="rect">
-            <a:avLst/>
-          </a:prstGeom>
-          <a:noFill/>
-          <a:ln/>
-        </p:spPr>
-        <p:txBody>
-          <a:bodyPr wrap="square" lIns="0" tIns="0" rIns="0" bIns="0" rtlCol="0" anchor="t"/>
-          <a:lstStyle/>
-          <a:p>
-            <a:pPr indent="0" marL="0">
-              <a:buNone/>
-            </a:pPr>
-            <a:r>
-              <a:rPr lang="en-US" sz="950" b="1" dirty="0">
-                <a:solidFill>
-                  <a:srgbClr val="B5651D"/>
-                </a:solidFill>
-              </a:rPr>
-              <a:t>versiones probadas: 4.x, 6.11, 6.12</a:t>
-            </a:r>
-            <a:endParaRPr lang="en-US" sz="950" dirty="0"/>
-          </a:p>
-        </p:txBody>
-      </p:sp>
-      <p:sp>
-        <p:nvSpPr>
-          <p:cNvPr id="8" name="Text 5"/>
-          <p:cNvSpPr txBox="1"/>
-          <p:nvPr/>
-        </p:nvSpPr>
-        <p:spPr>
-          <a:xfrm>
-            <a:off x="621792" y="1947672"/>
-            <a:ext cx="3465576" cy="649224"/>
-          </a:xfrm>
-          <a:prstGeom prst="rect">
-            <a:avLst/>
-          </a:prstGeom>
-          <a:noFill/>
-          <a:ln/>
-        </p:spPr>
-        <p:txBody>
-          <a:bodyPr wrap="square" lIns="0" tIns="0" rIns="0" bIns="0" rtlCol="0" anchor="t"/>
-          <a:lstStyle/>
-          <a:p>
-            <a:pPr indent="0" marL="0">
-              <a:buNone/>
-            </a:pPr>
-            <a:r>
-              <a:rPr lang="en-US" sz="1100" dirty="0">
-                <a:solidFill>
-                  <a:srgbClr val="272425"/>
-                </a:solidFill>
-              </a:rPr>
-              <a:t>Especificación de solo lectura: PRD, arquitectura, épicas, historias y estado del sprint, sin copias.</a:t>
-            </a:r>
-            <a:endParaRPr lang="en-US" sz="1200" dirty="0"/>
-          </a:p>
-        </p:txBody>
-      </p:sp>
-      <p:sp>
-        <p:nvSpPr>
-          <p:cNvPr id="9" name="Shape 6"/>
-          <p:cNvSpPr/>
-          <p:nvPr/>
-        </p:nvSpPr>
-        <p:spPr>
-          <a:xfrm>
-            <a:off x="4251960" y="3497580"/>
-            <a:ext cx="1156716" cy="114300"/>
-          </a:xfrm>
-          <a:prstGeom prst="line">
-            <a:avLst/>
-          </a:prstGeom>
-          <a:noFill/>
-          <a:ln w="15875">
-            <a:solidFill>
-              <a:srgbClr val="AFC0D0"/>
-            </a:solidFill>
-            <a:prstDash val="solid"/>
-          </a:ln>
-        </p:spPr>
-      </p:sp>
-      <p:sp>
-        <p:nvSpPr>
-          <p:cNvPr id="10" name="Shape 7"/>
-          <p:cNvSpPr/>
-          <p:nvPr/>
-        </p:nvSpPr>
-        <p:spPr>
-          <a:xfrm>
-            <a:off x="457200" y="2834640"/>
-            <a:ext cx="3794760" cy="1325880"/>
-          </a:xfrm>
-          <a:prstGeom prst="roundRect">
-            <a:avLst>
-              <a:gd name="adj" fmla="val 5517"/>
+              <a:gd name="adj" fmla="val 1600"/>
             </a:avLst>
           </a:prstGeom>
           <a:solidFill>
@@ -26052,14 +27702,14 @@
       </p:sp>
       <p:sp>
         <p:nvSpPr>
-          <p:cNvPr id="11" name="Text 8"/>
+          <p:cNvPr id="10" name="Text 6"/>
           <p:cNvSpPr txBox="1"/>
           <p:nvPr/>
         </p:nvSpPr>
         <p:spPr>
           <a:xfrm>
-            <a:off x="621792" y="2926080"/>
-            <a:ext cx="3465576" cy="274320"/>
+            <a:off x="6373368" y="1371600"/>
+            <a:ext cx="5175504" cy="237744"/>
           </a:xfrm>
           <a:prstGeom prst="rect">
             <a:avLst/>
@@ -26075,27 +27725,27 @@
               <a:buNone/>
             </a:pPr>
             <a:r>
-              <a:rPr lang="en-US" sz="1350" b="1" dirty="0">
-                <a:solidFill>
-                  <a:srgbClr val="002855"/>
-                </a:solidFill>
-              </a:rPr>
-              <a:t>Trackers</a:t>
-            </a:r>
-            <a:endParaRPr lang="en-US" sz="1350" dirty="0"/>
-          </a:p>
-        </p:txBody>
-      </p:sp>
-      <p:sp>
-        <p:nvSpPr>
-          <p:cNvPr id="12" name="Text 9"/>
+              <a:rPr lang="en-US" sz="1000" b="1" spc="100" kern="0" dirty="0">
+                <a:solidFill>
+                  <a:srgbClr val="00629B"/>
+                </a:solidFill>
+              </a:rPr>
+              <a:t>BUSCAR EN LOS PROYECTOS (PM-KB, OPCIONAL)</a:t>
+            </a:r>
+            <a:endParaRPr lang="en-US" sz="1000" dirty="0"/>
+          </a:p>
+        </p:txBody>
+      </p:sp>
+      <p:sp>
+        <p:nvSpPr>
+          <p:cNvPr id="11" name="Text 7"/>
           <p:cNvSpPr txBox="1"/>
           <p:nvPr/>
         </p:nvSpPr>
         <p:spPr>
           <a:xfrm>
-            <a:off x="621792" y="3200400"/>
-            <a:ext cx="3465576" cy="237744"/>
+            <a:off x="6373368" y="1682496"/>
+            <a:ext cx="5175504" cy="1783080"/>
           </a:xfrm>
           <a:prstGeom prst="rect">
             <a:avLst/>
@@ -26108,15 +27758,185 @@
           <a:lstStyle/>
           <a:p>
             <a:pPr indent="0" marL="0">
-              <a:buNone/>
-            </a:pPr>
-            <a:r>
-              <a:rPr lang="en-US" sz="950" b="1" dirty="0">
+              <a:spcAft>
+                <a:spcPts val="400"/>
+              </a:spcAft>
+              <a:buNone/>
+            </a:pPr>
+            <a:r>
+              <a:rPr lang="en-US" sz="1250" b="1" dirty="0">
                 <a:solidFill>
                   <a:srgbClr val="00629B"/>
                 </a:solidFill>
               </a:rPr>
-              <a:t>Azure DevOps · GitHub · Jira · Linear</a:t>
+              <a:t>▪  </a:t>
+            </a:r>
+            <a:pPr indent="0" marL="0">
+              <a:spcAft>
+                <a:spcPts val="400"/>
+              </a:spcAft>
+              <a:buNone/>
+            </a:pPr>
+            <a:r>
+              <a:rPr lang="en-US" sz="1250" dirty="0">
+                <a:solidFill>
+                  <a:srgbClr val="272425"/>
+                </a:solidFill>
+              </a:rPr>
+              <a:t>Índice de registros, documentos con sus versiones, actas y transcripciones de cada proyecto</a:t>
+            </a:r>
+            <a:endParaRPr lang="en-US" sz="1250" dirty="0"/>
+          </a:p>
+          <a:p>
+            <a:pPr indent="0" marL="0">
+              <a:spcAft>
+                <a:spcPts val="400"/>
+              </a:spcAft>
+              <a:buNone/>
+            </a:pPr>
+            <a:r>
+              <a:rPr lang="en-US" sz="1250" b="1" dirty="0">
+                <a:solidFill>
+                  <a:srgbClr val="00629B"/>
+                </a:solidFill>
+              </a:rPr>
+              <a:t>▪  </a:t>
+            </a:r>
+            <a:pPr indent="0" marL="0">
+              <a:spcAft>
+                <a:spcPts val="400"/>
+              </a:spcAft>
+              <a:buNone/>
+            </a:pPr>
+            <a:r>
+              <a:rPr lang="en-US" sz="1250" dirty="0">
+                <a:solidFill>
+                  <a:srgbClr val="272425"/>
+                </a:solidFill>
+              </a:rPr>
+              <a:t>Preguntas en español o inglés; cada respuesta con la cita de archivo y línea</a:t>
+            </a:r>
+            <a:endParaRPr lang="en-US" sz="1250" dirty="0"/>
+          </a:p>
+          <a:p>
+            <a:pPr indent="0" marL="0">
+              <a:spcAft>
+                <a:spcPts val="400"/>
+              </a:spcAft>
+              <a:buNone/>
+            </a:pPr>
+            <a:r>
+              <a:rPr lang="en-US" sz="1250" b="1" dirty="0">
+                <a:solidFill>
+                  <a:srgbClr val="00629B"/>
+                </a:solidFill>
+              </a:rPr>
+              <a:t>▪  </a:t>
+            </a:r>
+            <a:pPr indent="0" marL="0">
+              <a:spcAft>
+                <a:spcPts val="400"/>
+              </a:spcAft>
+              <a:buNone/>
+            </a:pPr>
+            <a:r>
+              <a:rPr lang="en-US" sz="1250" dirty="0">
+                <a:solidFill>
+                  <a:srgbClr val="272425"/>
+                </a:solidFill>
+              </a:rPr>
+              <a:t>Web con token por persona y MCP de solo lectura para Claude Code y Hermes</a:t>
+            </a:r>
+            <a:endParaRPr lang="en-US" sz="1250" dirty="0"/>
+          </a:p>
+          <a:p>
+            <a:pPr indent="0" marL="0">
+              <a:spcAft>
+                <a:spcPts val="400"/>
+              </a:spcAft>
+              <a:buNone/>
+            </a:pPr>
+            <a:r>
+              <a:rPr lang="en-US" sz="1250" b="1" dirty="0">
+                <a:solidFill>
+                  <a:srgbClr val="00629B"/>
+                </a:solidFill>
+              </a:rPr>
+              <a:t>▪  </a:t>
+            </a:r>
+            <a:pPr indent="0" marL="0">
+              <a:spcAft>
+                <a:spcPts val="400"/>
+              </a:spcAft>
+              <a:buNone/>
+            </a:pPr>
+            <a:r>
+              <a:rPr lang="en-US" sz="1250" dirty="0">
+                <a:solidFill>
+                  <a:srgbClr val="272425"/>
+                </a:solidFill>
+              </a:rPr>
+              <a:t>Sobre WSL2 con un clúster propio o con Docker en un contenedor segregado</a:t>
+            </a:r>
+            <a:endParaRPr lang="en-US" sz="1250" dirty="0"/>
+          </a:p>
+        </p:txBody>
+      </p:sp>
+      <p:pic>
+        <p:nvPicPr>
+          <p:cNvPr id="12" name="Image 1" descr="/home/claude/pm-method/docs/guias/img/g1-kb-busqueda.png">    </p:cNvPr>
+          <p:cNvPicPr>
+            <a:picLocks noChangeAspect="1"/>
+          </p:cNvPicPr>
+          <p:nvPr/>
+        </p:nvPicPr>
+        <p:blipFill>
+          <a:blip r:embed="rId2"/>
+          <a:stretch>
+            <a:fillRect/>
+          </a:stretch>
+        </p:blipFill>
+        <p:spPr>
+          <a:xfrm>
+            <a:off x="7213600" y="3529584"/>
+            <a:ext cx="3495040" cy="1965960"/>
+          </a:xfrm>
+          <a:prstGeom prst="rect">
+            <a:avLst/>
+          </a:prstGeom>
+        </p:spPr>
+      </p:pic>
+      <p:sp>
+        <p:nvSpPr>
+          <p:cNvPr id="13" name="Text 8"/>
+          <p:cNvSpPr txBox="1"/>
+          <p:nvPr/>
+        </p:nvSpPr>
+        <p:spPr>
+          <a:xfrm>
+            <a:off x="6373368" y="5532120"/>
+            <a:ext cx="5175504" cy="237744"/>
+          </a:xfrm>
+          <a:prstGeom prst="rect">
+            <a:avLst/>
+          </a:prstGeom>
+          <a:noFill/>
+          <a:ln/>
+        </p:spPr>
+        <p:txBody>
+          <a:bodyPr wrap="square" lIns="0" tIns="0" rIns="0" bIns="0" rtlCol="0" anchor="t"/>
+          <a:lstStyle/>
+          <a:p>
+            <a:pPr algn="ctr" indent="0" marL="0">
+              <a:buNone/>
+            </a:pPr>
+            <a:r>
+              <a:rPr lang="en-US" sz="950" i="1" dirty="0">
+                <a:solidFill>
+                  <a:srgbClr val="696969"/>
+                </a:solidFill>
+              </a:rPr>
+              <a:t>Búsqueda en pm-kb: C-003 primero, con su cita</a:t>
             </a:r>
             <a:endParaRPr lang="en-US" sz="950" dirty="0"/>
           </a:p>
@@ -26124,58 +27944,26 @@
       </p:sp>
       <p:sp>
         <p:nvSpPr>
-          <p:cNvPr id="13" name="Text 10"/>
-          <p:cNvSpPr txBox="1"/>
-          <p:nvPr/>
-        </p:nvSpPr>
-        <p:spPr>
-          <a:xfrm>
-            <a:off x="621792" y="3456432"/>
-            <a:ext cx="3465576" cy="649224"/>
-          </a:xfrm>
-          <a:prstGeom prst="rect">
-            <a:avLst/>
-          </a:prstGeom>
-          <a:noFill/>
-          <a:ln/>
-        </p:spPr>
-        <p:txBody>
-          <a:bodyPr wrap="square" lIns="0" tIns="0" rIns="0" bIns="0" rtlCol="0" anchor="t"/>
-          <a:lstStyle/>
-          <a:p>
-            <a:pPr indent="0" marL="0">
-              <a:buNone/>
-            </a:pPr>
-            <a:r>
-              <a:rPr lang="en-US" sz="1100" dirty="0">
-                <a:solidFill>
-                  <a:srgbClr val="272425"/>
-                </a:solidFill>
-              </a:rPr>
-              <a:t>Instantáneas fechadas, avance y riesgos candidatos desde los tickets.</a:t>
-            </a:r>
-            <a:endParaRPr lang="en-US" sz="1200" dirty="0"/>
-          </a:p>
-        </p:txBody>
-      </p:sp>
-      <p:sp>
-        <p:nvSpPr>
-          <p:cNvPr id="14" name="Shape 11"/>
+          <p:cNvPr id="14" name="Shape 9"/>
           <p:cNvSpPr/>
           <p:nvPr/>
         </p:nvSpPr>
         <p:spPr>
-          <a:xfrm flipV="1">
-            <a:off x="4251960" y="3611880"/>
-            <a:ext cx="1156716" cy="1394460"/>
-          </a:xfrm>
-          <a:prstGeom prst="line">
-            <a:avLst/>
-          </a:prstGeom>
-          <a:noFill/>
-          <a:ln w="15875">
+          <a:xfrm>
+            <a:off x="457200" y="5925312"/>
+            <a:ext cx="11274552" cy="329184"/>
+          </a:xfrm>
+          <a:prstGeom prst="roundRect">
+            <a:avLst>
+              <a:gd name="adj" fmla="val 22222"/>
+            </a:avLst>
+          </a:prstGeom>
+          <a:solidFill>
+            <a:srgbClr val="002855"/>
+          </a:solidFill>
+          <a:ln w="9525">
             <a:solidFill>
-              <a:srgbClr val="AFC0D0"/>
+              <a:srgbClr val="002855"/>
             </a:solidFill>
             <a:prstDash val="solid"/>
           </a:ln>
@@ -26183,743 +27971,37 @@
       </p:sp>
       <p:sp>
         <p:nvSpPr>
-          <p:cNvPr id="15" name="Shape 12"/>
-          <p:cNvSpPr/>
-          <p:nvPr/>
-        </p:nvSpPr>
-        <p:spPr>
-          <a:xfrm>
-            <a:off x="457200" y="4343400"/>
-            <a:ext cx="3794760" cy="1325880"/>
-          </a:xfrm>
-          <a:prstGeom prst="roundRect">
-            <a:avLst>
-              <a:gd name="adj" fmla="val 5517"/>
-            </a:avLst>
-          </a:prstGeom>
-          <a:solidFill>
-            <a:srgbClr val="E9F1F8"/>
-          </a:solidFill>
-          <a:ln w="9525">
-            <a:solidFill>
-              <a:srgbClr val="E9F1F8"/>
-            </a:solidFill>
-            <a:prstDash val="solid"/>
-          </a:ln>
-        </p:spPr>
-      </p:sp>
-      <p:sp>
-        <p:nvSpPr>
-          <p:cNvPr id="16" name="Text 13"/>
+          <p:cNvPr id="15" name="Text 10"/>
           <p:cNvSpPr txBox="1"/>
           <p:nvPr/>
         </p:nvSpPr>
         <p:spPr>
           <a:xfrm>
-            <a:off x="621792" y="4434840"/>
-            <a:ext cx="3465576" cy="274320"/>
-          </a:xfrm>
-          <a:prstGeom prst="rect">
-            <a:avLst/>
-          </a:prstGeom>
-          <a:noFill/>
-          <a:ln/>
-        </p:spPr>
-        <p:txBody>
-          <a:bodyPr wrap="square" lIns="0" tIns="0" rIns="0" bIns="0" rtlCol="0" anchor="t"/>
-          <a:lstStyle/>
-          <a:p>
-            <a:pPr indent="0" marL="0">
-              <a:buNone/>
-            </a:pPr>
-            <a:r>
-              <a:rPr lang="en-US" sz="1350" b="1" dirty="0">
-                <a:solidFill>
-                  <a:srgbClr val="002855"/>
-                </a:solidFill>
-              </a:rPr>
-              <a:t>Transcripciones</a:t>
-            </a:r>
-            <a:endParaRPr lang="en-US" sz="1350" dirty="0"/>
-          </a:p>
-        </p:txBody>
-      </p:sp>
-      <p:sp>
-        <p:nvSpPr>
-          <p:cNvPr id="17" name="Text 14"/>
-          <p:cNvSpPr txBox="1"/>
-          <p:nvPr/>
-        </p:nvSpPr>
-        <p:spPr>
-          <a:xfrm>
-            <a:off x="621792" y="4709160"/>
-            <a:ext cx="3465576" cy="237744"/>
-          </a:xfrm>
-          <a:prstGeom prst="rect">
-            <a:avLst/>
-          </a:prstGeom>
-          <a:noFill/>
-          <a:ln/>
-        </p:spPr>
-        <p:txBody>
-          <a:bodyPr wrap="square" lIns="0" tIns="0" rIns="0" bIns="0" rtlCol="0" anchor="t"/>
-          <a:lstStyle/>
-          <a:p>
-            <a:pPr indent="0" marL="0">
-              <a:buNone/>
-            </a:pPr>
-            <a:r>
-              <a:rPr lang="en-US" sz="950" b="1" dirty="0">
-                <a:solidFill>
-                  <a:srgbClr val="00629B"/>
-                </a:solidFill>
-              </a:rPr>
-              <a:t>archivo · Fireflies · Granola · minutes · Teams · Zoom</a:t>
-            </a:r>
-            <a:endParaRPr lang="en-US" sz="950" dirty="0"/>
-          </a:p>
-        </p:txBody>
-      </p:sp>
-      <p:sp>
-        <p:nvSpPr>
-          <p:cNvPr id="18" name="Text 15"/>
-          <p:cNvSpPr txBox="1"/>
-          <p:nvPr/>
-        </p:nvSpPr>
-        <p:spPr>
-          <a:xfrm>
-            <a:off x="621792" y="4965192"/>
-            <a:ext cx="3465576" cy="649224"/>
-          </a:xfrm>
-          <a:prstGeom prst="rect">
-            <a:avLst/>
-          </a:prstGeom>
-          <a:noFill/>
-          <a:ln/>
-        </p:spPr>
-        <p:txBody>
-          <a:bodyPr wrap="square" lIns="0" tIns="0" rIns="0" bIns="0" rtlCol="0" anchor="t"/>
-          <a:lstStyle/>
-          <a:p>
-            <a:pPr indent="0" marL="0">
-              <a:buNone/>
-            </a:pPr>
-            <a:r>
-              <a:rPr lang="en-US" sz="1050" dirty="0">
-                <a:solidFill>
-                  <a:srgbClr val="272425"/>
-                </a:solidFill>
-              </a:rPr>
-              <a:t>Acuerdos con cita: decisiones, compromisos, supuestos, riesgos y lecciones propuestos desde la transcripción y registrados solo si una persona los confirma.</a:t>
-            </a:r>
-            <a:endParaRPr lang="en-US" sz="1200" dirty="0"/>
-          </a:p>
-        </p:txBody>
-      </p:sp>
-      <p:sp>
-        <p:nvSpPr>
-          <p:cNvPr id="19" name="Shape 16"/>
-          <p:cNvSpPr/>
-          <p:nvPr/>
-        </p:nvSpPr>
-        <p:spPr>
-          <a:xfrm flipV="1">
-            <a:off x="6780276" y="1988820"/>
-            <a:ext cx="1156716" cy="1623060"/>
-          </a:xfrm>
-          <a:prstGeom prst="line">
-            <a:avLst/>
-          </a:prstGeom>
-          <a:noFill/>
-          <a:ln w="15875">
-            <a:solidFill>
-              <a:srgbClr val="AFC0D0"/>
-            </a:solidFill>
-            <a:prstDash val="solid"/>
-          </a:ln>
-        </p:spPr>
-      </p:sp>
-      <p:sp>
-        <p:nvSpPr>
-          <p:cNvPr id="20" name="Shape 17"/>
-          <p:cNvSpPr/>
-          <p:nvPr/>
-        </p:nvSpPr>
-        <p:spPr>
-          <a:xfrm>
-            <a:off x="7936992" y="1325880"/>
-            <a:ext cx="3794760" cy="1325880"/>
-          </a:xfrm>
-          <a:prstGeom prst="roundRect">
-            <a:avLst>
-              <a:gd name="adj" fmla="val 5517"/>
-            </a:avLst>
-          </a:prstGeom>
-          <a:solidFill>
-            <a:srgbClr val="FBF1E6"/>
-          </a:solidFill>
-          <a:ln w="9525">
-            <a:solidFill>
-              <a:srgbClr val="FBF1E6"/>
-            </a:solidFill>
-            <a:prstDash val="solid"/>
-          </a:ln>
-        </p:spPr>
-      </p:sp>
-      <p:sp>
-        <p:nvSpPr>
-          <p:cNvPr id="21" name="Text 18"/>
-          <p:cNvSpPr txBox="1"/>
-          <p:nvPr/>
-        </p:nvSpPr>
-        <p:spPr>
-          <a:xfrm>
-            <a:off x="8101584" y="1417320"/>
-            <a:ext cx="3465576" cy="274320"/>
-          </a:xfrm>
-          <a:prstGeom prst="rect">
-            <a:avLst/>
-          </a:prstGeom>
-          <a:noFill/>
-          <a:ln/>
-        </p:spPr>
-        <p:txBody>
-          <a:bodyPr wrap="square" lIns="0" tIns="0" rIns="0" bIns="0" rtlCol="0" anchor="t"/>
-          <a:lstStyle/>
-          <a:p>
-            <a:pPr indent="0" marL="0">
-              <a:buNone/>
-            </a:pPr>
-            <a:r>
-              <a:rPr lang="en-US" sz="1350" b="1" dirty="0">
-                <a:solidFill>
-                  <a:srgbClr val="002855"/>
-                </a:solidFill>
-              </a:rPr>
-              <a:t>Correo, Slack y Teams</a:t>
-            </a:r>
-            <a:endParaRPr lang="en-US" sz="1350" dirty="0"/>
-          </a:p>
-        </p:txBody>
-      </p:sp>
-      <p:sp>
-        <p:nvSpPr>
-          <p:cNvPr id="22" name="Text 19"/>
-          <p:cNvSpPr txBox="1"/>
-          <p:nvPr/>
-        </p:nvSpPr>
-        <p:spPr>
-          <a:xfrm>
-            <a:off x="8101584" y="1691640"/>
-            <a:ext cx="3465576" cy="237744"/>
-          </a:xfrm>
-          <a:prstGeom prst="rect">
-            <a:avLst/>
-          </a:prstGeom>
-          <a:noFill/>
-          <a:ln/>
-        </p:spPr>
-        <p:txBody>
-          <a:bodyPr wrap="square" lIns="0" tIns="0" rIns="0" bIns="0" rtlCol="0" anchor="t"/>
-          <a:lstStyle/>
-          <a:p>
-            <a:pPr indent="0" marL="0">
-              <a:buNone/>
-            </a:pPr>
-            <a:r>
-              <a:rPr lang="en-US" sz="950" b="1" dirty="0">
-                <a:solidFill>
-                  <a:srgbClr val="B5651D"/>
-                </a:solidFill>
-              </a:rPr>
-              <a:t>.eml · Gmail · Outlook · SMTP · Slack · Teams</a:t>
-            </a:r>
-            <a:endParaRPr lang="en-US" sz="950" dirty="0"/>
-          </a:p>
-        </p:txBody>
-      </p:sp>
-      <p:sp>
-        <p:nvSpPr>
-          <p:cNvPr id="23" name="Text 20"/>
-          <p:cNvSpPr txBox="1"/>
-          <p:nvPr/>
-        </p:nvSpPr>
-        <p:spPr>
-          <a:xfrm>
-            <a:off x="8101584" y="1947672"/>
-            <a:ext cx="3465576" cy="649224"/>
-          </a:xfrm>
-          <a:prstGeom prst="rect">
-            <a:avLst/>
-          </a:prstGeom>
-          <a:noFill/>
-          <a:ln/>
-        </p:spPr>
-        <p:txBody>
-          <a:bodyPr wrap="square" lIns="0" tIns="0" rIns="0" bIns="0" rtlCol="0" anchor="t"/>
-          <a:lstStyle/>
-          <a:p>
-            <a:pPr indent="0" marL="0">
-              <a:buNone/>
-            </a:pPr>
-            <a:r>
-              <a:rPr lang="en-US" sz="1100" dirty="0">
-                <a:solidFill>
-                  <a:srgbClr val="272425"/>
-                </a:solidFill>
-              </a:rPr>
-              <a:t>Capa de canales: envía solo mensajes aprobados, simula por defecto y registra cada envío.</a:t>
-            </a:r>
-            <a:endParaRPr lang="en-US" sz="1200" dirty="0"/>
-          </a:p>
-        </p:txBody>
-      </p:sp>
-      <p:sp>
-        <p:nvSpPr>
-          <p:cNvPr id="24" name="Shape 21"/>
-          <p:cNvSpPr/>
-          <p:nvPr/>
-        </p:nvSpPr>
-        <p:spPr>
-          <a:xfrm flipV="1">
-            <a:off x="6780276" y="3497580"/>
-            <a:ext cx="1156716" cy="114300"/>
-          </a:xfrm>
-          <a:prstGeom prst="line">
-            <a:avLst/>
-          </a:prstGeom>
-          <a:noFill/>
-          <a:ln w="15875">
-            <a:solidFill>
-              <a:srgbClr val="AFC0D0"/>
-            </a:solidFill>
-            <a:prstDash val="solid"/>
-          </a:ln>
-        </p:spPr>
-      </p:sp>
-      <p:sp>
-        <p:nvSpPr>
-          <p:cNvPr id="25" name="Shape 22"/>
-          <p:cNvSpPr/>
-          <p:nvPr/>
-        </p:nvSpPr>
-        <p:spPr>
-          <a:xfrm>
-            <a:off x="7936992" y="2834640"/>
-            <a:ext cx="3794760" cy="1325880"/>
-          </a:xfrm>
-          <a:prstGeom prst="roundRect">
-            <a:avLst>
-              <a:gd name="adj" fmla="val 5517"/>
-            </a:avLst>
-          </a:prstGeom>
-          <a:solidFill>
-            <a:srgbClr val="E9F1F8"/>
-          </a:solidFill>
-          <a:ln w="9525">
-            <a:solidFill>
-              <a:srgbClr val="E9F1F8"/>
-            </a:solidFill>
-            <a:prstDash val="solid"/>
-          </a:ln>
-        </p:spPr>
-      </p:sp>
-      <p:sp>
-        <p:nvSpPr>
-          <p:cNvPr id="26" name="Text 23"/>
-          <p:cNvSpPr txBox="1"/>
-          <p:nvPr/>
-        </p:nvSpPr>
-        <p:spPr>
-          <a:xfrm>
-            <a:off x="8101584" y="2926080"/>
-            <a:ext cx="3465576" cy="274320"/>
-          </a:xfrm>
-          <a:prstGeom prst="rect">
-            <a:avLst/>
-          </a:prstGeom>
-          <a:noFill/>
-          <a:ln/>
-        </p:spPr>
-        <p:txBody>
-          <a:bodyPr wrap="square" lIns="0" tIns="0" rIns="0" bIns="0" rtlCol="0" anchor="t"/>
-          <a:lstStyle/>
-          <a:p>
-            <a:pPr indent="0" marL="0">
-              <a:buNone/>
-            </a:pPr>
-            <a:r>
-              <a:rPr lang="en-US" sz="1350" b="1" dirty="0">
-                <a:solidFill>
-                  <a:srgbClr val="002855"/>
-                </a:solidFill>
-              </a:rPr>
-              <a:t>OKR</a:t>
-            </a:r>
-            <a:endParaRPr lang="en-US" sz="1350" dirty="0"/>
-          </a:p>
-        </p:txBody>
-      </p:sp>
-      <p:sp>
-        <p:nvSpPr>
-          <p:cNvPr id="27" name="Text 24"/>
-          <p:cNvSpPr txBox="1"/>
-          <p:nvPr/>
-        </p:nvSpPr>
-        <p:spPr>
-          <a:xfrm>
-            <a:off x="8101584" y="3200400"/>
-            <a:ext cx="3465576" cy="237744"/>
-          </a:xfrm>
-          <a:prstGeom prst="rect">
-            <a:avLst/>
-          </a:prstGeom>
-          <a:noFill/>
-          <a:ln/>
-        </p:spPr>
-        <p:txBody>
-          <a:bodyPr wrap="square" lIns="0" tIns="0" rIns="0" bIns="0" rtlCol="0" anchor="t"/>
-          <a:lstStyle/>
-          <a:p>
-            <a:pPr indent="0" marL="0">
-              <a:buNone/>
-            </a:pPr>
-            <a:r>
-              <a:rPr lang="en-US" sz="950" b="1" dirty="0">
-                <a:solidFill>
-                  <a:srgbClr val="00629B"/>
-                </a:solidFill>
-              </a:rPr>
-              <a:t>archivo · Perdoo · Tability</a:t>
-            </a:r>
-            <a:endParaRPr lang="en-US" sz="950" dirty="0"/>
-          </a:p>
-        </p:txBody>
-      </p:sp>
-      <p:sp>
-        <p:nvSpPr>
-          <p:cNvPr id="28" name="Text 25"/>
-          <p:cNvSpPr txBox="1"/>
-          <p:nvPr/>
-        </p:nvSpPr>
-        <p:spPr>
-          <a:xfrm>
-            <a:off x="8101584" y="3456432"/>
-            <a:ext cx="3465576" cy="649224"/>
-          </a:xfrm>
-          <a:prstGeom prst="rect">
-            <a:avLst/>
-          </a:prstGeom>
-          <a:noFill/>
-          <a:ln/>
-        </p:spPr>
-        <p:txBody>
-          <a:bodyPr wrap="square" lIns="0" tIns="0" rIns="0" bIns="0" rtlCol="0" anchor="t"/>
-          <a:lstStyle/>
-          <a:p>
-            <a:pPr indent="0" marL="0">
-              <a:buNone/>
-            </a:pPr>
-            <a:r>
-              <a:rPr lang="en-US" sz="1100" dirty="0">
-                <a:solidFill>
-                  <a:srgbClr val="272425"/>
-                </a:solidFill>
-              </a:rPr>
-              <a:t>Resultados clave ligados a los beneficios del business case, con check-ins y salud.</a:t>
-            </a:r>
-            <a:endParaRPr lang="en-US" sz="1200" dirty="0"/>
-          </a:p>
-        </p:txBody>
-      </p:sp>
-      <p:sp>
-        <p:nvSpPr>
-          <p:cNvPr id="29" name="Shape 26"/>
-          <p:cNvSpPr/>
-          <p:nvPr/>
-        </p:nvSpPr>
-        <p:spPr>
-          <a:xfrm>
-            <a:off x="6780276" y="3611880"/>
-            <a:ext cx="1156716" cy="1394460"/>
-          </a:xfrm>
-          <a:prstGeom prst="line">
-            <a:avLst/>
-          </a:prstGeom>
-          <a:noFill/>
-          <a:ln w="15875">
-            <a:solidFill>
-              <a:srgbClr val="AFC0D0"/>
-            </a:solidFill>
-            <a:prstDash val="solid"/>
-          </a:ln>
-        </p:spPr>
-      </p:sp>
-      <p:sp>
-        <p:nvSpPr>
-          <p:cNvPr id="30" name="Shape 27"/>
-          <p:cNvSpPr/>
-          <p:nvPr/>
-        </p:nvSpPr>
-        <p:spPr>
-          <a:xfrm>
-            <a:off x="7936992" y="4343400"/>
-            <a:ext cx="3794760" cy="1325880"/>
-          </a:xfrm>
-          <a:prstGeom prst="roundRect">
-            <a:avLst>
-              <a:gd name="adj" fmla="val 5517"/>
-            </a:avLst>
-          </a:prstGeom>
-          <a:solidFill>
-            <a:srgbClr val="E9F1F8"/>
-          </a:solidFill>
-          <a:ln w="9525">
-            <a:solidFill>
-              <a:srgbClr val="E9F1F8"/>
-            </a:solidFill>
-            <a:prstDash val="solid"/>
-          </a:ln>
-        </p:spPr>
-      </p:sp>
-      <p:sp>
-        <p:nvSpPr>
-          <p:cNvPr id="31" name="Text 28"/>
-          <p:cNvSpPr txBox="1"/>
-          <p:nvPr/>
-        </p:nvSpPr>
-        <p:spPr>
-          <a:xfrm>
-            <a:off x="8101584" y="4434840"/>
-            <a:ext cx="3465576" cy="274320"/>
-          </a:xfrm>
-          <a:prstGeom prst="rect">
-            <a:avLst/>
-          </a:prstGeom>
-          <a:noFill/>
-          <a:ln/>
-        </p:spPr>
-        <p:txBody>
-          <a:bodyPr wrap="square" lIns="0" tIns="0" rIns="0" bIns="0" rtlCol="0" anchor="t"/>
-          <a:lstStyle/>
-          <a:p>
-            <a:pPr indent="0" marL="0">
-              <a:buNone/>
-            </a:pPr>
-            <a:r>
-              <a:rPr lang="en-US" sz="1350" b="1" dirty="0">
-                <a:solidFill>
-                  <a:srgbClr val="002855"/>
-                </a:solidFill>
-              </a:rPr>
-              <a:t>Mapas de Wardley y recorrido</a:t>
-            </a:r>
-            <a:endParaRPr lang="en-US" sz="1350" dirty="0"/>
-          </a:p>
-        </p:txBody>
-      </p:sp>
-      <p:sp>
-        <p:nvSpPr>
-          <p:cNvPr id="32" name="Text 29"/>
-          <p:cNvSpPr txBox="1"/>
-          <p:nvPr/>
-        </p:nvSpPr>
-        <p:spPr>
-          <a:xfrm>
-            <a:off x="8101584" y="4709160"/>
-            <a:ext cx="3465576" cy="237744"/>
-          </a:xfrm>
-          <a:prstGeom prst="rect">
-            <a:avLst/>
-          </a:prstGeom>
-          <a:noFill/>
-          <a:ln/>
-        </p:spPr>
-        <p:txBody>
-          <a:bodyPr wrap="square" lIns="0" tIns="0" rIns="0" bIns="0" rtlCol="0" anchor="t"/>
-          <a:lstStyle/>
-          <a:p>
-            <a:pPr indent="0" marL="0">
-              <a:buNone/>
-            </a:pPr>
-            <a:r>
-              <a:rPr lang="en-US" sz="950" b="1" dirty="0">
-                <a:solidFill>
-                  <a:srgbClr val="00629B"/>
-                </a:solidFill>
-              </a:rPr>
-              <a:t>Mermaid wardley-beta y journey · OWM · HTML</a:t>
-            </a:r>
-            <a:endParaRPr lang="en-US" sz="950" dirty="0"/>
-          </a:p>
-        </p:txBody>
-      </p:sp>
-      <p:sp>
-        <p:nvSpPr>
-          <p:cNvPr id="33" name="Text 30"/>
-          <p:cNvSpPr txBox="1"/>
-          <p:nvPr/>
-        </p:nvSpPr>
-        <p:spPr>
-          <a:xfrm>
-            <a:off x="8101584" y="4965192"/>
-            <a:ext cx="3465576" cy="649224"/>
-          </a:xfrm>
-          <a:prstGeom prst="rect">
-            <a:avLst/>
-          </a:prstGeom>
-          <a:noFill/>
-          <a:ln/>
-        </p:spPr>
-        <p:txBody>
-          <a:bodyPr wrap="square" lIns="0" tIns="0" rIns="0" bIns="0" rtlCol="0" anchor="t"/>
-          <a:lstStyle/>
-          <a:p>
-            <a:pPr indent="0" marL="0">
-              <a:buNone/>
-            </a:pPr>
-            <a:r>
-              <a:rPr lang="en-US" sz="1100" dirty="0">
-                <a:solidFill>
-                  <a:srgbClr val="272425"/>
-                </a:solidFill>
-              </a:rPr>
-              <a:t>Qué construir, comprar o tercerizar y la experiencia del usuario paso a paso, con controles.</a:t>
-            </a:r>
-            <a:endParaRPr lang="en-US" sz="1200" dirty="0"/>
-          </a:p>
-        </p:txBody>
-      </p:sp>
-      <p:sp>
-        <p:nvSpPr>
-          <p:cNvPr id="34" name="Shape 31"/>
-          <p:cNvSpPr/>
-          <p:nvPr/>
-        </p:nvSpPr>
-        <p:spPr>
-          <a:xfrm>
-            <a:off x="5180076" y="2697480"/>
-            <a:ext cx="1828800" cy="1828800"/>
-          </a:xfrm>
-          <a:prstGeom prst="ellipse">
-            <a:avLst/>
-          </a:prstGeom>
-          <a:solidFill>
-            <a:srgbClr val="002855"/>
-          </a:solidFill>
-          <a:ln w="12700">
-            <a:solidFill>
-              <a:srgbClr val="FFFFFF"/>
-            </a:solidFill>
-            <a:prstDash val="solid"/>
-          </a:ln>
-        </p:spPr>
-      </p:sp>
-      <p:sp>
-        <p:nvSpPr>
-          <p:cNvPr id="35" name="Text 32"/>
-          <p:cNvSpPr txBox="1"/>
-          <p:nvPr/>
-        </p:nvSpPr>
-        <p:spPr>
-          <a:xfrm>
-            <a:off x="5271516" y="3227832"/>
-            <a:ext cx="1645920" cy="365760"/>
-          </a:xfrm>
-          <a:prstGeom prst="rect">
-            <a:avLst/>
-          </a:prstGeom>
-          <a:noFill/>
-          <a:ln/>
-        </p:spPr>
-        <p:txBody>
-          <a:bodyPr wrap="square" lIns="0" tIns="0" rIns="0" bIns="0" rtlCol="0" anchor="b"/>
-          <a:lstStyle/>
-          <a:p>
-            <a:pPr algn="ctr" indent="0" marL="0">
-              <a:buNone/>
-            </a:pPr>
-            <a:r>
-              <a:rPr lang="en-US" sz="1800" b="1" dirty="0">
+            <a:off x="640080" y="5925312"/>
+            <a:ext cx="10972800" cy="329184"/>
+          </a:xfrm>
+          <a:prstGeom prst="rect">
+            <a:avLst/>
+          </a:prstGeom>
+          <a:noFill/>
+          <a:ln/>
+        </p:spPr>
+        <p:txBody>
+          <a:bodyPr wrap="square" lIns="0" tIns="0" rIns="0" bIns="0" rtlCol="0" anchor="ctr"/>
+          <a:lstStyle/>
+          <a:p>
+            <a:pPr indent="0" marL="0">
+              <a:buNone/>
+            </a:pPr>
+            <a:r>
+              <a:rPr lang="en-US" sz="1100" b="1" dirty="0">
                 <a:solidFill>
                   <a:srgbClr val="FFFFFF"/>
                 </a:solidFill>
               </a:rPr>
-              <a:t>pm-method</a:t>
-            </a:r>
-            <a:endParaRPr lang="en-US" sz="1800" dirty="0"/>
-          </a:p>
-        </p:txBody>
-      </p:sp>
-      <p:sp>
-        <p:nvSpPr>
-          <p:cNvPr id="36" name="Text 33"/>
-          <p:cNvSpPr txBox="1"/>
-          <p:nvPr/>
-        </p:nvSpPr>
-        <p:spPr>
-          <a:xfrm>
-            <a:off x="5408676" y="3630168"/>
-            <a:ext cx="1371600" cy="457200"/>
-          </a:xfrm>
-          <a:prstGeom prst="rect">
-            <a:avLst/>
-          </a:prstGeom>
-          <a:noFill/>
-          <a:ln/>
-        </p:spPr>
-        <p:txBody>
-          <a:bodyPr wrap="square" lIns="0" tIns="0" rIns="0" bIns="0" rtlCol="0" anchor="t"/>
-          <a:lstStyle/>
-          <a:p>
-            <a:pPr algn="ctr" indent="0" marL="0">
-              <a:buNone/>
-            </a:pPr>
-            <a:r>
-              <a:rPr lang="en-US" sz="1000" dirty="0">
-                <a:solidFill>
-                  <a:srgbClr val="9FD0F0"/>
-                </a:solidFill>
-              </a:rPr>
-              <a:t>gobierno sobre la carpeta del proyecto</a:t>
-            </a:r>
-            <a:endParaRPr lang="en-US" sz="1000" dirty="0"/>
-          </a:p>
-        </p:txBody>
-      </p:sp>
-      <p:sp>
-        <p:nvSpPr>
-          <p:cNvPr id="37" name="Text 34"/>
-          <p:cNvSpPr txBox="1"/>
-          <p:nvPr/>
-        </p:nvSpPr>
-        <p:spPr>
-          <a:xfrm>
-            <a:off x="457200" y="5870448"/>
-            <a:ext cx="11274552" cy="384048"/>
-          </a:xfrm>
-          <a:prstGeom prst="rect">
-            <a:avLst/>
-          </a:prstGeom>
-          <a:noFill/>
-          <a:ln/>
-        </p:spPr>
-        <p:txBody>
-          <a:bodyPr wrap="square" lIns="0" tIns="0" rIns="0" bIns="0" rtlCol="0" anchor="t"/>
-          <a:lstStyle/>
-          <a:p>
-            <a:pPr indent="0" marL="0">
-              <a:buNone/>
-            </a:pPr>
-            <a:r>
-              <a:rPr lang="en-US" sz="1100" dirty="0">
-                <a:solidFill>
-                  <a:srgbClr val="696969"/>
-                </a:solidFill>
-              </a:rPr>
-              <a:t>Conexión por MCP genérico: nada viene predefinido. Sin MCP, pm-method trabaja con archivos; sin BMAD, con su propia especificación.</a:t>
-            </a:r>
-            <a:endParaRPr lang="en-US" sz="1200" dirty="0"/>
+              <a:t>Controles: DEC-01 a DEC-06 (decisiones) · BIT-01 y BIT-02 (bitácora) · MAP-01 al elegir en un mapa</a:t>
+            </a:r>
+            <a:endParaRPr lang="en-US" sz="1100" dirty="0"/>
           </a:p>
         </p:txBody>
       </p:sp>
